--- a/Progression_P6/P6-L04_Paper_4_Q1_Directed_Writing.pptx
+++ b/Progression_P6/P6-L04_Paper_4_Q1_Directed_Writing.pptx
@@ -1,6 +1,6 @@
 
 <file path=ppt/presentation.xml><?xml version="1.0" encoding="utf-8"?>
-<p:presentation xmlns:a="http://schemas.openxmlformats.org/drawingml/2006/main" xmlns:r="http://schemas.openxmlformats.org/officeDocument/2006/relationships" xmlns:p="http://schemas.openxmlformats.org/presentationml/2006/main" saveSubsetFonts="1" autoCompressPictures="0">
+<p:presentation xmlns:a="http://schemas.openxmlformats.org/drawingml/2006/main" xmlns:r="http://schemas.openxmlformats.org/officeDocument/2006/relationships" xmlns:p="http://schemas.openxmlformats.org/presentationml/2006/main" embedTrueTypeFonts="1" saveSubsetFonts="1" autoCompressPictures="0">
   <p:sldMasterIdLst>
     <p:sldMasterId id="2147483648" r:id="rId1"/>
   </p:sldMasterIdLst>
@@ -37,6 +37,13 @@
   </p:notesMasterIdLst>
   <p:sldSz cx="12192000" cy="6858000"/>
   <p:notesSz cx="6858000" cy="12192000"/>
+  <p:embeddedFontLst>
+    <p:embeddedFont>
+      <p:font typeface="Amiri" pitchFamily="2" charset="-78"/>
+      <p:regular r:id="rIdFont1"/>
+      <p:bold r:id="rIdFont2"/>
+    </p:embeddedFont>
+  </p:embeddedFontLst>
   <p:defaultTextStyle>
     <a:lvl1pPr marL="0" algn="l" defTabSz="914400" rtl="0" eaLnBrk="1" latinLnBrk="0" hangingPunct="1">
       <a:defRPr sz="1800" kern="1200">
@@ -393,8 +400,7 @@
           <a:schemeClr val="tx1"/>
         </a:solidFill>
         <a:latin typeface="+mn-lt"/>
-        <a:ea typeface="+mn-ea"/>
-        <a:cs typeface="+mn-cs"/>
+        <a:cs typeface="Amiri" pitchFamily="2" charset="-78"/>
       </a:defRPr>
     </a:lvl1pPr>
     <a:lvl2pPr marL="457200" algn="l" defTabSz="914400" rtl="0" eaLnBrk="1" latinLnBrk="0" hangingPunct="1">
@@ -403,8 +409,7 @@
           <a:schemeClr val="tx1"/>
         </a:solidFill>
         <a:latin typeface="+mn-lt"/>
-        <a:ea typeface="+mn-ea"/>
-        <a:cs typeface="+mn-cs"/>
+        <a:cs typeface="Amiri" pitchFamily="2" charset="-78"/>
       </a:defRPr>
     </a:lvl2pPr>
     <a:lvl3pPr marL="914400" algn="l" defTabSz="914400" rtl="0" eaLnBrk="1" latinLnBrk="0" hangingPunct="1">
@@ -413,8 +418,7 @@
           <a:schemeClr val="tx1"/>
         </a:solidFill>
         <a:latin typeface="+mn-lt"/>
-        <a:ea typeface="+mn-ea"/>
-        <a:cs typeface="+mn-cs"/>
+        <a:cs typeface="Amiri" pitchFamily="2" charset="-78"/>
       </a:defRPr>
     </a:lvl3pPr>
     <a:lvl4pPr marL="1371600" algn="l" defTabSz="914400" rtl="0" eaLnBrk="1" latinLnBrk="0" hangingPunct="1">
@@ -423,8 +427,7 @@
           <a:schemeClr val="tx1"/>
         </a:solidFill>
         <a:latin typeface="+mn-lt"/>
-        <a:ea typeface="+mn-ea"/>
-        <a:cs typeface="+mn-cs"/>
+        <a:cs typeface="Amiri" pitchFamily="2" charset="-78"/>
       </a:defRPr>
     </a:lvl4pPr>
     <a:lvl5pPr marL="1828800" algn="l" defTabSz="914400" rtl="0" eaLnBrk="1" latinLnBrk="0" hangingPunct="1">
@@ -433,8 +436,7 @@
           <a:schemeClr val="tx1"/>
         </a:solidFill>
         <a:latin typeface="+mn-lt"/>
-        <a:ea typeface="+mn-ea"/>
-        <a:cs typeface="+mn-cs"/>
+        <a:cs typeface="Amiri" pitchFamily="2" charset="-78"/>
       </a:defRPr>
     </a:lvl5pPr>
     <a:lvl6pPr marL="2286000" algn="l" defTabSz="914400" rtl="0" eaLnBrk="1" latinLnBrk="0" hangingPunct="1">
@@ -443,8 +445,7 @@
           <a:schemeClr val="tx1"/>
         </a:solidFill>
         <a:latin typeface="+mn-lt"/>
-        <a:ea typeface="+mn-ea"/>
-        <a:cs typeface="+mn-cs"/>
+        <a:cs typeface="Amiri" pitchFamily="2" charset="-78"/>
       </a:defRPr>
     </a:lvl6pPr>
     <a:lvl7pPr marL="2743200" algn="l" defTabSz="914400" rtl="0" eaLnBrk="1" latinLnBrk="0" hangingPunct="1">
@@ -453,8 +454,7 @@
           <a:schemeClr val="tx1"/>
         </a:solidFill>
         <a:latin typeface="+mn-lt"/>
-        <a:ea typeface="+mn-ea"/>
-        <a:cs typeface="+mn-cs"/>
+        <a:cs typeface="Amiri" pitchFamily="2" charset="-78"/>
       </a:defRPr>
     </a:lvl7pPr>
     <a:lvl8pPr marL="3200400" algn="l" defTabSz="914400" rtl="0" eaLnBrk="1" latinLnBrk="0" hangingPunct="1">
@@ -463,8 +463,7 @@
           <a:schemeClr val="tx1"/>
         </a:solidFill>
         <a:latin typeface="+mn-lt"/>
-        <a:ea typeface="+mn-ea"/>
-        <a:cs typeface="+mn-cs"/>
+        <a:cs typeface="Amiri" pitchFamily="2" charset="-78"/>
       </a:defRPr>
     </a:lvl8pPr>
     <a:lvl9pPr marL="3657600" algn="l" defTabSz="914400" rtl="0" eaLnBrk="1" latinLnBrk="0" hangingPunct="1">
@@ -473,8 +472,7 @@
           <a:schemeClr val="tx1"/>
         </a:solidFill>
         <a:latin typeface="+mn-lt"/>
-        <a:ea typeface="+mn-ea"/>
-        <a:cs typeface="+mn-cs"/>
+        <a:cs typeface="Amiri" pitchFamily="2" charset="-78"/>
       </a:defRPr>
     </a:lvl9pPr>
   </p:notesStyle>
@@ -2889,8 +2887,7 @@
             <a:schemeClr val="tx1"/>
           </a:solidFill>
           <a:latin typeface="+mj-lt"/>
-          <a:ea typeface="+mj-ea"/>
-          <a:cs typeface="+mj-cs"/>
+          <a:cs typeface="Amiri" pitchFamily="2" charset="-78"/>
         </a:defRPr>
       </a:lvl1pPr>
     </p:titleStyle>
@@ -2906,8 +2903,7 @@
             <a:schemeClr val="tx1"/>
           </a:solidFill>
           <a:latin typeface="+mn-lt"/>
-          <a:ea typeface="+mn-ea"/>
-          <a:cs typeface="+mn-cs"/>
+          <a:cs typeface="Amiri" pitchFamily="2" charset="-78"/>
         </a:defRPr>
       </a:lvl1pPr>
       <a:lvl2pPr marL="742950" indent="-285750" algn="l" defTabSz="914400" rtl="0" eaLnBrk="1" latinLnBrk="0" hangingPunct="1">
@@ -2921,8 +2917,7 @@
             <a:schemeClr val="tx1"/>
           </a:solidFill>
           <a:latin typeface="+mn-lt"/>
-          <a:ea typeface="+mn-ea"/>
-          <a:cs typeface="+mn-cs"/>
+          <a:cs typeface="Amiri" pitchFamily="2" charset="-78"/>
         </a:defRPr>
       </a:lvl2pPr>
       <a:lvl3pPr marL="1143000" indent="-228600" algn="l" defTabSz="914400" rtl="0" eaLnBrk="1" latinLnBrk="0" hangingPunct="1">
@@ -2936,8 +2931,7 @@
             <a:schemeClr val="tx1"/>
           </a:solidFill>
           <a:latin typeface="+mn-lt"/>
-          <a:ea typeface="+mn-ea"/>
-          <a:cs typeface="+mn-cs"/>
+          <a:cs typeface="Amiri" pitchFamily="2" charset="-78"/>
         </a:defRPr>
       </a:lvl3pPr>
       <a:lvl4pPr marL="1600200" indent="-228600" algn="l" defTabSz="914400" rtl="0" eaLnBrk="1" latinLnBrk="0" hangingPunct="1">
@@ -2951,8 +2945,7 @@
             <a:schemeClr val="tx1"/>
           </a:solidFill>
           <a:latin typeface="+mn-lt"/>
-          <a:ea typeface="+mn-ea"/>
-          <a:cs typeface="+mn-cs"/>
+          <a:cs typeface="Amiri" pitchFamily="2" charset="-78"/>
         </a:defRPr>
       </a:lvl4pPr>
       <a:lvl5pPr marL="2057400" indent="-228600" algn="l" defTabSz="914400" rtl="0" eaLnBrk="1" latinLnBrk="0" hangingPunct="1">
@@ -2966,8 +2959,7 @@
             <a:schemeClr val="tx1"/>
           </a:solidFill>
           <a:latin typeface="+mn-lt"/>
-          <a:ea typeface="+mn-ea"/>
-          <a:cs typeface="+mn-cs"/>
+          <a:cs typeface="Amiri" pitchFamily="2" charset="-78"/>
         </a:defRPr>
       </a:lvl5pPr>
       <a:lvl6pPr marL="2514600" indent="-228600" algn="l" defTabSz="914400" rtl="0" eaLnBrk="1" latinLnBrk="0" hangingPunct="1">
@@ -2981,8 +2973,7 @@
             <a:schemeClr val="tx1"/>
           </a:solidFill>
           <a:latin typeface="+mn-lt"/>
-          <a:ea typeface="+mn-ea"/>
-          <a:cs typeface="+mn-cs"/>
+          <a:cs typeface="Amiri" pitchFamily="2" charset="-78"/>
         </a:defRPr>
       </a:lvl6pPr>
       <a:lvl7pPr marL="2971800" indent="-228600" algn="l" defTabSz="914400" rtl="0" eaLnBrk="1" latinLnBrk="0" hangingPunct="1">
@@ -2996,8 +2987,7 @@
             <a:schemeClr val="tx1"/>
           </a:solidFill>
           <a:latin typeface="+mn-lt"/>
-          <a:ea typeface="+mn-ea"/>
-          <a:cs typeface="+mn-cs"/>
+          <a:cs typeface="Amiri" pitchFamily="2" charset="-78"/>
         </a:defRPr>
       </a:lvl7pPr>
       <a:lvl8pPr marL="3429000" indent="-228600" algn="l" defTabSz="914400" rtl="0" eaLnBrk="1" latinLnBrk="0" hangingPunct="1">
@@ -3011,8 +3001,7 @@
             <a:schemeClr val="tx1"/>
           </a:solidFill>
           <a:latin typeface="+mn-lt"/>
-          <a:ea typeface="+mn-ea"/>
-          <a:cs typeface="+mn-cs"/>
+          <a:cs typeface="Amiri" pitchFamily="2" charset="-78"/>
         </a:defRPr>
       </a:lvl8pPr>
       <a:lvl9pPr marL="3886200" indent="-228600" algn="l" defTabSz="914400" rtl="0" eaLnBrk="1" latinLnBrk="0" hangingPunct="1">
@@ -3026,8 +3015,7 @@
             <a:schemeClr val="tx1"/>
           </a:solidFill>
           <a:latin typeface="+mn-lt"/>
-          <a:ea typeface="+mn-ea"/>
-          <a:cs typeface="+mn-cs"/>
+          <a:cs typeface="Amiri" pitchFamily="2" charset="-78"/>
         </a:defRPr>
       </a:lvl9pPr>
     </p:bodyStyle>
@@ -3041,8 +3029,7 @@
             <a:schemeClr val="tx1"/>
           </a:solidFill>
           <a:latin typeface="+mn-lt"/>
-          <a:ea typeface="+mn-ea"/>
-          <a:cs typeface="+mn-cs"/>
+          <a:cs typeface="Amiri" pitchFamily="2" charset="-78"/>
         </a:defRPr>
       </a:lvl1pPr>
       <a:lvl2pPr marL="457200" algn="l" defTabSz="914400" rtl="0" eaLnBrk="1" latinLnBrk="0" hangingPunct="1">
@@ -3051,8 +3038,7 @@
             <a:schemeClr val="tx1"/>
           </a:solidFill>
           <a:latin typeface="+mn-lt"/>
-          <a:ea typeface="+mn-ea"/>
-          <a:cs typeface="+mn-cs"/>
+          <a:cs typeface="Amiri" pitchFamily="2" charset="-78"/>
         </a:defRPr>
       </a:lvl2pPr>
       <a:lvl3pPr marL="914400" algn="l" defTabSz="914400" rtl="0" eaLnBrk="1" latinLnBrk="0" hangingPunct="1">
@@ -3061,8 +3047,7 @@
             <a:schemeClr val="tx1"/>
           </a:solidFill>
           <a:latin typeface="+mn-lt"/>
-          <a:ea typeface="+mn-ea"/>
-          <a:cs typeface="+mn-cs"/>
+          <a:cs typeface="Amiri" pitchFamily="2" charset="-78"/>
         </a:defRPr>
       </a:lvl3pPr>
       <a:lvl4pPr marL="1371600" algn="l" defTabSz="914400" rtl="0" eaLnBrk="1" latinLnBrk="0" hangingPunct="1">
@@ -3071,8 +3056,7 @@
             <a:schemeClr val="tx1"/>
           </a:solidFill>
           <a:latin typeface="+mn-lt"/>
-          <a:ea typeface="+mn-ea"/>
-          <a:cs typeface="+mn-cs"/>
+          <a:cs typeface="Amiri" pitchFamily="2" charset="-78"/>
         </a:defRPr>
       </a:lvl4pPr>
       <a:lvl5pPr marL="1828800" algn="l" defTabSz="914400" rtl="0" eaLnBrk="1" latinLnBrk="0" hangingPunct="1">
@@ -3081,8 +3065,7 @@
             <a:schemeClr val="tx1"/>
           </a:solidFill>
           <a:latin typeface="+mn-lt"/>
-          <a:ea typeface="+mn-ea"/>
-          <a:cs typeface="+mn-cs"/>
+          <a:cs typeface="Amiri" pitchFamily="2" charset="-78"/>
         </a:defRPr>
       </a:lvl5pPr>
       <a:lvl6pPr marL="2286000" algn="l" defTabSz="914400" rtl="0" eaLnBrk="1" latinLnBrk="0" hangingPunct="1">
@@ -3091,8 +3074,7 @@
             <a:schemeClr val="tx1"/>
           </a:solidFill>
           <a:latin typeface="+mn-lt"/>
-          <a:ea typeface="+mn-ea"/>
-          <a:cs typeface="+mn-cs"/>
+          <a:cs typeface="Amiri" pitchFamily="2" charset="-78"/>
         </a:defRPr>
       </a:lvl6pPr>
       <a:lvl7pPr marL="2743200" algn="l" defTabSz="914400" rtl="0" eaLnBrk="1" latinLnBrk="0" hangingPunct="1">
@@ -3101,8 +3083,7 @@
             <a:schemeClr val="tx1"/>
           </a:solidFill>
           <a:latin typeface="+mn-lt"/>
-          <a:ea typeface="+mn-ea"/>
-          <a:cs typeface="+mn-cs"/>
+          <a:cs typeface="Amiri" pitchFamily="2" charset="-78"/>
         </a:defRPr>
       </a:lvl7pPr>
       <a:lvl8pPr marL="3200400" algn="l" defTabSz="914400" rtl="0" eaLnBrk="1" latinLnBrk="0" hangingPunct="1">
@@ -3111,8 +3092,7 @@
             <a:schemeClr val="tx1"/>
           </a:solidFill>
           <a:latin typeface="+mn-lt"/>
-          <a:ea typeface="+mn-ea"/>
-          <a:cs typeface="+mn-cs"/>
+          <a:cs typeface="Amiri" pitchFamily="2" charset="-78"/>
         </a:defRPr>
       </a:lvl8pPr>
       <a:lvl9pPr marL="3657600" algn="l" defTabSz="914400" rtl="0" eaLnBrk="1" latinLnBrk="0" hangingPunct="1">
@@ -3121,8 +3101,7 @@
             <a:schemeClr val="tx1"/>
           </a:solidFill>
           <a:latin typeface="+mn-lt"/>
-          <a:ea typeface="+mn-ea"/>
-          <a:cs typeface="+mn-cs"/>
+          <a:cs typeface="Amiri" pitchFamily="2" charset="-78"/>
         </a:defRPr>
       </a:lvl9pPr>
     </p:otherStyle>
@@ -3282,9 +3261,8 @@
                 <a:solidFill>
                   <a:srgbClr val="D4AF37"/>
                 </a:solidFill>
-                <a:latin typeface="Amiri" pitchFamily="34" charset="0"/>
-                <a:ea typeface="Amiri" pitchFamily="34" charset="-122"/>
-                <a:cs typeface="Amiri" pitchFamily="34" charset="-120"/>
+                <a:latin typeface="Amiri" pitchFamily="2" charset="-78"/>
+                <a:cs typeface="Amiri" pitchFamily="2" charset="-78"/>
               </a:rPr>
               <a:t>م</a:t>
             </a:r>
@@ -3322,8 +3300,7 @@
                   <a:srgbClr val="FFFFFF"/>
                 </a:solidFill>
                 <a:latin typeface="Cambria" pitchFamily="34" charset="0"/>
-                <a:ea typeface="Cambria" pitchFamily="34" charset="-122"/>
-                <a:cs typeface="Cambria" pitchFamily="34" charset="-120"/>
+                <a:cs typeface="Amiri" pitchFamily="2" charset="-78"/>
               </a:rPr>
               <a:t>Al Madina Online School</a:t>
             </a:r>
@@ -3339,8 +3316,7 @@
                   <a:srgbClr val="D4AF37"/>
                 </a:solidFill>
                 <a:latin typeface="Calibri" pitchFamily="34" charset="0"/>
-                <a:ea typeface="Calibri" pitchFamily="34" charset="-122"/>
-                <a:cs typeface="Calibri" pitchFamily="34" charset="-120"/>
+                <a:cs typeface="Amiri" pitchFamily="2" charset="-78"/>
               </a:rPr>
               <a:t>ARABIC DEPARTMENT · MIFTAH ARABIC</a:t>
             </a:r>
@@ -3378,8 +3354,7 @@
                   <a:srgbClr val="D4AF37"/>
                 </a:solidFill>
                 <a:latin typeface="Calibri" pitchFamily="34" charset="0"/>
-                <a:ea typeface="Calibri" pitchFamily="34" charset="-122"/>
-                <a:cs typeface="Calibri" pitchFamily="34" charset="-120"/>
+                <a:cs typeface="Amiri" pitchFamily="2" charset="-78"/>
               </a:rPr>
               <a:t>CAMBRIDGE IGCSE ARABIC 0544  ·  YEAR 9  ·  PROGRESSION P6  ·  P6-L04</a:t>
             </a:r>
@@ -3417,8 +3392,7 @@
                   <a:srgbClr val="9FB3D1"/>
                 </a:solidFill>
                 <a:latin typeface="Cambria" pitchFamily="34" charset="0"/>
-                <a:ea typeface="Cambria" pitchFamily="34" charset="-122"/>
-                <a:cs typeface="Cambria" pitchFamily="34" charset="-120"/>
+                <a:cs typeface="Amiri" pitchFamily="2" charset="-78"/>
               </a:rPr>
               <a:t>P6-L04</a:t>
             </a:r>
@@ -3456,8 +3430,7 @@
                   <a:srgbClr val="FFFFFF"/>
                 </a:solidFill>
                 <a:latin typeface="Cambria" pitchFamily="34" charset="0"/>
-                <a:ea typeface="Cambria" pitchFamily="34" charset="-122"/>
-                <a:cs typeface="Cambria" pitchFamily="34" charset="-120"/>
+                <a:cs typeface="Amiri" pitchFamily="2" charset="-78"/>
               </a:rPr>
               <a:t>Paper 4 Q1 — Directed Writing: Mastering Form and Register</a:t>
             </a:r>
@@ -3494,9 +3467,8 @@
                 <a:solidFill>
                   <a:srgbClr val="D4AF37"/>
                 </a:solidFill>
-                <a:latin typeface="Amiri" pitchFamily="34" charset="0"/>
-                <a:ea typeface="Amiri" pitchFamily="34" charset="-122"/>
-                <a:cs typeface="Amiri" pitchFamily="34" charset="-120"/>
+                <a:latin typeface="Amiri" pitchFamily="2" charset="-78"/>
+                <a:cs typeface="Amiri" pitchFamily="2" charset="-78"/>
               </a:rPr>
               <a:t>الوَرَقَةُ الرَّابِعَةُ — الكِتَابَةُ المُوَجَّهَةُ: الشَّكْلُ وَالصِّيغَةُ</a:t>
             </a:r>
@@ -3534,8 +3506,7 @@
                   <a:srgbClr val="C6D2E6"/>
                 </a:solidFill>
                 <a:latin typeface="Calibri" pitchFamily="34" charset="0"/>
-                <a:ea typeface="Calibri" pitchFamily="34" charset="-122"/>
-                <a:cs typeface="Calibri" pitchFamily="34" charset="-120"/>
+                <a:cs typeface="Amiri" pitchFamily="2" charset="-78"/>
               </a:rPr>
               <a:t>Write Paper 4 Q1 (130–140 words) in the right form and register — a formal letter, an article or a friendly email — with the right opening and closing, every content point covered, and the Q1 mark scheme (TC 7 · Range 4 · Accuracy 4) as your checklist.</a:t>
             </a:r>
@@ -3600,8 +3571,7 @@
                   <a:srgbClr val="D4AF37"/>
                 </a:solidFill>
                 <a:latin typeface="Calibri" pitchFamily="34" charset="0"/>
-                <a:ea typeface="Calibri" pitchFamily="34" charset="-122"/>
-                <a:cs typeface="Calibri" pitchFamily="34" charset="-120"/>
+                <a:cs typeface="Amiri" pitchFamily="2" charset="-78"/>
               </a:rPr>
               <a:t>LESSON</a:t>
             </a:r>
@@ -3617,8 +3587,7 @@
                   <a:srgbClr val="FFFFFF"/>
                 </a:solidFill>
                 <a:latin typeface="Calibri" pitchFamily="34" charset="0"/>
-                <a:ea typeface="Calibri" pitchFamily="34" charset="-122"/>
-                <a:cs typeface="Calibri" pitchFamily="34" charset="-120"/>
+                <a:cs typeface="Amiri" pitchFamily="2" charset="-78"/>
               </a:rPr>
               <a:t>P6-L04 · Progression P6 · IGCSE Bridge</a:t>
             </a:r>
@@ -3683,8 +3652,7 @@
                   <a:srgbClr val="D4AF37"/>
                 </a:solidFill>
                 <a:latin typeface="Calibri" pitchFamily="34" charset="0"/>
-                <a:ea typeface="Calibri" pitchFamily="34" charset="-122"/>
-                <a:cs typeface="Calibri" pitchFamily="34" charset="-120"/>
+                <a:cs typeface="Amiri" pitchFamily="2" charset="-78"/>
               </a:rPr>
               <a:t>DURATION</a:t>
             </a:r>
@@ -3700,8 +3668,7 @@
                   <a:srgbClr val="FFFFFF"/>
                 </a:solidFill>
                 <a:latin typeface="Calibri" pitchFamily="34" charset="0"/>
-                <a:ea typeface="Calibri" pitchFamily="34" charset="-122"/>
-                <a:cs typeface="Calibri" pitchFamily="34" charset="-120"/>
+                <a:cs typeface="Amiri" pitchFamily="2" charset="-78"/>
               </a:rPr>
               <a:t>60 minutes · Teams</a:t>
             </a:r>
@@ -3766,8 +3733,7 @@
                   <a:srgbClr val="D4AF37"/>
                 </a:solidFill>
                 <a:latin typeface="Calibri" pitchFamily="34" charset="0"/>
-                <a:ea typeface="Calibri" pitchFamily="34" charset="-122"/>
-                <a:cs typeface="Calibri" pitchFamily="34" charset="-120"/>
+                <a:cs typeface="Amiri" pitchFamily="2" charset="-78"/>
               </a:rPr>
               <a:t>LEVEL</a:t>
             </a:r>
@@ -3783,8 +3749,7 @@
                   <a:srgbClr val="FFFFFF"/>
                 </a:solidFill>
                 <a:latin typeface="Calibri" pitchFamily="34" charset="0"/>
-                <a:ea typeface="Calibri" pitchFamily="34" charset="-122"/>
-                <a:cs typeface="Calibri" pitchFamily="34" charset="-120"/>
+                <a:cs typeface="Amiri" pitchFamily="2" charset="-78"/>
               </a:rPr>
               <a:t>Progression · B1 → B2</a:t>
             </a:r>
@@ -3849,8 +3814,7 @@
                   <a:srgbClr val="D4AF37"/>
                 </a:solidFill>
                 <a:latin typeface="Calibri" pitchFamily="34" charset="0"/>
-                <a:ea typeface="Calibri" pitchFamily="34" charset="-122"/>
-                <a:cs typeface="Calibri" pitchFamily="34" charset="-120"/>
+                <a:cs typeface="Amiri" pitchFamily="2" charset="-78"/>
               </a:rPr>
               <a:t>ON THE WEBSITE</a:t>
             </a:r>
@@ -3866,8 +3830,7 @@
                   <a:srgbClr val="FFFFFF"/>
                 </a:solidFill>
                 <a:latin typeface="Calibri" pitchFamily="34" charset="0"/>
-                <a:ea typeface="Calibri" pitchFamily="34" charset="-122"/>
-                <a:cs typeface="Calibri" pitchFamily="34" charset="-120"/>
+                <a:cs typeface="Amiri" pitchFamily="2" charset="-78"/>
               </a:rPr>
               <a:t>Pathways › Progression › P6 › P6-L04</a:t>
             </a:r>
@@ -3961,9 +3924,8 @@
                 <a:solidFill>
                   <a:srgbClr val="D4AF37"/>
                 </a:solidFill>
-                <a:latin typeface="Amiri" pitchFamily="34" charset="0"/>
-                <a:ea typeface="Amiri" pitchFamily="34" charset="-122"/>
-                <a:cs typeface="Amiri" pitchFamily="34" charset="-120"/>
+                <a:latin typeface="Amiri" pitchFamily="2" charset="-78"/>
+                <a:cs typeface="Amiri" pitchFamily="2" charset="-78"/>
               </a:rPr>
               <a:t>م</a:t>
             </a:r>
@@ -4001,8 +3963,7 @@
                   <a:srgbClr val="1B3B6F"/>
                 </a:solidFill>
                 <a:latin typeface="Cambria" pitchFamily="34" charset="0"/>
-                <a:ea typeface="Cambria" pitchFamily="34" charset="-122"/>
-                <a:cs typeface="Cambria" pitchFamily="34" charset="-120"/>
+                <a:cs typeface="Amiri" pitchFamily="2" charset="-78"/>
               </a:rPr>
               <a:t>Al Madina Online School</a:t>
             </a:r>
@@ -4040,8 +4001,7 @@
                   <a:srgbClr val="8A6D1E"/>
                 </a:solidFill>
                 <a:latin typeface="Calibri" pitchFamily="34" charset="0"/>
-                <a:ea typeface="Calibri" pitchFamily="34" charset="-122"/>
-                <a:cs typeface="Calibri" pitchFamily="34" charset="-120"/>
+                <a:cs typeface="Amiri" pitchFamily="2" charset="-78"/>
               </a:rPr>
               <a:t>ARABIC DEPARTMENT · MIFTAH ARABIC · IGCSE 0544</a:t>
             </a:r>
@@ -4106,8 +4066,7 @@
                   <a:srgbClr val="FFFFFF"/>
                 </a:solidFill>
                 <a:latin typeface="Calibri" pitchFamily="34" charset="0"/>
-                <a:ea typeface="Calibri" pitchFamily="34" charset="-122"/>
-                <a:cs typeface="Calibri" pitchFamily="34" charset="-120"/>
+                <a:cs typeface="Amiri" pitchFamily="2" charset="-78"/>
               </a:rPr>
               <a:t>P6-L04 · IGCSE Bridge</a:t>
             </a:r>
@@ -4172,8 +4131,7 @@
                   <a:srgbClr val="FFFFFF"/>
                 </a:solidFill>
                 <a:latin typeface="Calibri" pitchFamily="34" charset="0"/>
-                <a:ea typeface="Calibri" pitchFamily="34" charset="-122"/>
-                <a:cs typeface="Calibri" pitchFamily="34" charset="-120"/>
+                <a:cs typeface="Amiri" pitchFamily="2" charset="-78"/>
               </a:rPr>
               <a:t>TEACHER INSTRUCTION · 2 MIN</a:t>
             </a:r>
@@ -4211,8 +4169,7 @@
                   <a:srgbClr val="1B3B6F"/>
                 </a:solidFill>
                 <a:latin typeface="Calibri" pitchFamily="34" charset="0"/>
-                <a:ea typeface="Calibri" pitchFamily="34" charset="-122"/>
-                <a:cs typeface="Calibri" pitchFamily="34" charset="-120"/>
+                <a:cs typeface="Amiri" pitchFamily="2" charset="-78"/>
               </a:rPr>
               <a:t>KEY WORDS · GROUP 2</a:t>
             </a:r>
@@ -4250,8 +4207,7 @@
                   <a:srgbClr val="1B3B6F"/>
                 </a:solidFill>
                 <a:latin typeface="Cambria" pitchFamily="34" charset="0"/>
-                <a:ea typeface="Cambria" pitchFamily="34" charset="-122"/>
-                <a:cs typeface="Cambria" pitchFamily="34" charset="-120"/>
+                <a:cs typeface="Amiri" pitchFamily="2" charset="-78"/>
               </a:rPr>
               <a:t>Register signals (1 of 2)</a:t>
             </a:r>
@@ -4288,9 +4244,8 @@
                 <a:solidFill>
                   <a:srgbClr val="8A6D1E"/>
                 </a:solidFill>
-                <a:latin typeface="Amiri" pitchFamily="34" charset="0"/>
-                <a:ea typeface="Amiri" pitchFamily="34" charset="-122"/>
-                <a:cs typeface="Amiri" pitchFamily="34" charset="-120"/>
+                <a:latin typeface="Amiri" pitchFamily="2" charset="-78"/>
+                <a:cs typeface="Amiri" pitchFamily="2" charset="-78"/>
               </a:rPr>
               <a:t>كَلِمَاتُ الدَّرْسِ</a:t>
             </a:r>
@@ -4328,8 +4283,7 @@
                   <a:srgbClr val="8A93A0"/>
                 </a:solidFill>
                 <a:latin typeface="Calibri" pitchFamily="34" charset="0"/>
-                <a:ea typeface="Calibri" pitchFamily="34" charset="-122"/>
-                <a:cs typeface="Calibri" pitchFamily="34" charset="-120"/>
+                <a:cs typeface="Amiri" pitchFamily="2" charset="-78"/>
               </a:rPr>
               <a:t>Miftah Arabic · Progression P6 · IGCSE Bridge · P6-L04</a:t>
             </a:r>
@@ -4426,8 +4380,7 @@
                   <a:srgbClr val="1B3B6F"/>
                 </a:solidFill>
                 <a:latin typeface="Calibri" pitchFamily="34" charset="0"/>
-                <a:ea typeface="Calibri" pitchFamily="34" charset="-122"/>
-                <a:cs typeface="Calibri" pitchFamily="34" charset="-120"/>
+                <a:cs typeface="Amiri" pitchFamily="2" charset="-78"/>
               </a:rPr>
               <a:t>9</a:t>
             </a:r>
@@ -4464,9 +4417,8 @@
                 <a:solidFill>
                   <a:srgbClr val="1B3B6F"/>
                 </a:solidFill>
-                <a:latin typeface="Amiri" pitchFamily="34" charset="0"/>
-                <a:ea typeface="Amiri" pitchFamily="34" charset="-122"/>
-                <a:cs typeface="Amiri" pitchFamily="34" charset="-120"/>
+                <a:latin typeface="Amiri" pitchFamily="2" charset="-78"/>
+                <a:cs typeface="Amiri" pitchFamily="2" charset="-78"/>
               </a:rPr>
               <a:t>مُقَدِّمَةٌ مُنَاسِبَةٌ</a:t>
             </a:r>
@@ -4504,8 +4456,7 @@
                   <a:srgbClr val="1F2A37"/>
                 </a:solidFill>
                 <a:latin typeface="Calibri" pitchFamily="34" charset="0"/>
-                <a:ea typeface="Calibri" pitchFamily="34" charset="-122"/>
-                <a:cs typeface="Calibri" pitchFamily="34" charset="-120"/>
+                <a:cs typeface="Amiri" pitchFamily="2" charset="-78"/>
               </a:rPr>
               <a:t>an appropriate opening</a:t>
             </a:r>
@@ -4521,8 +4472,7 @@
                   <a:srgbClr val="5A6472"/>
                 </a:solidFill>
                 <a:latin typeface="Calibri" pitchFamily="34" charset="0"/>
-                <a:ea typeface="Calibri" pitchFamily="34" charset="-122"/>
-                <a:cs typeface="Calibri" pitchFamily="34" charset="-120"/>
+                <a:cs typeface="Amiri" pitchFamily="2" charset="-78"/>
               </a:rPr>
               <a:t>mu-qad-di-ma-tun mu-nā-si-ba-tun</a:t>
             </a:r>
@@ -4619,8 +4569,7 @@
                   <a:srgbClr val="1B3B6F"/>
                 </a:solidFill>
                 <a:latin typeface="Calibri" pitchFamily="34" charset="0"/>
-                <a:ea typeface="Calibri" pitchFamily="34" charset="-122"/>
-                <a:cs typeface="Calibri" pitchFamily="34" charset="-120"/>
+                <a:cs typeface="Amiri" pitchFamily="2" charset="-78"/>
               </a:rPr>
               <a:t>10</a:t>
             </a:r>
@@ -4657,9 +4606,8 @@
                 <a:solidFill>
                   <a:srgbClr val="1B3B6F"/>
                 </a:solidFill>
-                <a:latin typeface="Amiri" pitchFamily="34" charset="0"/>
-                <a:ea typeface="Amiri" pitchFamily="34" charset="-122"/>
-                <a:cs typeface="Amiri" pitchFamily="34" charset="-120"/>
+                <a:latin typeface="Amiri" pitchFamily="2" charset="-78"/>
+                <a:cs typeface="Amiri" pitchFamily="2" charset="-78"/>
               </a:rPr>
               <a:t>خَاتِمَةٌ مُنَاسِبَةٌ</a:t>
             </a:r>
@@ -4697,8 +4645,7 @@
                   <a:srgbClr val="1F2A37"/>
                 </a:solidFill>
                 <a:latin typeface="Calibri" pitchFamily="34" charset="0"/>
-                <a:ea typeface="Calibri" pitchFamily="34" charset="-122"/>
-                <a:cs typeface="Calibri" pitchFamily="34" charset="-120"/>
+                <a:cs typeface="Amiri" pitchFamily="2" charset="-78"/>
               </a:rPr>
               <a:t>an appropriate closing</a:t>
             </a:r>
@@ -4714,8 +4661,7 @@
                   <a:srgbClr val="5A6472"/>
                 </a:solidFill>
                 <a:latin typeface="Calibri" pitchFamily="34" charset="0"/>
-                <a:ea typeface="Calibri" pitchFamily="34" charset="-122"/>
-                <a:cs typeface="Calibri" pitchFamily="34" charset="-120"/>
+                <a:cs typeface="Amiri" pitchFamily="2" charset="-78"/>
               </a:rPr>
               <a:t>khā-ti-ma-tun mu-nā-si-ba-tun</a:t>
             </a:r>
@@ -4812,8 +4758,7 @@
                   <a:srgbClr val="1B3B6F"/>
                 </a:solidFill>
                 <a:latin typeface="Calibri" pitchFamily="34" charset="0"/>
-                <a:ea typeface="Calibri" pitchFamily="34" charset="-122"/>
-                <a:cs typeface="Calibri" pitchFamily="34" charset="-120"/>
+                <a:cs typeface="Amiri" pitchFamily="2" charset="-78"/>
               </a:rPr>
               <a:t>11</a:t>
             </a:r>
@@ -4850,9 +4795,8 @@
                 <a:solidFill>
                   <a:srgbClr val="1B3B6F"/>
                 </a:solidFill>
-                <a:latin typeface="Amiri" pitchFamily="34" charset="0"/>
-                <a:ea typeface="Amiri" pitchFamily="34" charset="-122"/>
-                <a:cs typeface="Amiri" pitchFamily="34" charset="-120"/>
+                <a:latin typeface="Amiri" pitchFamily="2" charset="-78"/>
+                <a:cs typeface="Amiri" pitchFamily="2" charset="-78"/>
               </a:rPr>
               <a:t>اللُّغَةُ الإِقْنَاعِيَّةُ</a:t>
             </a:r>
@@ -4890,8 +4834,7 @@
                   <a:srgbClr val="1F2A37"/>
                 </a:solidFill>
                 <a:latin typeface="Calibri" pitchFamily="34" charset="0"/>
-                <a:ea typeface="Calibri" pitchFamily="34" charset="-122"/>
-                <a:cs typeface="Calibri" pitchFamily="34" charset="-120"/>
+                <a:cs typeface="Amiri" pitchFamily="2" charset="-78"/>
               </a:rPr>
               <a:t>persuasive language</a:t>
             </a:r>
@@ -4907,8 +4850,7 @@
                   <a:srgbClr val="5A6472"/>
                 </a:solidFill>
                 <a:latin typeface="Calibri" pitchFamily="34" charset="0"/>
-                <a:ea typeface="Calibri" pitchFamily="34" charset="-122"/>
-                <a:cs typeface="Calibri" pitchFamily="34" charset="-120"/>
+                <a:cs typeface="Amiri" pitchFamily="2" charset="-78"/>
               </a:rPr>
               <a:t>all-lu-gha-tu al-iq-nā-ʿiy-ya-tu</a:t>
             </a:r>
@@ -5005,8 +4947,7 @@
                   <a:srgbClr val="1B3B6F"/>
                 </a:solidFill>
                 <a:latin typeface="Calibri" pitchFamily="34" charset="0"/>
-                <a:ea typeface="Calibri" pitchFamily="34" charset="-122"/>
-                <a:cs typeface="Calibri" pitchFamily="34" charset="-120"/>
+                <a:cs typeface="Amiri" pitchFamily="2" charset="-78"/>
               </a:rPr>
               <a:t>12</a:t>
             </a:r>
@@ -5043,9 +4984,8 @@
                 <a:solidFill>
                   <a:srgbClr val="1B3B6F"/>
                 </a:solidFill>
-                <a:latin typeface="Amiri" pitchFamily="34" charset="0"/>
-                <a:ea typeface="Amiri" pitchFamily="34" charset="-122"/>
-                <a:cs typeface="Amiri" pitchFamily="34" charset="-120"/>
+                <a:latin typeface="Amiri" pitchFamily="2" charset="-78"/>
+                <a:cs typeface="Amiri" pitchFamily="2" charset="-78"/>
               </a:rPr>
               <a:t>المَعْلُومَاتُ المَطْلُوبَةُ</a:t>
             </a:r>
@@ -5083,8 +5023,7 @@
                   <a:srgbClr val="1F2A37"/>
                 </a:solidFill>
                 <a:latin typeface="Calibri" pitchFamily="34" charset="0"/>
-                <a:ea typeface="Calibri" pitchFamily="34" charset="-122"/>
-                <a:cs typeface="Calibri" pitchFamily="34" charset="-120"/>
+                <a:cs typeface="Amiri" pitchFamily="2" charset="-78"/>
               </a:rPr>
               <a:t>the required information</a:t>
             </a:r>
@@ -5100,8 +5039,7 @@
                   <a:srgbClr val="5A6472"/>
                 </a:solidFill>
                 <a:latin typeface="Calibri" pitchFamily="34" charset="0"/>
-                <a:ea typeface="Calibri" pitchFamily="34" charset="-122"/>
-                <a:cs typeface="Calibri" pitchFamily="34" charset="-120"/>
+                <a:cs typeface="Amiri" pitchFamily="2" charset="-78"/>
               </a:rPr>
               <a:t>al-maʿ-lū-mā-tu al-maṭ-lū-ba-tu</a:t>
             </a:r>
@@ -5139,8 +5077,7 @@
                   <a:srgbClr val="8A93A0"/>
                 </a:solidFill>
                 <a:latin typeface="Calibri" pitchFamily="34" charset="0"/>
-                <a:ea typeface="Calibri" pitchFamily="34" charset="-122"/>
-                <a:cs typeface="Calibri" pitchFamily="34" charset="-120"/>
+                <a:cs typeface="Amiri" pitchFamily="2" charset="-78"/>
               </a:rPr>
               <a:t>10 / 26</a:t>
             </a:r>
@@ -5234,9 +5171,8 @@
                 <a:solidFill>
                   <a:srgbClr val="D4AF37"/>
                 </a:solidFill>
-                <a:latin typeface="Amiri" pitchFamily="34" charset="0"/>
-                <a:ea typeface="Amiri" pitchFamily="34" charset="-122"/>
-                <a:cs typeface="Amiri" pitchFamily="34" charset="-120"/>
+                <a:latin typeface="Amiri" pitchFamily="2" charset="-78"/>
+                <a:cs typeface="Amiri" pitchFamily="2" charset="-78"/>
               </a:rPr>
               <a:t>م</a:t>
             </a:r>
@@ -5274,8 +5210,7 @@
                   <a:srgbClr val="1B3B6F"/>
                 </a:solidFill>
                 <a:latin typeface="Cambria" pitchFamily="34" charset="0"/>
-                <a:ea typeface="Cambria" pitchFamily="34" charset="-122"/>
-                <a:cs typeface="Cambria" pitchFamily="34" charset="-120"/>
+                <a:cs typeface="Amiri" pitchFamily="2" charset="-78"/>
               </a:rPr>
               <a:t>Al Madina Online School</a:t>
             </a:r>
@@ -5313,8 +5248,7 @@
                   <a:srgbClr val="8A6D1E"/>
                 </a:solidFill>
                 <a:latin typeface="Calibri" pitchFamily="34" charset="0"/>
-                <a:ea typeface="Calibri" pitchFamily="34" charset="-122"/>
-                <a:cs typeface="Calibri" pitchFamily="34" charset="-120"/>
+                <a:cs typeface="Amiri" pitchFamily="2" charset="-78"/>
               </a:rPr>
               <a:t>ARABIC DEPARTMENT · MIFTAH ARABIC · IGCSE 0544</a:t>
             </a:r>
@@ -5379,8 +5313,7 @@
                   <a:srgbClr val="FFFFFF"/>
                 </a:solidFill>
                 <a:latin typeface="Calibri" pitchFamily="34" charset="0"/>
-                <a:ea typeface="Calibri" pitchFamily="34" charset="-122"/>
-                <a:cs typeface="Calibri" pitchFamily="34" charset="-120"/>
+                <a:cs typeface="Amiri" pitchFamily="2" charset="-78"/>
               </a:rPr>
               <a:t>P6-L04 · IGCSE Bridge</a:t>
             </a:r>
@@ -5445,8 +5378,7 @@
                   <a:srgbClr val="FFFFFF"/>
                 </a:solidFill>
                 <a:latin typeface="Calibri" pitchFamily="34" charset="0"/>
-                <a:ea typeface="Calibri" pitchFamily="34" charset="-122"/>
-                <a:cs typeface="Calibri" pitchFamily="34" charset="-120"/>
+                <a:cs typeface="Amiri" pitchFamily="2" charset="-78"/>
               </a:rPr>
               <a:t>TEACHER INSTRUCTION · 2 MIN</a:t>
             </a:r>
@@ -5484,8 +5416,7 @@
                   <a:srgbClr val="1B3B6F"/>
                 </a:solidFill>
                 <a:latin typeface="Calibri" pitchFamily="34" charset="0"/>
-                <a:ea typeface="Calibri" pitchFamily="34" charset="-122"/>
-                <a:cs typeface="Calibri" pitchFamily="34" charset="-120"/>
+                <a:cs typeface="Amiri" pitchFamily="2" charset="-78"/>
               </a:rPr>
               <a:t>KEY WORDS · GROUP 2</a:t>
             </a:r>
@@ -5523,8 +5454,7 @@
                   <a:srgbClr val="1B3B6F"/>
                 </a:solidFill>
                 <a:latin typeface="Cambria" pitchFamily="34" charset="0"/>
-                <a:ea typeface="Cambria" pitchFamily="34" charset="-122"/>
-                <a:cs typeface="Cambria" pitchFamily="34" charset="-120"/>
+                <a:cs typeface="Amiri" pitchFamily="2" charset="-78"/>
               </a:rPr>
               <a:t>Register signals (2 of 2)</a:t>
             </a:r>
@@ -5561,9 +5491,8 @@
                 <a:solidFill>
                   <a:srgbClr val="8A6D1E"/>
                 </a:solidFill>
-                <a:latin typeface="Amiri" pitchFamily="34" charset="0"/>
-                <a:ea typeface="Amiri" pitchFamily="34" charset="-122"/>
-                <a:cs typeface="Amiri" pitchFamily="34" charset="-120"/>
+                <a:latin typeface="Amiri" pitchFamily="2" charset="-78"/>
+                <a:cs typeface="Amiri" pitchFamily="2" charset="-78"/>
               </a:rPr>
               <a:t>كَلِمَاتُ الدَّرْسِ</a:t>
             </a:r>
@@ -5601,8 +5530,7 @@
                   <a:srgbClr val="8A93A0"/>
                 </a:solidFill>
                 <a:latin typeface="Calibri" pitchFamily="34" charset="0"/>
-                <a:ea typeface="Calibri" pitchFamily="34" charset="-122"/>
-                <a:cs typeface="Calibri" pitchFamily="34" charset="-120"/>
+                <a:cs typeface="Amiri" pitchFamily="2" charset="-78"/>
               </a:rPr>
               <a:t>Miftah Arabic · Progression P6 · IGCSE Bridge · P6-L04</a:t>
             </a:r>
@@ -5699,8 +5627,7 @@
                   <a:srgbClr val="1B3B6F"/>
                 </a:solidFill>
                 <a:latin typeface="Calibri" pitchFamily="34" charset="0"/>
-                <a:ea typeface="Calibri" pitchFamily="34" charset="-122"/>
-                <a:cs typeface="Calibri" pitchFamily="34" charset="-120"/>
+                <a:cs typeface="Amiri" pitchFamily="2" charset="-78"/>
               </a:rPr>
               <a:t>13</a:t>
             </a:r>
@@ -5765,8 +5692,7 @@
                   <a:srgbClr val="8A6D1E"/>
                 </a:solidFill>
                 <a:latin typeface="Calibri" pitchFamily="34" charset="0"/>
-                <a:ea typeface="Calibri" pitchFamily="34" charset="-122"/>
-                <a:cs typeface="Calibri" pitchFamily="34" charset="-120"/>
+                <a:cs typeface="Amiri" pitchFamily="2" charset="-78"/>
               </a:rPr>
               <a:t>Formal opener.</a:t>
             </a:r>
@@ -5831,8 +5757,7 @@
                   <a:srgbClr val="FFFFFF"/>
                 </a:solidFill>
                 <a:latin typeface="Calibri" pitchFamily="34" charset="0"/>
-                <a:ea typeface="Calibri" pitchFamily="34" charset="-122"/>
-                <a:cs typeface="Calibri" pitchFamily="34" charset="-120"/>
+                <a:cs typeface="Amiri" pitchFamily="2" charset="-78"/>
               </a:rPr>
               <a:t>CORE</a:t>
             </a:r>
@@ -5869,9 +5794,8 @@
                 <a:solidFill>
                   <a:srgbClr val="1B3B6F"/>
                 </a:solidFill>
-                <a:latin typeface="Amiri" pitchFamily="34" charset="0"/>
-                <a:ea typeface="Amiri" pitchFamily="34" charset="-122"/>
-                <a:cs typeface="Amiri" pitchFamily="34" charset="-120"/>
+                <a:latin typeface="Amiri" pitchFamily="2" charset="-78"/>
+                <a:cs typeface="Amiri" pitchFamily="2" charset="-78"/>
               </a:rPr>
               <a:t>أَتَشَرَّفُ بِمُخَاطَبَتِكُمْ</a:t>
             </a:r>
@@ -5909,8 +5833,7 @@
                   <a:srgbClr val="1F2A37"/>
                 </a:solidFill>
                 <a:latin typeface="Calibri" pitchFamily="34" charset="0"/>
-                <a:ea typeface="Calibri" pitchFamily="34" charset="-122"/>
-                <a:cs typeface="Calibri" pitchFamily="34" charset="-120"/>
+                <a:cs typeface="Amiri" pitchFamily="2" charset="-78"/>
               </a:rPr>
               <a:t>I have the honour of writing to you</a:t>
             </a:r>
@@ -5926,8 +5849,7 @@
                   <a:srgbClr val="5A6472"/>
                 </a:solidFill>
                 <a:latin typeface="Calibri" pitchFamily="34" charset="0"/>
-                <a:ea typeface="Calibri" pitchFamily="34" charset="-122"/>
-                <a:cs typeface="Calibri" pitchFamily="34" charset="-120"/>
+                <a:cs typeface="Amiri" pitchFamily="2" charset="-78"/>
               </a:rPr>
               <a:t>a-ta-shar-ra-fu bi-mu-khā-ṭa-ba-ti-kum</a:t>
             </a:r>
@@ -6024,8 +5946,7 @@
                   <a:srgbClr val="1B3B6F"/>
                 </a:solidFill>
                 <a:latin typeface="Calibri" pitchFamily="34" charset="0"/>
-                <a:ea typeface="Calibri" pitchFamily="34" charset="-122"/>
-                <a:cs typeface="Calibri" pitchFamily="34" charset="-120"/>
+                <a:cs typeface="Amiri" pitchFamily="2" charset="-78"/>
               </a:rPr>
               <a:t>14</a:t>
             </a:r>
@@ -6090,8 +6011,7 @@
                   <a:srgbClr val="8A6D1E"/>
                 </a:solidFill>
                 <a:latin typeface="Calibri" pitchFamily="34" charset="0"/>
-                <a:ea typeface="Calibri" pitchFamily="34" charset="-122"/>
-                <a:cs typeface="Calibri" pitchFamily="34" charset="-120"/>
+                <a:cs typeface="Amiri" pitchFamily="2" charset="-78"/>
               </a:rPr>
               <a:t>to a boy · girl</a:t>
             </a:r>
@@ -6156,8 +6076,7 @@
                   <a:srgbClr val="FFFFFF"/>
                 </a:solidFill>
                 <a:latin typeface="Calibri" pitchFamily="34" charset="0"/>
-                <a:ea typeface="Calibri" pitchFamily="34" charset="-122"/>
-                <a:cs typeface="Calibri" pitchFamily="34" charset="-120"/>
+                <a:cs typeface="Amiri" pitchFamily="2" charset="-78"/>
               </a:rPr>
               <a:t>CORE</a:t>
             </a:r>
@@ -6194,9 +6113,8 @@
                 <a:solidFill>
                   <a:srgbClr val="1B3B6F"/>
                 </a:solidFill>
-                <a:latin typeface="Amiri" pitchFamily="34" charset="0"/>
-                <a:ea typeface="Amiri" pitchFamily="34" charset="-122"/>
-                <a:cs typeface="Amiri" pitchFamily="34" charset="-120"/>
+                <a:latin typeface="Amiri" pitchFamily="2" charset="-78"/>
+                <a:cs typeface="Amiri" pitchFamily="2" charset="-78"/>
               </a:rPr>
               <a:t>حَيَّاكَ اللَّهُ</a:t>
             </a:r>
@@ -6234,8 +6152,7 @@
                   <a:srgbClr val="1F2A37"/>
                 </a:solidFill>
                 <a:latin typeface="Calibri" pitchFamily="34" charset="0"/>
-                <a:ea typeface="Calibri" pitchFamily="34" charset="-122"/>
-                <a:cs typeface="Calibri" pitchFamily="34" charset="-120"/>
+                <a:cs typeface="Amiri" pitchFamily="2" charset="-78"/>
               </a:rPr>
               <a:t>welcome / hello</a:t>
             </a:r>
@@ -6251,8 +6168,7 @@
                   <a:srgbClr val="5A6472"/>
                 </a:solidFill>
                 <a:latin typeface="Calibri" pitchFamily="34" charset="0"/>
-                <a:ea typeface="Calibri" pitchFamily="34" charset="-122"/>
-                <a:cs typeface="Calibri" pitchFamily="34" charset="-120"/>
+                <a:cs typeface="Amiri" pitchFamily="2" charset="-78"/>
               </a:rPr>
               <a:t>ḥay-yā-ka all-la-hu</a:t>
             </a:r>
@@ -6317,8 +6233,7 @@
                   <a:srgbClr val="8A6D1E"/>
                 </a:solidFill>
                 <a:latin typeface="Calibri" pitchFamily="34" charset="0"/>
-                <a:ea typeface="Calibri" pitchFamily="34" charset="-122"/>
-                <a:cs typeface="Calibri" pitchFamily="34" charset="-120"/>
+                <a:cs typeface="Amiri" pitchFamily="2" charset="-78"/>
               </a:rPr>
               <a:t>girl</a:t>
             </a:r>
@@ -6355,9 +6270,8 @@
                 <a:solidFill>
                   <a:srgbClr val="1B3B6F"/>
                 </a:solidFill>
-                <a:latin typeface="Amiri" pitchFamily="34" charset="0"/>
-                <a:ea typeface="Amiri" pitchFamily="34" charset="-122"/>
-                <a:cs typeface="Amiri" pitchFamily="34" charset="-120"/>
+                <a:latin typeface="Amiri" pitchFamily="2" charset="-78"/>
+                <a:cs typeface="Amiri" pitchFamily="2" charset="-78"/>
               </a:rPr>
               <a:t>حَيَّاكِ اللَّهُ</a:t>
             </a:r>
@@ -6454,8 +6368,7 @@
                   <a:srgbClr val="1B3B6F"/>
                 </a:solidFill>
                 <a:latin typeface="Calibri" pitchFamily="34" charset="0"/>
-                <a:ea typeface="Calibri" pitchFamily="34" charset="-122"/>
-                <a:cs typeface="Calibri" pitchFamily="34" charset="-120"/>
+                <a:cs typeface="Amiri" pitchFamily="2" charset="-78"/>
               </a:rPr>
               <a:t>15</a:t>
             </a:r>
@@ -6520,8 +6433,7 @@
                   <a:srgbClr val="8A6D1E"/>
                 </a:solidFill>
                 <a:latin typeface="Calibri" pitchFamily="34" charset="0"/>
-                <a:ea typeface="Calibri" pitchFamily="34" charset="-122"/>
-                <a:cs typeface="Calibri" pitchFamily="34" charset="-120"/>
+                <a:cs typeface="Amiri" pitchFamily="2" charset="-78"/>
               </a:rPr>
               <a:t>Formal closer.</a:t>
             </a:r>
@@ -6586,8 +6498,7 @@
                   <a:srgbClr val="FFFFFF"/>
                 </a:solidFill>
                 <a:latin typeface="Calibri" pitchFamily="34" charset="0"/>
-                <a:ea typeface="Calibri" pitchFamily="34" charset="-122"/>
-                <a:cs typeface="Calibri" pitchFamily="34" charset="-120"/>
+                <a:cs typeface="Amiri" pitchFamily="2" charset="-78"/>
               </a:rPr>
               <a:t>CORE</a:t>
             </a:r>
@@ -6624,9 +6535,8 @@
                 <a:solidFill>
                   <a:srgbClr val="1B3B6F"/>
                 </a:solidFill>
-                <a:latin typeface="Amiri" pitchFamily="34" charset="0"/>
-                <a:ea typeface="Amiri" pitchFamily="34" charset="-122"/>
-                <a:cs typeface="Amiri" pitchFamily="34" charset="-120"/>
+                <a:latin typeface="Amiri" pitchFamily="2" charset="-78"/>
+                <a:cs typeface="Amiri" pitchFamily="2" charset="-78"/>
               </a:rPr>
               <a:t>وَتَفَضَّلُوا بِقَبُولِ الاحْتِرَامِ</a:t>
             </a:r>
@@ -6664,8 +6574,7 @@
                   <a:srgbClr val="1F2A37"/>
                 </a:solidFill>
                 <a:latin typeface="Calibri" pitchFamily="34" charset="0"/>
-                <a:ea typeface="Calibri" pitchFamily="34" charset="-122"/>
-                <a:cs typeface="Calibri" pitchFamily="34" charset="-120"/>
+                <a:cs typeface="Amiri" pitchFamily="2" charset="-78"/>
               </a:rPr>
               <a:t>yours faithfully</a:t>
             </a:r>
@@ -6681,8 +6590,7 @@
                   <a:srgbClr val="5A6472"/>
                 </a:solidFill>
                 <a:latin typeface="Calibri" pitchFamily="34" charset="0"/>
-                <a:ea typeface="Calibri" pitchFamily="34" charset="-122"/>
-                <a:cs typeface="Calibri" pitchFamily="34" charset="-120"/>
+                <a:cs typeface="Amiri" pitchFamily="2" charset="-78"/>
               </a:rPr>
               <a:t>wa-ta-faḍ-ḍa-lū bi-qa-bū-li alḥ-ti-rā-mi</a:t>
             </a:r>
@@ -6779,8 +6687,7 @@
                   <a:srgbClr val="1B3B6F"/>
                 </a:solidFill>
                 <a:latin typeface="Calibri" pitchFamily="34" charset="0"/>
-                <a:ea typeface="Calibri" pitchFamily="34" charset="-122"/>
-                <a:cs typeface="Calibri" pitchFamily="34" charset="-120"/>
+                <a:cs typeface="Amiri" pitchFamily="2" charset="-78"/>
               </a:rPr>
               <a:t>16</a:t>
             </a:r>
@@ -6845,8 +6752,7 @@
                   <a:srgbClr val="8A6D1E"/>
                 </a:solidFill>
                 <a:latin typeface="Calibri" pitchFamily="34" charset="0"/>
-                <a:ea typeface="Calibri" pitchFamily="34" charset="-122"/>
-                <a:cs typeface="Calibri" pitchFamily="34" charset="-120"/>
+                <a:cs typeface="Amiri" pitchFamily="2" charset="-78"/>
               </a:rPr>
               <a:t>Informal closer.</a:t>
             </a:r>
@@ -6911,8 +6817,7 @@
                   <a:srgbClr val="FFFFFF"/>
                 </a:solidFill>
                 <a:latin typeface="Calibri" pitchFamily="34" charset="0"/>
-                <a:ea typeface="Calibri" pitchFamily="34" charset="-122"/>
-                <a:cs typeface="Calibri" pitchFamily="34" charset="-120"/>
+                <a:cs typeface="Amiri" pitchFamily="2" charset="-78"/>
               </a:rPr>
               <a:t>CORE</a:t>
             </a:r>
@@ -6949,9 +6854,8 @@
                 <a:solidFill>
                   <a:srgbClr val="1B3B6F"/>
                 </a:solidFill>
-                <a:latin typeface="Amiri" pitchFamily="34" charset="0"/>
-                <a:ea typeface="Amiri" pitchFamily="34" charset="-122"/>
-                <a:cs typeface="Amiri" pitchFamily="34" charset="-120"/>
+                <a:latin typeface="Amiri" pitchFamily="2" charset="-78"/>
+                <a:cs typeface="Amiri" pitchFamily="2" charset="-78"/>
               </a:rPr>
               <a:t>إِلَى اللِّقَاءِ</a:t>
             </a:r>
@@ -6989,8 +6893,7 @@
                   <a:srgbClr val="1F2A37"/>
                 </a:solidFill>
                 <a:latin typeface="Calibri" pitchFamily="34" charset="0"/>
-                <a:ea typeface="Calibri" pitchFamily="34" charset="-122"/>
-                <a:cs typeface="Calibri" pitchFamily="34" charset="-120"/>
+                <a:cs typeface="Amiri" pitchFamily="2" charset="-78"/>
               </a:rPr>
               <a:t>see you soon</a:t>
             </a:r>
@@ -7006,8 +6909,7 @@
                   <a:srgbClr val="5A6472"/>
                 </a:solidFill>
                 <a:latin typeface="Calibri" pitchFamily="34" charset="0"/>
-                <a:ea typeface="Calibri" pitchFamily="34" charset="-122"/>
-                <a:cs typeface="Calibri" pitchFamily="34" charset="-120"/>
+                <a:cs typeface="Amiri" pitchFamily="2" charset="-78"/>
               </a:rPr>
               <a:t>i-lā all-li-qā-ʾi</a:t>
             </a:r>
@@ -7045,8 +6947,7 @@
                   <a:srgbClr val="8A93A0"/>
                 </a:solidFill>
                 <a:latin typeface="Calibri" pitchFamily="34" charset="0"/>
-                <a:ea typeface="Calibri" pitchFamily="34" charset="-122"/>
-                <a:cs typeface="Calibri" pitchFamily="34" charset="-120"/>
+                <a:cs typeface="Amiri" pitchFamily="2" charset="-78"/>
               </a:rPr>
               <a:t>11 / 26</a:t>
             </a:r>
@@ -7140,9 +7041,8 @@
                 <a:solidFill>
                   <a:srgbClr val="D4AF37"/>
                 </a:solidFill>
-                <a:latin typeface="Amiri" pitchFamily="34" charset="0"/>
-                <a:ea typeface="Amiri" pitchFamily="34" charset="-122"/>
-                <a:cs typeface="Amiri" pitchFamily="34" charset="-120"/>
+                <a:latin typeface="Amiri" pitchFamily="2" charset="-78"/>
+                <a:cs typeface="Amiri" pitchFamily="2" charset="-78"/>
               </a:rPr>
               <a:t>م</a:t>
             </a:r>
@@ -7180,8 +7080,7 @@
                   <a:srgbClr val="1B3B6F"/>
                 </a:solidFill>
                 <a:latin typeface="Cambria" pitchFamily="34" charset="0"/>
-                <a:ea typeface="Cambria" pitchFamily="34" charset="-122"/>
-                <a:cs typeface="Cambria" pitchFamily="34" charset="-120"/>
+                <a:cs typeface="Amiri" pitchFamily="2" charset="-78"/>
               </a:rPr>
               <a:t>Al Madina Online School</a:t>
             </a:r>
@@ -7219,8 +7118,7 @@
                   <a:srgbClr val="8A6D1E"/>
                 </a:solidFill>
                 <a:latin typeface="Calibri" pitchFamily="34" charset="0"/>
-                <a:ea typeface="Calibri" pitchFamily="34" charset="-122"/>
-                <a:cs typeface="Calibri" pitchFamily="34" charset="-120"/>
+                <a:cs typeface="Amiri" pitchFamily="2" charset="-78"/>
               </a:rPr>
               <a:t>ARABIC DEPARTMENT · MIFTAH ARABIC · IGCSE 0544</a:t>
             </a:r>
@@ -7285,8 +7183,7 @@
                   <a:srgbClr val="FFFFFF"/>
                 </a:solidFill>
                 <a:latin typeface="Calibri" pitchFamily="34" charset="0"/>
-                <a:ea typeface="Calibri" pitchFamily="34" charset="-122"/>
-                <a:cs typeface="Calibri" pitchFamily="34" charset="-120"/>
+                <a:cs typeface="Amiri" pitchFamily="2" charset="-78"/>
               </a:rPr>
               <a:t>P6-L04 · IGCSE Bridge</a:t>
             </a:r>
@@ -7351,8 +7248,7 @@
                   <a:srgbClr val="FFFFFF"/>
                 </a:solidFill>
                 <a:latin typeface="Calibri" pitchFamily="34" charset="0"/>
-                <a:ea typeface="Calibri" pitchFamily="34" charset="-122"/>
-                <a:cs typeface="Calibri" pitchFamily="34" charset="-120"/>
+                <a:cs typeface="Amiri" pitchFamily="2" charset="-78"/>
               </a:rPr>
               <a:t>TEACHER INSTRUCTION · 3 MIN</a:t>
             </a:r>
@@ -7390,8 +7286,7 @@
                   <a:srgbClr val="1B3B6F"/>
                 </a:solidFill>
                 <a:latin typeface="Calibri" pitchFamily="34" charset="0"/>
-                <a:ea typeface="Calibri" pitchFamily="34" charset="-122"/>
-                <a:cs typeface="Calibri" pitchFamily="34" charset="-120"/>
+                <a:cs typeface="Amiri" pitchFamily="2" charset="-78"/>
               </a:rPr>
               <a:t>TEACH · MATCH THE SIGNAL TO THE TYPE (WEBSITE)</a:t>
             </a:r>
@@ -7429,8 +7324,7 @@
                   <a:srgbClr val="1B3B6F"/>
                 </a:solidFill>
                 <a:latin typeface="Cambria" pitchFamily="34" charset="0"/>
-                <a:ea typeface="Cambria" pitchFamily="34" charset="-122"/>
-                <a:cs typeface="Cambria" pitchFamily="34" charset="-120"/>
+                <a:cs typeface="Amiri" pitchFamily="2" charset="-78"/>
               </a:rPr>
               <a:t>Register signals by text type</a:t>
             </a:r>
@@ -7467,9 +7361,8 @@
                 <a:solidFill>
                   <a:srgbClr val="8A6D1E"/>
                 </a:solidFill>
-                <a:latin typeface="Amiri" pitchFamily="34" charset="0"/>
-                <a:ea typeface="Amiri" pitchFamily="34" charset="-122"/>
-                <a:cs typeface="Amiri" pitchFamily="34" charset="-120"/>
+                <a:latin typeface="Amiri" pitchFamily="2" charset="-78"/>
+                <a:cs typeface="Amiri" pitchFamily="2" charset="-78"/>
               </a:rPr>
               <a:t>عَلَامَاتُ الصِّيغَةِ</a:t>
             </a:r>
@@ -7507,8 +7400,7 @@
                   <a:srgbClr val="8A93A0"/>
                 </a:solidFill>
                 <a:latin typeface="Calibri" pitchFamily="34" charset="0"/>
-                <a:ea typeface="Calibri" pitchFamily="34" charset="-122"/>
-                <a:cs typeface="Calibri" pitchFamily="34" charset="-120"/>
+                <a:cs typeface="Amiri" pitchFamily="2" charset="-78"/>
               </a:rPr>
               <a:t>Miftah Arabic · Progression P6 · IGCSE Bridge · P6-L04</a:t>
             </a:r>
@@ -7571,8 +7463,7 @@
                   <a:srgbClr val="FFFFFF"/>
                 </a:solidFill>
                 <a:latin typeface="Calibri" pitchFamily="34" charset="0"/>
-                <a:ea typeface="Calibri" pitchFamily="34" charset="-122"/>
-                <a:cs typeface="Calibri" pitchFamily="34" charset="-120"/>
+                <a:cs typeface="Amiri" pitchFamily="2" charset="-78"/>
               </a:rPr>
               <a:t>Register</a:t>
             </a:r>
@@ -7610,8 +7501,7 @@
                   <a:srgbClr val="FFFFFF"/>
                 </a:solidFill>
                 <a:latin typeface="Calibri" pitchFamily="34" charset="0"/>
-                <a:ea typeface="Calibri" pitchFamily="34" charset="-122"/>
-                <a:cs typeface="Calibri" pitchFamily="34" charset="-120"/>
+                <a:cs typeface="Amiri" pitchFamily="2" charset="-78"/>
               </a:rPr>
               <a:t>Opening signal</a:t>
             </a:r>
@@ -7649,8 +7539,7 @@
                   <a:srgbClr val="FFFFFF"/>
                 </a:solidFill>
                 <a:latin typeface="Calibri" pitchFamily="34" charset="0"/>
-                <a:ea typeface="Calibri" pitchFamily="34" charset="-122"/>
-                <a:cs typeface="Calibri" pitchFamily="34" charset="-120"/>
+                <a:cs typeface="Amiri" pitchFamily="2" charset="-78"/>
               </a:rPr>
               <a:t>Text type</a:t>
             </a:r>
@@ -7715,8 +7604,7 @@
                   <a:srgbClr val="5A6472"/>
                 </a:solidFill>
                 <a:latin typeface="Calibri" pitchFamily="34" charset="0"/>
-                <a:ea typeface="Calibri" pitchFamily="34" charset="-122"/>
-                <a:cs typeface="Calibri" pitchFamily="34" charset="-120"/>
+                <a:cs typeface="Amiri" pitchFamily="2" charset="-78"/>
               </a:rPr>
               <a:t>Formal: third person, passive, formal connectors</a:t>
             </a:r>
@@ -7753,9 +7641,8 @@
                 <a:solidFill>
                   <a:srgbClr val="1B3B6F"/>
                 </a:solidFill>
-                <a:latin typeface="Amiri" pitchFamily="34" charset="0"/>
-                <a:ea typeface="Amiri" pitchFamily="34" charset="-122"/>
-                <a:cs typeface="Amiri" pitchFamily="34" charset="-120"/>
+                <a:latin typeface="Amiri" pitchFamily="2" charset="-78"/>
+                <a:cs typeface="Amiri" pitchFamily="2" charset="-78"/>
               </a:rPr>
               <a:t>أَتَشَرَّفُ بِمُخَاطَبَتِكُمْ</a:t>
             </a:r>
@@ -7793,8 +7680,7 @@
                   <a:srgbClr val="5A6472"/>
                 </a:solidFill>
                 <a:latin typeface="Calibri" pitchFamily="34" charset="0"/>
-                <a:ea typeface="Calibri" pitchFamily="34" charset="-122"/>
-                <a:cs typeface="Calibri" pitchFamily="34" charset="-120"/>
+                <a:cs typeface="Amiri" pitchFamily="2" charset="-78"/>
               </a:rPr>
               <a:t>Formal letter</a:t>
             </a:r>
@@ -7859,8 +7745,7 @@
                   <a:srgbClr val="FFFFFF"/>
                 </a:solidFill>
                 <a:latin typeface="Calibri" pitchFamily="34" charset="0"/>
-                <a:ea typeface="Calibri" pitchFamily="34" charset="-122"/>
-                <a:cs typeface="Calibri" pitchFamily="34" charset="-120"/>
+                <a:cs typeface="Amiri" pitchFamily="2" charset="-78"/>
               </a:rPr>
               <a:t>CORE</a:t>
             </a:r>
@@ -7925,8 +7810,7 @@
                   <a:srgbClr val="5A6472"/>
                 </a:solidFill>
                 <a:latin typeface="Calibri" pitchFamily="34" charset="0"/>
-                <a:ea typeface="Calibri" pitchFamily="34" charset="-122"/>
-                <a:cs typeface="Calibri" pitchFamily="34" charset="-120"/>
+                <a:cs typeface="Amiri" pitchFamily="2" charset="-78"/>
               </a:rPr>
               <a:t>Friendly: first/second person, conversational</a:t>
             </a:r>
@@ -7963,9 +7847,8 @@
                 <a:solidFill>
                   <a:srgbClr val="1B3B6F"/>
                 </a:solidFill>
-                <a:latin typeface="Amiri" pitchFamily="34" charset="0"/>
-                <a:ea typeface="Amiri" pitchFamily="34" charset="-122"/>
-                <a:cs typeface="Amiri" pitchFamily="34" charset="-120"/>
+                <a:latin typeface="Amiri" pitchFamily="2" charset="-78"/>
+                <a:cs typeface="Amiri" pitchFamily="2" charset="-78"/>
               </a:rPr>
               <a:t>حَيَّاكَ اللَّهُ / عَزِيزِي</a:t>
             </a:r>
@@ -8003,8 +7886,7 @@
                   <a:srgbClr val="5A6472"/>
                 </a:solidFill>
                 <a:latin typeface="Calibri" pitchFamily="34" charset="0"/>
-                <a:ea typeface="Calibri" pitchFamily="34" charset="-122"/>
-                <a:cs typeface="Calibri" pitchFamily="34" charset="-120"/>
+                <a:cs typeface="Amiri" pitchFamily="2" charset="-78"/>
               </a:rPr>
               <a:t>Email (friend)</a:t>
             </a:r>
@@ -8069,8 +7951,7 @@
                   <a:srgbClr val="FFFFFF"/>
                 </a:solidFill>
                 <a:latin typeface="Calibri" pitchFamily="34" charset="0"/>
-                <a:ea typeface="Calibri" pitchFamily="34" charset="-122"/>
-                <a:cs typeface="Calibri" pitchFamily="34" charset="-120"/>
+                <a:cs typeface="Amiri" pitchFamily="2" charset="-78"/>
               </a:rPr>
               <a:t>CORE</a:t>
             </a:r>
@@ -8135,8 +8016,7 @@
                   <a:srgbClr val="5A6472"/>
                 </a:solidFill>
                 <a:latin typeface="Calibri" pitchFamily="34" charset="0"/>
-                <a:ea typeface="Calibri" pitchFamily="34" charset="-122"/>
-                <a:cs typeface="Calibri" pitchFamily="34" charset="-120"/>
+                <a:cs typeface="Amiri" pitchFamily="2" charset="-78"/>
               </a:rPr>
               <a:t>Semi-formal, engaging, first person</a:t>
             </a:r>
@@ -8174,8 +8054,7 @@
                   <a:srgbClr val="5A6472"/>
                 </a:solidFill>
                 <a:latin typeface="Calibri" pitchFamily="34" charset="0"/>
-                <a:ea typeface="Calibri" pitchFamily="34" charset="-122"/>
-                <a:cs typeface="Calibri" pitchFamily="34" charset="-120"/>
+                <a:cs typeface="Amiri" pitchFamily="2" charset="-78"/>
               </a:rPr>
               <a:t>(a hook, no address)</a:t>
             </a:r>
@@ -8213,8 +8092,7 @@
                   <a:srgbClr val="5A6472"/>
                 </a:solidFill>
                 <a:latin typeface="Calibri" pitchFamily="34" charset="0"/>
-                <a:ea typeface="Calibri" pitchFamily="34" charset="-122"/>
-                <a:cs typeface="Calibri" pitchFamily="34" charset="-120"/>
+                <a:cs typeface="Amiri" pitchFamily="2" charset="-78"/>
               </a:rPr>
               <a:t>Article</a:t>
             </a:r>
@@ -8279,8 +8157,7 @@
                   <a:srgbClr val="5A6472"/>
                 </a:solidFill>
                 <a:latin typeface="Calibri" pitchFamily="34" charset="0"/>
-                <a:ea typeface="Calibri" pitchFamily="34" charset="-122"/>
-                <a:cs typeface="Calibri" pitchFamily="34" charset="-120"/>
+                <a:cs typeface="Amiri" pitchFamily="2" charset="-78"/>
               </a:rPr>
               <a:t>Formal, impersonal, structured</a:t>
             </a:r>
@@ -8317,9 +8194,8 @@
                 <a:solidFill>
                   <a:srgbClr val="1B3B6F"/>
                 </a:solidFill>
-                <a:latin typeface="Amiri" pitchFamily="34" charset="0"/>
-                <a:ea typeface="Amiri" pitchFamily="34" charset="-122"/>
-                <a:cs typeface="Amiri" pitchFamily="34" charset="-120"/>
+                <a:latin typeface="Amiri" pitchFamily="2" charset="-78"/>
+                <a:cs typeface="Amiri" pitchFamily="2" charset="-78"/>
               </a:rPr>
               <a:t>عُنْوَانٌ + أَقْسَامٌ مُرَقَّمَةٌ</a:t>
             </a:r>
@@ -8357,8 +8233,7 @@
                   <a:srgbClr val="5A6472"/>
                 </a:solidFill>
                 <a:latin typeface="Calibri" pitchFamily="34" charset="0"/>
-                <a:ea typeface="Calibri" pitchFamily="34" charset="-122"/>
-                <a:cs typeface="Calibri" pitchFamily="34" charset="-120"/>
+                <a:cs typeface="Amiri" pitchFamily="2" charset="-78"/>
               </a:rPr>
               <a:t>Report</a:t>
             </a:r>
@@ -8396,8 +8271,7 @@
                   <a:srgbClr val="1B3B6F"/>
                 </a:solidFill>
                 <a:latin typeface="Calibri" pitchFamily="34" charset="0"/>
-                <a:ea typeface="Calibri" pitchFamily="34" charset="-122"/>
-                <a:cs typeface="Calibri" pitchFamily="34" charset="-120"/>
+                <a:cs typeface="Amiri" pitchFamily="2" charset="-78"/>
               </a:rPr>
               <a:t>The opening line tells the examiner the register — get it right before anything else.</a:t>
             </a:r>
@@ -8435,8 +8309,7 @@
                   <a:srgbClr val="8A93A0"/>
                 </a:solidFill>
                 <a:latin typeface="Calibri" pitchFamily="34" charset="0"/>
-                <a:ea typeface="Calibri" pitchFamily="34" charset="-122"/>
-                <a:cs typeface="Calibri" pitchFamily="34" charset="-120"/>
+                <a:cs typeface="Amiri" pitchFamily="2" charset="-78"/>
               </a:rPr>
               <a:t>12 / 26</a:t>
             </a:r>
@@ -8530,9 +8403,8 @@
                 <a:solidFill>
                   <a:srgbClr val="D4AF37"/>
                 </a:solidFill>
-                <a:latin typeface="Amiri" pitchFamily="34" charset="0"/>
-                <a:ea typeface="Amiri" pitchFamily="34" charset="-122"/>
-                <a:cs typeface="Amiri" pitchFamily="34" charset="-120"/>
+                <a:latin typeface="Amiri" pitchFamily="2" charset="-78"/>
+                <a:cs typeface="Amiri" pitchFamily="2" charset="-78"/>
               </a:rPr>
               <a:t>م</a:t>
             </a:r>
@@ -8570,8 +8442,7 @@
                   <a:srgbClr val="1B3B6F"/>
                 </a:solidFill>
                 <a:latin typeface="Cambria" pitchFamily="34" charset="0"/>
-                <a:ea typeface="Cambria" pitchFamily="34" charset="-122"/>
-                <a:cs typeface="Cambria" pitchFamily="34" charset="-120"/>
+                <a:cs typeface="Amiri" pitchFamily="2" charset="-78"/>
               </a:rPr>
               <a:t>Al Madina Online School</a:t>
             </a:r>
@@ -8609,8 +8480,7 @@
                   <a:srgbClr val="8A6D1E"/>
                 </a:solidFill>
                 <a:latin typeface="Calibri" pitchFamily="34" charset="0"/>
-                <a:ea typeface="Calibri" pitchFamily="34" charset="-122"/>
-                <a:cs typeface="Calibri" pitchFamily="34" charset="-120"/>
+                <a:cs typeface="Amiri" pitchFamily="2" charset="-78"/>
               </a:rPr>
               <a:t>ARABIC DEPARTMENT · MIFTAH ARABIC · IGCSE 0544</a:t>
             </a:r>
@@ -8675,8 +8545,7 @@
                   <a:srgbClr val="FFFFFF"/>
                 </a:solidFill>
                 <a:latin typeface="Calibri" pitchFamily="34" charset="0"/>
-                <a:ea typeface="Calibri" pitchFamily="34" charset="-122"/>
-                <a:cs typeface="Calibri" pitchFamily="34" charset="-120"/>
+                <a:cs typeface="Amiri" pitchFamily="2" charset="-78"/>
               </a:rPr>
               <a:t>P6-L04 · IGCSE Bridge</a:t>
             </a:r>
@@ -8741,8 +8610,7 @@
                   <a:srgbClr val="FFFFFF"/>
                 </a:solidFill>
                 <a:latin typeface="Calibri" pitchFamily="34" charset="0"/>
-                <a:ea typeface="Calibri" pitchFamily="34" charset="-122"/>
-                <a:cs typeface="Calibri" pitchFamily="34" charset="-120"/>
+                <a:cs typeface="Amiri" pitchFamily="2" charset="-78"/>
               </a:rPr>
               <a:t>I DO · 4 MIN</a:t>
             </a:r>
@@ -8780,8 +8648,7 @@
                   <a:srgbClr val="6B4C9A"/>
                 </a:solidFill>
                 <a:latin typeface="Calibri" pitchFamily="34" charset="0"/>
-                <a:ea typeface="Calibri" pitchFamily="34" charset="-122"/>
-                <a:cs typeface="Calibri" pitchFamily="34" charset="-120"/>
+                <a:cs typeface="Amiri" pitchFamily="2" charset="-78"/>
               </a:rPr>
               <a:t>I DO · SAME CONTENT, TWO REGISTERS</a:t>
             </a:r>
@@ -8819,8 +8686,7 @@
                   <a:srgbClr val="1B3B6F"/>
                 </a:solidFill>
                 <a:latin typeface="Cambria" pitchFamily="34" charset="0"/>
-                <a:ea typeface="Cambria" pitchFamily="34" charset="-122"/>
-                <a:cs typeface="Cambria" pitchFamily="34" charset="-120"/>
+                <a:cs typeface="Amiri" pitchFamily="2" charset="-78"/>
               </a:rPr>
               <a:t>One message — a minister or a friend?</a:t>
             </a:r>
@@ -8857,9 +8723,8 @@
                 <a:solidFill>
                   <a:srgbClr val="8A6D1E"/>
                 </a:solidFill>
-                <a:latin typeface="Amiri" pitchFamily="34" charset="0"/>
-                <a:ea typeface="Amiri" pitchFamily="34" charset="-122"/>
-                <a:cs typeface="Amiri" pitchFamily="34" charset="-120"/>
+                <a:latin typeface="Amiri" pitchFamily="2" charset="-78"/>
+                <a:cs typeface="Amiri" pitchFamily="2" charset="-78"/>
               </a:rPr>
               <a:t>رَسْمِيٌّ أَمْ وُدِّيٌّ؟</a:t>
             </a:r>
@@ -8897,8 +8762,7 @@
                   <a:srgbClr val="8A93A0"/>
                 </a:solidFill>
                 <a:latin typeface="Calibri" pitchFamily="34" charset="0"/>
-                <a:ea typeface="Calibri" pitchFamily="34" charset="-122"/>
-                <a:cs typeface="Calibri" pitchFamily="34" charset="-120"/>
+                <a:cs typeface="Amiri" pitchFamily="2" charset="-78"/>
               </a:rPr>
               <a:t>Miftah Arabic · Progression P6 · IGCSE Bridge · P6-L04</a:t>
             </a:r>
@@ -8961,8 +8825,7 @@
                   <a:srgbClr val="FFFFFF"/>
                 </a:solidFill>
                 <a:latin typeface="Calibri" pitchFamily="34" charset="0"/>
-                <a:ea typeface="Calibri" pitchFamily="34" charset="-122"/>
-                <a:cs typeface="Calibri" pitchFamily="34" charset="-120"/>
+                <a:cs typeface="Amiri" pitchFamily="2" charset="-78"/>
               </a:rPr>
               <a:t>Friendly email</a:t>
             </a:r>
@@ -9000,8 +8863,7 @@
                   <a:srgbClr val="FFFFFF"/>
                 </a:solidFill>
                 <a:latin typeface="Calibri" pitchFamily="34" charset="0"/>
-                <a:ea typeface="Calibri" pitchFamily="34" charset="-122"/>
-                <a:cs typeface="Calibri" pitchFamily="34" charset="-120"/>
+                <a:cs typeface="Amiri" pitchFamily="2" charset="-78"/>
               </a:rPr>
               <a:t>Formal letter</a:t>
             </a:r>
@@ -9039,8 +8901,7 @@
                   <a:srgbClr val="FFFFFF"/>
                 </a:solidFill>
                 <a:latin typeface="Calibri" pitchFamily="34" charset="0"/>
-                <a:ea typeface="Calibri" pitchFamily="34" charset="-122"/>
-                <a:cs typeface="Calibri" pitchFamily="34" charset="-120"/>
+                <a:cs typeface="Amiri" pitchFamily="2" charset="-78"/>
               </a:rPr>
               <a:t>Move</a:t>
             </a:r>
@@ -9104,9 +8965,8 @@
                 <a:solidFill>
                   <a:srgbClr val="1B3B6F"/>
                 </a:solidFill>
-                <a:latin typeface="Amiri" pitchFamily="34" charset="0"/>
-                <a:ea typeface="Amiri" pitchFamily="34" charset="-122"/>
-                <a:cs typeface="Amiri" pitchFamily="34" charset="-120"/>
+                <a:latin typeface="Amiri" pitchFamily="2" charset="-78"/>
+                <a:cs typeface="Amiri" pitchFamily="2" charset="-78"/>
               </a:rPr>
               <a:t>عَزِيزِي أَحْمَدُ، حَيَّاكَ اللَّهُ!</a:t>
             </a:r>
@@ -9143,9 +9003,8 @@
                 <a:solidFill>
                   <a:srgbClr val="1B3B6F"/>
                 </a:solidFill>
-                <a:latin typeface="Amiri" pitchFamily="34" charset="0"/>
-                <a:ea typeface="Amiri" pitchFamily="34" charset="-122"/>
-                <a:cs typeface="Amiri" pitchFamily="34" charset="-120"/>
+                <a:latin typeface="Amiri" pitchFamily="2" charset="-78"/>
+                <a:cs typeface="Amiri" pitchFamily="2" charset="-78"/>
               </a:rPr>
               <a:t>حَضَرَاتِ أَعْضَاءِ اللَّجْنَةِ المُحْتَرَمِينَ، أَتَشَرَّفُ بِمُخَاطَبَتِكُمْ …</a:t>
             </a:r>
@@ -9183,8 +9042,7 @@
                   <a:srgbClr val="5A6472"/>
                 </a:solidFill>
                 <a:latin typeface="Calibri" pitchFamily="34" charset="0"/>
-                <a:ea typeface="Calibri" pitchFamily="34" charset="-122"/>
-                <a:cs typeface="Calibri" pitchFamily="34" charset="-120"/>
+                <a:cs typeface="Amiri" pitchFamily="2" charset="-78"/>
               </a:rPr>
               <a:t>open</a:t>
             </a:r>
@@ -9249,8 +9107,7 @@
                   <a:srgbClr val="FFFFFF"/>
                 </a:solidFill>
                 <a:latin typeface="Calibri" pitchFamily="34" charset="0"/>
-                <a:ea typeface="Calibri" pitchFamily="34" charset="-122"/>
-                <a:cs typeface="Calibri" pitchFamily="34" charset="-120"/>
+                <a:cs typeface="Amiri" pitchFamily="2" charset="-78"/>
               </a:rPr>
               <a:t>CORE</a:t>
             </a:r>
@@ -9314,9 +9171,8 @@
                 <a:solidFill>
                   <a:srgbClr val="1B3B6F"/>
                 </a:solidFill>
-                <a:latin typeface="Amiri" pitchFamily="34" charset="0"/>
-                <a:ea typeface="Amiri" pitchFamily="34" charset="-122"/>
-                <a:cs typeface="Amiri" pitchFamily="34" charset="-120"/>
+                <a:latin typeface="Amiri" pitchFamily="2" charset="-78"/>
+                <a:cs typeface="Amiri" pitchFamily="2" charset="-78"/>
               </a:rPr>
               <a:t>صَحِيحٌ أَنَّ الطَّقْسَ بَارِدٌ، غَيْرَ أَنَّ …</a:t>
             </a:r>
@@ -9353,9 +9209,8 @@
                 <a:solidFill>
                   <a:srgbClr val="1B3B6F"/>
                 </a:solidFill>
-                <a:latin typeface="Amiri" pitchFamily="34" charset="0"/>
-                <a:ea typeface="Amiri" pitchFamily="34" charset="-122"/>
-                <a:cs typeface="Amiri" pitchFamily="34" charset="-120"/>
+                <a:latin typeface="Amiri" pitchFamily="2" charset="-78"/>
+                <a:cs typeface="Amiri" pitchFamily="2" charset="-78"/>
               </a:rPr>
               <a:t>صَحِيحٌ أَنَّ المَوَارِدَ مَحْدُودَةٌ، غَيْرَ أَنَّ …</a:t>
             </a:r>
@@ -9393,8 +9248,7 @@
                   <a:srgbClr val="5A6472"/>
                 </a:solidFill>
                 <a:latin typeface="Calibri" pitchFamily="34" charset="0"/>
-                <a:ea typeface="Calibri" pitchFamily="34" charset="-122"/>
-                <a:cs typeface="Calibri" pitchFamily="34" charset="-120"/>
+                <a:cs typeface="Amiri" pitchFamily="2" charset="-78"/>
               </a:rPr>
               <a:t>the problem</a:t>
             </a:r>
@@ -9458,9 +9312,8 @@
                 <a:solidFill>
                   <a:srgbClr val="1B3B6F"/>
                 </a:solidFill>
-                <a:latin typeface="Amiri" pitchFamily="34" charset="0"/>
-                <a:ea typeface="Amiri" pitchFamily="34" charset="-122"/>
-                <a:cs typeface="Amiri" pitchFamily="34" charset="-120"/>
+                <a:latin typeface="Amiri" pitchFamily="2" charset="-78"/>
+                <a:cs typeface="Amiri" pitchFamily="2" charset="-78"/>
               </a:rPr>
               <a:t>وَأَنْصَحُكَ بِأَنْ تُحْضِرَ مِعْطَفًا.</a:t>
             </a:r>
@@ -9497,9 +9350,8 @@
                 <a:solidFill>
                   <a:srgbClr val="1B3B6F"/>
                 </a:solidFill>
-                <a:latin typeface="Amiri" pitchFamily="34" charset="0"/>
-                <a:ea typeface="Amiri" pitchFamily="34" charset="-122"/>
-                <a:cs typeface="Amiri" pitchFamily="34" charset="-120"/>
+                <a:latin typeface="Amiri" pitchFamily="2" charset="-78"/>
+                <a:cs typeface="Amiri" pitchFamily="2" charset="-78"/>
               </a:rPr>
               <a:t>وَأَقْتَرِحُ أَنْ تُطْلَقَ حَمْلَةٌ …</a:t>
             </a:r>
@@ -9537,8 +9389,7 @@
                   <a:srgbClr val="5A6472"/>
                 </a:solidFill>
                 <a:latin typeface="Calibri" pitchFamily="34" charset="0"/>
-                <a:ea typeface="Calibri" pitchFamily="34" charset="-122"/>
-                <a:cs typeface="Calibri" pitchFamily="34" charset="-120"/>
+                <a:cs typeface="Amiri" pitchFamily="2" charset="-78"/>
               </a:rPr>
               <a:t>advise / ask</a:t>
             </a:r>
@@ -9602,9 +9453,8 @@
                 <a:solidFill>
                   <a:srgbClr val="1B3B6F"/>
                 </a:solidFill>
-                <a:latin typeface="Amiri" pitchFamily="34" charset="0"/>
-                <a:ea typeface="Amiri" pitchFamily="34" charset="-122"/>
-                <a:cs typeface="Amiri" pitchFamily="34" charset="-120"/>
+                <a:latin typeface="Amiri" pitchFamily="2" charset="-78"/>
+                <a:cs typeface="Amiri" pitchFamily="2" charset="-78"/>
               </a:rPr>
               <a:t>وَإِذَا تَوَفَّرَ الوَقْتُ، سَنَزُورُ المَتْحَفَ.</a:t>
             </a:r>
@@ -9641,9 +9491,8 @@
                 <a:solidFill>
                   <a:srgbClr val="1B3B6F"/>
                 </a:solidFill>
-                <a:latin typeface="Amiri" pitchFamily="34" charset="0"/>
-                <a:ea typeface="Amiri" pitchFamily="34" charset="-122"/>
-                <a:cs typeface="Amiri" pitchFamily="34" charset="-120"/>
+                <a:latin typeface="Amiri" pitchFamily="2" charset="-78"/>
+                <a:cs typeface="Amiri" pitchFamily="2" charset="-78"/>
               </a:rPr>
               <a:t>أَرْجُو أَنْ تَتَّخِذُوا القَرَارَ المُنَاسِبَ عَاجِلًا.</a:t>
             </a:r>
@@ -9681,8 +9530,7 @@
                   <a:srgbClr val="5A6472"/>
                 </a:solidFill>
                 <a:latin typeface="Calibri" pitchFamily="34" charset="0"/>
-                <a:ea typeface="Calibri" pitchFamily="34" charset="-122"/>
-                <a:cs typeface="Calibri" pitchFamily="34" charset="-120"/>
+                <a:cs typeface="Amiri" pitchFamily="2" charset="-78"/>
               </a:rPr>
               <a:t>request</a:t>
             </a:r>
@@ -9746,9 +9594,8 @@
                 <a:solidFill>
                   <a:srgbClr val="1B3B6F"/>
                 </a:solidFill>
-                <a:latin typeface="Amiri" pitchFamily="34" charset="0"/>
-                <a:ea typeface="Amiri" pitchFamily="34" charset="-122"/>
-                <a:cs typeface="Amiri" pitchFamily="34" charset="-120"/>
+                <a:latin typeface="Amiri" pitchFamily="2" charset="-78"/>
+                <a:cs typeface="Amiri" pitchFamily="2" charset="-78"/>
               </a:rPr>
               <a:t>إِلَى اللِّقَاءِ، صَدِيقُكَ سَامِي.</a:t>
             </a:r>
@@ -9785,9 +9632,8 @@
                 <a:solidFill>
                   <a:srgbClr val="1B3B6F"/>
                 </a:solidFill>
-                <a:latin typeface="Amiri" pitchFamily="34" charset="0"/>
-                <a:ea typeface="Amiri" pitchFamily="34" charset="-122"/>
-                <a:cs typeface="Amiri" pitchFamily="34" charset="-120"/>
+                <a:latin typeface="Amiri" pitchFamily="2" charset="-78"/>
+                <a:cs typeface="Amiri" pitchFamily="2" charset="-78"/>
               </a:rPr>
               <a:t>وَتَفَضَّلُوا بِقَبُولِ فَائِقِ الاحْتِرَامِ.</a:t>
             </a:r>
@@ -9825,8 +9671,7 @@
                   <a:srgbClr val="5A6472"/>
                 </a:solidFill>
                 <a:latin typeface="Calibri" pitchFamily="34" charset="0"/>
-                <a:ea typeface="Calibri" pitchFamily="34" charset="-122"/>
-                <a:cs typeface="Calibri" pitchFamily="34" charset="-120"/>
+                <a:cs typeface="Amiri" pitchFamily="2" charset="-78"/>
               </a:rPr>
               <a:t>close</a:t>
             </a:r>
@@ -9891,8 +9736,7 @@
                   <a:srgbClr val="FFFFFF"/>
                 </a:solidFill>
                 <a:latin typeface="Calibri" pitchFamily="34" charset="0"/>
-                <a:ea typeface="Calibri" pitchFamily="34" charset="-122"/>
-                <a:cs typeface="Calibri" pitchFamily="34" charset="-120"/>
+                <a:cs typeface="Amiri" pitchFamily="2" charset="-78"/>
               </a:rPr>
               <a:t>CORE</a:t>
             </a:r>
@@ -9930,8 +9774,7 @@
                   <a:srgbClr val="1B3B6F"/>
                 </a:solidFill>
                 <a:latin typeface="Calibri" pitchFamily="34" charset="0"/>
-                <a:ea typeface="Calibri" pitchFamily="34" charset="-122"/>
-                <a:cs typeface="Calibri" pitchFamily="34" charset="-120"/>
+                <a:cs typeface="Amiri" pitchFamily="2" charset="-78"/>
               </a:rPr>
               <a:t>Same grammar (ṣaḥīḥun anna … ghayra anna · an + -a) — different register: you (plural) and passives vs. you (singular) and “I”.</a:t>
             </a:r>
@@ -9969,8 +9812,7 @@
                   <a:srgbClr val="8A93A0"/>
                 </a:solidFill>
                 <a:latin typeface="Calibri" pitchFamily="34" charset="0"/>
-                <a:ea typeface="Calibri" pitchFamily="34" charset="-122"/>
-                <a:cs typeface="Calibri" pitchFamily="34" charset="-120"/>
+                <a:cs typeface="Amiri" pitchFamily="2" charset="-78"/>
               </a:rPr>
               <a:t>13 / 26</a:t>
             </a:r>
@@ -10064,9 +9906,8 @@
                 <a:solidFill>
                   <a:srgbClr val="D4AF37"/>
                 </a:solidFill>
-                <a:latin typeface="Amiri" pitchFamily="34" charset="0"/>
-                <a:ea typeface="Amiri" pitchFamily="34" charset="-122"/>
-                <a:cs typeface="Amiri" pitchFamily="34" charset="-120"/>
+                <a:latin typeface="Amiri" pitchFamily="2" charset="-78"/>
+                <a:cs typeface="Amiri" pitchFamily="2" charset="-78"/>
               </a:rPr>
               <a:t>م</a:t>
             </a:r>
@@ -10104,8 +9945,7 @@
                   <a:srgbClr val="1B3B6F"/>
                 </a:solidFill>
                 <a:latin typeface="Cambria" pitchFamily="34" charset="0"/>
-                <a:ea typeface="Cambria" pitchFamily="34" charset="-122"/>
-                <a:cs typeface="Cambria" pitchFamily="34" charset="-120"/>
+                <a:cs typeface="Amiri" pitchFamily="2" charset="-78"/>
               </a:rPr>
               <a:t>Al Madina Online School</a:t>
             </a:r>
@@ -10143,8 +9983,7 @@
                   <a:srgbClr val="8A6D1E"/>
                 </a:solidFill>
                 <a:latin typeface="Calibri" pitchFamily="34" charset="0"/>
-                <a:ea typeface="Calibri" pitchFamily="34" charset="-122"/>
-                <a:cs typeface="Calibri" pitchFamily="34" charset="-120"/>
+                <a:cs typeface="Amiri" pitchFamily="2" charset="-78"/>
               </a:rPr>
               <a:t>ARABIC DEPARTMENT · MIFTAH ARABIC · IGCSE 0544</a:t>
             </a:r>
@@ -10209,8 +10048,7 @@
                   <a:srgbClr val="FFFFFF"/>
                 </a:solidFill>
                 <a:latin typeface="Calibri" pitchFamily="34" charset="0"/>
-                <a:ea typeface="Calibri" pitchFamily="34" charset="-122"/>
-                <a:cs typeface="Calibri" pitchFamily="34" charset="-120"/>
+                <a:cs typeface="Amiri" pitchFamily="2" charset="-78"/>
               </a:rPr>
               <a:t>P6-L04 · IGCSE Bridge</a:t>
             </a:r>
@@ -10275,8 +10113,7 @@
                   <a:srgbClr val="FFFFFF"/>
                 </a:solidFill>
                 <a:latin typeface="Calibri" pitchFamily="34" charset="0"/>
-                <a:ea typeface="Calibri" pitchFamily="34" charset="-122"/>
-                <a:cs typeface="Calibri" pitchFamily="34" charset="-120"/>
+                <a:cs typeface="Amiri" pitchFamily="2" charset="-78"/>
               </a:rPr>
               <a:t>TEACHER INSTRUCTION · 2 MIN</a:t>
             </a:r>
@@ -10314,8 +10151,7 @@
                   <a:srgbClr val="1B3B6F"/>
                 </a:solidFill>
                 <a:latin typeface="Calibri" pitchFamily="34" charset="0"/>
-                <a:ea typeface="Calibri" pitchFamily="34" charset="-122"/>
-                <a:cs typeface="Calibri" pitchFamily="34" charset="-120"/>
+                <a:cs typeface="Amiri" pitchFamily="2" charset="-78"/>
               </a:rPr>
               <a:t>TEACH · KNOW HOW YOU ARE MARKED (WEBSITE)</a:t>
             </a:r>
@@ -10353,8 +10189,7 @@
                   <a:srgbClr val="1B3B6F"/>
                 </a:solidFill>
                 <a:latin typeface="Cambria" pitchFamily="34" charset="0"/>
-                <a:ea typeface="Cambria" pitchFamily="34" charset="-122"/>
-                <a:cs typeface="Cambria" pitchFamily="34" charset="-120"/>
+                <a:cs typeface="Amiri" pitchFamily="2" charset="-78"/>
               </a:rPr>
               <a:t>The Paper 4 Q1 mark scheme</a:t>
             </a:r>
@@ -10391,9 +10226,8 @@
                 <a:solidFill>
                   <a:srgbClr val="8A6D1E"/>
                 </a:solidFill>
-                <a:latin typeface="Amiri" pitchFamily="34" charset="0"/>
-                <a:ea typeface="Amiri" pitchFamily="34" charset="-122"/>
-                <a:cs typeface="Amiri" pitchFamily="34" charset="-120"/>
+                <a:latin typeface="Amiri" pitchFamily="2" charset="-78"/>
+                <a:cs typeface="Amiri" pitchFamily="2" charset="-78"/>
               </a:rPr>
               <a:t>مَعَايِيرُ التَّقْيِيمِ</a:t>
             </a:r>
@@ -10431,8 +10265,7 @@
                   <a:srgbClr val="8A93A0"/>
                 </a:solidFill>
                 <a:latin typeface="Calibri" pitchFamily="34" charset="0"/>
-                <a:ea typeface="Calibri" pitchFamily="34" charset="-122"/>
-                <a:cs typeface="Calibri" pitchFamily="34" charset="-120"/>
+                <a:cs typeface="Amiri" pitchFamily="2" charset="-78"/>
               </a:rPr>
               <a:t>Miftah Arabic · Progression P6 · IGCSE Bridge · P6-L04</a:t>
             </a:r>
@@ -10495,8 +10328,7 @@
                   <a:srgbClr val="FFFFFF"/>
                 </a:solidFill>
                 <a:latin typeface="Calibri" pitchFamily="34" charset="0"/>
-                <a:ea typeface="Calibri" pitchFamily="34" charset="-122"/>
-                <a:cs typeface="Calibri" pitchFamily="34" charset="-120"/>
+                <a:cs typeface="Amiri" pitchFamily="2" charset="-78"/>
               </a:rPr>
               <a:t>What the examiner looks for (website)</a:t>
             </a:r>
@@ -10534,8 +10366,7 @@
                   <a:srgbClr val="FFFFFF"/>
                 </a:solidFill>
                 <a:latin typeface="Calibri" pitchFamily="34" charset="0"/>
-                <a:ea typeface="Calibri" pitchFamily="34" charset="-122"/>
-                <a:cs typeface="Calibri" pitchFamily="34" charset="-120"/>
+                <a:cs typeface="Amiri" pitchFamily="2" charset="-78"/>
               </a:rPr>
               <a:t>Marks</a:t>
             </a:r>
@@ -10573,8 +10404,7 @@
                   <a:srgbClr val="FFFFFF"/>
                 </a:solidFill>
                 <a:latin typeface="Calibri" pitchFamily="34" charset="0"/>
-                <a:ea typeface="Calibri" pitchFamily="34" charset="-122"/>
-                <a:cs typeface="Calibri" pitchFamily="34" charset="-120"/>
+                <a:cs typeface="Amiri" pitchFamily="2" charset="-78"/>
               </a:rPr>
               <a:t>Criterion</a:t>
             </a:r>
@@ -10639,8 +10469,7 @@
                   <a:srgbClr val="5A6472"/>
                 </a:solidFill>
                 <a:latin typeface="Calibri" pitchFamily="34" charset="0"/>
-                <a:ea typeface="Calibri" pitchFamily="34" charset="-122"/>
-                <a:cs typeface="Calibri" pitchFamily="34" charset="-120"/>
+                <a:cs typeface="Amiri" pitchFamily="2" charset="-78"/>
               </a:rPr>
               <a:t>Every required content point is present. · The text type and register are correct from the opening. · An appropriate opening and closing for the text type.</a:t>
             </a:r>
@@ -10678,8 +10507,7 @@
                   <a:srgbClr val="5A6472"/>
                 </a:solidFill>
                 <a:latin typeface="Calibri" pitchFamily="34" charset="0"/>
-                <a:ea typeface="Calibri" pitchFamily="34" charset="-122"/>
-                <a:cs typeface="Calibri" pitchFamily="34" charset="-120"/>
+                <a:cs typeface="Amiri" pitchFamily="2" charset="-78"/>
               </a:rPr>
               <a:t>7</a:t>
             </a:r>
@@ -10717,8 +10545,7 @@
                   <a:srgbClr val="5A6472"/>
                 </a:solidFill>
                 <a:latin typeface="Calibri" pitchFamily="34" charset="0"/>
-                <a:ea typeface="Calibri" pitchFamily="34" charset="-122"/>
-                <a:cs typeface="Calibri" pitchFamily="34" charset="-120"/>
+                <a:cs typeface="Amiri" pitchFamily="2" charset="-78"/>
               </a:rPr>
               <a:t>Task Completion (TC)</a:t>
             </a:r>
@@ -10783,8 +10610,7 @@
                   <a:srgbClr val="FFFFFF"/>
                 </a:solidFill>
                 <a:latin typeface="Calibri" pitchFamily="34" charset="0"/>
-                <a:ea typeface="Calibri" pitchFamily="34" charset="-122"/>
-                <a:cs typeface="Calibri" pitchFamily="34" charset="-120"/>
+                <a:cs typeface="Amiri" pitchFamily="2" charset="-78"/>
               </a:rPr>
               <a:t>CORE</a:t>
             </a:r>
@@ -10849,8 +10675,7 @@
                   <a:srgbClr val="5A6472"/>
                 </a:solidFill>
                 <a:latin typeface="Calibri" pitchFamily="34" charset="0"/>
-                <a:ea typeface="Calibri" pitchFamily="34" charset="-122"/>
-                <a:cs typeface="Calibri" pitchFamily="34" charset="-120"/>
+                <a:cs typeface="Amiri" pitchFamily="2" charset="-78"/>
               </a:rPr>
               <a:t>A variety of vocabulary suited to the register. · Several different grammar structures (tenses, connectors).</a:t>
             </a:r>
@@ -10888,8 +10713,7 @@
                   <a:srgbClr val="5A6472"/>
                 </a:solidFill>
                 <a:latin typeface="Calibri" pitchFamily="34" charset="0"/>
-                <a:ea typeface="Calibri" pitchFamily="34" charset="-122"/>
-                <a:cs typeface="Calibri" pitchFamily="34" charset="-120"/>
+                <a:cs typeface="Amiri" pitchFamily="2" charset="-78"/>
               </a:rPr>
               <a:t>4</a:t>
             </a:r>
@@ -10927,8 +10751,7 @@
                   <a:srgbClr val="5A6472"/>
                 </a:solidFill>
                 <a:latin typeface="Calibri" pitchFamily="34" charset="0"/>
-                <a:ea typeface="Calibri" pitchFamily="34" charset="-122"/>
-                <a:cs typeface="Calibri" pitchFamily="34" charset="-120"/>
+                <a:cs typeface="Amiri" pitchFamily="2" charset="-78"/>
               </a:rPr>
               <a:t>Range</a:t>
             </a:r>
@@ -10993,8 +10816,7 @@
                   <a:srgbClr val="5A6472"/>
                 </a:solidFill>
                 <a:latin typeface="Calibri" pitchFamily="34" charset="0"/>
-                <a:ea typeface="Calibri" pitchFamily="34" charset="-122"/>
-                <a:cs typeface="Calibri" pitchFamily="34" charset="-120"/>
+                <a:cs typeface="Amiri" pitchFamily="2" charset="-78"/>
               </a:rPr>
               <a:t>Correct tense, agreement and subjunctive forms. · Errors do not obscure the meaning.</a:t>
             </a:r>
@@ -11032,8 +10854,7 @@
                   <a:srgbClr val="5A6472"/>
                 </a:solidFill>
                 <a:latin typeface="Calibri" pitchFamily="34" charset="0"/>
-                <a:ea typeface="Calibri" pitchFamily="34" charset="-122"/>
-                <a:cs typeface="Calibri" pitchFamily="34" charset="-120"/>
+                <a:cs typeface="Amiri" pitchFamily="2" charset="-78"/>
               </a:rPr>
               <a:t>4</a:t>
             </a:r>
@@ -11071,8 +10892,7 @@
                   <a:srgbClr val="5A6472"/>
                 </a:solidFill>
                 <a:latin typeface="Calibri" pitchFamily="34" charset="0"/>
-                <a:ea typeface="Calibri" pitchFamily="34" charset="-122"/>
-                <a:cs typeface="Calibri" pitchFamily="34" charset="-120"/>
+                <a:cs typeface="Amiri" pitchFamily="2" charset="-78"/>
               </a:rPr>
               <a:t>Accuracy</a:t>
             </a:r>
@@ -11110,8 +10930,7 @@
                   <a:srgbClr val="1B3B6F"/>
                 </a:solidFill>
                 <a:latin typeface="Calibri" pitchFamily="34" charset="0"/>
-                <a:ea typeface="Calibri" pitchFamily="34" charset="-122"/>
-                <a:cs typeface="Calibri" pitchFamily="34" charset="-120"/>
+                <a:cs typeface="Amiri" pitchFamily="2" charset="-78"/>
               </a:rPr>
               <a:t>TC is 7 of 15: the right register from the first line, and EVERY content point.</a:t>
             </a:r>
@@ -11149,8 +10968,7 @@
                   <a:srgbClr val="8A93A0"/>
                 </a:solidFill>
                 <a:latin typeface="Calibri" pitchFamily="34" charset="0"/>
-                <a:ea typeface="Calibri" pitchFamily="34" charset="-122"/>
-                <a:cs typeface="Calibri" pitchFamily="34" charset="-120"/>
+                <a:cs typeface="Amiri" pitchFamily="2" charset="-78"/>
               </a:rPr>
               <a:t>14 / 26</a:t>
             </a:r>
@@ -11244,9 +11062,8 @@
                 <a:solidFill>
                   <a:srgbClr val="D4AF37"/>
                 </a:solidFill>
-                <a:latin typeface="Amiri" pitchFamily="34" charset="0"/>
-                <a:ea typeface="Amiri" pitchFamily="34" charset="-122"/>
-                <a:cs typeface="Amiri" pitchFamily="34" charset="-120"/>
+                <a:latin typeface="Amiri" pitchFamily="2" charset="-78"/>
+                <a:cs typeface="Amiri" pitchFamily="2" charset="-78"/>
               </a:rPr>
               <a:t>م</a:t>
             </a:r>
@@ -11284,8 +11101,7 @@
                   <a:srgbClr val="1B3B6F"/>
                 </a:solidFill>
                 <a:latin typeface="Cambria" pitchFamily="34" charset="0"/>
-                <a:ea typeface="Cambria" pitchFamily="34" charset="-122"/>
-                <a:cs typeface="Cambria" pitchFamily="34" charset="-120"/>
+                <a:cs typeface="Amiri" pitchFamily="2" charset="-78"/>
               </a:rPr>
               <a:t>Al Madina Online School</a:t>
             </a:r>
@@ -11323,8 +11139,7 @@
                   <a:srgbClr val="8A6D1E"/>
                 </a:solidFill>
                 <a:latin typeface="Calibri" pitchFamily="34" charset="0"/>
-                <a:ea typeface="Calibri" pitchFamily="34" charset="-122"/>
-                <a:cs typeface="Calibri" pitchFamily="34" charset="-120"/>
+                <a:cs typeface="Amiri" pitchFamily="2" charset="-78"/>
               </a:rPr>
               <a:t>ARABIC DEPARTMENT · MIFTAH ARABIC · IGCSE 0544</a:t>
             </a:r>
@@ -11389,8 +11204,7 @@
                   <a:srgbClr val="FFFFFF"/>
                 </a:solidFill>
                 <a:latin typeface="Calibri" pitchFamily="34" charset="0"/>
-                <a:ea typeface="Calibri" pitchFamily="34" charset="-122"/>
-                <a:cs typeface="Calibri" pitchFamily="34" charset="-120"/>
+                <a:cs typeface="Amiri" pitchFamily="2" charset="-78"/>
               </a:rPr>
               <a:t>P6-L04 · IGCSE Bridge</a:t>
             </a:r>
@@ -11455,8 +11269,7 @@
                   <a:srgbClr val="FFFFFF"/>
                 </a:solidFill>
                 <a:latin typeface="Calibri" pitchFamily="34" charset="0"/>
-                <a:ea typeface="Calibri" pitchFamily="34" charset="-122"/>
-                <a:cs typeface="Calibri" pitchFamily="34" charset="-120"/>
+                <a:cs typeface="Amiri" pitchFamily="2" charset="-78"/>
               </a:rPr>
               <a:t>YOU DO · 2 MIN</a:t>
             </a:r>
@@ -11494,8 +11307,7 @@
                   <a:srgbClr val="1E6B52"/>
                 </a:solidFill>
                 <a:latin typeface="Calibri" pitchFamily="34" charset="0"/>
-                <a:ea typeface="Calibri" pitchFamily="34" charset="-122"/>
-                <a:cs typeface="Calibri" pitchFamily="34" charset="-120"/>
+                <a:cs typeface="Amiri" pitchFamily="2" charset="-78"/>
               </a:rPr>
               <a:t>YOU DO · CHOOSE YOUR TASK · WRITE FOR 20 MINUTES</a:t>
             </a:r>
@@ -11533,8 +11345,7 @@
                   <a:srgbClr val="1B3B6F"/>
                 </a:solidFill>
                 <a:latin typeface="Cambria" pitchFamily="34" charset="0"/>
-                <a:ea typeface="Cambria" pitchFamily="34" charset="-122"/>
-                <a:cs typeface="Cambria" pitchFamily="34" charset="-120"/>
+                <a:cs typeface="Amiri" pitchFamily="2" charset="-78"/>
               </a:rPr>
               <a:t>Write: choose your route</a:t>
             </a:r>
@@ -11571,9 +11382,8 @@
                 <a:solidFill>
                   <a:srgbClr val="8A6D1E"/>
                 </a:solidFill>
-                <a:latin typeface="Amiri" pitchFamily="34" charset="0"/>
-                <a:ea typeface="Amiri" pitchFamily="34" charset="-122"/>
-                <a:cs typeface="Amiri" pitchFamily="34" charset="-120"/>
+                <a:latin typeface="Amiri" pitchFamily="2" charset="-78"/>
+                <a:cs typeface="Amiri" pitchFamily="2" charset="-78"/>
               </a:rPr>
               <a:t>اُكْتُبْ</a:t>
             </a:r>
@@ -11611,8 +11421,7 @@
                   <a:srgbClr val="8A93A0"/>
                 </a:solidFill>
                 <a:latin typeface="Calibri" pitchFamily="34" charset="0"/>
-                <a:ea typeface="Calibri" pitchFamily="34" charset="-122"/>
-                <a:cs typeface="Calibri" pitchFamily="34" charset="-120"/>
+                <a:cs typeface="Amiri" pitchFamily="2" charset="-78"/>
               </a:rPr>
               <a:t>Miftah Arabic · Progression P6 · IGCSE Bridge · P6-L04</a:t>
             </a:r>
@@ -11711,8 +11520,7 @@
                   <a:srgbClr val="FFFFFF"/>
                 </a:solidFill>
                 <a:latin typeface="Calibri" pitchFamily="34" charset="0"/>
-                <a:ea typeface="Calibri" pitchFamily="34" charset="-122"/>
-                <a:cs typeface="Calibri" pitchFamily="34" charset="-120"/>
+                <a:cs typeface="Amiri" pitchFamily="2" charset="-78"/>
               </a:rPr>
               <a:t>CORE</a:t>
             </a:r>
@@ -11749,9 +11557,8 @@
                 <a:solidFill>
                   <a:srgbClr val="2E8B57"/>
                 </a:solidFill>
-                <a:latin typeface="Amiri" pitchFamily="34" charset="0"/>
-                <a:ea typeface="Amiri" pitchFamily="34" charset="-122"/>
-                <a:cs typeface="Amiri" pitchFamily="34" charset="-120"/>
+                <a:latin typeface="Amiri" pitchFamily="2" charset="-78"/>
+                <a:cs typeface="Amiri" pitchFamily="2" charset="-78"/>
               </a:rPr>
               <a:t>الأَسَاسُ</a:t>
             </a:r>
@@ -11789,8 +11596,7 @@
                   <a:srgbClr val="2E8B57"/>
                 </a:solidFill>
                 <a:latin typeface="Cambria" pitchFamily="34" charset="0"/>
-                <a:ea typeface="Cambria" pitchFamily="34" charset="-122"/>
-                <a:cs typeface="Cambria" pitchFamily="34" charset="-120"/>
+                <a:cs typeface="Amiri" pitchFamily="2" charset="-78"/>
               </a:rPr>
               <a:t>Task 3 · email</a:t>
             </a:r>
@@ -11828,8 +11634,7 @@
                   <a:srgbClr val="1F2A37"/>
                 </a:solidFill>
                 <a:latin typeface="Calibri" pitchFamily="34" charset="0"/>
-                <a:ea typeface="Calibri" pitchFamily="34" charset="-122"/>
-                <a:cs typeface="Calibri" pitchFamily="34" charset="-120"/>
+                <a:cs typeface="Amiri" pitchFamily="2" charset="-78"/>
               </a:rPr>
               <a:t>A friendly email (130–140 words) to an exchange student: the school, the area, one custom, one activity.</a:t>
             </a:r>
@@ -11894,8 +11699,7 @@
                   <a:srgbClr val="2E8B57"/>
                 </a:solidFill>
                 <a:latin typeface="Calibri" pitchFamily="34" charset="0"/>
-                <a:ea typeface="Calibri" pitchFamily="34" charset="-122"/>
-                <a:cs typeface="Calibri" pitchFamily="34" charset="-120"/>
+                <a:cs typeface="Amiri" pitchFamily="2" charset="-78"/>
               </a:rPr>
               <a:t>HOW</a:t>
             </a:r>
@@ -11911,8 +11715,7 @@
                   <a:srgbClr val="1F2A37"/>
                 </a:solidFill>
                 <a:latin typeface="Calibri" pitchFamily="34" charset="0"/>
-                <a:ea typeface="Calibri" pitchFamily="34" charset="-122"/>
-                <a:cs typeface="Calibri" pitchFamily="34" charset="-120"/>
+                <a:cs typeface="Amiri" pitchFamily="2" charset="-78"/>
               </a:rPr>
               <a:t>Open with عَزِيزِي … حَيَّاكَ اللَّهُ! · close with إِلَى اللِّقَاءِ. Tick the four points.</a:t>
             </a:r>
@@ -12011,8 +11814,7 @@
                   <a:srgbClr val="FFFFFF"/>
                 </a:solidFill>
                 <a:latin typeface="Calibri" pitchFamily="34" charset="0"/>
-                <a:ea typeface="Calibri" pitchFamily="34" charset="-122"/>
-                <a:cs typeface="Calibri" pitchFamily="34" charset="-120"/>
+                <a:cs typeface="Amiri" pitchFamily="2" charset="-78"/>
               </a:rPr>
               <a:t>DEVELOP</a:t>
             </a:r>
@@ -12049,9 +11851,8 @@
                 <a:solidFill>
                   <a:srgbClr val="C9780A"/>
                 </a:solidFill>
-                <a:latin typeface="Amiri" pitchFamily="34" charset="0"/>
-                <a:ea typeface="Amiri" pitchFamily="34" charset="-122"/>
-                <a:cs typeface="Amiri" pitchFamily="34" charset="-120"/>
+                <a:latin typeface="Amiri" pitchFamily="2" charset="-78"/>
+                <a:cs typeface="Amiri" pitchFamily="2" charset="-78"/>
               </a:rPr>
               <a:t>التَّطْوِيرُ</a:t>
             </a:r>
@@ -12089,8 +11890,7 @@
                   <a:srgbClr val="C9780A"/>
                 </a:solidFill>
                 <a:latin typeface="Cambria" pitchFamily="34" charset="0"/>
-                <a:ea typeface="Cambria" pitchFamily="34" charset="-122"/>
-                <a:cs typeface="Cambria" pitchFamily="34" charset="-120"/>
+                <a:cs typeface="Amiri" pitchFamily="2" charset="-78"/>
               </a:rPr>
               <a:t>Task 2 · article</a:t>
             </a:r>
@@ -12128,8 +11928,7 @@
                   <a:srgbClr val="1F2A37"/>
                 </a:solidFill>
                 <a:latin typeface="Calibri" pitchFamily="34" charset="0"/>
-                <a:ea typeface="Calibri" pitchFamily="34" charset="-122"/>
-                <a:cs typeface="Calibri" pitchFamily="34" charset="-120"/>
+                <a:cs typeface="Amiri" pitchFamily="2" charset="-78"/>
               </a:rPr>
               <a:t>An article (130–140 words) for a youth magazine: how I manage stress and keep my wellbeing.</a:t>
             </a:r>
@@ -12194,8 +11993,7 @@
                   <a:srgbClr val="C9780A"/>
                 </a:solidFill>
                 <a:latin typeface="Calibri" pitchFamily="34" charset="0"/>
-                <a:ea typeface="Calibri" pitchFamily="34" charset="-122"/>
-                <a:cs typeface="Calibri" pitchFamily="34" charset="-120"/>
+                <a:cs typeface="Amiri" pitchFamily="2" charset="-78"/>
               </a:rPr>
               <a:t>HOW</a:t>
             </a:r>
@@ -12211,8 +12009,7 @@
                   <a:srgbClr val="1F2A37"/>
                 </a:solidFill>
                 <a:latin typeface="Calibri" pitchFamily="34" charset="0"/>
-                <a:ea typeface="Calibri" pitchFamily="34" charset="-122"/>
-                <a:cs typeface="Calibri" pitchFamily="34" charset="-120"/>
+                <a:cs typeface="Amiri" pitchFamily="2" charset="-78"/>
               </a:rPr>
               <a:t>Open with a hook question · first person · one conditional + one trigger.</a:t>
             </a:r>
@@ -12311,8 +12108,7 @@
                   <a:srgbClr val="FFFFFF"/>
                 </a:solidFill>
                 <a:latin typeface="Calibri" pitchFamily="34" charset="0"/>
-                <a:ea typeface="Calibri" pitchFamily="34" charset="-122"/>
-                <a:cs typeface="Calibri" pitchFamily="34" charset="-120"/>
+                <a:cs typeface="Amiri" pitchFamily="2" charset="-78"/>
               </a:rPr>
               <a:t>STRETCH</a:t>
             </a:r>
@@ -12349,9 +12145,8 @@
                 <a:solidFill>
                   <a:srgbClr val="B83227"/>
                 </a:solidFill>
-                <a:latin typeface="Amiri" pitchFamily="34" charset="0"/>
-                <a:ea typeface="Amiri" pitchFamily="34" charset="-122"/>
-                <a:cs typeface="Amiri" pitchFamily="34" charset="-120"/>
+                <a:latin typeface="Amiri" pitchFamily="2" charset="-78"/>
+                <a:cs typeface="Amiri" pitchFamily="2" charset="-78"/>
               </a:rPr>
               <a:t>التَّحَدِّي</a:t>
             </a:r>
@@ -12389,8 +12184,7 @@
                   <a:srgbClr val="B83227"/>
                 </a:solidFill>
                 <a:latin typeface="Cambria" pitchFamily="34" charset="0"/>
-                <a:ea typeface="Cambria" pitchFamily="34" charset="-122"/>
-                <a:cs typeface="Cambria" pitchFamily="34" charset="-120"/>
+                <a:cs typeface="Amiri" pitchFamily="2" charset="-78"/>
               </a:rPr>
               <a:t>Task 1 · letter</a:t>
             </a:r>
@@ -12428,8 +12222,7 @@
                   <a:srgbClr val="1F2A37"/>
                 </a:solidFill>
                 <a:latin typeface="Calibri" pitchFamily="34" charset="0"/>
-                <a:ea typeface="Calibri" pitchFamily="34" charset="-122"/>
-                <a:cs typeface="Calibri" pitchFamily="34" charset="-120"/>
+                <a:cs typeface="Amiri" pitchFamily="2" charset="-78"/>
               </a:rPr>
               <a:t>A formal letter (130–140 words) to the Arab League Environment Committee: problem, solution, benefit, request.</a:t>
             </a:r>
@@ -12494,8 +12287,7 @@
                   <a:srgbClr val="B83227"/>
                 </a:solidFill>
                 <a:latin typeface="Calibri" pitchFamily="34" charset="0"/>
-                <a:ea typeface="Calibri" pitchFamily="34" charset="-122"/>
-                <a:cs typeface="Calibri" pitchFamily="34" charset="-120"/>
+                <a:cs typeface="Amiri" pitchFamily="2" charset="-78"/>
               </a:rPr>
               <a:t>HOW</a:t>
             </a:r>
@@ -12511,8 +12303,7 @@
                   <a:srgbClr val="1F2A37"/>
                 </a:solidFill>
                 <a:latin typeface="Calibri" pitchFamily="34" charset="0"/>
-                <a:ea typeface="Calibri" pitchFamily="34" charset="-122"/>
-                <a:cs typeface="Calibri" pitchFamily="34" charset="-120"/>
+                <a:cs typeface="Amiri" pitchFamily="2" charset="-78"/>
               </a:rPr>
               <a:t>Formal opening and closing · passives in -a · law … la- · wa-bināʾan.</a:t>
             </a:r>
@@ -12550,8 +12341,7 @@
                   <a:srgbClr val="8A93A0"/>
                 </a:solidFill>
                 <a:latin typeface="Calibri" pitchFamily="34" charset="0"/>
-                <a:ea typeface="Calibri" pitchFamily="34" charset="-122"/>
-                <a:cs typeface="Calibri" pitchFamily="34" charset="-120"/>
+                <a:cs typeface="Amiri" pitchFamily="2" charset="-78"/>
               </a:rPr>
               <a:t>15 / 26</a:t>
             </a:r>
@@ -12645,9 +12435,8 @@
                 <a:solidFill>
                   <a:srgbClr val="D4AF37"/>
                 </a:solidFill>
-                <a:latin typeface="Amiri" pitchFamily="34" charset="0"/>
-                <a:ea typeface="Amiri" pitchFamily="34" charset="-122"/>
-                <a:cs typeface="Amiri" pitchFamily="34" charset="-120"/>
+                <a:latin typeface="Amiri" pitchFamily="2" charset="-78"/>
+                <a:cs typeface="Amiri" pitchFamily="2" charset="-78"/>
               </a:rPr>
               <a:t>م</a:t>
             </a:r>
@@ -12685,8 +12474,7 @@
                   <a:srgbClr val="1B3B6F"/>
                 </a:solidFill>
                 <a:latin typeface="Cambria" pitchFamily="34" charset="0"/>
-                <a:ea typeface="Cambria" pitchFamily="34" charset="-122"/>
-                <a:cs typeface="Cambria" pitchFamily="34" charset="-120"/>
+                <a:cs typeface="Amiri" pitchFamily="2" charset="-78"/>
               </a:rPr>
               <a:t>Al Madina Online School</a:t>
             </a:r>
@@ -12724,8 +12512,7 @@
                   <a:srgbClr val="8A6D1E"/>
                 </a:solidFill>
                 <a:latin typeface="Calibri" pitchFamily="34" charset="0"/>
-                <a:ea typeface="Calibri" pitchFamily="34" charset="-122"/>
-                <a:cs typeface="Calibri" pitchFamily="34" charset="-120"/>
+                <a:cs typeface="Amiri" pitchFamily="2" charset="-78"/>
               </a:rPr>
               <a:t>ARABIC DEPARTMENT · MIFTAH ARABIC · IGCSE 0544</a:t>
             </a:r>
@@ -12790,8 +12577,7 @@
                   <a:srgbClr val="FFFFFF"/>
                 </a:solidFill>
                 <a:latin typeface="Calibri" pitchFamily="34" charset="0"/>
-                <a:ea typeface="Calibri" pitchFamily="34" charset="-122"/>
-                <a:cs typeface="Calibri" pitchFamily="34" charset="-120"/>
+                <a:cs typeface="Amiri" pitchFamily="2" charset="-78"/>
               </a:rPr>
               <a:t>P6-L04 · IGCSE Bridge</a:t>
             </a:r>
@@ -12856,8 +12642,7 @@
                   <a:srgbClr val="FFFFFF"/>
                 </a:solidFill>
                 <a:latin typeface="Calibri" pitchFamily="34" charset="0"/>
-                <a:ea typeface="Calibri" pitchFamily="34" charset="-122"/>
-                <a:cs typeface="Calibri" pitchFamily="34" charset="-120"/>
+                <a:cs typeface="Amiri" pitchFamily="2" charset="-78"/>
               </a:rPr>
               <a:t>YOU DO</a:t>
             </a:r>
@@ -12895,8 +12680,7 @@
                   <a:srgbClr val="1E6B52"/>
                 </a:solidFill>
                 <a:latin typeface="Calibri" pitchFamily="34" charset="0"/>
-                <a:ea typeface="Calibri" pitchFamily="34" charset="-122"/>
-                <a:cs typeface="Calibri" pitchFamily="34" charset="-120"/>
+                <a:cs typeface="Amiri" pitchFamily="2" charset="-78"/>
               </a:rPr>
               <a:t>YOU DO · CORE ROUTE · TASK 3 — FRIENDLY EMAIL (WEBSITE)</a:t>
             </a:r>
@@ -12934,8 +12718,7 @@
                   <a:srgbClr val="1B3B6F"/>
                 </a:solidFill>
                 <a:latin typeface="Cambria" pitchFamily="34" charset="0"/>
-                <a:ea typeface="Cambria" pitchFamily="34" charset="-122"/>
-                <a:cs typeface="Cambria" pitchFamily="34" charset="-120"/>
+                <a:cs typeface="Amiri" pitchFamily="2" charset="-78"/>
               </a:rPr>
               <a:t>Task 3 — A friendly email</a:t>
             </a:r>
@@ -12972,9 +12755,8 @@
                 <a:solidFill>
                   <a:srgbClr val="8A6D1E"/>
                 </a:solidFill>
-                <a:latin typeface="Amiri" pitchFamily="34" charset="0"/>
-                <a:ea typeface="Amiri" pitchFamily="34" charset="-122"/>
-                <a:cs typeface="Amiri" pitchFamily="34" charset="-120"/>
+                <a:latin typeface="Amiri" pitchFamily="2" charset="-78"/>
+                <a:cs typeface="Amiri" pitchFamily="2" charset="-78"/>
               </a:rPr>
               <a:t>بَرِيدٌ إِلِكْتْرُونِيٌّ</a:t>
             </a:r>
@@ -13012,8 +12794,7 @@
                   <a:srgbClr val="8A93A0"/>
                 </a:solidFill>
                 <a:latin typeface="Calibri" pitchFamily="34" charset="0"/>
-                <a:ea typeface="Calibri" pitchFamily="34" charset="-122"/>
-                <a:cs typeface="Calibri" pitchFamily="34" charset="-120"/>
+                <a:cs typeface="Amiri" pitchFamily="2" charset="-78"/>
               </a:rPr>
               <a:t>Miftah Arabic · Progression P6 · IGCSE Bridge · P6-L04</a:t>
             </a:r>
@@ -13112,8 +12893,7 @@
                   <a:srgbClr val="FFFFFF"/>
                 </a:solidFill>
                 <a:latin typeface="Calibri" pitchFamily="34" charset="0"/>
-                <a:ea typeface="Calibri" pitchFamily="34" charset="-122"/>
-                <a:cs typeface="Calibri" pitchFamily="34" charset="-120"/>
+                <a:cs typeface="Amiri" pitchFamily="2" charset="-78"/>
               </a:rPr>
               <a:t>CORE</a:t>
             </a:r>
@@ -13151,8 +12931,7 @@
                   <a:srgbClr val="1F2A37"/>
                 </a:solidFill>
                 <a:latin typeface="Calibri" pitchFamily="34" charset="0"/>
-                <a:ea typeface="Calibri" pitchFamily="34" charset="-122"/>
-                <a:cs typeface="Calibri" pitchFamily="34" charset="-120"/>
+                <a:cs typeface="Amiri" pitchFamily="2" charset="-78"/>
               </a:rPr>
               <a:t>Write a friendly email (130–140 words) to an Arabic exchange student coming to your school for a month. Describe: your school, the local area, one cultural custom to be aware of, and a suggested activity. Register: friendly, semi-formal.</a:t>
             </a:r>
@@ -13190,8 +12969,7 @@
                   <a:srgbClr val="1F2A37"/>
                 </a:solidFill>
                 <a:latin typeface="Calibri" pitchFamily="34" charset="0"/>
-                <a:ea typeface="Calibri" pitchFamily="34" charset="-122"/>
-                <a:cs typeface="Calibri" pitchFamily="34" charset="-120"/>
+                <a:cs typeface="Amiri" pitchFamily="2" charset="-78"/>
               </a:rPr>
               <a:t>☐  A warm opening (</a:t>
             </a:r>
@@ -13203,9 +12981,8 @@
                 <a:solidFill>
                   <a:srgbClr val="1F2A37"/>
                 </a:solidFill>
-                <a:latin typeface="Amiri" pitchFamily="34" charset="0"/>
-                <a:ea typeface="Amiri" pitchFamily="34" charset="-122"/>
-                <a:cs typeface="Amiri" pitchFamily="34" charset="-120"/>
+                <a:latin typeface="Amiri" pitchFamily="2" charset="-78"/>
+                <a:cs typeface="Amiri" pitchFamily="2" charset="-78"/>
               </a:rPr>
               <a:t>حَيَّاكَ اللَّهُ / عَزِيزِي</a:t>
             </a:r>
@@ -13218,8 +12995,7 @@
                   <a:srgbClr val="1F2A37"/>
                 </a:solidFill>
                 <a:latin typeface="Calibri" pitchFamily="34" charset="0"/>
-                <a:ea typeface="Calibri" pitchFamily="34" charset="-122"/>
-                <a:cs typeface="Calibri" pitchFamily="34" charset="-120"/>
+                <a:cs typeface="Amiri" pitchFamily="2" charset="-78"/>
               </a:rPr>
               <a:t> …).</a:t>
             </a:r>
@@ -13257,8 +13033,7 @@
                   <a:srgbClr val="1F2A37"/>
                 </a:solidFill>
                 <a:latin typeface="Calibri" pitchFamily="34" charset="0"/>
-                <a:ea typeface="Calibri" pitchFamily="34" charset="-122"/>
-                <a:cs typeface="Calibri" pitchFamily="34" charset="-120"/>
+                <a:cs typeface="Amiri" pitchFamily="2" charset="-78"/>
               </a:rPr>
               <a:t>☐  The school, the area, a custom and a suggested activity.</a:t>
             </a:r>
@@ -13296,8 +13071,7 @@
                   <a:srgbClr val="1F2A37"/>
                 </a:solidFill>
                 <a:latin typeface="Calibri" pitchFamily="34" charset="0"/>
-                <a:ea typeface="Calibri" pitchFamily="34" charset="-122"/>
-                <a:cs typeface="Calibri" pitchFamily="34" charset="-120"/>
+                <a:cs typeface="Amiri" pitchFamily="2" charset="-78"/>
               </a:rPr>
               <a:t>☐  Friendly, first/second-person register.</a:t>
             </a:r>
@@ -13335,8 +13109,7 @@
                   <a:srgbClr val="1F2A37"/>
                 </a:solidFill>
                 <a:latin typeface="Calibri" pitchFamily="34" charset="0"/>
-                <a:ea typeface="Calibri" pitchFamily="34" charset="-122"/>
-                <a:cs typeface="Calibri" pitchFamily="34" charset="-120"/>
+                <a:cs typeface="Amiri" pitchFamily="2" charset="-78"/>
               </a:rPr>
               <a:t>☐  A warm closing (</a:t>
             </a:r>
@@ -13348,9 +13121,8 @@
                 <a:solidFill>
                   <a:srgbClr val="1F2A37"/>
                 </a:solidFill>
-                <a:latin typeface="Amiri" pitchFamily="34" charset="0"/>
-                <a:ea typeface="Amiri" pitchFamily="34" charset="-122"/>
-                <a:cs typeface="Amiri" pitchFamily="34" charset="-120"/>
+                <a:latin typeface="Amiri" pitchFamily="2" charset="-78"/>
+                <a:cs typeface="Amiri" pitchFamily="2" charset="-78"/>
               </a:rPr>
               <a:t>إِلَى اللِّقَاءِ</a:t>
             </a:r>
@@ -13363,8 +13135,7 @@
                   <a:srgbClr val="1F2A37"/>
                 </a:solidFill>
                 <a:latin typeface="Calibri" pitchFamily="34" charset="0"/>
-                <a:ea typeface="Calibri" pitchFamily="34" charset="-122"/>
-                <a:cs typeface="Calibri" pitchFamily="34" charset="-120"/>
+                <a:cs typeface="Amiri" pitchFamily="2" charset="-78"/>
               </a:rPr>
               <a:t>).</a:t>
             </a:r>
@@ -13436,8 +13207,7 @@
                   <a:srgbClr val="8A6D1E"/>
                 </a:solidFill>
                 <a:latin typeface="Calibri" pitchFamily="34" charset="0"/>
-                <a:ea typeface="Calibri" pitchFamily="34" charset="-122"/>
-                <a:cs typeface="Calibri" pitchFamily="34" charset="-120"/>
+                <a:cs typeface="Amiri" pitchFamily="2" charset="-78"/>
               </a:rPr>
               <a:t>USEFUL LANGUAGE — FROM THE WEBSITE MODEL</a:t>
             </a:r>
@@ -13474,9 +13244,8 @@
                 <a:solidFill>
                   <a:srgbClr val="1B3B6F"/>
                 </a:solidFill>
-                <a:latin typeface="Amiri" pitchFamily="34" charset="0"/>
-                <a:ea typeface="Amiri" pitchFamily="34" charset="-122"/>
-                <a:cs typeface="Amiri" pitchFamily="34" charset="-120"/>
+                <a:latin typeface="Amiri" pitchFamily="2" charset="-78"/>
+                <a:cs typeface="Amiri" pitchFamily="2" charset="-78"/>
               </a:rPr>
               <a:t>عَزِيزِي … ، حَيَّاكَ اللَّهُ!</a:t>
             </a:r>
@@ -13514,8 +13283,7 @@
                   <a:srgbClr val="5A6472"/>
                 </a:solidFill>
                 <a:latin typeface="Calibri" pitchFamily="34" charset="0"/>
-                <a:ea typeface="Calibri" pitchFamily="34" charset="-122"/>
-                <a:cs typeface="Calibri" pitchFamily="34" charset="-120"/>
+                <a:cs typeface="Amiri" pitchFamily="2" charset="-78"/>
               </a:rPr>
               <a:t>Dear …, hello!</a:t>
             </a:r>
@@ -13552,9 +13320,8 @@
                 <a:solidFill>
                   <a:srgbClr val="1B3B6F"/>
                 </a:solidFill>
-                <a:latin typeface="Amiri" pitchFamily="34" charset="0"/>
-                <a:ea typeface="Amiri" pitchFamily="34" charset="-122"/>
-                <a:cs typeface="Amiri" pitchFamily="34" charset="-120"/>
+                <a:latin typeface="Amiri" pitchFamily="2" charset="-78"/>
+                <a:cs typeface="Amiri" pitchFamily="2" charset="-78"/>
               </a:rPr>
               <a:t>يُسْعِدُنِي أَنَّكَ سَتَزُورُ</a:t>
             </a:r>
@@ -13592,8 +13359,7 @@
                   <a:srgbClr val="5A6472"/>
                 </a:solidFill>
                 <a:latin typeface="Calibri" pitchFamily="34" charset="0"/>
-                <a:ea typeface="Calibri" pitchFamily="34" charset="-122"/>
-                <a:cs typeface="Calibri" pitchFamily="34" charset="-120"/>
+                <a:cs typeface="Amiri" pitchFamily="2" charset="-78"/>
               </a:rPr>
               <a:t>I am happy that you will visit</a:t>
             </a:r>
@@ -13630,9 +13396,8 @@
                 <a:solidFill>
                   <a:srgbClr val="1B3B6F"/>
                 </a:solidFill>
-                <a:latin typeface="Amiri" pitchFamily="34" charset="0"/>
-                <a:ea typeface="Amiri" pitchFamily="34" charset="-122"/>
-                <a:cs typeface="Amiri" pitchFamily="34" charset="-120"/>
+                <a:latin typeface="Amiri" pitchFamily="2" charset="-78"/>
+                <a:cs typeface="Amiri" pitchFamily="2" charset="-78"/>
               </a:rPr>
               <a:t>وَأَنْصَحُكَ بِأَنْ تُحْضِرَ</a:t>
             </a:r>
@@ -13670,8 +13435,7 @@
                   <a:srgbClr val="5A6472"/>
                 </a:solidFill>
                 <a:latin typeface="Calibri" pitchFamily="34" charset="0"/>
-                <a:ea typeface="Calibri" pitchFamily="34" charset="-122"/>
-                <a:cs typeface="Calibri" pitchFamily="34" charset="-120"/>
+                <a:cs typeface="Amiri" pitchFamily="2" charset="-78"/>
               </a:rPr>
               <a:t>and I advise you to bring</a:t>
             </a:r>
@@ -13708,9 +13472,8 @@
                 <a:solidFill>
                   <a:srgbClr val="1B3B6F"/>
                 </a:solidFill>
-                <a:latin typeface="Amiri" pitchFamily="34" charset="0"/>
-                <a:ea typeface="Amiri" pitchFamily="34" charset="-122"/>
-                <a:cs typeface="Amiri" pitchFamily="34" charset="-120"/>
+                <a:latin typeface="Amiri" pitchFamily="2" charset="-78"/>
+                <a:cs typeface="Amiri" pitchFamily="2" charset="-78"/>
               </a:rPr>
               <a:t>وَمِنَ العَادَاتِ المُهِمَّةِ أَنْ …</a:t>
             </a:r>
@@ -13748,8 +13511,7 @@
                   <a:srgbClr val="5A6472"/>
                 </a:solidFill>
                 <a:latin typeface="Calibri" pitchFamily="34" charset="0"/>
-                <a:ea typeface="Calibri" pitchFamily="34" charset="-122"/>
-                <a:cs typeface="Calibri" pitchFamily="34" charset="-120"/>
+                <a:cs typeface="Amiri" pitchFamily="2" charset="-78"/>
               </a:rPr>
               <a:t>one important custom is that …</a:t>
             </a:r>
@@ -13786,9 +13548,8 @@
                 <a:solidFill>
                   <a:srgbClr val="1B3B6F"/>
                 </a:solidFill>
-                <a:latin typeface="Amiri" pitchFamily="34" charset="0"/>
-                <a:ea typeface="Amiri" pitchFamily="34" charset="-122"/>
-                <a:cs typeface="Amiri" pitchFamily="34" charset="-120"/>
+                <a:latin typeface="Amiri" pitchFamily="2" charset="-78"/>
+                <a:cs typeface="Amiri" pitchFamily="2" charset="-78"/>
               </a:rPr>
               <a:t>أَتَطَلَّعُ إِلَى لِقَائِكَ</a:t>
             </a:r>
@@ -13826,8 +13587,7 @@
                   <a:srgbClr val="5A6472"/>
                 </a:solidFill>
                 <a:latin typeface="Calibri" pitchFamily="34" charset="0"/>
-                <a:ea typeface="Calibri" pitchFamily="34" charset="-122"/>
-                <a:cs typeface="Calibri" pitchFamily="34" charset="-120"/>
+                <a:cs typeface="Amiri" pitchFamily="2" charset="-78"/>
               </a:rPr>
               <a:t>I look forward to meeting you</a:t>
             </a:r>
@@ -13865,8 +13625,7 @@
                   <a:srgbClr val="8A93A0"/>
                 </a:solidFill>
                 <a:latin typeface="Calibri" pitchFamily="34" charset="0"/>
-                <a:ea typeface="Calibri" pitchFamily="34" charset="-122"/>
-                <a:cs typeface="Calibri" pitchFamily="34" charset="-120"/>
+                <a:cs typeface="Amiri" pitchFamily="2" charset="-78"/>
               </a:rPr>
               <a:t>16 / 26</a:t>
             </a:r>
@@ -13960,9 +13719,8 @@
                 <a:solidFill>
                   <a:srgbClr val="D4AF37"/>
                 </a:solidFill>
-                <a:latin typeface="Amiri" pitchFamily="34" charset="0"/>
-                <a:ea typeface="Amiri" pitchFamily="34" charset="-122"/>
-                <a:cs typeface="Amiri" pitchFamily="34" charset="-120"/>
+                <a:latin typeface="Amiri" pitchFamily="2" charset="-78"/>
+                <a:cs typeface="Amiri" pitchFamily="2" charset="-78"/>
               </a:rPr>
               <a:t>م</a:t>
             </a:r>
@@ -14000,8 +13758,7 @@
                   <a:srgbClr val="1B3B6F"/>
                 </a:solidFill>
                 <a:latin typeface="Cambria" pitchFamily="34" charset="0"/>
-                <a:ea typeface="Cambria" pitchFamily="34" charset="-122"/>
-                <a:cs typeface="Cambria" pitchFamily="34" charset="-120"/>
+                <a:cs typeface="Amiri" pitchFamily="2" charset="-78"/>
               </a:rPr>
               <a:t>Al Madina Online School</a:t>
             </a:r>
@@ -14039,8 +13796,7 @@
                   <a:srgbClr val="8A6D1E"/>
                 </a:solidFill>
                 <a:latin typeface="Calibri" pitchFamily="34" charset="0"/>
-                <a:ea typeface="Calibri" pitchFamily="34" charset="-122"/>
-                <a:cs typeface="Calibri" pitchFamily="34" charset="-120"/>
+                <a:cs typeface="Amiri" pitchFamily="2" charset="-78"/>
               </a:rPr>
               <a:t>ARABIC DEPARTMENT · MIFTAH ARABIC · IGCSE 0544</a:t>
             </a:r>
@@ -14105,8 +13861,7 @@
                   <a:srgbClr val="FFFFFF"/>
                 </a:solidFill>
                 <a:latin typeface="Calibri" pitchFamily="34" charset="0"/>
-                <a:ea typeface="Calibri" pitchFamily="34" charset="-122"/>
-                <a:cs typeface="Calibri" pitchFamily="34" charset="-120"/>
+                <a:cs typeface="Amiri" pitchFamily="2" charset="-78"/>
               </a:rPr>
               <a:t>P6-L04 · IGCSE Bridge</a:t>
             </a:r>
@@ -14171,8 +13926,7 @@
                   <a:srgbClr val="FFFFFF"/>
                 </a:solidFill>
                 <a:latin typeface="Calibri" pitchFamily="34" charset="0"/>
-                <a:ea typeface="Calibri" pitchFamily="34" charset="-122"/>
-                <a:cs typeface="Calibri" pitchFamily="34" charset="-120"/>
+                <a:cs typeface="Amiri" pitchFamily="2" charset="-78"/>
               </a:rPr>
               <a:t>YOU DO</a:t>
             </a:r>
@@ -14210,8 +13964,7 @@
                   <a:srgbClr val="1E6B52"/>
                 </a:solidFill>
                 <a:latin typeface="Calibri" pitchFamily="34" charset="0"/>
-                <a:ea typeface="Calibri" pitchFamily="34" charset="-122"/>
-                <a:cs typeface="Calibri" pitchFamily="34" charset="-120"/>
+                <a:cs typeface="Amiri" pitchFamily="2" charset="-78"/>
               </a:rPr>
               <a:t>YOU DO · DEVELOP ROUTE · TASK 2 — ARTICLE (WEBSITE)</a:t>
             </a:r>
@@ -14249,8 +14002,7 @@
                   <a:srgbClr val="1B3B6F"/>
                 </a:solidFill>
                 <a:latin typeface="Cambria" pitchFamily="34" charset="0"/>
-                <a:ea typeface="Cambria" pitchFamily="34" charset="-122"/>
-                <a:cs typeface="Cambria" pitchFamily="34" charset="-120"/>
+                <a:cs typeface="Amiri" pitchFamily="2" charset="-78"/>
               </a:rPr>
               <a:t>Task 2 — An article</a:t>
             </a:r>
@@ -14287,9 +14039,8 @@
                 <a:solidFill>
                   <a:srgbClr val="8A6D1E"/>
                 </a:solidFill>
-                <a:latin typeface="Amiri" pitchFamily="34" charset="0"/>
-                <a:ea typeface="Amiri" pitchFamily="34" charset="-122"/>
-                <a:cs typeface="Amiri" pitchFamily="34" charset="-120"/>
+                <a:latin typeface="Amiri" pitchFamily="2" charset="-78"/>
+                <a:cs typeface="Amiri" pitchFamily="2" charset="-78"/>
               </a:rPr>
               <a:t>مَقَالَةٌ</a:t>
             </a:r>
@@ -14327,8 +14078,7 @@
                   <a:srgbClr val="8A93A0"/>
                 </a:solidFill>
                 <a:latin typeface="Calibri" pitchFamily="34" charset="0"/>
-                <a:ea typeface="Calibri" pitchFamily="34" charset="-122"/>
-                <a:cs typeface="Calibri" pitchFamily="34" charset="-120"/>
+                <a:cs typeface="Amiri" pitchFamily="2" charset="-78"/>
               </a:rPr>
               <a:t>Miftah Arabic · Progression P6 · IGCSE Bridge · P6-L04</a:t>
             </a:r>
@@ -14427,8 +14177,7 @@
                   <a:srgbClr val="FFFFFF"/>
                 </a:solidFill>
                 <a:latin typeface="Calibri" pitchFamily="34" charset="0"/>
-                <a:ea typeface="Calibri" pitchFamily="34" charset="-122"/>
-                <a:cs typeface="Calibri" pitchFamily="34" charset="-120"/>
+                <a:cs typeface="Amiri" pitchFamily="2" charset="-78"/>
               </a:rPr>
               <a:t>DEVELOP</a:t>
             </a:r>
@@ -14466,8 +14215,7 @@
                   <a:srgbClr val="1F2A37"/>
                 </a:solidFill>
                 <a:latin typeface="Calibri" pitchFamily="34" charset="0"/>
-                <a:ea typeface="Calibri" pitchFamily="34" charset="-122"/>
-                <a:cs typeface="Calibri" pitchFamily="34" charset="-120"/>
+                <a:cs typeface="Amiri" pitchFamily="2" charset="-78"/>
               </a:rPr>
               <a:t>Write an article (130–140 words) for an Arabic youth magazine on: “How I manage stress and maintain my wellbeing.” Register: engaging, semi-formal, first person.</a:t>
             </a:r>
@@ -14505,8 +14253,7 @@
                   <a:srgbClr val="1F2A37"/>
                 </a:solidFill>
                 <a:latin typeface="Calibri" pitchFamily="34" charset="0"/>
-                <a:ea typeface="Calibri" pitchFamily="34" charset="-122"/>
-                <a:cs typeface="Calibri" pitchFamily="34" charset="-120"/>
+                <a:cs typeface="Amiri" pitchFamily="2" charset="-78"/>
               </a:rPr>
               <a:t>☐  An engaging hook (no formal address).</a:t>
             </a:r>
@@ -14544,8 +14291,7 @@
                   <a:srgbClr val="1F2A37"/>
                 </a:solidFill>
                 <a:latin typeface="Calibri" pitchFamily="34" charset="0"/>
-                <a:ea typeface="Calibri" pitchFamily="34" charset="-122"/>
-                <a:cs typeface="Calibri" pitchFamily="34" charset="-120"/>
+                <a:cs typeface="Amiri" pitchFamily="2" charset="-78"/>
               </a:rPr>
               <a:t>☐  First-person, semi-formal register.</a:t>
             </a:r>
@@ -14583,8 +14329,7 @@
                   <a:srgbClr val="1F2A37"/>
                 </a:solidFill>
                 <a:latin typeface="Calibri" pitchFamily="34" charset="0"/>
-                <a:ea typeface="Calibri" pitchFamily="34" charset="-122"/>
-                <a:cs typeface="Calibri" pitchFamily="34" charset="-120"/>
+                <a:cs typeface="Amiri" pitchFamily="2" charset="-78"/>
               </a:rPr>
               <a:t>☐  At least one conditional and one subjunctive trigger.</a:t>
             </a:r>
@@ -14622,8 +14367,7 @@
                   <a:srgbClr val="1F2A37"/>
                 </a:solidFill>
                 <a:latin typeface="Calibri" pitchFamily="34" charset="0"/>
-                <a:ea typeface="Calibri" pitchFamily="34" charset="-122"/>
-                <a:cs typeface="Calibri" pitchFamily="34" charset="-120"/>
+                <a:cs typeface="Amiri" pitchFamily="2" charset="-78"/>
               </a:rPr>
               <a:t>☐  A clear closing thought for the reader.</a:t>
             </a:r>
@@ -14695,8 +14439,7 @@
                   <a:srgbClr val="8A6D1E"/>
                 </a:solidFill>
                 <a:latin typeface="Calibri" pitchFamily="34" charset="0"/>
-                <a:ea typeface="Calibri" pitchFamily="34" charset="-122"/>
-                <a:cs typeface="Calibri" pitchFamily="34" charset="-120"/>
+                <a:cs typeface="Amiri" pitchFamily="2" charset="-78"/>
               </a:rPr>
               <a:t>USEFUL LANGUAGE — FROM THE WEBSITE MODEL</a:t>
             </a:r>
@@ -14733,9 +14476,8 @@
                 <a:solidFill>
                   <a:srgbClr val="1B3B6F"/>
                 </a:solidFill>
-                <a:latin typeface="Amiri" pitchFamily="34" charset="0"/>
-                <a:ea typeface="Amiri" pitchFamily="34" charset="-122"/>
-                <a:cs typeface="Amiri" pitchFamily="34" charset="-120"/>
+                <a:latin typeface="Amiri" pitchFamily="2" charset="-78"/>
+                <a:cs typeface="Amiri" pitchFamily="2" charset="-78"/>
               </a:rPr>
               <a:t>سُؤَالٌ يَشْغَلُ كَثِيرًا مِنَ الشَّبَابِ</a:t>
             </a:r>
@@ -14773,8 +14515,7 @@
                   <a:srgbClr val="5A6472"/>
                 </a:solidFill>
                 <a:latin typeface="Calibri" pitchFamily="34" charset="0"/>
-                <a:ea typeface="Calibri" pitchFamily="34" charset="-122"/>
-                <a:cs typeface="Calibri" pitchFamily="34" charset="-120"/>
+                <a:cs typeface="Amiri" pitchFamily="2" charset="-78"/>
               </a:rPr>
               <a:t>a question on many young people’s minds</a:t>
             </a:r>
@@ -14811,9 +14552,8 @@
                 <a:solidFill>
                   <a:srgbClr val="1B3B6F"/>
                 </a:solidFill>
-                <a:latin typeface="Amiri" pitchFamily="34" charset="0"/>
-                <a:ea typeface="Amiri" pitchFamily="34" charset="-122"/>
-                <a:cs typeface="Amiri" pitchFamily="34" charset="-120"/>
+                <a:latin typeface="Amiri" pitchFamily="2" charset="-78"/>
+                <a:cs typeface="Amiri" pitchFamily="2" charset="-78"/>
               </a:rPr>
               <a:t>أَسَاسٌ لَا غِنَى عَنْهُ</a:t>
             </a:r>
@@ -14851,8 +14591,7 @@
                   <a:srgbClr val="5A6472"/>
                 </a:solidFill>
                 <a:latin typeface="Calibri" pitchFamily="34" charset="0"/>
-                <a:ea typeface="Calibri" pitchFamily="34" charset="-122"/>
-                <a:cs typeface="Calibri" pitchFamily="34" charset="-120"/>
+                <a:cs typeface="Amiri" pitchFamily="2" charset="-78"/>
               </a:rPr>
               <a:t>an indispensable foundation</a:t>
             </a:r>
@@ -14889,9 +14628,8 @@
                 <a:solidFill>
                   <a:srgbClr val="1B3B6F"/>
                 </a:solidFill>
-                <a:latin typeface="Amiri" pitchFamily="34" charset="0"/>
-                <a:ea typeface="Amiri" pitchFamily="34" charset="-122"/>
-                <a:cs typeface="Amiri" pitchFamily="34" charset="-120"/>
+                <a:latin typeface="Amiri" pitchFamily="2" charset="-78"/>
+                <a:cs typeface="Amiri" pitchFamily="2" charset="-78"/>
               </a:rPr>
               <a:t>تَنْظِيمُ الوَقْتِ يُخَفِّفُهُ</a:t>
             </a:r>
@@ -14929,8 +14667,7 @@
                   <a:srgbClr val="5A6472"/>
                 </a:solidFill>
                 <a:latin typeface="Calibri" pitchFamily="34" charset="0"/>
-                <a:ea typeface="Calibri" pitchFamily="34" charset="-122"/>
-                <a:cs typeface="Calibri" pitchFamily="34" charset="-120"/>
+                <a:cs typeface="Amiri" pitchFamily="2" charset="-78"/>
               </a:rPr>
               <a:t>organising time eases it</a:t>
             </a:r>
@@ -14967,9 +14704,8 @@
                 <a:solidFill>
                   <a:srgbClr val="1B3B6F"/>
                 </a:solidFill>
-                <a:latin typeface="Amiri" pitchFamily="34" charset="0"/>
-                <a:ea typeface="Amiri" pitchFamily="34" charset="-122"/>
-                <a:cs typeface="Amiri" pitchFamily="34" charset="-120"/>
+                <a:latin typeface="Amiri" pitchFamily="2" charset="-78"/>
+                <a:cs typeface="Amiri" pitchFamily="2" charset="-78"/>
               </a:rPr>
               <a:t>مَعَ مَنْ نَثِقُ بِهِمْ</a:t>
             </a:r>
@@ -15007,8 +14743,7 @@
                   <a:srgbClr val="5A6472"/>
                 </a:solidFill>
                 <a:latin typeface="Calibri" pitchFamily="34" charset="0"/>
-                <a:ea typeface="Calibri" pitchFamily="34" charset="-122"/>
-                <a:cs typeface="Calibri" pitchFamily="34" charset="-120"/>
+                <a:cs typeface="Amiri" pitchFamily="2" charset="-78"/>
               </a:rPr>
               <a:t>with people we trust</a:t>
             </a:r>
@@ -15045,9 +14780,8 @@
                 <a:solidFill>
                   <a:srgbClr val="1B3B6F"/>
                 </a:solidFill>
-                <a:latin typeface="Amiri" pitchFamily="34" charset="0"/>
-                <a:ea typeface="Amiri" pitchFamily="34" charset="-122"/>
-                <a:cs typeface="Amiri" pitchFamily="34" charset="-120"/>
+                <a:latin typeface="Amiri" pitchFamily="2" charset="-78"/>
+                <a:cs typeface="Amiri" pitchFamily="2" charset="-78"/>
               </a:rPr>
               <a:t>أَدْعُو كُلَّ قَارِئٍ إِلَى أَنْ …</a:t>
             </a:r>
@@ -15085,8 +14819,7 @@
                   <a:srgbClr val="5A6472"/>
                 </a:solidFill>
                 <a:latin typeface="Calibri" pitchFamily="34" charset="0"/>
-                <a:ea typeface="Calibri" pitchFamily="34" charset="-122"/>
-                <a:cs typeface="Calibri" pitchFamily="34" charset="-120"/>
+                <a:cs typeface="Amiri" pitchFamily="2" charset="-78"/>
               </a:rPr>
               <a:t>I call on every reader to …</a:t>
             </a:r>
@@ -15124,8 +14857,7 @@
                   <a:srgbClr val="8A93A0"/>
                 </a:solidFill>
                 <a:latin typeface="Calibri" pitchFamily="34" charset="0"/>
-                <a:ea typeface="Calibri" pitchFamily="34" charset="-122"/>
-                <a:cs typeface="Calibri" pitchFamily="34" charset="-120"/>
+                <a:cs typeface="Amiri" pitchFamily="2" charset="-78"/>
               </a:rPr>
               <a:t>17 / 26</a:t>
             </a:r>
@@ -15219,9 +14951,8 @@
                 <a:solidFill>
                   <a:srgbClr val="D4AF37"/>
                 </a:solidFill>
-                <a:latin typeface="Amiri" pitchFamily="34" charset="0"/>
-                <a:ea typeface="Amiri" pitchFamily="34" charset="-122"/>
-                <a:cs typeface="Amiri" pitchFamily="34" charset="-120"/>
+                <a:latin typeface="Amiri" pitchFamily="2" charset="-78"/>
+                <a:cs typeface="Amiri" pitchFamily="2" charset="-78"/>
               </a:rPr>
               <a:t>م</a:t>
             </a:r>
@@ -15259,8 +14990,7 @@
                   <a:srgbClr val="1B3B6F"/>
                 </a:solidFill>
                 <a:latin typeface="Cambria" pitchFamily="34" charset="0"/>
-                <a:ea typeface="Cambria" pitchFamily="34" charset="-122"/>
-                <a:cs typeface="Cambria" pitchFamily="34" charset="-120"/>
+                <a:cs typeface="Amiri" pitchFamily="2" charset="-78"/>
               </a:rPr>
               <a:t>Al Madina Online School</a:t>
             </a:r>
@@ -15298,8 +15028,7 @@
                   <a:srgbClr val="8A6D1E"/>
                 </a:solidFill>
                 <a:latin typeface="Calibri" pitchFamily="34" charset="0"/>
-                <a:ea typeface="Calibri" pitchFamily="34" charset="-122"/>
-                <a:cs typeface="Calibri" pitchFamily="34" charset="-120"/>
+                <a:cs typeface="Amiri" pitchFamily="2" charset="-78"/>
               </a:rPr>
               <a:t>ARABIC DEPARTMENT · MIFTAH ARABIC · IGCSE 0544</a:t>
             </a:r>
@@ -15364,8 +15093,7 @@
                   <a:srgbClr val="FFFFFF"/>
                 </a:solidFill>
                 <a:latin typeface="Calibri" pitchFamily="34" charset="0"/>
-                <a:ea typeface="Calibri" pitchFamily="34" charset="-122"/>
-                <a:cs typeface="Calibri" pitchFamily="34" charset="-120"/>
+                <a:cs typeface="Amiri" pitchFamily="2" charset="-78"/>
               </a:rPr>
               <a:t>P6-L04 · IGCSE Bridge</a:t>
             </a:r>
@@ -15430,8 +15158,7 @@
                   <a:srgbClr val="FFFFFF"/>
                 </a:solidFill>
                 <a:latin typeface="Calibri" pitchFamily="34" charset="0"/>
-                <a:ea typeface="Calibri" pitchFamily="34" charset="-122"/>
-                <a:cs typeface="Calibri" pitchFamily="34" charset="-120"/>
+                <a:cs typeface="Amiri" pitchFamily="2" charset="-78"/>
               </a:rPr>
               <a:t>YOU DO</a:t>
             </a:r>
@@ -15469,8 +15196,7 @@
                   <a:srgbClr val="1E6B52"/>
                 </a:solidFill>
                 <a:latin typeface="Calibri" pitchFamily="34" charset="0"/>
-                <a:ea typeface="Calibri" pitchFamily="34" charset="-122"/>
-                <a:cs typeface="Calibri" pitchFamily="34" charset="-120"/>
+                <a:cs typeface="Amiri" pitchFamily="2" charset="-78"/>
               </a:rPr>
               <a:t>YOU DO · STRETCH ROUTE · TASK 1 — FORMAL LETTER (WEBSITE)</a:t>
             </a:r>
@@ -15508,8 +15234,7 @@
                   <a:srgbClr val="1B3B6F"/>
                 </a:solidFill>
                 <a:latin typeface="Cambria" pitchFamily="34" charset="0"/>
-                <a:ea typeface="Cambria" pitchFamily="34" charset="-122"/>
-                <a:cs typeface="Cambria" pitchFamily="34" charset="-120"/>
+                <a:cs typeface="Amiri" pitchFamily="2" charset="-78"/>
               </a:rPr>
               <a:t>Task 1 — A formal letter</a:t>
             </a:r>
@@ -15546,9 +15271,8 @@
                 <a:solidFill>
                   <a:srgbClr val="8A6D1E"/>
                 </a:solidFill>
-                <a:latin typeface="Amiri" pitchFamily="34" charset="0"/>
-                <a:ea typeface="Amiri" pitchFamily="34" charset="-122"/>
-                <a:cs typeface="Amiri" pitchFamily="34" charset="-120"/>
+                <a:latin typeface="Amiri" pitchFamily="2" charset="-78"/>
+                <a:cs typeface="Amiri" pitchFamily="2" charset="-78"/>
               </a:rPr>
               <a:t>خِطَابٌ رَسْمِيٌّ</a:t>
             </a:r>
@@ -15586,8 +15310,7 @@
                   <a:srgbClr val="8A93A0"/>
                 </a:solidFill>
                 <a:latin typeface="Calibri" pitchFamily="34" charset="0"/>
-                <a:ea typeface="Calibri" pitchFamily="34" charset="-122"/>
-                <a:cs typeface="Calibri" pitchFamily="34" charset="-120"/>
+                <a:cs typeface="Amiri" pitchFamily="2" charset="-78"/>
               </a:rPr>
               <a:t>Miftah Arabic · Progression P6 · IGCSE Bridge · P6-L04</a:t>
             </a:r>
@@ -15686,8 +15409,7 @@
                   <a:srgbClr val="FFFFFF"/>
                 </a:solidFill>
                 <a:latin typeface="Calibri" pitchFamily="34" charset="0"/>
-                <a:ea typeface="Calibri" pitchFamily="34" charset="-122"/>
-                <a:cs typeface="Calibri" pitchFamily="34" charset="-120"/>
+                <a:cs typeface="Amiri" pitchFamily="2" charset="-78"/>
               </a:rPr>
               <a:t>STRETCH</a:t>
             </a:r>
@@ -15725,8 +15447,7 @@
                   <a:srgbClr val="1F2A37"/>
                 </a:solidFill>
                 <a:latin typeface="Calibri" pitchFamily="34" charset="0"/>
-                <a:ea typeface="Calibri" pitchFamily="34" charset="-122"/>
-                <a:cs typeface="Calibri" pitchFamily="34" charset="-120"/>
+                <a:cs typeface="Amiri" pitchFamily="2" charset="-78"/>
               </a:rPr>
               <a:t>Write a formal letter (130–140 words) to the Arab League Environment Committee recommending a specific environmental measure. Include: the problem, your proposed solution, the expected benefit, and a request for action. Keep the register </a:t>
             </a:r>
@@ -15738,9 +15459,8 @@
                 <a:solidFill>
                   <a:srgbClr val="1F2A37"/>
                 </a:solidFill>
-                <a:latin typeface="Amiri" pitchFamily="34" charset="0"/>
-                <a:ea typeface="Amiri" pitchFamily="34" charset="-122"/>
-                <a:cs typeface="Amiri" pitchFamily="34" charset="-120"/>
+                <a:latin typeface="Amiri" pitchFamily="2" charset="-78"/>
+                <a:cs typeface="Amiri" pitchFamily="2" charset="-78"/>
               </a:rPr>
               <a:t>رَسْمِيًّا</a:t>
             </a:r>
@@ -15753,8 +15473,7 @@
                   <a:srgbClr val="1F2A37"/>
                 </a:solidFill>
                 <a:latin typeface="Calibri" pitchFamily="34" charset="0"/>
-                <a:ea typeface="Calibri" pitchFamily="34" charset="-122"/>
-                <a:cs typeface="Calibri" pitchFamily="34" charset="-120"/>
+                <a:cs typeface="Amiri" pitchFamily="2" charset="-78"/>
               </a:rPr>
               <a:t> throughout.</a:t>
             </a:r>
@@ -15792,8 +15511,7 @@
                   <a:srgbClr val="1F2A37"/>
                 </a:solidFill>
                 <a:latin typeface="Calibri" pitchFamily="34" charset="0"/>
-                <a:ea typeface="Calibri" pitchFamily="34" charset="-122"/>
-                <a:cs typeface="Calibri" pitchFamily="34" charset="-120"/>
+                <a:cs typeface="Amiri" pitchFamily="2" charset="-78"/>
               </a:rPr>
               <a:t>☐  Formal opening (</a:t>
             </a:r>
@@ -15805,9 +15523,8 @@
                 <a:solidFill>
                   <a:srgbClr val="1F2A37"/>
                 </a:solidFill>
-                <a:latin typeface="Amiri" pitchFamily="34" charset="0"/>
-                <a:ea typeface="Amiri" pitchFamily="34" charset="-122"/>
-                <a:cs typeface="Amiri" pitchFamily="34" charset="-120"/>
+                <a:latin typeface="Amiri" pitchFamily="2" charset="-78"/>
+                <a:cs typeface="Amiri" pitchFamily="2" charset="-78"/>
               </a:rPr>
               <a:t>أَتَشَرَّفُ بِمُخَاطَبَتِكُمْ</a:t>
             </a:r>
@@ -15820,8 +15537,7 @@
                   <a:srgbClr val="1F2A37"/>
                 </a:solidFill>
                 <a:latin typeface="Calibri" pitchFamily="34" charset="0"/>
-                <a:ea typeface="Calibri" pitchFamily="34" charset="-122"/>
-                <a:cs typeface="Calibri" pitchFamily="34" charset="-120"/>
+                <a:cs typeface="Amiri" pitchFamily="2" charset="-78"/>
               </a:rPr>
               <a:t> …).</a:t>
             </a:r>
@@ -15859,8 +15575,7 @@
                   <a:srgbClr val="1F2A37"/>
                 </a:solidFill>
                 <a:latin typeface="Calibri" pitchFamily="34" charset="0"/>
-                <a:ea typeface="Calibri" pitchFamily="34" charset="-122"/>
-                <a:cs typeface="Calibri" pitchFamily="34" charset="-120"/>
+                <a:cs typeface="Amiri" pitchFamily="2" charset="-78"/>
               </a:rPr>
               <a:t>☐  The problem, the solution, the benefit and a request for action.</a:t>
             </a:r>
@@ -15898,8 +15613,7 @@
                   <a:srgbClr val="1F2A37"/>
                 </a:solidFill>
                 <a:latin typeface="Calibri" pitchFamily="34" charset="0"/>
-                <a:ea typeface="Calibri" pitchFamily="34" charset="-122"/>
-                <a:cs typeface="Calibri" pitchFamily="34" charset="-120"/>
+                <a:cs typeface="Amiri" pitchFamily="2" charset="-78"/>
               </a:rPr>
               <a:t>☐  Formal connectors and impersonal/passive structures.</a:t>
             </a:r>
@@ -15937,8 +15651,7 @@
                   <a:srgbClr val="1F2A37"/>
                 </a:solidFill>
                 <a:latin typeface="Calibri" pitchFamily="34" charset="0"/>
-                <a:ea typeface="Calibri" pitchFamily="34" charset="-122"/>
-                <a:cs typeface="Calibri" pitchFamily="34" charset="-120"/>
+                <a:cs typeface="Amiri" pitchFamily="2" charset="-78"/>
               </a:rPr>
               <a:t>☐  A formal closing (</a:t>
             </a:r>
@@ -15950,9 +15663,8 @@
                 <a:solidFill>
                   <a:srgbClr val="1F2A37"/>
                 </a:solidFill>
-                <a:latin typeface="Amiri" pitchFamily="34" charset="0"/>
-                <a:ea typeface="Amiri" pitchFamily="34" charset="-122"/>
-                <a:cs typeface="Amiri" pitchFamily="34" charset="-120"/>
+                <a:latin typeface="Amiri" pitchFamily="2" charset="-78"/>
+                <a:cs typeface="Amiri" pitchFamily="2" charset="-78"/>
               </a:rPr>
               <a:t>وَتَفَضَّلُوا بِقَبُولِ الاحْتِرَامِ</a:t>
             </a:r>
@@ -15965,8 +15677,7 @@
                   <a:srgbClr val="1F2A37"/>
                 </a:solidFill>
                 <a:latin typeface="Calibri" pitchFamily="34" charset="0"/>
-                <a:ea typeface="Calibri" pitchFamily="34" charset="-122"/>
-                <a:cs typeface="Calibri" pitchFamily="34" charset="-120"/>
+                <a:cs typeface="Amiri" pitchFamily="2" charset="-78"/>
               </a:rPr>
               <a:t>).</a:t>
             </a:r>
@@ -16038,8 +15749,7 @@
                   <a:srgbClr val="8A6D1E"/>
                 </a:solidFill>
                 <a:latin typeface="Calibri" pitchFamily="34" charset="0"/>
-                <a:ea typeface="Calibri" pitchFamily="34" charset="-122"/>
-                <a:cs typeface="Calibri" pitchFamily="34" charset="-120"/>
+                <a:cs typeface="Amiri" pitchFamily="2" charset="-78"/>
               </a:rPr>
               <a:t>USEFUL LANGUAGE — FROM THE WEBSITE MODEL</a:t>
             </a:r>
@@ -16076,9 +15786,8 @@
                 <a:solidFill>
                   <a:srgbClr val="1B3B6F"/>
                 </a:solidFill>
-                <a:latin typeface="Amiri" pitchFamily="34" charset="0"/>
-                <a:ea typeface="Amiri" pitchFamily="34" charset="-122"/>
-                <a:cs typeface="Amiri" pitchFamily="34" charset="-120"/>
+                <a:latin typeface="Amiri" pitchFamily="2" charset="-78"/>
+                <a:cs typeface="Amiri" pitchFamily="2" charset="-78"/>
               </a:rPr>
               <a:t>أَتَشَرَّفُ بِمُخَاطَبَتِكُمْ بِشَأْنِ</a:t>
             </a:r>
@@ -16116,8 +15825,7 @@
                   <a:srgbClr val="5A6472"/>
                 </a:solidFill>
                 <a:latin typeface="Calibri" pitchFamily="34" charset="0"/>
-                <a:ea typeface="Calibri" pitchFamily="34" charset="-122"/>
-                <a:cs typeface="Calibri" pitchFamily="34" charset="-120"/>
+                <a:cs typeface="Amiri" pitchFamily="2" charset="-78"/>
               </a:rPr>
               <a:t>I have the honour of writing to you about</a:t>
             </a:r>
@@ -16154,9 +15862,8 @@
                 <a:solidFill>
                   <a:srgbClr val="1B3B6F"/>
                 </a:solidFill>
-                <a:latin typeface="Amiri" pitchFamily="34" charset="0"/>
-                <a:ea typeface="Amiri" pitchFamily="34" charset="-122"/>
-                <a:cs typeface="Amiri" pitchFamily="34" charset="-120"/>
+                <a:latin typeface="Amiri" pitchFamily="2" charset="-78"/>
+                <a:cs typeface="Amiri" pitchFamily="2" charset="-78"/>
               </a:rPr>
               <a:t>يُفَاقِمُ الأَزْمَةَ</a:t>
             </a:r>
@@ -16194,8 +15901,7 @@
                   <a:srgbClr val="5A6472"/>
                 </a:solidFill>
                 <a:latin typeface="Calibri" pitchFamily="34" charset="0"/>
-                <a:ea typeface="Calibri" pitchFamily="34" charset="-122"/>
-                <a:cs typeface="Calibri" pitchFamily="34" charset="-120"/>
+                <a:cs typeface="Amiri" pitchFamily="2" charset="-78"/>
               </a:rPr>
               <a:t>worsens the crisis</a:t>
             </a:r>
@@ -16232,9 +15938,8 @@
                 <a:solidFill>
                   <a:srgbClr val="1B3B6F"/>
                 </a:solidFill>
-                <a:latin typeface="Amiri" pitchFamily="34" charset="0"/>
-                <a:ea typeface="Amiri" pitchFamily="34" charset="-122"/>
-                <a:cs typeface="Amiri" pitchFamily="34" charset="-120"/>
+                <a:latin typeface="Amiri" pitchFamily="2" charset="-78"/>
+                <a:cs typeface="Amiri" pitchFamily="2" charset="-78"/>
               </a:rPr>
               <a:t>وَأَقْتَرِحُ أَنْ تُطْلَقَ حَمْلَةٌ</a:t>
             </a:r>
@@ -16272,8 +15977,7 @@
                   <a:srgbClr val="5A6472"/>
                 </a:solidFill>
                 <a:latin typeface="Calibri" pitchFamily="34" charset="0"/>
-                <a:ea typeface="Calibri" pitchFamily="34" charset="-122"/>
-                <a:cs typeface="Calibri" pitchFamily="34" charset="-120"/>
+                <a:cs typeface="Amiri" pitchFamily="2" charset="-78"/>
               </a:rPr>
               <a:t>I propose that a campaign be launched</a:t>
             </a:r>
@@ -16310,9 +16014,8 @@
                 <a:solidFill>
                   <a:srgbClr val="1B3B6F"/>
                 </a:solidFill>
-                <a:latin typeface="Amiri" pitchFamily="34" charset="0"/>
-                <a:ea typeface="Amiri" pitchFamily="34" charset="-122"/>
-                <a:cs typeface="Amiri" pitchFamily="34" charset="-120"/>
+                <a:latin typeface="Amiri" pitchFamily="2" charset="-78"/>
+                <a:cs typeface="Amiri" pitchFamily="2" charset="-78"/>
               </a:rPr>
               <a:t>أَرْجُو أَنْ تَتَّخِذُوا القَرَارَ المُنَاسِبَ</a:t>
             </a:r>
@@ -16350,8 +16053,7 @@
                   <a:srgbClr val="5A6472"/>
                 </a:solidFill>
                 <a:latin typeface="Calibri" pitchFamily="34" charset="0"/>
-                <a:ea typeface="Calibri" pitchFamily="34" charset="-122"/>
-                <a:cs typeface="Calibri" pitchFamily="34" charset="-120"/>
+                <a:cs typeface="Amiri" pitchFamily="2" charset="-78"/>
               </a:rPr>
               <a:t>I hope you will take the right decision</a:t>
             </a:r>
@@ -16388,9 +16090,8 @@
                 <a:solidFill>
                   <a:srgbClr val="1B3B6F"/>
                 </a:solidFill>
-                <a:latin typeface="Amiri" pitchFamily="34" charset="0"/>
-                <a:ea typeface="Amiri" pitchFamily="34" charset="-122"/>
-                <a:cs typeface="Amiri" pitchFamily="34" charset="-120"/>
+                <a:latin typeface="Amiri" pitchFamily="2" charset="-78"/>
+                <a:cs typeface="Amiri" pitchFamily="2" charset="-78"/>
               </a:rPr>
               <a:t>وَتَفَضَّلُوا بِقَبُولِ فَائِقِ الاحْتِرَامِ</a:t>
             </a:r>
@@ -16428,8 +16129,7 @@
                   <a:srgbClr val="5A6472"/>
                 </a:solidFill>
                 <a:latin typeface="Calibri" pitchFamily="34" charset="0"/>
-                <a:ea typeface="Calibri" pitchFamily="34" charset="-122"/>
-                <a:cs typeface="Calibri" pitchFamily="34" charset="-120"/>
+                <a:cs typeface="Amiri" pitchFamily="2" charset="-78"/>
               </a:rPr>
               <a:t>yours faithfully</a:t>
             </a:r>
@@ -16467,8 +16167,7 @@
                   <a:srgbClr val="8A93A0"/>
                 </a:solidFill>
                 <a:latin typeface="Calibri" pitchFamily="34" charset="0"/>
-                <a:ea typeface="Calibri" pitchFamily="34" charset="-122"/>
-                <a:cs typeface="Calibri" pitchFamily="34" charset="-120"/>
+                <a:cs typeface="Amiri" pitchFamily="2" charset="-78"/>
               </a:rPr>
               <a:t>18 / 26</a:t>
             </a:r>
@@ -16562,9 +16261,8 @@
                 <a:solidFill>
                   <a:srgbClr val="D4AF37"/>
                 </a:solidFill>
-                <a:latin typeface="Amiri" pitchFamily="34" charset="0"/>
-                <a:ea typeface="Amiri" pitchFamily="34" charset="-122"/>
-                <a:cs typeface="Amiri" pitchFamily="34" charset="-120"/>
+                <a:latin typeface="Amiri" pitchFamily="2" charset="-78"/>
+                <a:cs typeface="Amiri" pitchFamily="2" charset="-78"/>
               </a:rPr>
               <a:t>م</a:t>
             </a:r>
@@ -16602,8 +16300,7 @@
                   <a:srgbClr val="1B3B6F"/>
                 </a:solidFill>
                 <a:latin typeface="Cambria" pitchFamily="34" charset="0"/>
-                <a:ea typeface="Cambria" pitchFamily="34" charset="-122"/>
-                <a:cs typeface="Cambria" pitchFamily="34" charset="-120"/>
+                <a:cs typeface="Amiri" pitchFamily="2" charset="-78"/>
               </a:rPr>
               <a:t>Al Madina Online School</a:t>
             </a:r>
@@ -16641,8 +16338,7 @@
                   <a:srgbClr val="8A6D1E"/>
                 </a:solidFill>
                 <a:latin typeface="Calibri" pitchFamily="34" charset="0"/>
-                <a:ea typeface="Calibri" pitchFamily="34" charset="-122"/>
-                <a:cs typeface="Calibri" pitchFamily="34" charset="-120"/>
+                <a:cs typeface="Amiri" pitchFamily="2" charset="-78"/>
               </a:rPr>
               <a:t>ARABIC DEPARTMENT · MIFTAH ARABIC · IGCSE 0544</a:t>
             </a:r>
@@ -16707,8 +16403,7 @@
                   <a:srgbClr val="FFFFFF"/>
                 </a:solidFill>
                 <a:latin typeface="Calibri" pitchFamily="34" charset="0"/>
-                <a:ea typeface="Calibri" pitchFamily="34" charset="-122"/>
-                <a:cs typeface="Calibri" pitchFamily="34" charset="-120"/>
+                <a:cs typeface="Amiri" pitchFamily="2" charset="-78"/>
               </a:rPr>
               <a:t>P6-L04 · IGCSE Bridge</a:t>
             </a:r>
@@ -16773,8 +16468,7 @@
                   <a:srgbClr val="FFFFFF"/>
                 </a:solidFill>
                 <a:latin typeface="Calibri" pitchFamily="34" charset="0"/>
-                <a:ea typeface="Calibri" pitchFamily="34" charset="-122"/>
-                <a:cs typeface="Calibri" pitchFamily="34" charset="-120"/>
+                <a:cs typeface="Amiri" pitchFamily="2" charset="-78"/>
               </a:rPr>
               <a:t>FEEDBACK · 1 MIN</a:t>
             </a:r>
@@ -16812,8 +16506,7 @@
                   <a:srgbClr val="8A6D1E"/>
                 </a:solidFill>
                 <a:latin typeface="Calibri" pitchFamily="34" charset="0"/>
-                <a:ea typeface="Calibri" pitchFamily="34" charset="-122"/>
-                <a:cs typeface="Calibri" pitchFamily="34" charset="-120"/>
+                <a:cs typeface="Amiri" pitchFamily="2" charset="-78"/>
               </a:rPr>
               <a:t>FEEDBACK · TASK 3 — EMAIL · THE WEBSITE MODEL</a:t>
             </a:r>
@@ -16851,8 +16544,7 @@
                   <a:srgbClr val="1B3B6F"/>
                 </a:solidFill>
                 <a:latin typeface="Cambria" pitchFamily="34" charset="0"/>
-                <a:ea typeface="Cambria" pitchFamily="34" charset="-122"/>
-                <a:cs typeface="Cambria" pitchFamily="34" charset="-120"/>
+                <a:cs typeface="Amiri" pitchFamily="2" charset="-78"/>
               </a:rPr>
               <a:t>What a full-mark answer looks like</a:t>
             </a:r>
@@ -16889,9 +16581,8 @@
                 <a:solidFill>
                   <a:srgbClr val="8A6D1E"/>
                 </a:solidFill>
-                <a:latin typeface="Amiri" pitchFamily="34" charset="0"/>
-                <a:ea typeface="Amiri" pitchFamily="34" charset="-122"/>
-                <a:cs typeface="Amiri" pitchFamily="34" charset="-120"/>
+                <a:latin typeface="Amiri" pitchFamily="2" charset="-78"/>
+                <a:cs typeface="Amiri" pitchFamily="2" charset="-78"/>
               </a:rPr>
               <a:t>نَمُوذَجُ الإِجَابَةِ</a:t>
             </a:r>
@@ -16929,8 +16620,7 @@
                   <a:srgbClr val="8A93A0"/>
                 </a:solidFill>
                 <a:latin typeface="Calibri" pitchFamily="34" charset="0"/>
-                <a:ea typeface="Calibri" pitchFamily="34" charset="-122"/>
-                <a:cs typeface="Calibri" pitchFamily="34" charset="-120"/>
+                <a:cs typeface="Amiri" pitchFamily="2" charset="-78"/>
               </a:rPr>
               <a:t>Miftah Arabic · Progression P6 · IGCSE Bridge · P6-L04</a:t>
             </a:r>
@@ -17004,9 +16694,8 @@
                 <a:solidFill>
                   <a:srgbClr val="1F2A37"/>
                 </a:solidFill>
-                <a:latin typeface="Amiri" pitchFamily="34" charset="0"/>
-                <a:ea typeface="Amiri" pitchFamily="34" charset="-122"/>
-                <a:cs typeface="Amiri" pitchFamily="34" charset="-120"/>
+                <a:latin typeface="Amiri" pitchFamily="2" charset="-78"/>
+                <a:cs typeface="Amiri" pitchFamily="2" charset="-78"/>
               </a:rPr>
               <a:t>عَزِيزِي أَحْمَدُ، حَيَّاكَ اللَّهُ! يُسْعِدُنِي أَنَّكَ سَتَزُورُ مَدْرَسَتَنَا الشَّهْرَ القَادِمَ. مَدْرَسَتُنَا كَبِيرَةٌ وَفِيهَا مُخْتَبَرَاتٌ حَدِيثَةٌ، وَتَقَعُ قُرْبَ حَدِيقَةٍ جَمِيلَةٍ. صَحِيحٌ أَنَّ الطَّقْسَ بَارِدٌ أَحْيَانًا، غَيْرَ أَنَّ النَّاسَ وَدُودُونَ. وَأَنْصَحُكَ بِأَنْ تُحْضِرَ مِعْطَفًا. وَمِنَ العَادَاتِ المُهِمَّةِ أَنْ نَخْلَعَ الحِذَاءَ عِنْدَ دُخُولِ البُيُوتِ. وَإِذَا تَوَفَّرَ الوَقْتُ، سَنَزُورُ المَتْحَفَ المَحَلِّيَّ مَعًا. أَتَطَلَّعُ إِلَى لِقَائِكَ. إِلَى اللِّقَاءِ، صَدِيقُكَ سَامِي.</a:t>
             </a:r>
@@ -17071,8 +16760,7 @@
                   <a:srgbClr val="5A6472"/>
                 </a:solidFill>
                 <a:latin typeface="Calibri" pitchFamily="34" charset="0"/>
-                <a:ea typeface="Calibri" pitchFamily="34" charset="-122"/>
-                <a:cs typeface="Calibri" pitchFamily="34" charset="-120"/>
+                <a:cs typeface="Amiri" pitchFamily="2" charset="-78"/>
               </a:rPr>
               <a:t>Dear Ahmad, hello! I am happy that you will visit our school next month. Our school is big and has modern laboratories, and it is near a beautiful park. It is true that the weather is sometimes cold, but people are friendly. I advise you to bring a coat. One important custom is that we take off our shoes when entering homes. If there is time, we will visit the local museum together. I look forward to meeting you. See you soon, your friend Sami.</a:t>
             </a:r>
@@ -17110,8 +16798,7 @@
                   <a:srgbClr val="8A6D1E"/>
                 </a:solidFill>
                 <a:latin typeface="Calibri" pitchFamily="34" charset="0"/>
-                <a:ea typeface="Calibri" pitchFamily="34" charset="-122"/>
-                <a:cs typeface="Calibri" pitchFamily="34" charset="-120"/>
+                <a:cs typeface="Amiri" pitchFamily="2" charset="-78"/>
               </a:rPr>
               <a:t>FIND IN THE MODEL:</a:t>
             </a:r>
@@ -17176,8 +16863,7 @@
                   <a:srgbClr val="FFFFFF"/>
                 </a:solidFill>
                 <a:latin typeface="Calibri" pitchFamily="34" charset="0"/>
-                <a:ea typeface="Calibri" pitchFamily="34" charset="-122"/>
-                <a:cs typeface="Calibri" pitchFamily="34" charset="-120"/>
+                <a:cs typeface="Amiri" pitchFamily="2" charset="-78"/>
               </a:rPr>
               <a:t>warm opening + closing</a:t>
             </a:r>
@@ -17242,8 +16928,7 @@
                   <a:srgbClr val="FFFFFF"/>
                 </a:solidFill>
                 <a:latin typeface="Calibri" pitchFamily="34" charset="0"/>
-                <a:ea typeface="Calibri" pitchFamily="34" charset="-122"/>
-                <a:cs typeface="Calibri" pitchFamily="34" charset="-120"/>
+                <a:cs typeface="Amiri" pitchFamily="2" charset="-78"/>
               </a:rPr>
               <a:t>school · area · custom · activity</a:t>
             </a:r>
@@ -17308,8 +16993,7 @@
                   <a:srgbClr val="FFFFFF"/>
                 </a:solidFill>
                 <a:latin typeface="Calibri" pitchFamily="34" charset="0"/>
-                <a:ea typeface="Calibri" pitchFamily="34" charset="-122"/>
-                <a:cs typeface="Calibri" pitchFamily="34" charset="-120"/>
+                <a:cs typeface="Amiri" pitchFamily="2" charset="-78"/>
               </a:rPr>
               <a:t>bi-an tuḥḍira · idhā … sa-</a:t>
             </a:r>
@@ -17374,8 +17058,7 @@
                   <a:srgbClr val="FFFFFF"/>
                 </a:solidFill>
                 <a:latin typeface="Calibri" pitchFamily="34" charset="0"/>
-                <a:ea typeface="Calibri" pitchFamily="34" charset="-122"/>
-                <a:cs typeface="Calibri" pitchFamily="34" charset="-120"/>
+                <a:cs typeface="Amiri" pitchFamily="2" charset="-78"/>
               </a:rPr>
               <a:t>friendly 1st / 2nd person</a:t>
             </a:r>
@@ -17413,8 +17096,7 @@
                   <a:srgbClr val="8A93A0"/>
                 </a:solidFill>
                 <a:latin typeface="Calibri" pitchFamily="34" charset="0"/>
-                <a:ea typeface="Calibri" pitchFamily="34" charset="-122"/>
-                <a:cs typeface="Calibri" pitchFamily="34" charset="-120"/>
+                <a:cs typeface="Amiri" pitchFamily="2" charset="-78"/>
               </a:rPr>
               <a:t>19 / 26</a:t>
             </a:r>
@@ -17508,9 +17190,8 @@
                 <a:solidFill>
                   <a:srgbClr val="D4AF37"/>
                 </a:solidFill>
-                <a:latin typeface="Amiri" pitchFamily="34" charset="0"/>
-                <a:ea typeface="Amiri" pitchFamily="34" charset="-122"/>
-                <a:cs typeface="Amiri" pitchFamily="34" charset="-120"/>
+                <a:latin typeface="Amiri" pitchFamily="2" charset="-78"/>
+                <a:cs typeface="Amiri" pitchFamily="2" charset="-78"/>
               </a:rPr>
               <a:t>م</a:t>
             </a:r>
@@ -17548,8 +17229,7 @@
                   <a:srgbClr val="1B3B6F"/>
                 </a:solidFill>
                 <a:latin typeface="Cambria" pitchFamily="34" charset="0"/>
-                <a:ea typeface="Cambria" pitchFamily="34" charset="-122"/>
-                <a:cs typeface="Cambria" pitchFamily="34" charset="-120"/>
+                <a:cs typeface="Amiri" pitchFamily="2" charset="-78"/>
               </a:rPr>
               <a:t>Al Madina Online School</a:t>
             </a:r>
@@ -17587,8 +17267,7 @@
                   <a:srgbClr val="8A6D1E"/>
                 </a:solidFill>
                 <a:latin typeface="Calibri" pitchFamily="34" charset="0"/>
-                <a:ea typeface="Calibri" pitchFamily="34" charset="-122"/>
-                <a:cs typeface="Calibri" pitchFamily="34" charset="-120"/>
+                <a:cs typeface="Amiri" pitchFamily="2" charset="-78"/>
               </a:rPr>
               <a:t>ARABIC DEPARTMENT · MIFTAH ARABIC · IGCSE 0544</a:t>
             </a:r>
@@ -17653,8 +17332,7 @@
                   <a:srgbClr val="FFFFFF"/>
                 </a:solidFill>
                 <a:latin typeface="Calibri" pitchFamily="34" charset="0"/>
-                <a:ea typeface="Calibri" pitchFamily="34" charset="-122"/>
-                <a:cs typeface="Calibri" pitchFamily="34" charset="-120"/>
+                <a:cs typeface="Amiri" pitchFamily="2" charset="-78"/>
               </a:rPr>
               <a:t>P6-L04 · IGCSE Bridge</a:t>
             </a:r>
@@ -17719,8 +17397,7 @@
                   <a:srgbClr val="FFFFFF"/>
                 </a:solidFill>
                 <a:latin typeface="Calibri" pitchFamily="34" charset="0"/>
-                <a:ea typeface="Calibri" pitchFamily="34" charset="-122"/>
-                <a:cs typeface="Calibri" pitchFamily="34" charset="-120"/>
+                <a:cs typeface="Amiri" pitchFamily="2" charset="-78"/>
               </a:rPr>
               <a:t>WELCOME · 1 MIN</a:t>
             </a:r>
@@ -17758,8 +17435,7 @@
                   <a:srgbClr val="5A6472"/>
                 </a:solidFill>
                 <a:latin typeface="Calibri" pitchFamily="34" charset="0"/>
-                <a:ea typeface="Calibri" pitchFamily="34" charset="-122"/>
-                <a:cs typeface="Calibri" pitchFamily="34" charset="-120"/>
+                <a:cs typeface="Amiri" pitchFamily="2" charset="-78"/>
               </a:rPr>
               <a:t>BEFORE WE BEGIN</a:t>
             </a:r>
@@ -17797,8 +17473,7 @@
                   <a:srgbClr val="1B3B6F"/>
                 </a:solidFill>
                 <a:latin typeface="Cambria" pitchFamily="34" charset="0"/>
-                <a:ea typeface="Cambria" pitchFamily="34" charset="-122"/>
-                <a:cs typeface="Cambria" pitchFamily="34" charset="-120"/>
+                <a:cs typeface="Amiri" pitchFamily="2" charset="-78"/>
               </a:rPr>
               <a:t>Our online classroom</a:t>
             </a:r>
@@ -17835,9 +17510,8 @@
                 <a:solidFill>
                   <a:srgbClr val="8A6D1E"/>
                 </a:solidFill>
-                <a:latin typeface="Amiri" pitchFamily="34" charset="0"/>
-                <a:ea typeface="Amiri" pitchFamily="34" charset="-122"/>
-                <a:cs typeface="Amiri" pitchFamily="34" charset="-120"/>
+                <a:latin typeface="Amiri" pitchFamily="2" charset="-78"/>
+                <a:cs typeface="Amiri" pitchFamily="2" charset="-78"/>
               </a:rPr>
               <a:t>آدَابُ الصَّفِّ</a:t>
             </a:r>
@@ -17875,8 +17549,7 @@
                   <a:srgbClr val="8A93A0"/>
                 </a:solidFill>
                 <a:latin typeface="Calibri" pitchFamily="34" charset="0"/>
-                <a:ea typeface="Calibri" pitchFamily="34" charset="-122"/>
-                <a:cs typeface="Calibri" pitchFamily="34" charset="-120"/>
+                <a:cs typeface="Amiri" pitchFamily="2" charset="-78"/>
               </a:rPr>
               <a:t>Miftah Arabic · Progression P6 · IGCSE Bridge · P6-L04</a:t>
             </a:r>
@@ -17997,8 +17670,7 @@
                   <a:srgbClr val="1B3B6F"/>
                 </a:solidFill>
                 <a:latin typeface="Calibri" pitchFamily="34" charset="0"/>
-                <a:ea typeface="Calibri" pitchFamily="34" charset="-122"/>
-                <a:cs typeface="Calibri" pitchFamily="34" charset="-120"/>
+                <a:cs typeface="Amiri" pitchFamily="2" charset="-78"/>
               </a:rPr>
               <a:t>Camera on</a:t>
             </a:r>
@@ -18014,8 +17686,7 @@
                   <a:srgbClr val="5A6472"/>
                 </a:solidFill>
                 <a:latin typeface="Calibri" pitchFamily="34" charset="0"/>
-                <a:ea typeface="Calibri" pitchFamily="34" charset="-122"/>
-                <a:cs typeface="Calibri" pitchFamily="34" charset="-120"/>
+                <a:cs typeface="Amiri" pitchFamily="2" charset="-78"/>
               </a:rPr>
               <a:t>So I can see you learning and help you quickly.</a:t>
             </a:r>
@@ -18136,8 +17807,7 @@
                   <a:srgbClr val="1B3B6F"/>
                 </a:solidFill>
                 <a:latin typeface="Calibri" pitchFamily="34" charset="0"/>
-                <a:ea typeface="Calibri" pitchFamily="34" charset="-122"/>
-                <a:cs typeface="Calibri" pitchFamily="34" charset="-120"/>
+                <a:cs typeface="Amiri" pitchFamily="2" charset="-78"/>
               </a:rPr>
               <a:t>Mic muted</a:t>
             </a:r>
@@ -18153,8 +17823,7 @@
                   <a:srgbClr val="5A6472"/>
                 </a:solidFill>
                 <a:latin typeface="Calibri" pitchFamily="34" charset="0"/>
-                <a:ea typeface="Calibri" pitchFamily="34" charset="-122"/>
-                <a:cs typeface="Calibri" pitchFamily="34" charset="-120"/>
+                <a:cs typeface="Amiri" pitchFamily="2" charset="-78"/>
               </a:rPr>
               <a:t>Unmute only when invited to speak.</a:t>
             </a:r>
@@ -18275,8 +17944,7 @@
                   <a:srgbClr val="1B3B6F"/>
                 </a:solidFill>
                 <a:latin typeface="Calibri" pitchFamily="34" charset="0"/>
-                <a:ea typeface="Calibri" pitchFamily="34" charset="-122"/>
-                <a:cs typeface="Calibri" pitchFamily="34" charset="-120"/>
+                <a:cs typeface="Amiri" pitchFamily="2" charset="-78"/>
               </a:rPr>
               <a:t>Chat for learning</a:t>
             </a:r>
@@ -18292,8 +17960,7 @@
                   <a:srgbClr val="5A6472"/>
                 </a:solidFill>
                 <a:latin typeface="Calibri" pitchFamily="34" charset="0"/>
-                <a:ea typeface="Calibri" pitchFamily="34" charset="-122"/>
-                <a:cs typeface="Calibri" pitchFamily="34" charset="-120"/>
+                <a:cs typeface="Amiri" pitchFamily="2" charset="-78"/>
               </a:rPr>
               <a:t>Answers, questions and Arabic only.</a:t>
             </a:r>
@@ -18414,8 +18081,7 @@
                   <a:srgbClr val="1B3B6F"/>
                 </a:solidFill>
                 <a:latin typeface="Calibri" pitchFamily="34" charset="0"/>
-                <a:ea typeface="Calibri" pitchFamily="34" charset="-122"/>
-                <a:cs typeface="Calibri" pitchFamily="34" charset="-120"/>
+                <a:cs typeface="Amiri" pitchFamily="2" charset="-78"/>
               </a:rPr>
               <a:t>Raise your hand</a:t>
             </a:r>
@@ -18431,8 +18097,7 @@
                   <a:srgbClr val="5A6472"/>
                 </a:solidFill>
                 <a:latin typeface="Calibri" pitchFamily="34" charset="0"/>
-                <a:ea typeface="Calibri" pitchFamily="34" charset="-122"/>
-                <a:cs typeface="Calibri" pitchFamily="34" charset="-120"/>
+                <a:cs typeface="Amiri" pitchFamily="2" charset="-78"/>
               </a:rPr>
               <a:t>Use the hand button to ask for help.</a:t>
             </a:r>
@@ -18504,8 +18169,7 @@
                   <a:srgbClr val="1B3B6F"/>
                 </a:solidFill>
                 <a:latin typeface="Calibri" pitchFamily="34" charset="0"/>
-                <a:ea typeface="Calibri" pitchFamily="34" charset="-122"/>
-                <a:cs typeface="Calibri" pitchFamily="34" charset="-120"/>
+                <a:cs typeface="Amiri" pitchFamily="2" charset="-78"/>
               </a:rPr>
               <a:t>HOW WE TALK — THE ORACY CODE</a:t>
             </a:r>
@@ -18568,8 +18232,7 @@
                   <a:srgbClr val="D4AF37"/>
                 </a:solidFill>
                 <a:latin typeface="Arial" pitchFamily="34" charset="0"/>
-                <a:ea typeface="Arial" pitchFamily="34" charset="-122"/>
-                <a:cs typeface="Arial" pitchFamily="34" charset="-120"/>
+                <a:cs typeface="Amiri" pitchFamily="2" charset="-78"/>
               </a:rPr>
               <a:t>●</a:t>
             </a:r>
@@ -18607,8 +18270,7 @@
                   <a:srgbClr val="1B3B6F"/>
                 </a:solidFill>
                 <a:latin typeface="Calibri" pitchFamily="34" charset="0"/>
-                <a:ea typeface="Calibri" pitchFamily="34" charset="-122"/>
-                <a:cs typeface="Calibri" pitchFamily="34" charset="-120"/>
+                <a:cs typeface="Amiri" pitchFamily="2" charset="-78"/>
               </a:rPr>
               <a:t>Think</a:t>
             </a:r>
@@ -18624,8 +18286,7 @@
                   <a:srgbClr val="5A6472"/>
                 </a:solidFill>
                 <a:latin typeface="Calibri" pitchFamily="34" charset="0"/>
-                <a:ea typeface="Calibri" pitchFamily="34" charset="-122"/>
-                <a:cs typeface="Calibri" pitchFamily="34" charset="-120"/>
+                <a:cs typeface="Amiri" pitchFamily="2" charset="-78"/>
               </a:rPr>
               <a:t>silent preparation</a:t>
             </a:r>
@@ -18688,8 +18349,7 @@
                   <a:srgbClr val="D4AF37"/>
                 </a:solidFill>
                 <a:latin typeface="Arial" pitchFamily="34" charset="0"/>
-                <a:ea typeface="Arial" pitchFamily="34" charset="-122"/>
-                <a:cs typeface="Arial" pitchFamily="34" charset="-120"/>
+                <a:cs typeface="Amiri" pitchFamily="2" charset="-78"/>
               </a:rPr>
               <a:t>↔</a:t>
             </a:r>
@@ -18727,8 +18387,7 @@
                   <a:srgbClr val="1B3B6F"/>
                 </a:solidFill>
                 <a:latin typeface="Calibri" pitchFamily="34" charset="0"/>
-                <a:ea typeface="Calibri" pitchFamily="34" charset="-122"/>
-                <a:cs typeface="Calibri" pitchFamily="34" charset="-120"/>
+                <a:cs typeface="Amiri" pitchFamily="2" charset="-78"/>
               </a:rPr>
               <a:t>Rehearse</a:t>
             </a:r>
@@ -18744,8 +18403,7 @@
                   <a:srgbClr val="5A6472"/>
                 </a:solidFill>
                 <a:latin typeface="Calibri" pitchFamily="34" charset="0"/>
-                <a:ea typeface="Calibri" pitchFamily="34" charset="-122"/>
-                <a:cs typeface="Calibri" pitchFamily="34" charset="-120"/>
+                <a:cs typeface="Amiri" pitchFamily="2" charset="-78"/>
               </a:rPr>
               <a:t>both partners speak</a:t>
             </a:r>
@@ -18808,8 +18466,7 @@
                   <a:srgbClr val="D4AF37"/>
                 </a:solidFill>
                 <a:latin typeface="Arial" pitchFamily="34" charset="0"/>
-                <a:ea typeface="Arial" pitchFamily="34" charset="-122"/>
-                <a:cs typeface="Arial" pitchFamily="34" charset="-120"/>
+                <a:cs typeface="Amiri" pitchFamily="2" charset="-78"/>
               </a:rPr>
               <a:t>+</a:t>
             </a:r>
@@ -18847,8 +18504,7 @@
                   <a:srgbClr val="1B3B6F"/>
                 </a:solidFill>
                 <a:latin typeface="Calibri" pitchFamily="34" charset="0"/>
-                <a:ea typeface="Calibri" pitchFamily="34" charset="-122"/>
-                <a:cs typeface="Calibri" pitchFamily="34" charset="-120"/>
+                <a:cs typeface="Amiri" pitchFamily="2" charset="-78"/>
               </a:rPr>
               <a:t>Build</a:t>
             </a:r>
@@ -18864,8 +18520,7 @@
                   <a:srgbClr val="5A6472"/>
                 </a:solidFill>
                 <a:latin typeface="Calibri" pitchFamily="34" charset="0"/>
-                <a:ea typeface="Calibri" pitchFamily="34" charset="-122"/>
-                <a:cs typeface="Calibri" pitchFamily="34" charset="-120"/>
+                <a:cs typeface="Amiri" pitchFamily="2" charset="-78"/>
               </a:rPr>
               <a:t>add a reason or detail</a:t>
             </a:r>
@@ -18928,8 +18583,7 @@
                   <a:srgbClr val="D4AF37"/>
                 </a:solidFill>
                 <a:latin typeface="Arial" pitchFamily="34" charset="0"/>
-                <a:ea typeface="Arial" pitchFamily="34" charset="-122"/>
-                <a:cs typeface="Arial" pitchFamily="34" charset="-120"/>
+                <a:cs typeface="Amiri" pitchFamily="2" charset="-78"/>
               </a:rPr>
               <a:t>?</a:t>
             </a:r>
@@ -18967,8 +18621,7 @@
                   <a:srgbClr val="1B3B6F"/>
                 </a:solidFill>
                 <a:latin typeface="Calibri" pitchFamily="34" charset="0"/>
-                <a:ea typeface="Calibri" pitchFamily="34" charset="-122"/>
-                <a:cs typeface="Calibri" pitchFamily="34" charset="-120"/>
+                <a:cs typeface="Amiri" pitchFamily="2" charset="-78"/>
               </a:rPr>
               <a:t>Challenge</a:t>
             </a:r>
@@ -18984,8 +18637,7 @@
                   <a:srgbClr val="5A6472"/>
                 </a:solidFill>
                 <a:latin typeface="Calibri" pitchFamily="34" charset="0"/>
-                <a:ea typeface="Calibri" pitchFamily="34" charset="-122"/>
-                <a:cs typeface="Calibri" pitchFamily="34" charset="-120"/>
+                <a:cs typeface="Amiri" pitchFamily="2" charset="-78"/>
               </a:rPr>
               <a:t>question respectfully</a:t>
             </a:r>
@@ -19048,8 +18700,7 @@
                   <a:srgbClr val="D4AF37"/>
                 </a:solidFill>
                 <a:latin typeface="Arial" pitchFamily="34" charset="0"/>
-                <a:ea typeface="Arial" pitchFamily="34" charset="-122"/>
-                <a:cs typeface="Arial" pitchFamily="34" charset="-120"/>
+                <a:cs typeface="Amiri" pitchFamily="2" charset="-78"/>
               </a:rPr>
               <a:t>◎</a:t>
             </a:r>
@@ -19087,8 +18738,7 @@
                   <a:srgbClr val="1B3B6F"/>
                 </a:solidFill>
                 <a:latin typeface="Calibri" pitchFamily="34" charset="0"/>
-                <a:ea typeface="Calibri" pitchFamily="34" charset="-122"/>
-                <a:cs typeface="Calibri" pitchFamily="34" charset="-120"/>
+                <a:cs typeface="Amiri" pitchFamily="2" charset="-78"/>
               </a:rPr>
               <a:t>Share</a:t>
             </a:r>
@@ -19104,8 +18754,7 @@
                   <a:srgbClr val="5A6472"/>
                 </a:solidFill>
                 <a:latin typeface="Calibri" pitchFamily="34" charset="0"/>
-                <a:ea typeface="Calibri" pitchFamily="34" charset="-122"/>
-                <a:cs typeface="Calibri" pitchFamily="34" charset="-120"/>
+                <a:cs typeface="Amiri" pitchFamily="2" charset="-78"/>
               </a:rPr>
               <a:t>anyone may be invited</a:t>
             </a:r>
@@ -19168,8 +18817,7 @@
                   <a:srgbClr val="D4AF37"/>
                 </a:solidFill>
                 <a:latin typeface="Arial" pitchFamily="34" charset="0"/>
-                <a:ea typeface="Arial" pitchFamily="34" charset="-122"/>
-                <a:cs typeface="Arial" pitchFamily="34" charset="-120"/>
+                <a:cs typeface="Amiri" pitchFamily="2" charset="-78"/>
               </a:rPr>
               <a:t>↺</a:t>
             </a:r>
@@ -19207,8 +18855,7 @@
                   <a:srgbClr val="1B3B6F"/>
                 </a:solidFill>
                 <a:latin typeface="Calibri" pitchFamily="34" charset="0"/>
-                <a:ea typeface="Calibri" pitchFamily="34" charset="-122"/>
-                <a:cs typeface="Calibri" pitchFamily="34" charset="-120"/>
+                <a:cs typeface="Amiri" pitchFamily="2" charset="-78"/>
               </a:rPr>
               <a:t>Summarise</a:t>
             </a:r>
@@ -19224,8 +18871,7 @@
                   <a:srgbClr val="5A6472"/>
                 </a:solidFill>
                 <a:latin typeface="Calibri" pitchFamily="34" charset="0"/>
-                <a:ea typeface="Calibri" pitchFamily="34" charset="-122"/>
-                <a:cs typeface="Calibri" pitchFamily="34" charset="-120"/>
+                <a:cs typeface="Amiri" pitchFamily="2" charset="-78"/>
               </a:rPr>
               <a:t>say it more precisely</a:t>
             </a:r>
@@ -19263,8 +18909,7 @@
                   <a:srgbClr val="8A6D1E"/>
                 </a:solidFill>
                 <a:latin typeface="Calibri" pitchFamily="34" charset="0"/>
-                <a:ea typeface="Calibri" pitchFamily="34" charset="-122"/>
-                <a:cs typeface="Calibri" pitchFamily="34" charset="-120"/>
+                <a:cs typeface="Amiri" pitchFamily="2" charset="-78"/>
               </a:rPr>
               <a:t>I will always give you thinking and practice time before I ask anyone. Reading aloud is by invitation — you can always say “pass, please come back to me”.</a:t>
             </a:r>
@@ -19302,8 +18947,7 @@
                   <a:srgbClr val="8A93A0"/>
                 </a:solidFill>
                 <a:latin typeface="Calibri" pitchFamily="34" charset="0"/>
-                <a:ea typeface="Calibri" pitchFamily="34" charset="-122"/>
-                <a:cs typeface="Calibri" pitchFamily="34" charset="-120"/>
+                <a:cs typeface="Amiri" pitchFamily="2" charset="-78"/>
               </a:rPr>
               <a:t>2 / 26</a:t>
             </a:r>
@@ -19397,9 +19041,8 @@
                 <a:solidFill>
                   <a:srgbClr val="D4AF37"/>
                 </a:solidFill>
-                <a:latin typeface="Amiri" pitchFamily="34" charset="0"/>
-                <a:ea typeface="Amiri" pitchFamily="34" charset="-122"/>
-                <a:cs typeface="Amiri" pitchFamily="34" charset="-120"/>
+                <a:latin typeface="Amiri" pitchFamily="2" charset="-78"/>
+                <a:cs typeface="Amiri" pitchFamily="2" charset="-78"/>
               </a:rPr>
               <a:t>م</a:t>
             </a:r>
@@ -19437,8 +19080,7 @@
                   <a:srgbClr val="1B3B6F"/>
                 </a:solidFill>
                 <a:latin typeface="Cambria" pitchFamily="34" charset="0"/>
-                <a:ea typeface="Cambria" pitchFamily="34" charset="-122"/>
-                <a:cs typeface="Cambria" pitchFamily="34" charset="-120"/>
+                <a:cs typeface="Amiri" pitchFamily="2" charset="-78"/>
               </a:rPr>
               <a:t>Al Madina Online School</a:t>
             </a:r>
@@ -19476,8 +19118,7 @@
                   <a:srgbClr val="8A6D1E"/>
                 </a:solidFill>
                 <a:latin typeface="Calibri" pitchFamily="34" charset="0"/>
-                <a:ea typeface="Calibri" pitchFamily="34" charset="-122"/>
-                <a:cs typeface="Calibri" pitchFamily="34" charset="-120"/>
+                <a:cs typeface="Amiri" pitchFamily="2" charset="-78"/>
               </a:rPr>
               <a:t>ARABIC DEPARTMENT · MIFTAH ARABIC · IGCSE 0544</a:t>
             </a:r>
@@ -19542,8 +19183,7 @@
                   <a:srgbClr val="FFFFFF"/>
                 </a:solidFill>
                 <a:latin typeface="Calibri" pitchFamily="34" charset="0"/>
-                <a:ea typeface="Calibri" pitchFamily="34" charset="-122"/>
-                <a:cs typeface="Calibri" pitchFamily="34" charset="-120"/>
+                <a:cs typeface="Amiri" pitchFamily="2" charset="-78"/>
               </a:rPr>
               <a:t>P6-L04 · IGCSE Bridge</a:t>
             </a:r>
@@ -19608,8 +19248,7 @@
                   <a:srgbClr val="FFFFFF"/>
                 </a:solidFill>
                 <a:latin typeface="Calibri" pitchFamily="34" charset="0"/>
-                <a:ea typeface="Calibri" pitchFamily="34" charset="-122"/>
-                <a:cs typeface="Calibri" pitchFamily="34" charset="-120"/>
+                <a:cs typeface="Amiri" pitchFamily="2" charset="-78"/>
               </a:rPr>
               <a:t>FEEDBACK · 1 MIN</a:t>
             </a:r>
@@ -19647,8 +19286,7 @@
                   <a:srgbClr val="8A6D1E"/>
                 </a:solidFill>
                 <a:latin typeface="Calibri" pitchFamily="34" charset="0"/>
-                <a:ea typeface="Calibri" pitchFamily="34" charset="-122"/>
-                <a:cs typeface="Calibri" pitchFamily="34" charset="-120"/>
+                <a:cs typeface="Amiri" pitchFamily="2" charset="-78"/>
               </a:rPr>
               <a:t>FEEDBACK · TASK 2 — ARTICLE · THE WEBSITE MODEL</a:t>
             </a:r>
@@ -19686,8 +19324,7 @@
                   <a:srgbClr val="1B3B6F"/>
                 </a:solidFill>
                 <a:latin typeface="Cambria" pitchFamily="34" charset="0"/>
-                <a:ea typeface="Cambria" pitchFamily="34" charset="-122"/>
-                <a:cs typeface="Cambria" pitchFamily="34" charset="-120"/>
+                <a:cs typeface="Amiri" pitchFamily="2" charset="-78"/>
               </a:rPr>
               <a:t>What a full-mark answer looks like</a:t>
             </a:r>
@@ -19724,9 +19361,8 @@
                 <a:solidFill>
                   <a:srgbClr val="8A6D1E"/>
                 </a:solidFill>
-                <a:latin typeface="Amiri" pitchFamily="34" charset="0"/>
-                <a:ea typeface="Amiri" pitchFamily="34" charset="-122"/>
-                <a:cs typeface="Amiri" pitchFamily="34" charset="-120"/>
+                <a:latin typeface="Amiri" pitchFamily="2" charset="-78"/>
+                <a:cs typeface="Amiri" pitchFamily="2" charset="-78"/>
               </a:rPr>
               <a:t>نَمُوذَجُ الإِجَابَةِ</a:t>
             </a:r>
@@ -19764,8 +19400,7 @@
                   <a:srgbClr val="8A93A0"/>
                 </a:solidFill>
                 <a:latin typeface="Calibri" pitchFamily="34" charset="0"/>
-                <a:ea typeface="Calibri" pitchFamily="34" charset="-122"/>
-                <a:cs typeface="Calibri" pitchFamily="34" charset="-120"/>
+                <a:cs typeface="Amiri" pitchFamily="2" charset="-78"/>
               </a:rPr>
               <a:t>Miftah Arabic · Progression P6 · IGCSE Bridge · P6-L04</a:t>
             </a:r>
@@ -19839,9 +19474,8 @@
                 <a:solidFill>
                   <a:srgbClr val="1F2A37"/>
                 </a:solidFill>
-                <a:latin typeface="Amiri" pitchFamily="34" charset="0"/>
-                <a:ea typeface="Amiri" pitchFamily="34" charset="-122"/>
-                <a:cs typeface="Amiri" pitchFamily="34" charset="-120"/>
+                <a:latin typeface="Amiri" pitchFamily="2" charset="-78"/>
+                <a:cs typeface="Amiri" pitchFamily="2" charset="-78"/>
               </a:rPr>
               <a:t>كَيْفَ أُحَافِظُ عَلَى تَوَازُنِي النَّفْسِيِّ؟ سُؤَالٌ يَشْغَلُ كَثِيرًا مِنَ الشَّبَابِ. أُشِيرُ أَوَّلًا إِلَى أَنَّ النَّوْمَ الجَيِّدَ وَالرِّيَاضَةَ أَسَاسٌ لَا غِنَى عَنْهُ. صَحِيحٌ أَنَّ الدِّرَاسَةَ تُسَبِّبُ ضَغْطًا، غَيْرَ أَنَّ تَنْظِيمَ الوَقْتِ يُخَفِّفُهُ. وَإِذَا خَصَّصْتُ سَاعَةً لِلرَّاحَةِ يَوْمِيًّا، شَعَرْتُ بِتَحَسُّنٍ وَاضِحٍ. وَيَنْبَغِي أَنْ نَحْرِصَ عَلَى الحَدِيثِ مَعَ مَنْ نَثِقُ بِهِمْ. وَخِتَامًا، أَدْعُو كُلَّ قَارِئٍ إِلَى أَنْ يَعْتَنِيَ بِصِحَّتِهِ النَّفْسِيَّةِ كَمَا يَعْتَنِي بِجَسَدِهِ.</a:t>
             </a:r>
@@ -19906,8 +19540,7 @@
                   <a:srgbClr val="5A6472"/>
                 </a:solidFill>
                 <a:latin typeface="Calibri" pitchFamily="34" charset="0"/>
-                <a:ea typeface="Calibri" pitchFamily="34" charset="-122"/>
-                <a:cs typeface="Calibri" pitchFamily="34" charset="-120"/>
+                <a:cs typeface="Amiri" pitchFamily="2" charset="-78"/>
               </a:rPr>
               <a:t>How do I keep my mental balance? It is a question on many young people’s minds. First, I point out that good sleep and exercise are an indispensable foundation. It is true that studying causes stress; however, organising my time eases it. When I set aside an hour a day for rest, I feel a clear improvement. We should make sure we talk to people we trust. Finally, I call on every reader to look after their mental health as they look after their body.</a:t>
             </a:r>
@@ -19945,8 +19578,7 @@
                   <a:srgbClr val="8A6D1E"/>
                 </a:solidFill>
                 <a:latin typeface="Calibri" pitchFamily="34" charset="0"/>
-                <a:ea typeface="Calibri" pitchFamily="34" charset="-122"/>
-                <a:cs typeface="Calibri" pitchFamily="34" charset="-120"/>
+                <a:cs typeface="Amiri" pitchFamily="2" charset="-78"/>
               </a:rPr>
               <a:t>FIND IN THE MODEL:</a:t>
             </a:r>
@@ -20011,8 +19643,7 @@
                   <a:srgbClr val="FFFFFF"/>
                 </a:solidFill>
                 <a:latin typeface="Calibri" pitchFamily="34" charset="0"/>
-                <a:ea typeface="Calibri" pitchFamily="34" charset="-122"/>
-                <a:cs typeface="Calibri" pitchFamily="34" charset="-120"/>
+                <a:cs typeface="Amiri" pitchFamily="2" charset="-78"/>
               </a:rPr>
               <a:t>a hook question, no address</a:t>
             </a:r>
@@ -20077,8 +19708,7 @@
                   <a:srgbClr val="FFFFFF"/>
                 </a:solidFill>
                 <a:latin typeface="Calibri" pitchFamily="34" charset="0"/>
-                <a:ea typeface="Calibri" pitchFamily="34" charset="-122"/>
-                <a:cs typeface="Calibri" pitchFamily="34" charset="-120"/>
+                <a:cs typeface="Amiri" pitchFamily="2" charset="-78"/>
               </a:rPr>
               <a:t>first person, semi-formal</a:t>
             </a:r>
@@ -20143,8 +19773,7 @@
                   <a:srgbClr val="FFFFFF"/>
                 </a:solidFill>
                 <a:latin typeface="Calibri" pitchFamily="34" charset="0"/>
-                <a:ea typeface="Calibri" pitchFamily="34" charset="-122"/>
-                <a:cs typeface="Calibri" pitchFamily="34" charset="-120"/>
+                <a:cs typeface="Amiri" pitchFamily="2" charset="-78"/>
               </a:rPr>
               <a:t>idhā … · yanbaghī an</a:t>
             </a:r>
@@ -20209,8 +19838,7 @@
                   <a:srgbClr val="FFFFFF"/>
                 </a:solidFill>
                 <a:latin typeface="Calibri" pitchFamily="34" charset="0"/>
-                <a:ea typeface="Calibri" pitchFamily="34" charset="-122"/>
-                <a:cs typeface="Calibri" pitchFamily="34" charset="-120"/>
+                <a:cs typeface="Amiri" pitchFamily="2" charset="-78"/>
               </a:rPr>
               <a:t>a closing thought for the reader</a:t>
             </a:r>
@@ -20248,8 +19876,7 @@
                   <a:srgbClr val="8A93A0"/>
                 </a:solidFill>
                 <a:latin typeface="Calibri" pitchFamily="34" charset="0"/>
-                <a:ea typeface="Calibri" pitchFamily="34" charset="-122"/>
-                <a:cs typeface="Calibri" pitchFamily="34" charset="-120"/>
+                <a:cs typeface="Amiri" pitchFamily="2" charset="-78"/>
               </a:rPr>
               <a:t>20 / 26</a:t>
             </a:r>
@@ -20343,9 +19970,8 @@
                 <a:solidFill>
                   <a:srgbClr val="D4AF37"/>
                 </a:solidFill>
-                <a:latin typeface="Amiri" pitchFamily="34" charset="0"/>
-                <a:ea typeface="Amiri" pitchFamily="34" charset="-122"/>
-                <a:cs typeface="Amiri" pitchFamily="34" charset="-120"/>
+                <a:latin typeface="Amiri" pitchFamily="2" charset="-78"/>
+                <a:cs typeface="Amiri" pitchFamily="2" charset="-78"/>
               </a:rPr>
               <a:t>م</a:t>
             </a:r>
@@ -20383,8 +20009,7 @@
                   <a:srgbClr val="1B3B6F"/>
                 </a:solidFill>
                 <a:latin typeface="Cambria" pitchFamily="34" charset="0"/>
-                <a:ea typeface="Cambria" pitchFamily="34" charset="-122"/>
-                <a:cs typeface="Cambria" pitchFamily="34" charset="-120"/>
+                <a:cs typeface="Amiri" pitchFamily="2" charset="-78"/>
               </a:rPr>
               <a:t>Al Madina Online School</a:t>
             </a:r>
@@ -20422,8 +20047,7 @@
                   <a:srgbClr val="8A6D1E"/>
                 </a:solidFill>
                 <a:latin typeface="Calibri" pitchFamily="34" charset="0"/>
-                <a:ea typeface="Calibri" pitchFamily="34" charset="-122"/>
-                <a:cs typeface="Calibri" pitchFamily="34" charset="-120"/>
+                <a:cs typeface="Amiri" pitchFamily="2" charset="-78"/>
               </a:rPr>
               <a:t>ARABIC DEPARTMENT · MIFTAH ARABIC · IGCSE 0544</a:t>
             </a:r>
@@ -20488,8 +20112,7 @@
                   <a:srgbClr val="FFFFFF"/>
                 </a:solidFill>
                 <a:latin typeface="Calibri" pitchFamily="34" charset="0"/>
-                <a:ea typeface="Calibri" pitchFamily="34" charset="-122"/>
-                <a:cs typeface="Calibri" pitchFamily="34" charset="-120"/>
+                <a:cs typeface="Amiri" pitchFamily="2" charset="-78"/>
               </a:rPr>
               <a:t>P6-L04 · IGCSE Bridge</a:t>
             </a:r>
@@ -20554,8 +20177,7 @@
                   <a:srgbClr val="FFFFFF"/>
                 </a:solidFill>
                 <a:latin typeface="Calibri" pitchFamily="34" charset="0"/>
-                <a:ea typeface="Calibri" pitchFamily="34" charset="-122"/>
-                <a:cs typeface="Calibri" pitchFamily="34" charset="-120"/>
+                <a:cs typeface="Amiri" pitchFamily="2" charset="-78"/>
               </a:rPr>
               <a:t>FEEDBACK · 1 MIN</a:t>
             </a:r>
@@ -20593,8 +20215,7 @@
                   <a:srgbClr val="8A6D1E"/>
                 </a:solidFill>
                 <a:latin typeface="Calibri" pitchFamily="34" charset="0"/>
-                <a:ea typeface="Calibri" pitchFamily="34" charset="-122"/>
-                <a:cs typeface="Calibri" pitchFamily="34" charset="-120"/>
+                <a:cs typeface="Amiri" pitchFamily="2" charset="-78"/>
               </a:rPr>
               <a:t>FEEDBACK · TASK 1 — FORMAL LETTER · THE WEBSITE MODEL</a:t>
             </a:r>
@@ -20632,8 +20253,7 @@
                   <a:srgbClr val="1B3B6F"/>
                 </a:solidFill>
                 <a:latin typeface="Cambria" pitchFamily="34" charset="0"/>
-                <a:ea typeface="Cambria" pitchFamily="34" charset="-122"/>
-                <a:cs typeface="Cambria" pitchFamily="34" charset="-120"/>
+                <a:cs typeface="Amiri" pitchFamily="2" charset="-78"/>
               </a:rPr>
               <a:t>What a full-mark answer looks like</a:t>
             </a:r>
@@ -20670,9 +20290,8 @@
                 <a:solidFill>
                   <a:srgbClr val="8A6D1E"/>
                 </a:solidFill>
-                <a:latin typeface="Amiri" pitchFamily="34" charset="0"/>
-                <a:ea typeface="Amiri" pitchFamily="34" charset="-122"/>
-                <a:cs typeface="Amiri" pitchFamily="34" charset="-120"/>
+                <a:latin typeface="Amiri" pitchFamily="2" charset="-78"/>
+                <a:cs typeface="Amiri" pitchFamily="2" charset="-78"/>
               </a:rPr>
               <a:t>نَمُوذَجُ الإِجَابَةِ</a:t>
             </a:r>
@@ -20710,8 +20329,7 @@
                   <a:srgbClr val="8A93A0"/>
                 </a:solidFill>
                 <a:latin typeface="Calibri" pitchFamily="34" charset="0"/>
-                <a:ea typeface="Calibri" pitchFamily="34" charset="-122"/>
-                <a:cs typeface="Calibri" pitchFamily="34" charset="-120"/>
+                <a:cs typeface="Amiri" pitchFamily="2" charset="-78"/>
               </a:rPr>
               <a:t>Miftah Arabic · Progression P6 · IGCSE Bridge · P6-L04</a:t>
             </a:r>
@@ -20785,9 +20403,8 @@
                 <a:solidFill>
                   <a:srgbClr val="1F2A37"/>
                 </a:solidFill>
-                <a:latin typeface="Amiri" pitchFamily="34" charset="0"/>
-                <a:ea typeface="Amiri" pitchFamily="34" charset="-122"/>
-                <a:cs typeface="Amiri" pitchFamily="34" charset="-120"/>
+                <a:latin typeface="Amiri" pitchFamily="2" charset="-78"/>
+                <a:cs typeface="Amiri" pitchFamily="2" charset="-78"/>
               </a:rPr>
               <a:t>حَضَرَاتِ أَعْضَاءِ لَجْنَةِ البِيئَةِ المُحْتَرَمِينَ، أَتَشَرَّفُ بِمُخَاطَبَتِكُمْ بِشَأْنِ نُدْرَةِ المِيَاهِ فِي مِنْطَقَتِنَا. صَحِيحٌ أَنَّ المَوَارِدَ مَحْدُودَةٌ، غَيْرَ أَنَّ سُوءَ الإِدَارَةِ يُفَاقِمُ الأَزْمَةَ. وَأَقْتَرِحُ أَنْ تُطْلَقَ حَمْلَةٌ لِتَرْشِيدِ الاسْتِهْلَاكِ، وَأَنْ تُسْتَثْمَرَ الطَّاقَةُ الشَّمْسِيَّةُ فِي تَحْلِيَةِ المِيَاهِ. وَلَوْ طُبِّقَتْ هٰذِهِ الإِجْرَاءَاتُ، لَتَحَسَّنَ الوَضْعُ كَثِيرًا. وَبِنَاءً عَلَى مَا سَبَقَ، أَرْجُو أَنْ تَتَّخِذُوا القَرَارَ المُنَاسِبَ عَاجِلًا. وَتَفَضَّلُوا بِقَبُولِ فَائِقِ الاحْتِرَامِ.</a:t>
             </a:r>
@@ -20852,8 +20469,7 @@
                   <a:srgbClr val="5A6472"/>
                 </a:solidFill>
                 <a:latin typeface="Calibri" pitchFamily="34" charset="0"/>
-                <a:ea typeface="Calibri" pitchFamily="34" charset="-122"/>
-                <a:cs typeface="Calibri" pitchFamily="34" charset="-120"/>
+                <a:cs typeface="Amiri" pitchFamily="2" charset="-78"/>
               </a:rPr>
               <a:t>Honourable members of the Environment Committee, I have the honour of writing to you about water scarcity in our region. It is true that resources are limited; however, poor management is worsening the crisis. I propose that a campaign be launched to rationalise consumption, and that solar energy be invested in desalination. Had these measures been applied, the situation would have improved greatly. Based on the above, I hope that you will take the appropriate decision urgently. Yours faithfully.</a:t>
             </a:r>
@@ -20891,8 +20507,7 @@
                   <a:srgbClr val="8A6D1E"/>
                 </a:solidFill>
                 <a:latin typeface="Calibri" pitchFamily="34" charset="0"/>
-                <a:ea typeface="Calibri" pitchFamily="34" charset="-122"/>
-                <a:cs typeface="Calibri" pitchFamily="34" charset="-120"/>
+                <a:cs typeface="Amiri" pitchFamily="2" charset="-78"/>
               </a:rPr>
               <a:t>FIND IN THE MODEL:</a:t>
             </a:r>
@@ -20957,8 +20572,7 @@
                   <a:srgbClr val="FFFFFF"/>
                 </a:solidFill>
                 <a:latin typeface="Calibri" pitchFamily="34" charset="0"/>
-                <a:ea typeface="Calibri" pitchFamily="34" charset="-122"/>
-                <a:cs typeface="Calibri" pitchFamily="34" charset="-120"/>
+                <a:cs typeface="Amiri" pitchFamily="2" charset="-78"/>
               </a:rPr>
               <a:t>formal opening + closing</a:t>
             </a:r>
@@ -21023,8 +20637,7 @@
                   <a:srgbClr val="FFFFFF"/>
                 </a:solidFill>
                 <a:latin typeface="Calibri" pitchFamily="34" charset="0"/>
-                <a:ea typeface="Calibri" pitchFamily="34" charset="-122"/>
-                <a:cs typeface="Calibri" pitchFamily="34" charset="-120"/>
+                <a:cs typeface="Amiri" pitchFamily="2" charset="-78"/>
               </a:rPr>
               <a:t>problem · solution · benefit · request</a:t>
             </a:r>
@@ -21089,8 +20702,7 @@
                   <a:srgbClr val="FFFFFF"/>
                 </a:solidFill>
                 <a:latin typeface="Calibri" pitchFamily="34" charset="0"/>
-                <a:ea typeface="Calibri" pitchFamily="34" charset="-122"/>
-                <a:cs typeface="Calibri" pitchFamily="34" charset="-120"/>
+                <a:cs typeface="Amiri" pitchFamily="2" charset="-78"/>
               </a:rPr>
               <a:t>passive in -a (an tuṭlaqa)</a:t>
             </a:r>
@@ -21155,8 +20767,7 @@
                   <a:srgbClr val="FFFFFF"/>
                 </a:solidFill>
                 <a:latin typeface="Calibri" pitchFamily="34" charset="0"/>
-                <a:ea typeface="Calibri" pitchFamily="34" charset="-122"/>
-                <a:cs typeface="Calibri" pitchFamily="34" charset="-120"/>
+                <a:cs typeface="Amiri" pitchFamily="2" charset="-78"/>
               </a:rPr>
               <a:t>law … la- · wa-bināʾan</a:t>
             </a:r>
@@ -21194,8 +20805,7 @@
                   <a:srgbClr val="8A93A0"/>
                 </a:solidFill>
                 <a:latin typeface="Calibri" pitchFamily="34" charset="0"/>
-                <a:ea typeface="Calibri" pitchFamily="34" charset="-122"/>
-                <a:cs typeface="Calibri" pitchFamily="34" charset="-120"/>
+                <a:cs typeface="Amiri" pitchFamily="2" charset="-78"/>
               </a:rPr>
               <a:t>21 / 26</a:t>
             </a:r>
@@ -21289,9 +20899,8 @@
                 <a:solidFill>
                   <a:srgbClr val="D4AF37"/>
                 </a:solidFill>
-                <a:latin typeface="Amiri" pitchFamily="34" charset="0"/>
-                <a:ea typeface="Amiri" pitchFamily="34" charset="-122"/>
-                <a:cs typeface="Amiri" pitchFamily="34" charset="-120"/>
+                <a:latin typeface="Amiri" pitchFamily="2" charset="-78"/>
+                <a:cs typeface="Amiri" pitchFamily="2" charset="-78"/>
               </a:rPr>
               <a:t>م</a:t>
             </a:r>
@@ -21329,8 +20938,7 @@
                   <a:srgbClr val="1B3B6F"/>
                 </a:solidFill>
                 <a:latin typeface="Cambria" pitchFamily="34" charset="0"/>
-                <a:ea typeface="Cambria" pitchFamily="34" charset="-122"/>
-                <a:cs typeface="Cambria" pitchFamily="34" charset="-120"/>
+                <a:cs typeface="Amiri" pitchFamily="2" charset="-78"/>
               </a:rPr>
               <a:t>Al Madina Online School</a:t>
             </a:r>
@@ -21368,8 +20976,7 @@
                   <a:srgbClr val="8A6D1E"/>
                 </a:solidFill>
                 <a:latin typeface="Calibri" pitchFamily="34" charset="0"/>
-                <a:ea typeface="Calibri" pitchFamily="34" charset="-122"/>
-                <a:cs typeface="Calibri" pitchFamily="34" charset="-120"/>
+                <a:cs typeface="Amiri" pitchFamily="2" charset="-78"/>
               </a:rPr>
               <a:t>ARABIC DEPARTMENT · MIFTAH ARABIC · IGCSE 0544</a:t>
             </a:r>
@@ -21434,8 +21041,7 @@
                   <a:srgbClr val="FFFFFF"/>
                 </a:solidFill>
                 <a:latin typeface="Calibri" pitchFamily="34" charset="0"/>
-                <a:ea typeface="Calibri" pitchFamily="34" charset="-122"/>
-                <a:cs typeface="Calibri" pitchFamily="34" charset="-120"/>
+                <a:cs typeface="Amiri" pitchFamily="2" charset="-78"/>
               </a:rPr>
               <a:t>P6-L04 · IGCSE Bridge</a:t>
             </a:r>
@@ -21500,8 +21106,7 @@
                   <a:srgbClr val="FFFFFF"/>
                 </a:solidFill>
                 <a:latin typeface="Calibri" pitchFamily="34" charset="0"/>
-                <a:ea typeface="Calibri" pitchFamily="34" charset="-122"/>
-                <a:cs typeface="Calibri" pitchFamily="34" charset="-120"/>
+                <a:cs typeface="Amiri" pitchFamily="2" charset="-78"/>
               </a:rPr>
               <a:t>YOU DO · 3 MIN</a:t>
             </a:r>
@@ -21539,8 +21144,7 @@
                   <a:srgbClr val="1E6B52"/>
                 </a:solidFill>
                 <a:latin typeface="Calibri" pitchFamily="34" charset="0"/>
-                <a:ea typeface="Calibri" pitchFamily="34" charset="-122"/>
-                <a:cs typeface="Calibri" pitchFamily="34" charset="-120"/>
+                <a:cs typeface="Amiri" pitchFamily="2" charset="-78"/>
               </a:rPr>
               <a:t>YOU DO · TEXT-TYPE DIFFICULTY PROFILE (WEBSITE)</a:t>
             </a:r>
@@ -21578,8 +21182,7 @@
                   <a:srgbClr val="1B3B6F"/>
                 </a:solidFill>
                 <a:latin typeface="Cambria" pitchFamily="34" charset="0"/>
-                <a:ea typeface="Cambria" pitchFamily="34" charset="-122"/>
-                <a:cs typeface="Cambria" pitchFamily="34" charset="-120"/>
+                <a:cs typeface="Amiri" pitchFamily="2" charset="-78"/>
               </a:rPr>
               <a:t>Text type difficulty profile</a:t>
             </a:r>
@@ -21616,9 +21219,8 @@
                 <a:solidFill>
                   <a:srgbClr val="8A6D1E"/>
                 </a:solidFill>
-                <a:latin typeface="Amiri" pitchFamily="34" charset="0"/>
-                <a:ea typeface="Amiri" pitchFamily="34" charset="-122"/>
-                <a:cs typeface="Amiri" pitchFamily="34" charset="-120"/>
+                <a:latin typeface="Amiri" pitchFamily="2" charset="-78"/>
+                <a:cs typeface="Amiri" pitchFamily="2" charset="-78"/>
               </a:rPr>
               <a:t>أَقْوَى نَوْعٍ وَأَضْعَفُهُ</a:t>
             </a:r>
@@ -21656,8 +21258,7 @@
                   <a:srgbClr val="8A93A0"/>
                 </a:solidFill>
                 <a:latin typeface="Calibri" pitchFamily="34" charset="0"/>
-                <a:ea typeface="Calibri" pitchFamily="34" charset="-122"/>
-                <a:cs typeface="Calibri" pitchFamily="34" charset="-120"/>
+                <a:cs typeface="Amiri" pitchFamily="2" charset="-78"/>
               </a:rPr>
               <a:t>Miftah Arabic · Progression P6 · IGCSE Bridge · P6-L04</a:t>
             </a:r>
@@ -21720,8 +21321,7 @@
                   <a:srgbClr val="FFFFFF"/>
                 </a:solidFill>
                 <a:latin typeface="Calibri" pitchFamily="34" charset="0"/>
-                <a:ea typeface="Calibri" pitchFamily="34" charset="-122"/>
-                <a:cs typeface="Calibri" pitchFamily="34" charset="-120"/>
+                <a:cs typeface="Amiri" pitchFamily="2" charset="-78"/>
               </a:rPr>
               <a:t>Yours</a:t>
             </a:r>
@@ -21759,8 +21359,7 @@
                   <a:srgbClr val="FFFFFF"/>
                 </a:solidFill>
                 <a:latin typeface="Calibri" pitchFamily="34" charset="0"/>
-                <a:ea typeface="Calibri" pitchFamily="34" charset="-122"/>
-                <a:cs typeface="Calibri" pitchFamily="34" charset="-120"/>
+                <a:cs typeface="Amiri" pitchFamily="2" charset="-78"/>
               </a:rPr>
               <a:t>Example</a:t>
             </a:r>
@@ -21798,8 +21397,7 @@
                   <a:srgbClr val="FFFFFF"/>
                 </a:solidFill>
                 <a:latin typeface="Calibri" pitchFamily="34" charset="0"/>
-                <a:ea typeface="Calibri" pitchFamily="34" charset="-122"/>
-                <a:cs typeface="Calibri" pitchFamily="34" charset="-120"/>
+                <a:cs typeface="Amiri" pitchFamily="2" charset="-78"/>
               </a:rPr>
               <a:t>Record</a:t>
             </a:r>
@@ -21864,8 +21462,7 @@
                   <a:srgbClr val="5A6472"/>
                 </a:solidFill>
                 <a:latin typeface="Calibri" pitchFamily="34" charset="0"/>
-                <a:ea typeface="Calibri" pitchFamily="34" charset="-122"/>
-                <a:cs typeface="Calibri" pitchFamily="34" charset="-120"/>
+                <a:cs typeface="Amiri" pitchFamily="2" charset="-78"/>
               </a:rPr>
               <a:t>______________</a:t>
             </a:r>
@@ -21903,8 +21500,7 @@
                   <a:srgbClr val="5A6472"/>
                 </a:solidFill>
                 <a:latin typeface="Calibri" pitchFamily="34" charset="0"/>
-                <a:ea typeface="Calibri" pitchFamily="34" charset="-122"/>
-                <a:cs typeface="Calibri" pitchFamily="34" charset="-120"/>
+                <a:cs typeface="Amiri" pitchFamily="2" charset="-78"/>
               </a:rPr>
               <a:t>the email — I know the friendly openings</a:t>
             </a:r>
@@ -21942,8 +21538,7 @@
                   <a:srgbClr val="5A6472"/>
                 </a:solidFill>
                 <a:latin typeface="Calibri" pitchFamily="34" charset="0"/>
-                <a:ea typeface="Calibri" pitchFamily="34" charset="-122"/>
-                <a:cs typeface="Calibri" pitchFamily="34" charset="-120"/>
+                <a:cs typeface="Amiri" pitchFamily="2" charset="-78"/>
               </a:rPr>
               <a:t>My strongest text type is … because …</a:t>
             </a:r>
@@ -22008,8 +21603,7 @@
                   <a:srgbClr val="5A6472"/>
                 </a:solidFill>
                 <a:latin typeface="Calibri" pitchFamily="34" charset="0"/>
-                <a:ea typeface="Calibri" pitchFamily="34" charset="-122"/>
-                <a:cs typeface="Calibri" pitchFamily="34" charset="-120"/>
+                <a:cs typeface="Amiri" pitchFamily="2" charset="-78"/>
               </a:rPr>
               <a:t>______________</a:t>
             </a:r>
@@ -22047,8 +21641,7 @@
                   <a:srgbClr val="5A6472"/>
                 </a:solidFill>
                 <a:latin typeface="Calibri" pitchFamily="34" charset="0"/>
-                <a:ea typeface="Calibri" pitchFamily="34" charset="-122"/>
-                <a:cs typeface="Calibri" pitchFamily="34" charset="-120"/>
+                <a:cs typeface="Amiri" pitchFamily="2" charset="-78"/>
               </a:rPr>
               <a:t>the formal letter — the passives are hard</a:t>
             </a:r>
@@ -22086,8 +21679,7 @@
                   <a:srgbClr val="5A6472"/>
                 </a:solidFill>
                 <a:latin typeface="Calibri" pitchFamily="34" charset="0"/>
-                <a:ea typeface="Calibri" pitchFamily="34" charset="-122"/>
-                <a:cs typeface="Calibri" pitchFamily="34" charset="-120"/>
+                <a:cs typeface="Amiri" pitchFamily="2" charset="-78"/>
               </a:rPr>
               <a:t>My weakest text type is … because …</a:t>
             </a:r>
@@ -22152,8 +21744,7 @@
                   <a:srgbClr val="5A6472"/>
                 </a:solidFill>
                 <a:latin typeface="Calibri" pitchFamily="34" charset="0"/>
-                <a:ea typeface="Calibri" pitchFamily="34" charset="-122"/>
-                <a:cs typeface="Calibri" pitchFamily="34" charset="-120"/>
+                <a:cs typeface="Amiri" pitchFamily="2" charset="-78"/>
               </a:rPr>
               <a:t>______________</a:t>
             </a:r>
@@ -22191,8 +21782,7 @@
                   <a:srgbClr val="5A6472"/>
                 </a:solidFill>
                 <a:latin typeface="Calibri" pitchFamily="34" charset="0"/>
-                <a:ea typeface="Calibri" pitchFamily="34" charset="-122"/>
-                <a:cs typeface="Calibri" pitchFamily="34" charset="-120"/>
+                <a:cs typeface="Amiri" pitchFamily="2" charset="-78"/>
               </a:rPr>
               <a:t>formal openings and closings from memory</a:t>
             </a:r>
@@ -22230,8 +21820,7 @@
                   <a:srgbClr val="5A6472"/>
                 </a:solidFill>
                 <a:latin typeface="Calibri" pitchFamily="34" charset="0"/>
-                <a:ea typeface="Calibri" pitchFamily="34" charset="-122"/>
-                <a:cs typeface="Calibri" pitchFamily="34" charset="-120"/>
+                <a:cs typeface="Amiri" pitchFamily="2" charset="-78"/>
               </a:rPr>
               <a:t>For the Lesson 9 mock I will practise …</a:t>
             </a:r>
@@ -22269,8 +21858,7 @@
                   <a:srgbClr val="1B3B6F"/>
                 </a:solidFill>
                 <a:latin typeface="Calibri" pitchFamily="34" charset="0"/>
-                <a:ea typeface="Calibri" pitchFamily="34" charset="-122"/>
-                <a:cs typeface="Calibri" pitchFamily="34" charset="-120"/>
+                <a:cs typeface="Amiri" pitchFamily="2" charset="-78"/>
               </a:rPr>
               <a:t>In the real exam you cannot always choose the text type — practise your weakest before the L09 mock.</a:t>
             </a:r>
@@ -22308,8 +21896,7 @@
                   <a:srgbClr val="8A93A0"/>
                 </a:solidFill>
                 <a:latin typeface="Calibri" pitchFamily="34" charset="0"/>
-                <a:ea typeface="Calibri" pitchFamily="34" charset="-122"/>
-                <a:cs typeface="Calibri" pitchFamily="34" charset="-120"/>
+                <a:cs typeface="Amiri" pitchFamily="2" charset="-78"/>
               </a:rPr>
               <a:t>22 / 26</a:t>
             </a:r>
@@ -22403,9 +21990,8 @@
                 <a:solidFill>
                   <a:srgbClr val="D4AF37"/>
                 </a:solidFill>
-                <a:latin typeface="Amiri" pitchFamily="34" charset="0"/>
-                <a:ea typeface="Amiri" pitchFamily="34" charset="-122"/>
-                <a:cs typeface="Amiri" pitchFamily="34" charset="-120"/>
+                <a:latin typeface="Amiri" pitchFamily="2" charset="-78"/>
+                <a:cs typeface="Amiri" pitchFamily="2" charset="-78"/>
               </a:rPr>
               <a:t>م</a:t>
             </a:r>
@@ -22443,8 +22029,7 @@
                   <a:srgbClr val="1B3B6F"/>
                 </a:solidFill>
                 <a:latin typeface="Cambria" pitchFamily="34" charset="0"/>
-                <a:ea typeface="Cambria" pitchFamily="34" charset="-122"/>
-                <a:cs typeface="Cambria" pitchFamily="34" charset="-120"/>
+                <a:cs typeface="Amiri" pitchFamily="2" charset="-78"/>
               </a:rPr>
               <a:t>Al Madina Online School</a:t>
             </a:r>
@@ -22482,8 +22067,7 @@
                   <a:srgbClr val="8A6D1E"/>
                 </a:solidFill>
                 <a:latin typeface="Calibri" pitchFamily="34" charset="0"/>
-                <a:ea typeface="Calibri" pitchFamily="34" charset="-122"/>
-                <a:cs typeface="Calibri" pitchFamily="34" charset="-120"/>
+                <a:cs typeface="Amiri" pitchFamily="2" charset="-78"/>
               </a:rPr>
               <a:t>ARABIC DEPARTMENT · MIFTAH ARABIC · IGCSE 0544</a:t>
             </a:r>
@@ -22548,8 +22132,7 @@
                   <a:srgbClr val="FFFFFF"/>
                 </a:solidFill>
                 <a:latin typeface="Calibri" pitchFamily="34" charset="0"/>
-                <a:ea typeface="Calibri" pitchFamily="34" charset="-122"/>
-                <a:cs typeface="Calibri" pitchFamily="34" charset="-120"/>
+                <a:cs typeface="Amiri" pitchFamily="2" charset="-78"/>
               </a:rPr>
               <a:t>P6-L04 · IGCSE Bridge</a:t>
             </a:r>
@@ -22614,8 +22197,7 @@
                   <a:srgbClr val="FFFFFF"/>
                 </a:solidFill>
                 <a:latin typeface="Calibri" pitchFamily="34" charset="0"/>
-                <a:ea typeface="Calibri" pitchFamily="34" charset="-122"/>
-                <a:cs typeface="Calibri" pitchFamily="34" charset="-120"/>
+                <a:cs typeface="Amiri" pitchFamily="2" charset="-78"/>
               </a:rPr>
               <a:t>FEEDBACK · 2 MIN</a:t>
             </a:r>
@@ -22653,8 +22235,7 @@
                   <a:srgbClr val="8A6D1E"/>
                 </a:solidFill>
                 <a:latin typeface="Calibri" pitchFamily="34" charset="0"/>
-                <a:ea typeface="Calibri" pitchFamily="34" charset="-122"/>
-                <a:cs typeface="Calibri" pitchFamily="34" charset="-120"/>
+                <a:cs typeface="Amiri" pitchFamily="2" charset="-78"/>
               </a:rPr>
               <a:t>FEEDBACK · REGISTER — THE TC MULTIPLIER (WEBSITE)</a:t>
             </a:r>
@@ -22692,8 +22273,7 @@
                   <a:srgbClr val="1B3B6F"/>
                 </a:solidFill>
                 <a:latin typeface="Cambria" pitchFamily="34" charset="0"/>
-                <a:ea typeface="Cambria" pitchFamily="34" charset="-122"/>
-                <a:cs typeface="Cambria" pitchFamily="34" charset="-120"/>
+                <a:cs typeface="Amiri" pitchFamily="2" charset="-78"/>
               </a:rPr>
               <a:t>Directed writing reflection</a:t>
             </a:r>
@@ -22730,9 +22310,8 @@
                 <a:solidFill>
                   <a:srgbClr val="8A6D1E"/>
                 </a:solidFill>
-                <a:latin typeface="Amiri" pitchFamily="34" charset="0"/>
-                <a:ea typeface="Amiri" pitchFamily="34" charset="-122"/>
-                <a:cs typeface="Amiri" pitchFamily="34" charset="-120"/>
+                <a:latin typeface="Amiri" pitchFamily="2" charset="-78"/>
+                <a:cs typeface="Amiri" pitchFamily="2" charset="-78"/>
               </a:rPr>
               <a:t>التَّأَمُّلُ</a:t>
             </a:r>
@@ -22770,8 +22349,7 @@
                   <a:srgbClr val="8A93A0"/>
                 </a:solidFill>
                 <a:latin typeface="Calibri" pitchFamily="34" charset="0"/>
-                <a:ea typeface="Calibri" pitchFamily="34" charset="-122"/>
-                <a:cs typeface="Calibri" pitchFamily="34" charset="-120"/>
+                <a:cs typeface="Amiri" pitchFamily="2" charset="-78"/>
               </a:rPr>
               <a:t>Miftah Arabic · Progression P6 · IGCSE Bridge · P6-L04</a:t>
             </a:r>
@@ -22834,8 +22412,7 @@
                   <a:srgbClr val="FFFFFF"/>
                 </a:solidFill>
                 <a:latin typeface="Calibri" pitchFamily="34" charset="0"/>
-                <a:ea typeface="Calibri" pitchFamily="34" charset="-122"/>
-                <a:cs typeface="Calibri" pitchFamily="34" charset="-120"/>
+                <a:cs typeface="Amiri" pitchFamily="2" charset="-78"/>
               </a:rPr>
               <a:t>Model ending</a:t>
             </a:r>
@@ -22873,8 +22450,7 @@
                   <a:srgbClr val="FFFFFF"/>
                 </a:solidFill>
                 <a:latin typeface="Calibri" pitchFamily="34" charset="0"/>
-                <a:ea typeface="Calibri" pitchFamily="34" charset="-122"/>
-                <a:cs typeface="Calibri" pitchFamily="34" charset="-120"/>
+                <a:cs typeface="Amiri" pitchFamily="2" charset="-78"/>
               </a:rPr>
               <a:t>Meaning</a:t>
             </a:r>
@@ -22912,8 +22488,7 @@
                   <a:srgbClr val="FFFFFF"/>
                 </a:solidFill>
                 <a:latin typeface="Calibri" pitchFamily="34" charset="0"/>
-                <a:ea typeface="Calibri" pitchFamily="34" charset="-122"/>
-                <a:cs typeface="Calibri" pitchFamily="34" charset="-120"/>
+                <a:cs typeface="Amiri" pitchFamily="2" charset="-78"/>
               </a:rPr>
               <a:t>Reflection frame (website)</a:t>
             </a:r>
@@ -22977,9 +22552,8 @@
                 <a:solidFill>
                   <a:srgbClr val="1B3B6F"/>
                 </a:solidFill>
-                <a:latin typeface="Amiri" pitchFamily="34" charset="0"/>
-                <a:ea typeface="Amiri" pitchFamily="34" charset="-122"/>
-                <a:cs typeface="Amiri" pitchFamily="34" charset="-120"/>
+                <a:latin typeface="Amiri" pitchFamily="2" charset="-78"/>
+                <a:cs typeface="Amiri" pitchFamily="2" charset="-78"/>
               </a:rPr>
               <a:t>أَتَشَرَّفُ بِمُخَاطَبَتِكُمْ</a:t>
             </a:r>
@@ -23017,8 +22591,7 @@
                   <a:srgbClr val="5A6472"/>
                 </a:solidFill>
                 <a:latin typeface="Calibri" pitchFamily="34" charset="0"/>
-                <a:ea typeface="Calibri" pitchFamily="34" charset="-122"/>
-                <a:cs typeface="Calibri" pitchFamily="34" charset="-120"/>
+                <a:cs typeface="Amiri" pitchFamily="2" charset="-78"/>
               </a:rPr>
               <a:t>the signal I use confidently</a:t>
             </a:r>
@@ -23056,8 +22629,7 @@
                   <a:srgbClr val="5A6472"/>
                 </a:solidFill>
                 <a:latin typeface="Calibri" pitchFamily="34" charset="0"/>
-                <a:ea typeface="Calibri" pitchFamily="34" charset="-122"/>
-                <a:cs typeface="Calibri" pitchFamily="34" charset="-120"/>
+                <a:cs typeface="Amiri" pitchFamily="2" charset="-78"/>
               </a:rPr>
               <a:t>The register signal I now use confidently is…</a:t>
             </a:r>
@@ -23122,8 +22694,7 @@
                   <a:srgbClr val="5A6472"/>
                 </a:solidFill>
                 <a:latin typeface="Calibri" pitchFamily="34" charset="0"/>
-                <a:ea typeface="Calibri" pitchFamily="34" charset="-122"/>
-                <a:cs typeface="Calibri" pitchFamily="34" charset="-120"/>
+                <a:cs typeface="Amiri" pitchFamily="2" charset="-78"/>
               </a:rPr>
               <a:t>the formal letter</a:t>
             </a:r>
@@ -23161,8 +22732,7 @@
                   <a:srgbClr val="5A6472"/>
                 </a:solidFill>
                 <a:latin typeface="Calibri" pitchFamily="34" charset="0"/>
-                <a:ea typeface="Calibri" pitchFamily="34" charset="-122"/>
-                <a:cs typeface="Calibri" pitchFamily="34" charset="-120"/>
+                <a:cs typeface="Amiri" pitchFamily="2" charset="-78"/>
               </a:rPr>
               <a:t>the type I will practise most</a:t>
             </a:r>
@@ -23200,8 +22770,7 @@
                   <a:srgbClr val="5A6472"/>
                 </a:solidFill>
                 <a:latin typeface="Calibri" pitchFamily="34" charset="0"/>
-                <a:ea typeface="Calibri" pitchFamily="34" charset="-122"/>
-                <a:cs typeface="Calibri" pitchFamily="34" charset="-120"/>
+                <a:cs typeface="Amiri" pitchFamily="2" charset="-78"/>
               </a:rPr>
               <a:t>The text type I will practise most is…</a:t>
             </a:r>
@@ -23265,9 +22834,8 @@
                 <a:solidFill>
                   <a:srgbClr val="1B3B6F"/>
                 </a:solidFill>
-                <a:latin typeface="Amiri" pitchFamily="34" charset="0"/>
-                <a:ea typeface="Amiri" pitchFamily="34" charset="-122"/>
-                <a:cs typeface="Amiri" pitchFamily="34" charset="-120"/>
+                <a:latin typeface="Amiri" pitchFamily="2" charset="-78"/>
+                <a:cs typeface="Amiri" pitchFamily="2" charset="-78"/>
               </a:rPr>
               <a:t>الخِطَابُ الرَّسْمِيُّ</a:t>
             </a:r>
@@ -23305,8 +22873,7 @@
                   <a:srgbClr val="5A6472"/>
                 </a:solidFill>
                 <a:latin typeface="Calibri" pitchFamily="34" charset="0"/>
-                <a:ea typeface="Calibri" pitchFamily="34" charset="-122"/>
-                <a:cs typeface="Calibri" pitchFamily="34" charset="-120"/>
+                <a:cs typeface="Amiri" pitchFamily="2" charset="-78"/>
               </a:rPr>
               <a:t>The hardest type for me is …</a:t>
             </a:r>
@@ -23343,9 +22910,8 @@
                 <a:solidFill>
                   <a:srgbClr val="1B3B6F"/>
                 </a:solidFill>
-                <a:latin typeface="Amiri" pitchFamily="34" charset="0"/>
-                <a:ea typeface="Amiri" pitchFamily="34" charset="-122"/>
-                <a:cs typeface="Amiri" pitchFamily="34" charset="-120"/>
+                <a:latin typeface="Amiri" pitchFamily="2" charset="-78"/>
+                <a:cs typeface="Amiri" pitchFamily="2" charset="-78"/>
               </a:rPr>
               <a:t>أَصْعَبُ نَوْعٍ عِنْدِي هُوَ ______ .</a:t>
             </a:r>
@@ -23383,8 +22949,7 @@
                   <a:srgbClr val="1B3B6F"/>
                 </a:solidFill>
                 <a:latin typeface="Calibri" pitchFamily="34" charset="0"/>
-                <a:ea typeface="Calibri" pitchFamily="34" charset="-122"/>
-                <a:cs typeface="Calibri" pitchFamily="34" charset="-120"/>
+                <a:cs typeface="Amiri" pitchFamily="2" charset="-78"/>
               </a:rPr>
               <a:t>Register is the TC multiplier: right from the first line, consistent to the last.</a:t>
             </a:r>
@@ -23422,8 +22987,7 @@
                   <a:srgbClr val="8A93A0"/>
                 </a:solidFill>
                 <a:latin typeface="Calibri" pitchFamily="34" charset="0"/>
-                <a:ea typeface="Calibri" pitchFamily="34" charset="-122"/>
-                <a:cs typeface="Calibri" pitchFamily="34" charset="-120"/>
+                <a:cs typeface="Amiri" pitchFamily="2" charset="-78"/>
               </a:rPr>
               <a:t>23 / 26</a:t>
             </a:r>
@@ -23517,9 +23081,8 @@
                 <a:solidFill>
                   <a:srgbClr val="D4AF37"/>
                 </a:solidFill>
-                <a:latin typeface="Amiri" pitchFamily="34" charset="0"/>
-                <a:ea typeface="Amiri" pitchFamily="34" charset="-122"/>
-                <a:cs typeface="Amiri" pitchFamily="34" charset="-120"/>
+                <a:latin typeface="Amiri" pitchFamily="2" charset="-78"/>
+                <a:cs typeface="Amiri" pitchFamily="2" charset="-78"/>
               </a:rPr>
               <a:t>م</a:t>
             </a:r>
@@ -23557,8 +23120,7 @@
                   <a:srgbClr val="1B3B6F"/>
                 </a:solidFill>
                 <a:latin typeface="Cambria" pitchFamily="34" charset="0"/>
-                <a:ea typeface="Cambria" pitchFamily="34" charset="-122"/>
-                <a:cs typeface="Cambria" pitchFamily="34" charset="-120"/>
+                <a:cs typeface="Amiri" pitchFamily="2" charset="-78"/>
               </a:rPr>
               <a:t>Al Madina Online School</a:t>
             </a:r>
@@ -23596,8 +23158,7 @@
                   <a:srgbClr val="8A6D1E"/>
                 </a:solidFill>
                 <a:latin typeface="Calibri" pitchFamily="34" charset="0"/>
-                <a:ea typeface="Calibri" pitchFamily="34" charset="-122"/>
-                <a:cs typeface="Calibri" pitchFamily="34" charset="-120"/>
+                <a:cs typeface="Amiri" pitchFamily="2" charset="-78"/>
               </a:rPr>
               <a:t>ARABIC DEPARTMENT · MIFTAH ARABIC · IGCSE 0544</a:t>
             </a:r>
@@ -23662,8 +23223,7 @@
                   <a:srgbClr val="FFFFFF"/>
                 </a:solidFill>
                 <a:latin typeface="Calibri" pitchFamily="34" charset="0"/>
-                <a:ea typeface="Calibri" pitchFamily="34" charset="-122"/>
-                <a:cs typeface="Calibri" pitchFamily="34" charset="-120"/>
+                <a:cs typeface="Amiri" pitchFamily="2" charset="-78"/>
               </a:rPr>
               <a:t>P6-L04 · IGCSE Bridge</a:t>
             </a:r>
@@ -23728,8 +23288,7 @@
                   <a:srgbClr val="FFFFFF"/>
                 </a:solidFill>
                 <a:latin typeface="Calibri" pitchFamily="34" charset="0"/>
-                <a:ea typeface="Calibri" pitchFamily="34" charset="-122"/>
-                <a:cs typeface="Calibri" pitchFamily="34" charset="-120"/>
+                <a:cs typeface="Amiri" pitchFamily="2" charset="-78"/>
               </a:rPr>
               <a:t>FEEDBACK · 1 MIN</a:t>
             </a:r>
@@ -23767,8 +23326,7 @@
                   <a:srgbClr val="8A6D1E"/>
                 </a:solidFill>
                 <a:latin typeface="Calibri" pitchFamily="34" charset="0"/>
-                <a:ea typeface="Calibri" pitchFamily="34" charset="-122"/>
-                <a:cs typeface="Calibri" pitchFamily="34" charset="-120"/>
+                <a:cs typeface="Amiri" pitchFamily="2" charset="-78"/>
               </a:rPr>
               <a:t>FEEDBACK · SUCCESS CRITERIA</a:t>
             </a:r>
@@ -23806,8 +23364,7 @@
                   <a:srgbClr val="1B3B6F"/>
                 </a:solidFill>
                 <a:latin typeface="Cambria" pitchFamily="34" charset="0"/>
-                <a:ea typeface="Cambria" pitchFamily="34" charset="-122"/>
-                <a:cs typeface="Cambria" pitchFamily="34" charset="-120"/>
+                <a:cs typeface="Amiri" pitchFamily="2" charset="-78"/>
               </a:rPr>
               <a:t>Check your work</a:t>
             </a:r>
@@ -23844,9 +23401,8 @@
                 <a:solidFill>
                   <a:srgbClr val="8A6D1E"/>
                 </a:solidFill>
-                <a:latin typeface="Amiri" pitchFamily="34" charset="0"/>
-                <a:ea typeface="Amiri" pitchFamily="34" charset="-122"/>
-                <a:cs typeface="Amiri" pitchFamily="34" charset="-120"/>
+                <a:latin typeface="Amiri" pitchFamily="2" charset="-78"/>
+                <a:cs typeface="Amiri" pitchFamily="2" charset="-78"/>
               </a:rPr>
               <a:t>قَيِّمْ عَمَلَكَ</a:t>
             </a:r>
@@ -23884,8 +23440,7 @@
                   <a:srgbClr val="8A93A0"/>
                 </a:solidFill>
                 <a:latin typeface="Calibri" pitchFamily="34" charset="0"/>
-                <a:ea typeface="Calibri" pitchFamily="34" charset="-122"/>
-                <a:cs typeface="Calibri" pitchFamily="34" charset="-120"/>
+                <a:cs typeface="Amiri" pitchFamily="2" charset="-78"/>
               </a:rPr>
               <a:t>Miftah Arabic · Progression P6 · IGCSE Bridge · P6-L04</a:t>
             </a:r>
@@ -23982,8 +23537,7 @@
                   <a:srgbClr val="1F2A37"/>
                 </a:solidFill>
                 <a:latin typeface="Calibri" pitchFamily="34" charset="0"/>
-                <a:ea typeface="Calibri" pitchFamily="34" charset="-122"/>
-                <a:cs typeface="Calibri" pitchFamily="34" charset="-120"/>
+                <a:cs typeface="Amiri" pitchFamily="2" charset="-78"/>
               </a:rPr>
               <a:t>I chose the correct opening and closing for my text type.</a:t>
             </a:r>
@@ -24048,8 +23602,7 @@
                   <a:srgbClr val="FFFFFF"/>
                 </a:solidFill>
                 <a:latin typeface="Calibri" pitchFamily="34" charset="0"/>
-                <a:ea typeface="Calibri" pitchFamily="34" charset="-122"/>
-                <a:cs typeface="Calibri" pitchFamily="34" charset="-120"/>
+                <a:cs typeface="Amiri" pitchFamily="2" charset="-78"/>
               </a:rPr>
               <a:t>CORE</a:t>
             </a:r>
@@ -24146,8 +23699,7 @@
                   <a:srgbClr val="1F2A37"/>
                 </a:solidFill>
                 <a:latin typeface="Calibri" pitchFamily="34" charset="0"/>
-                <a:ea typeface="Calibri" pitchFamily="34" charset="-122"/>
-                <a:cs typeface="Calibri" pitchFamily="34" charset="-120"/>
+                <a:cs typeface="Amiri" pitchFamily="2" charset="-78"/>
               </a:rPr>
               <a:t>I included every required content point.</a:t>
             </a:r>
@@ -24212,8 +23764,7 @@
                   <a:srgbClr val="FFFFFF"/>
                 </a:solidFill>
                 <a:latin typeface="Calibri" pitchFamily="34" charset="0"/>
-                <a:ea typeface="Calibri" pitchFamily="34" charset="-122"/>
-                <a:cs typeface="Calibri" pitchFamily="34" charset="-120"/>
+                <a:cs typeface="Amiri" pitchFamily="2" charset="-78"/>
               </a:rPr>
               <a:t>CORE</a:t>
             </a:r>
@@ -24310,8 +23861,7 @@
                   <a:srgbClr val="1F2A37"/>
                 </a:solidFill>
                 <a:latin typeface="Calibri" pitchFamily="34" charset="0"/>
-                <a:ea typeface="Calibri" pitchFamily="34" charset="-122"/>
-                <a:cs typeface="Calibri" pitchFamily="34" charset="-120"/>
+                <a:cs typeface="Amiri" pitchFamily="2" charset="-78"/>
               </a:rPr>
               <a:t>I kept the register consistent from the opening sentence.</a:t>
             </a:r>
@@ -24376,8 +23926,7 @@
                   <a:srgbClr val="FFFFFF"/>
                 </a:solidFill>
                 <a:latin typeface="Calibri" pitchFamily="34" charset="0"/>
-                <a:ea typeface="Calibri" pitchFamily="34" charset="-122"/>
-                <a:cs typeface="Calibri" pitchFamily="34" charset="-120"/>
+                <a:cs typeface="Amiri" pitchFamily="2" charset="-78"/>
               </a:rPr>
               <a:t>DEVELOP</a:t>
             </a:r>
@@ -24474,8 +24023,7 @@
                   <a:srgbClr val="1F2A37"/>
                 </a:solidFill>
                 <a:latin typeface="Calibri" pitchFamily="34" charset="0"/>
-                <a:ea typeface="Calibri" pitchFamily="34" charset="-122"/>
-                <a:cs typeface="Calibri" pitchFamily="34" charset="-120"/>
+                <a:cs typeface="Amiri" pitchFamily="2" charset="-78"/>
               </a:rPr>
               <a:t>I used a conditional and a trigger + -a.</a:t>
             </a:r>
@@ -24540,8 +24088,7 @@
                   <a:srgbClr val="FFFFFF"/>
                 </a:solidFill>
                 <a:latin typeface="Calibri" pitchFamily="34" charset="0"/>
-                <a:ea typeface="Calibri" pitchFamily="34" charset="-122"/>
-                <a:cs typeface="Calibri" pitchFamily="34" charset="-120"/>
+                <a:cs typeface="Amiri" pitchFamily="2" charset="-78"/>
               </a:rPr>
               <a:t>DEVELOP</a:t>
             </a:r>
@@ -24638,8 +24185,7 @@
                   <a:srgbClr val="1F2A37"/>
                 </a:solidFill>
                 <a:latin typeface="Calibri" pitchFamily="34" charset="0"/>
-                <a:ea typeface="Calibri" pitchFamily="34" charset="-122"/>
-                <a:cs typeface="Calibri" pitchFamily="34" charset="-120"/>
+                <a:cs typeface="Amiri" pitchFamily="2" charset="-78"/>
               </a:rPr>
               <a:t>I scored my own writing against TC, Range and Accuracy.</a:t>
             </a:r>
@@ -24704,8 +24250,7 @@
                   <a:srgbClr val="FFFFFF"/>
                 </a:solidFill>
                 <a:latin typeface="Calibri" pitchFamily="34" charset="0"/>
-                <a:ea typeface="Calibri" pitchFamily="34" charset="-122"/>
-                <a:cs typeface="Calibri" pitchFamily="34" charset="-120"/>
+                <a:cs typeface="Amiri" pitchFamily="2" charset="-78"/>
               </a:rPr>
               <a:t>STRETCH</a:t>
             </a:r>
@@ -24777,8 +24322,7 @@
                   <a:srgbClr val="2E8B57"/>
                 </a:solidFill>
                 <a:latin typeface="Calibri" pitchFamily="34" charset="0"/>
-                <a:ea typeface="Calibri" pitchFamily="34" charset="-122"/>
-                <a:cs typeface="Calibri" pitchFamily="34" charset="-120"/>
+                <a:cs typeface="Amiri" pitchFamily="2" charset="-78"/>
               </a:rPr>
               <a:t>WWW</a:t>
             </a:r>
@@ -24794,8 +24338,7 @@
                   <a:srgbClr val="1F2A37"/>
                 </a:solidFill>
                 <a:latin typeface="Calibri" pitchFamily="34" charset="0"/>
-                <a:ea typeface="Calibri" pitchFamily="34" charset="-122"/>
-                <a:cs typeface="Calibri" pitchFamily="34" charset="-120"/>
+                <a:cs typeface="Amiri" pitchFamily="2" charset="-78"/>
               </a:rPr>
               <a:t>What went well? One thing you did accurately.</a:t>
             </a:r>
@@ -24867,8 +24410,7 @@
                   <a:srgbClr val="C9780A"/>
                 </a:solidFill>
                 <a:latin typeface="Calibri" pitchFamily="34" charset="0"/>
-                <a:ea typeface="Calibri" pitchFamily="34" charset="-122"/>
-                <a:cs typeface="Calibri" pitchFamily="34" charset="-120"/>
+                <a:cs typeface="Amiri" pitchFamily="2" charset="-78"/>
               </a:rPr>
               <a:t>EBI</a:t>
             </a:r>
@@ -24884,8 +24426,7 @@
                   <a:srgbClr val="1F2A37"/>
                 </a:solidFill>
                 <a:latin typeface="Calibri" pitchFamily="34" charset="0"/>
-                <a:ea typeface="Calibri" pitchFamily="34" charset="-122"/>
-                <a:cs typeface="Calibri" pitchFamily="34" charset="-120"/>
+                <a:cs typeface="Amiri" pitchFamily="2" charset="-78"/>
               </a:rPr>
               <a:t>Even better if… One thing you will fix or add.</a:t>
             </a:r>
@@ -24923,8 +24464,7 @@
                   <a:srgbClr val="8A93A0"/>
                 </a:solidFill>
                 <a:latin typeface="Calibri" pitchFamily="34" charset="0"/>
-                <a:ea typeface="Calibri" pitchFamily="34" charset="-122"/>
-                <a:cs typeface="Calibri" pitchFamily="34" charset="-120"/>
+                <a:cs typeface="Amiri" pitchFamily="2" charset="-78"/>
               </a:rPr>
               <a:t>24 / 26</a:t>
             </a:r>
@@ -25018,9 +24558,8 @@
                 <a:solidFill>
                   <a:srgbClr val="D4AF37"/>
                 </a:solidFill>
-                <a:latin typeface="Amiri" pitchFamily="34" charset="0"/>
-                <a:ea typeface="Amiri" pitchFamily="34" charset="-122"/>
-                <a:cs typeface="Amiri" pitchFamily="34" charset="-120"/>
+                <a:latin typeface="Amiri" pitchFamily="2" charset="-78"/>
+                <a:cs typeface="Amiri" pitchFamily="2" charset="-78"/>
               </a:rPr>
               <a:t>م</a:t>
             </a:r>
@@ -25058,8 +24597,7 @@
                   <a:srgbClr val="1B3B6F"/>
                 </a:solidFill>
                 <a:latin typeface="Cambria" pitchFamily="34" charset="0"/>
-                <a:ea typeface="Cambria" pitchFamily="34" charset="-122"/>
-                <a:cs typeface="Cambria" pitchFamily="34" charset="-120"/>
+                <a:cs typeface="Amiri" pitchFamily="2" charset="-78"/>
               </a:rPr>
               <a:t>Al Madina Online School</a:t>
             </a:r>
@@ -25097,8 +24635,7 @@
                   <a:srgbClr val="8A6D1E"/>
                 </a:solidFill>
                 <a:latin typeface="Calibri" pitchFamily="34" charset="0"/>
-                <a:ea typeface="Calibri" pitchFamily="34" charset="-122"/>
-                <a:cs typeface="Calibri" pitchFamily="34" charset="-120"/>
+                <a:cs typeface="Amiri" pitchFamily="2" charset="-78"/>
               </a:rPr>
               <a:t>ARABIC DEPARTMENT · MIFTAH ARABIC · IGCSE 0544</a:t>
             </a:r>
@@ -25163,8 +24700,7 @@
                   <a:srgbClr val="FFFFFF"/>
                 </a:solidFill>
                 <a:latin typeface="Calibri" pitchFamily="34" charset="0"/>
-                <a:ea typeface="Calibri" pitchFamily="34" charset="-122"/>
-                <a:cs typeface="Calibri" pitchFamily="34" charset="-120"/>
+                <a:cs typeface="Amiri" pitchFamily="2" charset="-78"/>
               </a:rPr>
               <a:t>P6-L04 · IGCSE Bridge</a:t>
             </a:r>
@@ -25229,8 +24765,7 @@
                   <a:srgbClr val="FFFFFF"/>
                 </a:solidFill>
                 <a:latin typeface="Calibri" pitchFamily="34" charset="0"/>
-                <a:ea typeface="Calibri" pitchFamily="34" charset="-122"/>
-                <a:cs typeface="Calibri" pitchFamily="34" charset="-120"/>
+                <a:cs typeface="Amiri" pitchFamily="2" charset="-78"/>
               </a:rPr>
               <a:t>PREPARATION · 2 MIN</a:t>
             </a:r>
@@ -25268,8 +24803,7 @@
                   <a:srgbClr val="C45A3C"/>
                 </a:solidFill>
                 <a:latin typeface="Calibri" pitchFamily="34" charset="0"/>
-                <a:ea typeface="Calibri" pitchFamily="34" charset="-122"/>
-                <a:cs typeface="Calibri" pitchFamily="34" charset="-120"/>
+                <a:cs typeface="Amiri" pitchFamily="2" charset="-78"/>
               </a:rPr>
               <a:t>PREPARATION FOR NEXT LESSON · ABOUT 10 MINUTES</a:t>
             </a:r>
@@ -25307,8 +24841,7 @@
                   <a:srgbClr val="1B3B6F"/>
                 </a:solidFill>
                 <a:latin typeface="Cambria" pitchFamily="34" charset="0"/>
-                <a:ea typeface="Cambria" pitchFamily="34" charset="-122"/>
-                <a:cs typeface="Cambria" pitchFamily="34" charset="-120"/>
+                <a:cs typeface="Amiri" pitchFamily="2" charset="-78"/>
               </a:rPr>
               <a:t>Before P6-L05: get ready at home</a:t>
             </a:r>
@@ -25345,9 +24878,8 @@
                 <a:solidFill>
                   <a:srgbClr val="8A6D1E"/>
                 </a:solidFill>
-                <a:latin typeface="Amiri" pitchFamily="34" charset="0"/>
-                <a:ea typeface="Amiri" pitchFamily="34" charset="-122"/>
-                <a:cs typeface="Amiri" pitchFamily="34" charset="-120"/>
+                <a:latin typeface="Amiri" pitchFamily="2" charset="-78"/>
+                <a:cs typeface="Amiri" pitchFamily="2" charset="-78"/>
               </a:rPr>
               <a:t>التَّحْضِيرُ لِلدَّرْسِ القَادِمِ</a:t>
             </a:r>
@@ -25385,8 +24917,7 @@
                   <a:srgbClr val="8A93A0"/>
                 </a:solidFill>
                 <a:latin typeface="Calibri" pitchFamily="34" charset="0"/>
-                <a:ea typeface="Calibri" pitchFamily="34" charset="-122"/>
-                <a:cs typeface="Calibri" pitchFamily="34" charset="-120"/>
+                <a:cs typeface="Amiri" pitchFamily="2" charset="-78"/>
               </a:rPr>
               <a:t>Miftah Arabic · Progression P6 · IGCSE Bridge · P6-L04</a:t>
             </a:r>
@@ -25507,8 +25038,7 @@
                   <a:srgbClr val="C45A3C"/>
                 </a:solidFill>
                 <a:latin typeface="Calibri" pitchFamily="34" charset="0"/>
-                <a:ea typeface="Calibri" pitchFamily="34" charset="-122"/>
-                <a:cs typeface="Calibri" pitchFamily="34" charset="-120"/>
+                <a:cs typeface="Amiri" pitchFamily="2" charset="-78"/>
               </a:rPr>
               <a:t>LEARN THESE 5 WORDS</a:t>
             </a:r>
@@ -25524,8 +25054,7 @@
                   <a:srgbClr val="5A6472"/>
                 </a:solidFill>
                 <a:latin typeface="Calibri" pitchFamily="34" charset="0"/>
-                <a:ea typeface="Calibri" pitchFamily="34" charset="-122"/>
-                <a:cs typeface="Calibri" pitchFamily="34" charset="-120"/>
+                <a:cs typeface="Amiri" pitchFamily="2" charset="-78"/>
               </a:rPr>
               <a:t>for P6-L05 · Paper 4 Q2 — Extended Writing: Essay Architecture Under Exam Conditions</a:t>
             </a:r>
@@ -25562,9 +25091,8 @@
                 <a:solidFill>
                   <a:srgbClr val="1B3B6F"/>
                 </a:solidFill>
-                <a:latin typeface="Amiri" pitchFamily="34" charset="0"/>
-                <a:ea typeface="Amiri" pitchFamily="34" charset="-122"/>
-                <a:cs typeface="Amiri" pitchFamily="34" charset="-120"/>
+                <a:latin typeface="Amiri" pitchFamily="2" charset="-78"/>
+                <a:cs typeface="Amiri" pitchFamily="2" charset="-78"/>
               </a:rPr>
               <a:t>الكِتَابَةُ المُوَسَّعَةُ</a:t>
             </a:r>
@@ -25602,8 +25130,7 @@
                   <a:srgbClr val="1F2A37"/>
                 </a:solidFill>
                 <a:latin typeface="Calibri" pitchFamily="34" charset="0"/>
-                <a:ea typeface="Calibri" pitchFamily="34" charset="-122"/>
-                <a:cs typeface="Calibri" pitchFamily="34" charset="-120"/>
+                <a:cs typeface="Amiri" pitchFamily="2" charset="-78"/>
               </a:rPr>
               <a:t>extended writing</a:t>
             </a:r>
@@ -25616,8 +25143,7 @@
                   <a:srgbClr val="5A6472"/>
                 </a:solidFill>
                 <a:latin typeface="Calibri" pitchFamily="34" charset="0"/>
-                <a:ea typeface="Calibri" pitchFamily="34" charset="-122"/>
-                <a:cs typeface="Calibri" pitchFamily="34" charset="-120"/>
+                <a:cs typeface="Amiri" pitchFamily="2" charset="-78"/>
               </a:rPr>
               <a:t>  —</a:t>
             </a:r>
@@ -25654,9 +25180,8 @@
                 <a:solidFill>
                   <a:srgbClr val="1B3B6F"/>
                 </a:solidFill>
-                <a:latin typeface="Amiri" pitchFamily="34" charset="0"/>
-                <a:ea typeface="Amiri" pitchFamily="34" charset="-122"/>
-                <a:cs typeface="Amiri" pitchFamily="34" charset="-120"/>
+                <a:latin typeface="Amiri" pitchFamily="2" charset="-78"/>
+                <a:cs typeface="Amiri" pitchFamily="2" charset="-78"/>
               </a:rPr>
               <a:t>هَيْكَلُ المَقَالِ</a:t>
             </a:r>
@@ -25694,8 +25219,7 @@
                   <a:srgbClr val="1F2A37"/>
                 </a:solidFill>
                 <a:latin typeface="Calibri" pitchFamily="34" charset="0"/>
-                <a:ea typeface="Calibri" pitchFamily="34" charset="-122"/>
-                <a:cs typeface="Calibri" pitchFamily="34" charset="-120"/>
+                <a:cs typeface="Amiri" pitchFamily="2" charset="-78"/>
               </a:rPr>
               <a:t>essay structure</a:t>
             </a:r>
@@ -25708,8 +25232,7 @@
                   <a:srgbClr val="5A6472"/>
                 </a:solidFill>
                 <a:latin typeface="Calibri" pitchFamily="34" charset="0"/>
-                <a:ea typeface="Calibri" pitchFamily="34" charset="-122"/>
-                <a:cs typeface="Calibri" pitchFamily="34" charset="-120"/>
+                <a:cs typeface="Amiri" pitchFamily="2" charset="-78"/>
               </a:rPr>
               <a:t>  pl. هَيَاكِلُ</a:t>
             </a:r>
@@ -25746,9 +25269,8 @@
                 <a:solidFill>
                   <a:srgbClr val="1B3B6F"/>
                 </a:solidFill>
-                <a:latin typeface="Amiri" pitchFamily="34" charset="0"/>
-                <a:ea typeface="Amiri" pitchFamily="34" charset="-122"/>
-                <a:cs typeface="Amiri" pitchFamily="34" charset="-120"/>
+                <a:latin typeface="Amiri" pitchFamily="2" charset="-78"/>
+                <a:cs typeface="Amiri" pitchFamily="2" charset="-78"/>
               </a:rPr>
               <a:t>التَّنَوُّعُ المَعْجَمِيُّ</a:t>
             </a:r>
@@ -25786,8 +25308,7 @@
                   <a:srgbClr val="1F2A37"/>
                 </a:solidFill>
                 <a:latin typeface="Calibri" pitchFamily="34" charset="0"/>
-                <a:ea typeface="Calibri" pitchFamily="34" charset="-122"/>
-                <a:cs typeface="Calibri" pitchFamily="34" charset="-120"/>
+                <a:cs typeface="Amiri" pitchFamily="2" charset="-78"/>
               </a:rPr>
               <a:t>lexical variety</a:t>
             </a:r>
@@ -25800,8 +25321,7 @@
                   <a:srgbClr val="5A6472"/>
                 </a:solidFill>
                 <a:latin typeface="Calibri" pitchFamily="34" charset="0"/>
-                <a:ea typeface="Calibri" pitchFamily="34" charset="-122"/>
-                <a:cs typeface="Calibri" pitchFamily="34" charset="-120"/>
+                <a:cs typeface="Amiri" pitchFamily="2" charset="-78"/>
               </a:rPr>
               <a:t>  —</a:t>
             </a:r>
@@ -25838,9 +25358,8 @@
                 <a:solidFill>
                   <a:srgbClr val="1B3B6F"/>
                 </a:solidFill>
-                <a:latin typeface="Amiri" pitchFamily="34" charset="0"/>
-                <a:ea typeface="Amiri" pitchFamily="34" charset="-122"/>
-                <a:cs typeface="Amiri" pitchFamily="34" charset="-120"/>
+                <a:latin typeface="Amiri" pitchFamily="2" charset="-78"/>
+                <a:cs typeface="Amiri" pitchFamily="2" charset="-78"/>
               </a:rPr>
               <a:t>الدِّقَّةُ تَحْتَ ضَغْطِ الوَقْتِ</a:t>
             </a:r>
@@ -25878,8 +25397,7 @@
                   <a:srgbClr val="1F2A37"/>
                 </a:solidFill>
                 <a:latin typeface="Calibri" pitchFamily="34" charset="0"/>
-                <a:ea typeface="Calibri" pitchFamily="34" charset="-122"/>
-                <a:cs typeface="Calibri" pitchFamily="34" charset="-120"/>
+                <a:cs typeface="Amiri" pitchFamily="2" charset="-78"/>
               </a:rPr>
               <a:t>accuracy under time pressure</a:t>
             </a:r>
@@ -25892,8 +25410,7 @@
                   <a:srgbClr val="5A6472"/>
                 </a:solidFill>
                 <a:latin typeface="Calibri" pitchFamily="34" charset="0"/>
-                <a:ea typeface="Calibri" pitchFamily="34" charset="-122"/>
-                <a:cs typeface="Calibri" pitchFamily="34" charset="-120"/>
+                <a:cs typeface="Amiri" pitchFamily="2" charset="-78"/>
               </a:rPr>
               <a:t>  —</a:t>
             </a:r>
@@ -25930,9 +25447,8 @@
                 <a:solidFill>
                   <a:srgbClr val="1B3B6F"/>
                 </a:solidFill>
-                <a:latin typeface="Amiri" pitchFamily="34" charset="0"/>
-                <a:ea typeface="Amiri" pitchFamily="34" charset="-122"/>
-                <a:cs typeface="Amiri" pitchFamily="34" charset="-120"/>
+                <a:latin typeface="Amiri" pitchFamily="2" charset="-78"/>
+                <a:cs typeface="Amiri" pitchFamily="2" charset="-78"/>
               </a:rPr>
               <a:t>الأُطْرُوحَةُ</a:t>
             </a:r>
@@ -25970,8 +25486,7 @@
                   <a:srgbClr val="1F2A37"/>
                 </a:solidFill>
                 <a:latin typeface="Calibri" pitchFamily="34" charset="0"/>
-                <a:ea typeface="Calibri" pitchFamily="34" charset="-122"/>
-                <a:cs typeface="Calibri" pitchFamily="34" charset="-120"/>
+                <a:cs typeface="Amiri" pitchFamily="2" charset="-78"/>
               </a:rPr>
               <a:t>the thesis</a:t>
             </a:r>
@@ -25984,8 +25499,7 @@
                   <a:srgbClr val="5A6472"/>
                 </a:solidFill>
                 <a:latin typeface="Calibri" pitchFamily="34" charset="0"/>
-                <a:ea typeface="Calibri" pitchFamily="34" charset="-122"/>
-                <a:cs typeface="Calibri" pitchFamily="34" charset="-120"/>
+                <a:cs typeface="Amiri" pitchFamily="2" charset="-78"/>
               </a:rPr>
               <a:t>  pl. الأُطْرُوحَاتُ</a:t>
             </a:r>
@@ -26023,8 +25537,7 @@
                   <a:srgbClr val="C45A3C"/>
                 </a:solidFill>
                 <a:latin typeface="Calibri" pitchFamily="34" charset="0"/>
-                <a:ea typeface="Calibri" pitchFamily="34" charset="-122"/>
-                <a:cs typeface="Calibri" pitchFamily="34" charset="-120"/>
+                <a:cs typeface="Amiri" pitchFamily="2" charset="-78"/>
               </a:rPr>
               <a:t>AND ANSWER ONE QUESTION</a:t>
             </a:r>
@@ -26062,8 +25575,7 @@
                   <a:srgbClr val="1F2A37"/>
                 </a:solidFill>
                 <a:latin typeface="Calibri" pitchFamily="34" charset="0"/>
-                <a:ea typeface="Calibri" pitchFamily="34" charset="-122"/>
-                <a:cs typeface="Calibri" pitchFamily="34" charset="-120"/>
+                <a:cs typeface="Amiri" pitchFamily="2" charset="-78"/>
               </a:rPr>
               <a:t>How many minutes would you spend planning a 150-word essay — and why?</a:t>
             </a:r>
@@ -26103,9 +25615,8 @@
                 <a:solidFill>
                   <a:srgbClr val="1B3B6F"/>
                 </a:solidFill>
-                <a:latin typeface="Amiri" pitchFamily="34" charset="0"/>
-                <a:ea typeface="Amiri" pitchFamily="34" charset="-122"/>
-                <a:cs typeface="Amiri" pitchFamily="34" charset="-120"/>
+                <a:latin typeface="Amiri" pitchFamily="2" charset="-78"/>
+                <a:cs typeface="Amiri" pitchFamily="2" charset="-78"/>
               </a:rPr>
               <a:t>أُخَطِّطُ لِلْمَقَالِ ______ دَقَائِقَ، لِأَنَّ ______ .</a:t>
             </a:r>
@@ -26143,8 +25654,7 @@
                   <a:srgbClr val="1B3B6F"/>
                 </a:solidFill>
                 <a:latin typeface="Calibri" pitchFamily="34" charset="0"/>
-                <a:ea typeface="Calibri" pitchFamily="34" charset="-122"/>
-                <a:cs typeface="Calibri" pitchFamily="34" charset="-120"/>
+                <a:cs typeface="Amiri" pitchFamily="2" charset="-78"/>
               </a:rPr>
               <a:t>HOMEWORK — CHOOSE YOUR ROUTE</a:t>
             </a:r>
@@ -26243,8 +25753,7 @@
                   <a:srgbClr val="FFFFFF"/>
                 </a:solidFill>
                 <a:latin typeface="Calibri" pitchFamily="34" charset="0"/>
-                <a:ea typeface="Calibri" pitchFamily="34" charset="-122"/>
-                <a:cs typeface="Calibri" pitchFamily="34" charset="-120"/>
+                <a:cs typeface="Amiri" pitchFamily="2" charset="-78"/>
               </a:rPr>
               <a:t>CORE</a:t>
             </a:r>
@@ -26282,8 +25791,7 @@
                   <a:srgbClr val="1F2A37"/>
                 </a:solidFill>
                 <a:latin typeface="Calibri" pitchFamily="34" charset="0"/>
-                <a:ea typeface="Calibri" pitchFamily="34" charset="-122"/>
-                <a:cs typeface="Calibri" pitchFamily="34" charset="-120"/>
+                <a:cs typeface="Amiri" pitchFamily="2" charset="-78"/>
               </a:rPr>
               <a:t>Redraft your email using the model’s phrases; learn the five words.</a:t>
             </a:r>
@@ -26382,8 +25890,7 @@
                   <a:srgbClr val="FFFFFF"/>
                 </a:solidFill>
                 <a:latin typeface="Calibri" pitchFamily="34" charset="0"/>
-                <a:ea typeface="Calibri" pitchFamily="34" charset="-122"/>
-                <a:cs typeface="Calibri" pitchFamily="34" charset="-120"/>
+                <a:cs typeface="Amiri" pitchFamily="2" charset="-78"/>
               </a:rPr>
               <a:t>DEVELOP</a:t>
             </a:r>
@@ -26421,8 +25928,7 @@
                   <a:srgbClr val="1F2A37"/>
                 </a:solidFill>
                 <a:latin typeface="Calibri" pitchFamily="34" charset="0"/>
-                <a:ea typeface="Calibri" pitchFamily="34" charset="-122"/>
-                <a:cs typeface="Calibri" pitchFamily="34" charset="-120"/>
+                <a:cs typeface="Amiri" pitchFamily="2" charset="-78"/>
               </a:rPr>
               <a:t>Write the second paragraph of a different task in a new register; learn the five words.</a:t>
             </a:r>
@@ -26521,8 +26027,7 @@
                   <a:srgbClr val="FFFFFF"/>
                 </a:solidFill>
                 <a:latin typeface="Calibri" pitchFamily="34" charset="0"/>
-                <a:ea typeface="Calibri" pitchFamily="34" charset="-122"/>
-                <a:cs typeface="Calibri" pitchFamily="34" charset="-120"/>
+                <a:cs typeface="Amiri" pitchFamily="2" charset="-78"/>
               </a:rPr>
               <a:t>STRETCH</a:t>
             </a:r>
@@ -26560,8 +26065,7 @@
                   <a:srgbClr val="1F2A37"/>
                 </a:solidFill>
                 <a:latin typeface="Calibri" pitchFamily="34" charset="0"/>
-                <a:ea typeface="Calibri" pitchFamily="34" charset="-122"/>
-                <a:cs typeface="Calibri" pitchFamily="34" charset="-120"/>
+                <a:cs typeface="Amiri" pitchFamily="2" charset="-78"/>
               </a:rPr>
               <a:t>Write a second task in full (130–140 words) under 25 minutes; learn the five words.</a:t>
             </a:r>
@@ -26599,8 +26103,7 @@
                   <a:srgbClr val="8A93A0"/>
                 </a:solidFill>
                 <a:latin typeface="Calibri" pitchFamily="34" charset="0"/>
-                <a:ea typeface="Calibri" pitchFamily="34" charset="-122"/>
-                <a:cs typeface="Calibri" pitchFamily="34" charset="-120"/>
+                <a:cs typeface="Amiri" pitchFamily="2" charset="-78"/>
               </a:rPr>
               <a:t>25 / 26</a:t>
             </a:r>
@@ -26744,8 +26247,7 @@
                   <a:srgbClr val="D4AF37"/>
                 </a:solidFill>
                 <a:latin typeface="Calibri" pitchFamily="34" charset="0"/>
-                <a:ea typeface="Calibri" pitchFamily="34" charset="-122"/>
-                <a:cs typeface="Calibri" pitchFamily="34" charset="-120"/>
+                <a:cs typeface="Amiri" pitchFamily="2" charset="-78"/>
               </a:rPr>
               <a:t>P6-L04 COMPLETE</a:t>
             </a:r>
@@ -26782,9 +26284,8 @@
                 <a:solidFill>
                   <a:srgbClr val="FFFFFF"/>
                 </a:solidFill>
-                <a:latin typeface="Amiri" pitchFamily="34" charset="0"/>
-                <a:ea typeface="Amiri" pitchFamily="34" charset="-122"/>
-                <a:cs typeface="Amiri" pitchFamily="34" charset="-120"/>
+                <a:latin typeface="Amiri" pitchFamily="2" charset="-78"/>
+                <a:cs typeface="Amiri" pitchFamily="2" charset="-78"/>
               </a:rPr>
               <a:t>أَحْسَنْتُمْ! إِلَى اللِّقَاءِ</a:t>
             </a:r>
@@ -26822,8 +26323,7 @@
                   <a:srgbClr val="C6D2E6"/>
                 </a:solidFill>
                 <a:latin typeface="Calibri" pitchFamily="34" charset="0"/>
-                <a:ea typeface="Calibri" pitchFamily="34" charset="-122"/>
-                <a:cs typeface="Calibri" pitchFamily="34" charset="-120"/>
+                <a:cs typeface="Amiri" pitchFamily="2" charset="-78"/>
               </a:rPr>
               <a:t>Well done — see you next lesson.</a:t>
             </a:r>
@@ -26861,8 +26361,7 @@
                   <a:srgbClr val="D4AF37"/>
                 </a:solidFill>
                 <a:latin typeface="Calibri" pitchFamily="34" charset="0"/>
-                <a:ea typeface="Calibri" pitchFamily="34" charset="-122"/>
-                <a:cs typeface="Calibri" pitchFamily="34" charset="-120"/>
+                <a:cs typeface="Amiri" pitchFamily="2" charset="-78"/>
               </a:rPr>
               <a:t>NEXT LESSON</a:t>
             </a:r>
@@ -26900,8 +26399,7 @@
                   <a:srgbClr val="FFFFFF"/>
                 </a:solidFill>
                 <a:latin typeface="Cambria" pitchFamily="34" charset="0"/>
-                <a:ea typeface="Cambria" pitchFamily="34" charset="-122"/>
-                <a:cs typeface="Cambria" pitchFamily="34" charset="-120"/>
+                <a:cs typeface="Amiri" pitchFamily="2" charset="-78"/>
               </a:rPr>
               <a:t>P6-L05 · Paper 4 Q2 — Extended Writing: Essay Architecture Under Exam Conditions</a:t>
             </a:r>
@@ -26938,9 +26436,8 @@
                 <a:solidFill>
                   <a:srgbClr val="D4AF37"/>
                 </a:solidFill>
-                <a:latin typeface="Amiri" pitchFamily="34" charset="0"/>
-                <a:ea typeface="Amiri" pitchFamily="34" charset="-122"/>
-                <a:cs typeface="Amiri" pitchFamily="34" charset="-120"/>
+                <a:latin typeface="Amiri" pitchFamily="2" charset="-78"/>
+                <a:cs typeface="Amiri" pitchFamily="2" charset="-78"/>
               </a:rPr>
               <a:t>الوَرَقَةُ الرَّابِعَةُ — الكِتَابَةُ المُوَسَّعَةُ</a:t>
             </a:r>
@@ -26978,8 +26475,7 @@
                   <a:srgbClr val="FFFFFF"/>
                 </a:solidFill>
                 <a:latin typeface="Calibri" pitchFamily="34" charset="0"/>
-                <a:ea typeface="Calibri" pitchFamily="34" charset="-122"/>
-                <a:cs typeface="Calibri" pitchFamily="34" charset="-120"/>
+                <a:cs typeface="Amiri" pitchFamily="2" charset="-78"/>
               </a:rPr>
               <a:t>Remember: the reader decides the register — formal letter, article or email — right from the first line; cover EVERY content point; TC is 7 of 15.</a:t>
             </a:r>
@@ -27073,9 +26569,8 @@
                 <a:solidFill>
                   <a:srgbClr val="D4AF37"/>
                 </a:solidFill>
-                <a:latin typeface="Amiri" pitchFamily="34" charset="0"/>
-                <a:ea typeface="Amiri" pitchFamily="34" charset="-122"/>
-                <a:cs typeface="Amiri" pitchFamily="34" charset="-120"/>
+                <a:latin typeface="Amiri" pitchFamily="2" charset="-78"/>
+                <a:cs typeface="Amiri" pitchFamily="2" charset="-78"/>
               </a:rPr>
               <a:t>م</a:t>
             </a:r>
@@ -27113,8 +26608,7 @@
                   <a:srgbClr val="1B3B6F"/>
                 </a:solidFill>
                 <a:latin typeface="Cambria" pitchFamily="34" charset="0"/>
-                <a:ea typeface="Cambria" pitchFamily="34" charset="-122"/>
-                <a:cs typeface="Cambria" pitchFamily="34" charset="-120"/>
+                <a:cs typeface="Amiri" pitchFamily="2" charset="-78"/>
               </a:rPr>
               <a:t>Al Madina Online School</a:t>
             </a:r>
@@ -27152,8 +26646,7 @@
                   <a:srgbClr val="8A6D1E"/>
                 </a:solidFill>
                 <a:latin typeface="Calibri" pitchFamily="34" charset="0"/>
-                <a:ea typeface="Calibri" pitchFamily="34" charset="-122"/>
-                <a:cs typeface="Calibri" pitchFamily="34" charset="-120"/>
+                <a:cs typeface="Amiri" pitchFamily="2" charset="-78"/>
               </a:rPr>
               <a:t>ARABIC DEPARTMENT · MIFTAH ARABIC · IGCSE 0544</a:t>
             </a:r>
@@ -27218,8 +26711,7 @@
                   <a:srgbClr val="FFFFFF"/>
                 </a:solidFill>
                 <a:latin typeface="Calibri" pitchFamily="34" charset="0"/>
-                <a:ea typeface="Calibri" pitchFamily="34" charset="-122"/>
-                <a:cs typeface="Calibri" pitchFamily="34" charset="-120"/>
+                <a:cs typeface="Amiri" pitchFamily="2" charset="-78"/>
               </a:rPr>
               <a:t>P6-L04 · IGCSE Bridge</a:t>
             </a:r>
@@ -27284,8 +26776,7 @@
                   <a:srgbClr val="FFFFFF"/>
                 </a:solidFill>
                 <a:latin typeface="Calibri" pitchFamily="34" charset="0"/>
-                <a:ea typeface="Calibri" pitchFamily="34" charset="-122"/>
-                <a:cs typeface="Calibri" pitchFamily="34" charset="-120"/>
+                <a:cs typeface="Amiri" pitchFamily="2" charset="-78"/>
               </a:rPr>
               <a:t>WELCOME</a:t>
             </a:r>
@@ -27323,8 +26814,7 @@
                   <a:srgbClr val="5A6472"/>
                 </a:solidFill>
                 <a:latin typeface="Calibri" pitchFamily="34" charset="0"/>
-                <a:ea typeface="Calibri" pitchFamily="34" charset="-122"/>
-                <a:cs typeface="Calibri" pitchFamily="34" charset="-120"/>
+                <a:cs typeface="Amiri" pitchFamily="2" charset="-78"/>
               </a:rPr>
               <a:t>TODAY’S LESSON MAP</a:t>
             </a:r>
@@ -27362,8 +26852,7 @@
                   <a:srgbClr val="1B3B6F"/>
                 </a:solidFill>
                 <a:latin typeface="Cambria" pitchFamily="34" charset="0"/>
-                <a:ea typeface="Cambria" pitchFamily="34" charset="-122"/>
-                <a:cs typeface="Cambria" pitchFamily="34" charset="-120"/>
+                <a:cs typeface="Amiri" pitchFamily="2" charset="-78"/>
               </a:rPr>
               <a:t>Our lesson today, step by step</a:t>
             </a:r>
@@ -27400,9 +26889,8 @@
                 <a:solidFill>
                   <a:srgbClr val="8A6D1E"/>
                 </a:solidFill>
-                <a:latin typeface="Amiri" pitchFamily="34" charset="0"/>
-                <a:ea typeface="Amiri" pitchFamily="34" charset="-122"/>
-                <a:cs typeface="Amiri" pitchFamily="34" charset="-120"/>
+                <a:latin typeface="Amiri" pitchFamily="2" charset="-78"/>
+                <a:cs typeface="Amiri" pitchFamily="2" charset="-78"/>
               </a:rPr>
               <a:t>خَرِيطَةُ الدَّرْسِ</a:t>
             </a:r>
@@ -27440,8 +26928,7 @@
                   <a:srgbClr val="8A93A0"/>
                 </a:solidFill>
                 <a:latin typeface="Calibri" pitchFamily="34" charset="0"/>
-                <a:ea typeface="Calibri" pitchFamily="34" charset="-122"/>
-                <a:cs typeface="Calibri" pitchFamily="34" charset="-120"/>
+                <a:cs typeface="Amiri" pitchFamily="2" charset="-78"/>
               </a:rPr>
               <a:t>Miftah Arabic · Progression P6 · IGCSE Bridge · P6-L04</a:t>
             </a:r>
@@ -27540,8 +27027,7 @@
                   <a:srgbClr val="FFFFFF"/>
                 </a:solidFill>
                 <a:latin typeface="Calibri" pitchFamily="34" charset="0"/>
-                <a:ea typeface="Calibri" pitchFamily="34" charset="-122"/>
-                <a:cs typeface="Calibri" pitchFamily="34" charset="-120"/>
+                <a:cs typeface="Amiri" pitchFamily="2" charset="-78"/>
               </a:rPr>
               <a:t>DO NOW</a:t>
             </a:r>
@@ -27579,8 +27065,7 @@
                   <a:srgbClr val="E8EDF5"/>
                 </a:solidFill>
                 <a:latin typeface="Calibri" pitchFamily="34" charset="0"/>
-                <a:ea typeface="Calibri" pitchFamily="34" charset="-122"/>
-                <a:cs typeface="Calibri" pitchFamily="34" charset="-120"/>
+                <a:cs typeface="Amiri" pitchFamily="2" charset="-78"/>
               </a:rPr>
               <a:t>6 min</a:t>
             </a:r>
@@ -27643,8 +27128,7 @@
                   <a:srgbClr val="1B3B6F"/>
                 </a:solidFill>
                 <a:latin typeface="Calibri" pitchFamily="34" charset="0"/>
-                <a:ea typeface="Calibri" pitchFamily="34" charset="-122"/>
-                <a:cs typeface="Calibri" pitchFamily="34" charset="-120"/>
+                <a:cs typeface="Amiri" pitchFamily="2" charset="-78"/>
               </a:rPr>
               <a:t>1</a:t>
             </a:r>
@@ -27682,8 +27166,7 @@
                   <a:srgbClr val="1F2A37"/>
                 </a:solidFill>
                 <a:latin typeface="Calibri" pitchFamily="34" charset="0"/>
-                <a:ea typeface="Calibri" pitchFamily="34" charset="-122"/>
-                <a:cs typeface="Calibri" pitchFamily="34" charset="-120"/>
+                <a:cs typeface="Amiri" pitchFamily="2" charset="-78"/>
               </a:rPr>
               <a:t>Retrieval: register words and P5 accuracy.</a:t>
             </a:r>
@@ -27720,9 +27203,8 @@
                 <a:solidFill>
                   <a:srgbClr val="0E7C86"/>
                 </a:solidFill>
-                <a:latin typeface="Amiri" pitchFamily="34" charset="0"/>
-                <a:ea typeface="Amiri" pitchFamily="34" charset="-122"/>
-                <a:cs typeface="Amiri" pitchFamily="34" charset="-120"/>
+                <a:latin typeface="Amiri" pitchFamily="2" charset="-78"/>
+                <a:cs typeface="Amiri" pitchFamily="2" charset="-78"/>
               </a:rPr>
               <a:t>اِبْدَأِ الآنَ</a:t>
             </a:r>
@@ -27821,8 +27303,7 @@
                   <a:srgbClr val="FFFFFF"/>
                 </a:solidFill>
                 <a:latin typeface="Calibri" pitchFamily="34" charset="0"/>
-                <a:ea typeface="Calibri" pitchFamily="34" charset="-122"/>
-                <a:cs typeface="Calibri" pitchFamily="34" charset="-120"/>
+                <a:cs typeface="Amiri" pitchFamily="2" charset="-78"/>
               </a:rPr>
               <a:t>TEACHER INSTRUCTION</a:t>
             </a:r>
@@ -27860,8 +27341,7 @@
                   <a:srgbClr val="E8EDF5"/>
                 </a:solidFill>
                 <a:latin typeface="Calibri" pitchFamily="34" charset="0"/>
-                <a:ea typeface="Calibri" pitchFamily="34" charset="-122"/>
-                <a:cs typeface="Calibri" pitchFamily="34" charset="-120"/>
+                <a:cs typeface="Amiri" pitchFamily="2" charset="-78"/>
               </a:rPr>
               <a:t>10 min</a:t>
             </a:r>
@@ -27924,8 +27404,7 @@
                   <a:srgbClr val="1B3B6F"/>
                 </a:solidFill>
                 <a:latin typeface="Calibri" pitchFamily="34" charset="0"/>
-                <a:ea typeface="Calibri" pitchFamily="34" charset="-122"/>
-                <a:cs typeface="Calibri" pitchFamily="34" charset="-120"/>
+                <a:cs typeface="Amiri" pitchFamily="2" charset="-78"/>
               </a:rPr>
               <a:t>2</a:t>
             </a:r>
@@ -27963,8 +27442,7 @@
                   <a:srgbClr val="1F2A37"/>
                 </a:solidFill>
                 <a:latin typeface="Calibri" pitchFamily="34" charset="0"/>
-                <a:ea typeface="Calibri" pitchFamily="34" charset="-122"/>
-                <a:cs typeface="Calibri" pitchFamily="34" charset="-120"/>
+                <a:cs typeface="Amiri" pitchFamily="2" charset="-78"/>
               </a:rPr>
               <a:t>Text types, register signals, the mark scheme.</a:t>
             </a:r>
@@ -28001,9 +27479,8 @@
                 <a:solidFill>
                   <a:srgbClr val="1B3B6F"/>
                 </a:solidFill>
-                <a:latin typeface="Amiri" pitchFamily="34" charset="0"/>
-                <a:ea typeface="Amiri" pitchFamily="34" charset="-122"/>
-                <a:cs typeface="Amiri" pitchFamily="34" charset="-120"/>
+                <a:latin typeface="Amiri" pitchFamily="2" charset="-78"/>
+                <a:cs typeface="Amiri" pitchFamily="2" charset="-78"/>
               </a:rPr>
               <a:t>الصِّيغَةُ</a:t>
             </a:r>
@@ -28102,8 +27579,7 @@
                   <a:srgbClr val="FFFFFF"/>
                 </a:solidFill>
                 <a:latin typeface="Calibri" pitchFamily="34" charset="0"/>
-                <a:ea typeface="Calibri" pitchFamily="34" charset="-122"/>
-                <a:cs typeface="Calibri" pitchFamily="34" charset="-120"/>
+                <a:cs typeface="Amiri" pitchFamily="2" charset="-78"/>
               </a:rPr>
               <a:t>I DO</a:t>
             </a:r>
@@ -28141,8 +27617,7 @@
                   <a:srgbClr val="E8EDF5"/>
                 </a:solidFill>
                 <a:latin typeface="Calibri" pitchFamily="34" charset="0"/>
-                <a:ea typeface="Calibri" pitchFamily="34" charset="-122"/>
-                <a:cs typeface="Calibri" pitchFamily="34" charset="-120"/>
+                <a:cs typeface="Amiri" pitchFamily="2" charset="-78"/>
               </a:rPr>
               <a:t>4 min</a:t>
             </a:r>
@@ -28205,8 +27680,7 @@
                   <a:srgbClr val="1B3B6F"/>
                 </a:solidFill>
                 <a:latin typeface="Calibri" pitchFamily="34" charset="0"/>
-                <a:ea typeface="Calibri" pitchFamily="34" charset="-122"/>
-                <a:cs typeface="Calibri" pitchFamily="34" charset="-120"/>
+                <a:cs typeface="Amiri" pitchFamily="2" charset="-78"/>
               </a:rPr>
               <a:t>3</a:t>
             </a:r>
@@ -28244,8 +27718,7 @@
                   <a:srgbClr val="1F2A37"/>
                 </a:solidFill>
                 <a:latin typeface="Calibri" pitchFamily="34" charset="0"/>
-                <a:ea typeface="Calibri" pitchFamily="34" charset="-122"/>
-                <a:cs typeface="Calibri" pitchFamily="34" charset="-120"/>
+                <a:cs typeface="Amiri" pitchFamily="2" charset="-78"/>
               </a:rPr>
               <a:t>Same content, two registers.</a:t>
             </a:r>
@@ -28282,9 +27755,8 @@
                 <a:solidFill>
                   <a:srgbClr val="6B4C9A"/>
                 </a:solidFill>
-                <a:latin typeface="Amiri" pitchFamily="34" charset="0"/>
-                <a:ea typeface="Amiri" pitchFamily="34" charset="-122"/>
-                <a:cs typeface="Amiri" pitchFamily="34" charset="-120"/>
+                <a:latin typeface="Amiri" pitchFamily="2" charset="-78"/>
+                <a:cs typeface="Amiri" pitchFamily="2" charset="-78"/>
               </a:rPr>
               <a:t>شَاهِدْ</a:t>
             </a:r>
@@ -28383,8 +27855,7 @@
                   <a:srgbClr val="FFFFFF"/>
                 </a:solidFill>
                 <a:latin typeface="Calibri" pitchFamily="34" charset="0"/>
-                <a:ea typeface="Calibri" pitchFamily="34" charset="-122"/>
-                <a:cs typeface="Calibri" pitchFamily="34" charset="-120"/>
+                <a:cs typeface="Amiri" pitchFamily="2" charset="-78"/>
               </a:rPr>
               <a:t>YOU DO</a:t>
             </a:r>
@@ -28422,8 +27893,7 @@
                   <a:srgbClr val="E8EDF5"/>
                 </a:solidFill>
                 <a:latin typeface="Calibri" pitchFamily="34" charset="0"/>
-                <a:ea typeface="Calibri" pitchFamily="34" charset="-122"/>
-                <a:cs typeface="Calibri" pitchFamily="34" charset="-120"/>
+                <a:cs typeface="Amiri" pitchFamily="2" charset="-78"/>
               </a:rPr>
               <a:t>22 min</a:t>
             </a:r>
@@ -28486,8 +27956,7 @@
                   <a:srgbClr val="1B3B6F"/>
                 </a:solidFill>
                 <a:latin typeface="Calibri" pitchFamily="34" charset="0"/>
-                <a:ea typeface="Calibri" pitchFamily="34" charset="-122"/>
-                <a:cs typeface="Calibri" pitchFamily="34" charset="-120"/>
+                <a:cs typeface="Amiri" pitchFamily="2" charset="-78"/>
               </a:rPr>
               <a:t>4</a:t>
             </a:r>
@@ -28525,8 +27994,7 @@
                   <a:srgbClr val="1F2A37"/>
                 </a:solidFill>
                 <a:latin typeface="Calibri" pitchFamily="34" charset="0"/>
-                <a:ea typeface="Calibri" pitchFamily="34" charset="-122"/>
-                <a:cs typeface="Calibri" pitchFamily="34" charset="-120"/>
+                <a:cs typeface="Amiri" pitchFamily="2" charset="-78"/>
               </a:rPr>
               <a:t>Choose your task and write (exam timing).</a:t>
             </a:r>
@@ -28563,9 +28031,8 @@
                 <a:solidFill>
                   <a:srgbClr val="1E6B52"/>
                 </a:solidFill>
-                <a:latin typeface="Amiri" pitchFamily="34" charset="0"/>
-                <a:ea typeface="Amiri" pitchFamily="34" charset="-122"/>
-                <a:cs typeface="Amiri" pitchFamily="34" charset="-120"/>
+                <a:latin typeface="Amiri" pitchFamily="2" charset="-78"/>
+                <a:cs typeface="Amiri" pitchFamily="2" charset="-78"/>
               </a:rPr>
               <a:t>اُكْتُبْ</a:t>
             </a:r>
@@ -28664,8 +28131,7 @@
                   <a:srgbClr val="FFFFFF"/>
                 </a:solidFill>
                 <a:latin typeface="Calibri" pitchFamily="34" charset="0"/>
-                <a:ea typeface="Calibri" pitchFamily="34" charset="-122"/>
-                <a:cs typeface="Calibri" pitchFamily="34" charset="-120"/>
+                <a:cs typeface="Amiri" pitchFamily="2" charset="-78"/>
               </a:rPr>
               <a:t>FEEDBACK</a:t>
             </a:r>
@@ -28703,8 +28169,7 @@
                   <a:srgbClr val="E8EDF5"/>
                 </a:solidFill>
                 <a:latin typeface="Calibri" pitchFamily="34" charset="0"/>
-                <a:ea typeface="Calibri" pitchFamily="34" charset="-122"/>
-                <a:cs typeface="Calibri" pitchFamily="34" charset="-120"/>
+                <a:cs typeface="Amiri" pitchFamily="2" charset="-78"/>
               </a:rPr>
               <a:t>12 min</a:t>
             </a:r>
@@ -28767,8 +28232,7 @@
                   <a:srgbClr val="1B3B6F"/>
                 </a:solidFill>
                 <a:latin typeface="Calibri" pitchFamily="34" charset="0"/>
-                <a:ea typeface="Calibri" pitchFamily="34" charset="-122"/>
-                <a:cs typeface="Calibri" pitchFamily="34" charset="-120"/>
+                <a:cs typeface="Amiri" pitchFamily="2" charset="-78"/>
               </a:rPr>
               <a:t>5</a:t>
             </a:r>
@@ -28806,8 +28270,7 @@
                   <a:srgbClr val="1F2A37"/>
                 </a:solidFill>
                 <a:latin typeface="Calibri" pitchFamily="34" charset="0"/>
-                <a:ea typeface="Calibri" pitchFamily="34" charset="-122"/>
-                <a:cs typeface="Calibri" pitchFamily="34" charset="-120"/>
+                <a:cs typeface="Amiri" pitchFamily="2" charset="-78"/>
               </a:rPr>
               <a:t>Models, self-marking, difficulty profile, reflection.</a:t>
             </a:r>
@@ -28844,9 +28307,8 @@
                 <a:solidFill>
                   <a:srgbClr val="8A6D1E"/>
                 </a:solidFill>
-                <a:latin typeface="Amiri" pitchFamily="34" charset="0"/>
-                <a:ea typeface="Amiri" pitchFamily="34" charset="-122"/>
-                <a:cs typeface="Amiri" pitchFamily="34" charset="-120"/>
+                <a:latin typeface="Amiri" pitchFamily="2" charset="-78"/>
+                <a:cs typeface="Amiri" pitchFamily="2" charset="-78"/>
               </a:rPr>
               <a:t>قَيِّمْ</a:t>
             </a:r>
@@ -28945,8 +28407,7 @@
                   <a:srgbClr val="FFFFFF"/>
                 </a:solidFill>
                 <a:latin typeface="Calibri" pitchFamily="34" charset="0"/>
-                <a:ea typeface="Calibri" pitchFamily="34" charset="-122"/>
-                <a:cs typeface="Calibri" pitchFamily="34" charset="-120"/>
+                <a:cs typeface="Amiri" pitchFamily="2" charset="-78"/>
               </a:rPr>
               <a:t>PREPARATION</a:t>
             </a:r>
@@ -28984,8 +28445,7 @@
                   <a:srgbClr val="E8EDF5"/>
                 </a:solidFill>
                 <a:latin typeface="Calibri" pitchFamily="34" charset="0"/>
-                <a:ea typeface="Calibri" pitchFamily="34" charset="-122"/>
-                <a:cs typeface="Calibri" pitchFamily="34" charset="-120"/>
+                <a:cs typeface="Amiri" pitchFamily="2" charset="-78"/>
               </a:rPr>
               <a:t>2 min</a:t>
             </a:r>
@@ -29048,8 +28508,7 @@
                   <a:srgbClr val="1B3B6F"/>
                 </a:solidFill>
                 <a:latin typeface="Calibri" pitchFamily="34" charset="0"/>
-                <a:ea typeface="Calibri" pitchFamily="34" charset="-122"/>
-                <a:cs typeface="Calibri" pitchFamily="34" charset="-120"/>
+                <a:cs typeface="Amiri" pitchFamily="2" charset="-78"/>
               </a:rPr>
               <a:t>6</a:t>
             </a:r>
@@ -29087,8 +28546,7 @@
                   <a:srgbClr val="1F2A37"/>
                 </a:solidFill>
                 <a:latin typeface="Calibri" pitchFamily="34" charset="0"/>
-                <a:ea typeface="Calibri" pitchFamily="34" charset="-122"/>
-                <a:cs typeface="Calibri" pitchFamily="34" charset="-120"/>
+                <a:cs typeface="Amiri" pitchFamily="2" charset="-78"/>
               </a:rPr>
               <a:t>Get ready for the extended essay.</a:t>
             </a:r>
@@ -29125,9 +28583,8 @@
                 <a:solidFill>
                   <a:srgbClr val="C45A3C"/>
                 </a:solidFill>
-                <a:latin typeface="Amiri" pitchFamily="34" charset="0"/>
-                <a:ea typeface="Amiri" pitchFamily="34" charset="-122"/>
-                <a:cs typeface="Amiri" pitchFamily="34" charset="-120"/>
+                <a:latin typeface="Amiri" pitchFamily="2" charset="-78"/>
+                <a:cs typeface="Amiri" pitchFamily="2" charset="-78"/>
               </a:rPr>
               <a:t>اِسْتَعِدَّ</a:t>
             </a:r>
@@ -29199,8 +28656,7 @@
                   <a:srgbClr val="1E6B52"/>
                 </a:solidFill>
                 <a:latin typeface="Calibri" pitchFamily="34" charset="0"/>
-                <a:ea typeface="Calibri" pitchFamily="34" charset="-122"/>
-                <a:cs typeface="Calibri" pitchFamily="34" charset="-120"/>
+                <a:cs typeface="Amiri" pitchFamily="2" charset="-78"/>
               </a:rPr>
               <a:t>IF ARABIC FEELS HARD TODAY</a:t>
             </a:r>
@@ -29238,8 +28694,7 @@
                   <a:srgbClr val="1F2A37"/>
                 </a:solidFill>
                 <a:latin typeface="Calibri" pitchFamily="34" charset="0"/>
-                <a:ea typeface="Calibri" pitchFamily="34" charset="-122"/>
-                <a:cs typeface="Calibri" pitchFamily="34" charset="-120"/>
+                <a:cs typeface="Amiri" pitchFamily="2" charset="-78"/>
               </a:rPr>
               <a:t>This is an exam-preparation lesson. Every task uses the real IGCSE format — Core students use the green boxes, frames and English support; nobody is expected to get everything right first time.</a:t>
             </a:r>
@@ -29277,8 +28732,7 @@
                   <a:srgbClr val="8A93A0"/>
                 </a:solidFill>
                 <a:latin typeface="Calibri" pitchFamily="34" charset="0"/>
-                <a:ea typeface="Calibri" pitchFamily="34" charset="-122"/>
-                <a:cs typeface="Calibri" pitchFamily="34" charset="-120"/>
+                <a:cs typeface="Amiri" pitchFamily="2" charset="-78"/>
               </a:rPr>
               <a:t>3 / 26</a:t>
             </a:r>
@@ -29372,9 +28826,8 @@
                 <a:solidFill>
                   <a:srgbClr val="D4AF37"/>
                 </a:solidFill>
-                <a:latin typeface="Amiri" pitchFamily="34" charset="0"/>
-                <a:ea typeface="Amiri" pitchFamily="34" charset="-122"/>
-                <a:cs typeface="Amiri" pitchFamily="34" charset="-120"/>
+                <a:latin typeface="Amiri" pitchFamily="2" charset="-78"/>
+                <a:cs typeface="Amiri" pitchFamily="2" charset="-78"/>
               </a:rPr>
               <a:t>م</a:t>
             </a:r>
@@ -29412,8 +28865,7 @@
                   <a:srgbClr val="1B3B6F"/>
                 </a:solidFill>
                 <a:latin typeface="Cambria" pitchFamily="34" charset="0"/>
-                <a:ea typeface="Cambria" pitchFamily="34" charset="-122"/>
-                <a:cs typeface="Cambria" pitchFamily="34" charset="-120"/>
+                <a:cs typeface="Amiri" pitchFamily="2" charset="-78"/>
               </a:rPr>
               <a:t>Al Madina Online School</a:t>
             </a:r>
@@ -29451,8 +28903,7 @@
                   <a:srgbClr val="8A6D1E"/>
                 </a:solidFill>
                 <a:latin typeface="Calibri" pitchFamily="34" charset="0"/>
-                <a:ea typeface="Calibri" pitchFamily="34" charset="-122"/>
-                <a:cs typeface="Calibri" pitchFamily="34" charset="-120"/>
+                <a:cs typeface="Amiri" pitchFamily="2" charset="-78"/>
               </a:rPr>
               <a:t>ARABIC DEPARTMENT · MIFTAH ARABIC · IGCSE 0544</a:t>
             </a:r>
@@ -29517,8 +28968,7 @@
                   <a:srgbClr val="FFFFFF"/>
                 </a:solidFill>
                 <a:latin typeface="Calibri" pitchFamily="34" charset="0"/>
-                <a:ea typeface="Calibri" pitchFamily="34" charset="-122"/>
-                <a:cs typeface="Calibri" pitchFamily="34" charset="-120"/>
+                <a:cs typeface="Amiri" pitchFamily="2" charset="-78"/>
               </a:rPr>
               <a:t>P6-L04 · IGCSE Bridge</a:t>
             </a:r>
@@ -29583,8 +29033,7 @@
                   <a:srgbClr val="FFFFFF"/>
                 </a:solidFill>
                 <a:latin typeface="Calibri" pitchFamily="34" charset="0"/>
-                <a:ea typeface="Calibri" pitchFamily="34" charset="-122"/>
-                <a:cs typeface="Calibri" pitchFamily="34" charset="-120"/>
+                <a:cs typeface="Amiri" pitchFamily="2" charset="-78"/>
               </a:rPr>
               <a:t>DO NOW · 5 MIN</a:t>
             </a:r>
@@ -29622,8 +29071,7 @@
                   <a:srgbClr val="0E7C86"/>
                 </a:solidFill>
                 <a:latin typeface="Calibri" pitchFamily="34" charset="0"/>
-                <a:ea typeface="Calibri" pitchFamily="34" charset="-122"/>
-                <a:cs typeface="Calibri" pitchFamily="34" charset="-120"/>
+                <a:cs typeface="Amiri" pitchFamily="2" charset="-78"/>
               </a:rPr>
               <a:t>DO NOW · ON YOUR OWN · 5 MINUTES</a:t>
             </a:r>
@@ -29661,8 +29109,7 @@
                   <a:srgbClr val="1B3B6F"/>
                 </a:solidFill>
                 <a:latin typeface="Cambria" pitchFamily="34" charset="0"/>
-                <a:ea typeface="Cambria" pitchFamily="34" charset="-122"/>
-                <a:cs typeface="Cambria" pitchFamily="34" charset="-120"/>
+                <a:cs typeface="Amiri" pitchFamily="2" charset="-78"/>
               </a:rPr>
               <a:t>Retrieval: what do you remember?</a:t>
             </a:r>
@@ -29699,9 +29146,8 @@
                 <a:solidFill>
                   <a:srgbClr val="8A6D1E"/>
                 </a:solidFill>
-                <a:latin typeface="Amiri" pitchFamily="34" charset="0"/>
-                <a:ea typeface="Amiri" pitchFamily="34" charset="-122"/>
-                <a:cs typeface="Amiri" pitchFamily="34" charset="-120"/>
+                <a:latin typeface="Amiri" pitchFamily="2" charset="-78"/>
+                <a:cs typeface="Amiri" pitchFamily="2" charset="-78"/>
               </a:rPr>
               <a:t>اِبْدَأِ الآنَ</a:t>
             </a:r>
@@ -29739,8 +29185,7 @@
                   <a:srgbClr val="8A93A0"/>
                 </a:solidFill>
                 <a:latin typeface="Calibri" pitchFamily="34" charset="0"/>
-                <a:ea typeface="Calibri" pitchFamily="34" charset="-122"/>
-                <a:cs typeface="Calibri" pitchFamily="34" charset="-120"/>
+                <a:cs typeface="Amiri" pitchFamily="2" charset="-78"/>
               </a:rPr>
               <a:t>Miftah Arabic · Progression P6 · IGCSE Bridge · P6-L04</a:t>
             </a:r>
@@ -29837,8 +29282,7 @@
                   <a:srgbClr val="FFFFFF"/>
                 </a:solidFill>
                 <a:latin typeface="Calibri" pitchFamily="34" charset="0"/>
-                <a:ea typeface="Calibri" pitchFamily="34" charset="-122"/>
-                <a:cs typeface="Calibri" pitchFamily="34" charset="-120"/>
+                <a:cs typeface="Amiri" pitchFamily="2" charset="-78"/>
               </a:rPr>
               <a:t>1</a:t>
             </a:r>
@@ -29876,8 +29320,7 @@
                   <a:srgbClr val="1B3B6F"/>
                 </a:solidFill>
                 <a:latin typeface="Calibri" pitchFamily="34" charset="0"/>
-                <a:ea typeface="Calibri" pitchFamily="34" charset="-122"/>
-                <a:cs typeface="Calibri" pitchFamily="34" charset="-120"/>
+                <a:cs typeface="Amiri" pitchFamily="2" charset="-78"/>
               </a:rPr>
               <a:t>What does </a:t>
             </a:r>
@@ -29889,9 +29332,8 @@
                 <a:solidFill>
                   <a:srgbClr val="1B3B6F"/>
                 </a:solidFill>
-                <a:latin typeface="Amiri" pitchFamily="34" charset="0"/>
-                <a:ea typeface="Amiri" pitchFamily="34" charset="-122"/>
-                <a:cs typeface="Amiri" pitchFamily="34" charset="-120"/>
+                <a:latin typeface="Amiri" pitchFamily="2" charset="-78"/>
+                <a:cs typeface="Amiri" pitchFamily="2" charset="-78"/>
               </a:rPr>
               <a:t>الكِتَابَةُ المُوَجَّهَةُ</a:t>
             </a:r>
@@ -29904,8 +29346,7 @@
                   <a:srgbClr val="1B3B6F"/>
                 </a:solidFill>
                 <a:latin typeface="Calibri" pitchFamily="34" charset="0"/>
-                <a:ea typeface="Calibri" pitchFamily="34" charset="-122"/>
-                <a:cs typeface="Calibri" pitchFamily="34" charset="-120"/>
+                <a:cs typeface="Amiri" pitchFamily="2" charset="-78"/>
               </a:rPr>
               <a:t> mean?</a:t>
             </a:r>
@@ -29968,8 +29409,7 @@
                   <a:srgbClr val="1B3B6F"/>
                 </a:solidFill>
                 <a:latin typeface="Calibri" pitchFamily="34" charset="0"/>
-                <a:ea typeface="Calibri" pitchFamily="34" charset="-122"/>
-                <a:cs typeface="Calibri" pitchFamily="34" charset="-120"/>
+                <a:cs typeface="Amiri" pitchFamily="2" charset="-78"/>
               </a:rPr>
               <a:t>A</a:t>
             </a:r>
@@ -30007,8 +29447,7 @@
                   <a:srgbClr val="1F2A37"/>
                 </a:solidFill>
                 <a:latin typeface="Calibri" pitchFamily="34" charset="0"/>
-                <a:ea typeface="Calibri" pitchFamily="34" charset="-122"/>
-                <a:cs typeface="Calibri" pitchFamily="34" charset="-120"/>
+                <a:cs typeface="Amiri" pitchFamily="2" charset="-78"/>
               </a:rPr>
               <a:t>free writing</a:t>
             </a:r>
@@ -30071,8 +29510,7 @@
                   <a:srgbClr val="1B3B6F"/>
                 </a:solidFill>
                 <a:latin typeface="Calibri" pitchFamily="34" charset="0"/>
-                <a:ea typeface="Calibri" pitchFamily="34" charset="-122"/>
-                <a:cs typeface="Calibri" pitchFamily="34" charset="-120"/>
+                <a:cs typeface="Amiri" pitchFamily="2" charset="-78"/>
               </a:rPr>
               <a:t>B</a:t>
             </a:r>
@@ -30110,8 +29548,7 @@
                   <a:srgbClr val="1F2A37"/>
                 </a:solidFill>
                 <a:latin typeface="Calibri" pitchFamily="34" charset="0"/>
-                <a:ea typeface="Calibri" pitchFamily="34" charset="-122"/>
-                <a:cs typeface="Calibri" pitchFamily="34" charset="-120"/>
+                <a:cs typeface="Amiri" pitchFamily="2" charset="-78"/>
               </a:rPr>
               <a:t>directed writing</a:t>
             </a:r>
@@ -30174,8 +29611,7 @@
                   <a:srgbClr val="1B3B6F"/>
                 </a:solidFill>
                 <a:latin typeface="Calibri" pitchFamily="34" charset="0"/>
-                <a:ea typeface="Calibri" pitchFamily="34" charset="-122"/>
-                <a:cs typeface="Calibri" pitchFamily="34" charset="-120"/>
+                <a:cs typeface="Amiri" pitchFamily="2" charset="-78"/>
               </a:rPr>
               <a:t>C</a:t>
             </a:r>
@@ -30213,8 +29649,7 @@
                   <a:srgbClr val="1F2A37"/>
                 </a:solidFill>
                 <a:latin typeface="Calibri" pitchFamily="34" charset="0"/>
-                <a:ea typeface="Calibri" pitchFamily="34" charset="-122"/>
-                <a:cs typeface="Calibri" pitchFamily="34" charset="-120"/>
+                <a:cs typeface="Amiri" pitchFamily="2" charset="-78"/>
               </a:rPr>
               <a:t>handwriting</a:t>
             </a:r>
@@ -30311,8 +29746,7 @@
                   <a:srgbClr val="FFFFFF"/>
                 </a:solidFill>
                 <a:latin typeface="Calibri" pitchFamily="34" charset="0"/>
-                <a:ea typeface="Calibri" pitchFamily="34" charset="-122"/>
-                <a:cs typeface="Calibri" pitchFamily="34" charset="-120"/>
+                <a:cs typeface="Amiri" pitchFamily="2" charset="-78"/>
               </a:rPr>
               <a:t>2</a:t>
             </a:r>
@@ -30350,8 +29784,7 @@
                   <a:srgbClr val="1B3B6F"/>
                 </a:solidFill>
                 <a:latin typeface="Calibri" pitchFamily="34" charset="0"/>
-                <a:ea typeface="Calibri" pitchFamily="34" charset="-122"/>
-                <a:cs typeface="Calibri" pitchFamily="34" charset="-120"/>
+                <a:cs typeface="Amiri" pitchFamily="2" charset="-78"/>
               </a:rPr>
               <a:t>What does </a:t>
             </a:r>
@@ -30363,9 +29796,8 @@
                 <a:solidFill>
                   <a:srgbClr val="1B3B6F"/>
                 </a:solidFill>
-                <a:latin typeface="Amiri" pitchFamily="34" charset="0"/>
-                <a:ea typeface="Amiri" pitchFamily="34" charset="-122"/>
-                <a:cs typeface="Amiri" pitchFamily="34" charset="-120"/>
+                <a:latin typeface="Amiri" pitchFamily="2" charset="-78"/>
+                <a:cs typeface="Amiri" pitchFamily="2" charset="-78"/>
               </a:rPr>
               <a:t>صِيغَةٌ رَسْمِيَّةٌ</a:t>
             </a:r>
@@ -30378,8 +29810,7 @@
                   <a:srgbClr val="1B3B6F"/>
                 </a:solidFill>
                 <a:latin typeface="Calibri" pitchFamily="34" charset="0"/>
-                <a:ea typeface="Calibri" pitchFamily="34" charset="-122"/>
-                <a:cs typeface="Calibri" pitchFamily="34" charset="-120"/>
+                <a:cs typeface="Amiri" pitchFamily="2" charset="-78"/>
               </a:rPr>
               <a:t> mean?</a:t>
             </a:r>
@@ -30442,8 +29873,7 @@
                   <a:srgbClr val="1B3B6F"/>
                 </a:solidFill>
                 <a:latin typeface="Calibri" pitchFamily="34" charset="0"/>
-                <a:ea typeface="Calibri" pitchFamily="34" charset="-122"/>
-                <a:cs typeface="Calibri" pitchFamily="34" charset="-120"/>
+                <a:cs typeface="Amiri" pitchFamily="2" charset="-78"/>
               </a:rPr>
               <a:t>A</a:t>
             </a:r>
@@ -30481,8 +29911,7 @@
                   <a:srgbClr val="1F2A37"/>
                 </a:solidFill>
                 <a:latin typeface="Calibri" pitchFamily="34" charset="0"/>
-                <a:ea typeface="Calibri" pitchFamily="34" charset="-122"/>
-                <a:cs typeface="Calibri" pitchFamily="34" charset="-120"/>
+                <a:cs typeface="Amiri" pitchFamily="2" charset="-78"/>
               </a:rPr>
               <a:t>formal register</a:t>
             </a:r>
@@ -30545,8 +29974,7 @@
                   <a:srgbClr val="1B3B6F"/>
                 </a:solidFill>
                 <a:latin typeface="Calibri" pitchFamily="34" charset="0"/>
-                <a:ea typeface="Calibri" pitchFamily="34" charset="-122"/>
-                <a:cs typeface="Calibri" pitchFamily="34" charset="-120"/>
+                <a:cs typeface="Amiri" pitchFamily="2" charset="-78"/>
               </a:rPr>
               <a:t>B</a:t>
             </a:r>
@@ -30584,8 +30012,7 @@
                   <a:srgbClr val="1F2A37"/>
                 </a:solidFill>
                 <a:latin typeface="Calibri" pitchFamily="34" charset="0"/>
-                <a:ea typeface="Calibri" pitchFamily="34" charset="-122"/>
-                <a:cs typeface="Calibri" pitchFamily="34" charset="-120"/>
+                <a:cs typeface="Amiri" pitchFamily="2" charset="-78"/>
               </a:rPr>
               <a:t>an official form</a:t>
             </a:r>
@@ -30648,8 +30075,7 @@
                   <a:srgbClr val="1B3B6F"/>
                 </a:solidFill>
                 <a:latin typeface="Calibri" pitchFamily="34" charset="0"/>
-                <a:ea typeface="Calibri" pitchFamily="34" charset="-122"/>
-                <a:cs typeface="Calibri" pitchFamily="34" charset="-120"/>
+                <a:cs typeface="Amiri" pitchFamily="2" charset="-78"/>
               </a:rPr>
               <a:t>C</a:t>
             </a:r>
@@ -30687,8 +30113,7 @@
                   <a:srgbClr val="1F2A37"/>
                 </a:solidFill>
                 <a:latin typeface="Calibri" pitchFamily="34" charset="0"/>
-                <a:ea typeface="Calibri" pitchFamily="34" charset="-122"/>
-                <a:cs typeface="Calibri" pitchFamily="34" charset="-120"/>
+                <a:cs typeface="Amiri" pitchFamily="2" charset="-78"/>
               </a:rPr>
               <a:t>a friendly tone</a:t>
             </a:r>
@@ -30785,8 +30210,7 @@
                   <a:srgbClr val="FFFFFF"/>
                 </a:solidFill>
                 <a:latin typeface="Calibri" pitchFamily="34" charset="0"/>
-                <a:ea typeface="Calibri" pitchFamily="34" charset="-122"/>
-                <a:cs typeface="Calibri" pitchFamily="34" charset="-120"/>
+                <a:cs typeface="Amiri" pitchFamily="2" charset="-78"/>
               </a:rPr>
               <a:t>3</a:t>
             </a:r>
@@ -30824,8 +30248,7 @@
                   <a:srgbClr val="1B3B6F"/>
                 </a:solidFill>
                 <a:latin typeface="Calibri" pitchFamily="34" charset="0"/>
-                <a:ea typeface="Calibri" pitchFamily="34" charset="-122"/>
-                <a:cs typeface="Calibri" pitchFamily="34" charset="-120"/>
+                <a:cs typeface="Amiri" pitchFamily="2" charset="-78"/>
               </a:rPr>
               <a:t>Which phrase opens a formal letter?</a:t>
             </a:r>
@@ -30888,8 +30311,7 @@
                   <a:srgbClr val="1B3B6F"/>
                 </a:solidFill>
                 <a:latin typeface="Calibri" pitchFamily="34" charset="0"/>
-                <a:ea typeface="Calibri" pitchFamily="34" charset="-122"/>
-                <a:cs typeface="Calibri" pitchFamily="34" charset="-120"/>
+                <a:cs typeface="Amiri" pitchFamily="2" charset="-78"/>
               </a:rPr>
               <a:t>A</a:t>
             </a:r>
@@ -30926,9 +30348,8 @@
                 <a:solidFill>
                   <a:srgbClr val="1F2A37"/>
                 </a:solidFill>
-                <a:latin typeface="Amiri" pitchFamily="34" charset="0"/>
-                <a:ea typeface="Amiri" pitchFamily="34" charset="-122"/>
-                <a:cs typeface="Amiri" pitchFamily="34" charset="-120"/>
+                <a:latin typeface="Amiri" pitchFamily="2" charset="-78"/>
+                <a:cs typeface="Amiri" pitchFamily="2" charset="-78"/>
               </a:rPr>
               <a:t>حَيَّاكَ اللَّهُ</a:t>
             </a:r>
@@ -30991,8 +30412,7 @@
                   <a:srgbClr val="1B3B6F"/>
                 </a:solidFill>
                 <a:latin typeface="Calibri" pitchFamily="34" charset="0"/>
-                <a:ea typeface="Calibri" pitchFamily="34" charset="-122"/>
-                <a:cs typeface="Calibri" pitchFamily="34" charset="-120"/>
+                <a:cs typeface="Amiri" pitchFamily="2" charset="-78"/>
               </a:rPr>
               <a:t>B</a:t>
             </a:r>
@@ -31029,9 +30449,8 @@
                 <a:solidFill>
                   <a:srgbClr val="1F2A37"/>
                 </a:solidFill>
-                <a:latin typeface="Amiri" pitchFamily="34" charset="0"/>
-                <a:ea typeface="Amiri" pitchFamily="34" charset="-122"/>
-                <a:cs typeface="Amiri" pitchFamily="34" charset="-120"/>
+                <a:latin typeface="Amiri" pitchFamily="2" charset="-78"/>
+                <a:cs typeface="Amiri" pitchFamily="2" charset="-78"/>
               </a:rPr>
               <a:t>إِلَى اللِّقَاءِ</a:t>
             </a:r>
@@ -31094,8 +30513,7 @@
                   <a:srgbClr val="1B3B6F"/>
                 </a:solidFill>
                 <a:latin typeface="Calibri" pitchFamily="34" charset="0"/>
-                <a:ea typeface="Calibri" pitchFamily="34" charset="-122"/>
-                <a:cs typeface="Calibri" pitchFamily="34" charset="-120"/>
+                <a:cs typeface="Amiri" pitchFamily="2" charset="-78"/>
               </a:rPr>
               <a:t>C</a:t>
             </a:r>
@@ -31132,9 +30550,8 @@
                 <a:solidFill>
                   <a:srgbClr val="1F2A37"/>
                 </a:solidFill>
-                <a:latin typeface="Amiri" pitchFamily="34" charset="0"/>
-                <a:ea typeface="Amiri" pitchFamily="34" charset="-122"/>
-                <a:cs typeface="Amiri" pitchFamily="34" charset="-120"/>
+                <a:latin typeface="Amiri" pitchFamily="2" charset="-78"/>
+                <a:cs typeface="Amiri" pitchFamily="2" charset="-78"/>
               </a:rPr>
               <a:t>أَتَشَرَّفُ بِمُخَاطَبَتِكُمْ</a:t>
             </a:r>
@@ -31231,8 +30648,7 @@
                   <a:srgbClr val="FFFFFF"/>
                 </a:solidFill>
                 <a:latin typeface="Calibri" pitchFamily="34" charset="0"/>
-                <a:ea typeface="Calibri" pitchFamily="34" charset="-122"/>
-                <a:cs typeface="Calibri" pitchFamily="34" charset="-120"/>
+                <a:cs typeface="Amiri" pitchFamily="2" charset="-78"/>
               </a:rPr>
               <a:t>4</a:t>
             </a:r>
@@ -31270,8 +30686,7 @@
                   <a:srgbClr val="1B3B6F"/>
                 </a:solidFill>
                 <a:latin typeface="Calibri" pitchFamily="34" charset="0"/>
-                <a:ea typeface="Calibri" pitchFamily="34" charset="-122"/>
-                <a:cs typeface="Calibri" pitchFamily="34" charset="-120"/>
+                <a:cs typeface="Amiri" pitchFamily="2" charset="-78"/>
               </a:rPr>
               <a:t>Complete: </a:t>
             </a:r>
@@ -31283,9 +30698,8 @@
                 <a:solidFill>
                   <a:srgbClr val="1B3B6F"/>
                 </a:solidFill>
-                <a:latin typeface="Amiri" pitchFamily="34" charset="0"/>
-                <a:ea typeface="Amiri" pitchFamily="34" charset="-122"/>
-                <a:cs typeface="Amiri" pitchFamily="34" charset="-120"/>
+                <a:latin typeface="Amiri" pitchFamily="2" charset="-78"/>
+                <a:cs typeface="Amiri" pitchFamily="2" charset="-78"/>
               </a:rPr>
               <a:t>أَقْتَرِحُ أَنْ</a:t>
             </a:r>
@@ -31298,8 +30712,7 @@
                   <a:srgbClr val="1B3B6F"/>
                 </a:solidFill>
                 <a:latin typeface="Calibri" pitchFamily="34" charset="0"/>
-                <a:ea typeface="Calibri" pitchFamily="34" charset="-122"/>
-                <a:cs typeface="Calibri" pitchFamily="34" charset="-120"/>
+                <a:cs typeface="Amiri" pitchFamily="2" charset="-78"/>
               </a:rPr>
               <a:t> ___ </a:t>
             </a:r>
@@ -31311,9 +30724,8 @@
                 <a:solidFill>
                   <a:srgbClr val="1B3B6F"/>
                 </a:solidFill>
-                <a:latin typeface="Amiri" pitchFamily="34" charset="0"/>
-                <a:ea typeface="Amiri" pitchFamily="34" charset="-122"/>
-                <a:cs typeface="Amiri" pitchFamily="34" charset="-120"/>
+                <a:latin typeface="Amiri" pitchFamily="2" charset="-78"/>
+                <a:cs typeface="Amiri" pitchFamily="2" charset="-78"/>
               </a:rPr>
               <a:t>حَمْلَةٌ لِتَرْشِيدِ الاسْتِهْلَاكِ</a:t>
             </a:r>
@@ -31326,8 +30738,7 @@
                   <a:srgbClr val="1B3B6F"/>
                 </a:solidFill>
                 <a:latin typeface="Calibri" pitchFamily="34" charset="0"/>
-                <a:ea typeface="Calibri" pitchFamily="34" charset="-122"/>
-                <a:cs typeface="Calibri" pitchFamily="34" charset="-120"/>
+                <a:cs typeface="Amiri" pitchFamily="2" charset="-78"/>
               </a:rPr>
               <a:t>.</a:t>
             </a:r>
@@ -31390,8 +30801,7 @@
                   <a:srgbClr val="1B3B6F"/>
                 </a:solidFill>
                 <a:latin typeface="Calibri" pitchFamily="34" charset="0"/>
-                <a:ea typeface="Calibri" pitchFamily="34" charset="-122"/>
-                <a:cs typeface="Calibri" pitchFamily="34" charset="-120"/>
+                <a:cs typeface="Amiri" pitchFamily="2" charset="-78"/>
               </a:rPr>
               <a:t>A</a:t>
             </a:r>
@@ -31428,9 +30838,8 @@
                 <a:solidFill>
                   <a:srgbClr val="1F2A37"/>
                 </a:solidFill>
-                <a:latin typeface="Amiri" pitchFamily="34" charset="0"/>
-                <a:ea typeface="Amiri" pitchFamily="34" charset="-122"/>
-                <a:cs typeface="Amiri" pitchFamily="34" charset="-120"/>
+                <a:latin typeface="Amiri" pitchFamily="2" charset="-78"/>
+                <a:cs typeface="Amiri" pitchFamily="2" charset="-78"/>
               </a:rPr>
               <a:t>تُطْلَقُ</a:t>
             </a:r>
@@ -31493,8 +30902,7 @@
                   <a:srgbClr val="1B3B6F"/>
                 </a:solidFill>
                 <a:latin typeface="Calibri" pitchFamily="34" charset="0"/>
-                <a:ea typeface="Calibri" pitchFamily="34" charset="-122"/>
-                <a:cs typeface="Calibri" pitchFamily="34" charset="-120"/>
+                <a:cs typeface="Amiri" pitchFamily="2" charset="-78"/>
               </a:rPr>
               <a:t>B</a:t>
             </a:r>
@@ -31531,9 +30939,8 @@
                 <a:solidFill>
                   <a:srgbClr val="1F2A37"/>
                 </a:solidFill>
-                <a:latin typeface="Amiri" pitchFamily="34" charset="0"/>
-                <a:ea typeface="Amiri" pitchFamily="34" charset="-122"/>
-                <a:cs typeface="Amiri" pitchFamily="34" charset="-120"/>
+                <a:latin typeface="Amiri" pitchFamily="2" charset="-78"/>
+                <a:cs typeface="Amiri" pitchFamily="2" charset="-78"/>
               </a:rPr>
               <a:t>أُطْلِقَتْ</a:t>
             </a:r>
@@ -31596,8 +31003,7 @@
                   <a:srgbClr val="1B3B6F"/>
                 </a:solidFill>
                 <a:latin typeface="Calibri" pitchFamily="34" charset="0"/>
-                <a:ea typeface="Calibri" pitchFamily="34" charset="-122"/>
-                <a:cs typeface="Calibri" pitchFamily="34" charset="-120"/>
+                <a:cs typeface="Amiri" pitchFamily="2" charset="-78"/>
               </a:rPr>
               <a:t>C</a:t>
             </a:r>
@@ -31634,9 +31040,8 @@
                 <a:solidFill>
                   <a:srgbClr val="1F2A37"/>
                 </a:solidFill>
-                <a:latin typeface="Amiri" pitchFamily="34" charset="0"/>
-                <a:ea typeface="Amiri" pitchFamily="34" charset="-122"/>
-                <a:cs typeface="Amiri" pitchFamily="34" charset="-120"/>
+                <a:latin typeface="Amiri" pitchFamily="2" charset="-78"/>
+                <a:cs typeface="Amiri" pitchFamily="2" charset="-78"/>
               </a:rPr>
               <a:t>تُطْلَقَ</a:t>
             </a:r>
@@ -31733,8 +31138,7 @@
                   <a:srgbClr val="FFFFFF"/>
                 </a:solidFill>
                 <a:latin typeface="Calibri" pitchFamily="34" charset="0"/>
-                <a:ea typeface="Calibri" pitchFamily="34" charset="-122"/>
-                <a:cs typeface="Calibri" pitchFamily="34" charset="-120"/>
+                <a:cs typeface="Amiri" pitchFamily="2" charset="-78"/>
               </a:rPr>
               <a:t>5</a:t>
             </a:r>
@@ -31772,8 +31176,7 @@
                   <a:srgbClr val="1B3B6F"/>
                 </a:solidFill>
                 <a:latin typeface="Calibri" pitchFamily="34" charset="0"/>
-                <a:ea typeface="Calibri" pitchFamily="34" charset="-122"/>
-                <a:cs typeface="Calibri" pitchFamily="34" charset="-120"/>
+                <a:cs typeface="Amiri" pitchFamily="2" charset="-78"/>
               </a:rPr>
               <a:t>Complete: </a:t>
             </a:r>
@@ -31785,9 +31188,8 @@
                 <a:solidFill>
                   <a:srgbClr val="1B3B6F"/>
                 </a:solidFill>
-                <a:latin typeface="Amiri" pitchFamily="34" charset="0"/>
-                <a:ea typeface="Amiri" pitchFamily="34" charset="-122"/>
-                <a:cs typeface="Amiri" pitchFamily="34" charset="-120"/>
+                <a:latin typeface="Amiri" pitchFamily="2" charset="-78"/>
+                <a:cs typeface="Amiri" pitchFamily="2" charset="-78"/>
               </a:rPr>
               <a:t>لَوْ طُبِّقَتْ هٰذِهِ الإِجْرَاءَاتُ،</a:t>
             </a:r>
@@ -31800,8 +31202,7 @@
                   <a:srgbClr val="1B3B6F"/>
                 </a:solidFill>
                 <a:latin typeface="Calibri" pitchFamily="34" charset="0"/>
-                <a:ea typeface="Calibri" pitchFamily="34" charset="-122"/>
-                <a:cs typeface="Calibri" pitchFamily="34" charset="-120"/>
+                <a:cs typeface="Amiri" pitchFamily="2" charset="-78"/>
               </a:rPr>
               <a:t> ___ </a:t>
             </a:r>
@@ -31813,9 +31214,8 @@
                 <a:solidFill>
                   <a:srgbClr val="1B3B6F"/>
                 </a:solidFill>
-                <a:latin typeface="Amiri" pitchFamily="34" charset="0"/>
-                <a:ea typeface="Amiri" pitchFamily="34" charset="-122"/>
-                <a:cs typeface="Amiri" pitchFamily="34" charset="-120"/>
+                <a:latin typeface="Amiri" pitchFamily="2" charset="-78"/>
+                <a:cs typeface="Amiri" pitchFamily="2" charset="-78"/>
               </a:rPr>
               <a:t>الوَضْعُ</a:t>
             </a:r>
@@ -31828,8 +31228,7 @@
                   <a:srgbClr val="1B3B6F"/>
                 </a:solidFill>
                 <a:latin typeface="Calibri" pitchFamily="34" charset="0"/>
-                <a:ea typeface="Calibri" pitchFamily="34" charset="-122"/>
-                <a:cs typeface="Calibri" pitchFamily="34" charset="-120"/>
+                <a:cs typeface="Amiri" pitchFamily="2" charset="-78"/>
               </a:rPr>
               <a:t>.</a:t>
             </a:r>
@@ -31892,8 +31291,7 @@
                   <a:srgbClr val="1B3B6F"/>
                 </a:solidFill>
                 <a:latin typeface="Calibri" pitchFamily="34" charset="0"/>
-                <a:ea typeface="Calibri" pitchFamily="34" charset="-122"/>
-                <a:cs typeface="Calibri" pitchFamily="34" charset="-120"/>
+                <a:cs typeface="Amiri" pitchFamily="2" charset="-78"/>
               </a:rPr>
               <a:t>A</a:t>
             </a:r>
@@ -31930,9 +31328,8 @@
                 <a:solidFill>
                   <a:srgbClr val="1F2A37"/>
                 </a:solidFill>
-                <a:latin typeface="Amiri" pitchFamily="34" charset="0"/>
-                <a:ea typeface="Amiri" pitchFamily="34" charset="-122"/>
-                <a:cs typeface="Amiri" pitchFamily="34" charset="-120"/>
+                <a:latin typeface="Amiri" pitchFamily="2" charset="-78"/>
+                <a:cs typeface="Amiri" pitchFamily="2" charset="-78"/>
               </a:rPr>
               <a:t>لَتَحَسَّنَ</a:t>
             </a:r>
@@ -31995,8 +31392,7 @@
                   <a:srgbClr val="1B3B6F"/>
                 </a:solidFill>
                 <a:latin typeface="Calibri" pitchFamily="34" charset="0"/>
-                <a:ea typeface="Calibri" pitchFamily="34" charset="-122"/>
-                <a:cs typeface="Calibri" pitchFamily="34" charset="-120"/>
+                <a:cs typeface="Amiri" pitchFamily="2" charset="-78"/>
               </a:rPr>
               <a:t>B</a:t>
             </a:r>
@@ -32033,9 +31429,8 @@
                 <a:solidFill>
                   <a:srgbClr val="1F2A37"/>
                 </a:solidFill>
-                <a:latin typeface="Amiri" pitchFamily="34" charset="0"/>
-                <a:ea typeface="Amiri" pitchFamily="34" charset="-122"/>
-                <a:cs typeface="Amiri" pitchFamily="34" charset="-120"/>
+                <a:latin typeface="Amiri" pitchFamily="2" charset="-78"/>
+                <a:cs typeface="Amiri" pitchFamily="2" charset="-78"/>
               </a:rPr>
               <a:t>سَيَتَحَسَّنُ</a:t>
             </a:r>
@@ -32098,8 +31493,7 @@
                   <a:srgbClr val="1B3B6F"/>
                 </a:solidFill>
                 <a:latin typeface="Calibri" pitchFamily="34" charset="0"/>
-                <a:ea typeface="Calibri" pitchFamily="34" charset="-122"/>
-                <a:cs typeface="Calibri" pitchFamily="34" charset="-120"/>
+                <a:cs typeface="Amiri" pitchFamily="2" charset="-78"/>
               </a:rPr>
               <a:t>C</a:t>
             </a:r>
@@ -32136,9 +31530,8 @@
                 <a:solidFill>
                   <a:srgbClr val="1F2A37"/>
                 </a:solidFill>
-                <a:latin typeface="Amiri" pitchFamily="34" charset="0"/>
-                <a:ea typeface="Amiri" pitchFamily="34" charset="-122"/>
-                <a:cs typeface="Amiri" pitchFamily="34" charset="-120"/>
+                <a:latin typeface="Amiri" pitchFamily="2" charset="-78"/>
+                <a:cs typeface="Amiri" pitchFamily="2" charset="-78"/>
               </a:rPr>
               <a:t>يَتَحَسَّنُ</a:t>
             </a:r>
@@ -32210,8 +31603,7 @@
                   <a:srgbClr val="0E7C86"/>
                 </a:solidFill>
                 <a:latin typeface="Calibri" pitchFamily="34" charset="0"/>
-                <a:ea typeface="Calibri" pitchFamily="34" charset="-122"/>
-                <a:cs typeface="Calibri" pitchFamily="34" charset="-120"/>
+                <a:cs typeface="Amiri" pitchFamily="2" charset="-78"/>
               </a:rPr>
               <a:t>HOW TO ANSWER</a:t>
             </a:r>
@@ -32249,8 +31641,7 @@
                   <a:srgbClr val="1F2A37"/>
                 </a:solidFill>
                 <a:latin typeface="Calibri" pitchFamily="34" charset="0"/>
-                <a:ea typeface="Calibri" pitchFamily="34" charset="-122"/>
-                <a:cs typeface="Calibri" pitchFamily="34" charset="-120"/>
+                <a:cs typeface="Amiri" pitchFamily="2" charset="-78"/>
               </a:rPr>
               <a:t>Work on your own in silence.</a:t>
             </a:r>
@@ -32266,8 +31657,7 @@
                   <a:srgbClr val="1F2A37"/>
                 </a:solidFill>
                 <a:latin typeface="Calibri" pitchFamily="34" charset="0"/>
-                <a:ea typeface="Calibri" pitchFamily="34" charset="-122"/>
-                <a:cs typeface="Calibri" pitchFamily="34" charset="-120"/>
+                <a:cs typeface="Amiri" pitchFamily="2" charset="-78"/>
               </a:rPr>
               <a:t>When the timer ends, type in the chat:</a:t>
             </a:r>
@@ -32305,8 +31695,7 @@
                   <a:srgbClr val="1B3B6F"/>
                 </a:solidFill>
                 <a:latin typeface="Consolas" pitchFamily="34" charset="0"/>
-                <a:ea typeface="Consolas" pitchFamily="34" charset="-122"/>
-                <a:cs typeface="Consolas" pitchFamily="34" charset="-120"/>
+                <a:cs typeface="Amiri" pitchFamily="2" charset="-78"/>
               </a:rPr>
               <a:t>1_  2_  3_  4_  5_</a:t>
             </a:r>
@@ -32344,8 +31733,7 @@
                   <a:srgbClr val="0E7C86"/>
                 </a:solidFill>
                 <a:latin typeface="Calibri" pitchFamily="34" charset="0"/>
-                <a:ea typeface="Calibri" pitchFamily="34" charset="-122"/>
-                <a:cs typeface="Calibri" pitchFamily="34" charset="-120"/>
+                <a:cs typeface="Amiri" pitchFamily="2" charset="-78"/>
               </a:rPr>
               <a:t>⏱  5 : 00</a:t>
             </a:r>
@@ -32383,8 +31771,7 @@
                   <a:srgbClr val="8A93A0"/>
                 </a:solidFill>
                 <a:latin typeface="Calibri" pitchFamily="34" charset="0"/>
-                <a:ea typeface="Calibri" pitchFamily="34" charset="-122"/>
-                <a:cs typeface="Calibri" pitchFamily="34" charset="-120"/>
+                <a:cs typeface="Amiri" pitchFamily="2" charset="-78"/>
               </a:rPr>
               <a:t>4 / 26</a:t>
             </a:r>
@@ -32478,9 +31865,8 @@
                 <a:solidFill>
                   <a:srgbClr val="D4AF37"/>
                 </a:solidFill>
-                <a:latin typeface="Amiri" pitchFamily="34" charset="0"/>
-                <a:ea typeface="Amiri" pitchFamily="34" charset="-122"/>
-                <a:cs typeface="Amiri" pitchFamily="34" charset="-120"/>
+                <a:latin typeface="Amiri" pitchFamily="2" charset="-78"/>
+                <a:cs typeface="Amiri" pitchFamily="2" charset="-78"/>
               </a:rPr>
               <a:t>م</a:t>
             </a:r>
@@ -32518,8 +31904,7 @@
                   <a:srgbClr val="1B3B6F"/>
                 </a:solidFill>
                 <a:latin typeface="Cambria" pitchFamily="34" charset="0"/>
-                <a:ea typeface="Cambria" pitchFamily="34" charset="-122"/>
-                <a:cs typeface="Cambria" pitchFamily="34" charset="-120"/>
+                <a:cs typeface="Amiri" pitchFamily="2" charset="-78"/>
               </a:rPr>
               <a:t>Al Madina Online School</a:t>
             </a:r>
@@ -32557,8 +31942,7 @@
                   <a:srgbClr val="8A6D1E"/>
                 </a:solidFill>
                 <a:latin typeface="Calibri" pitchFamily="34" charset="0"/>
-                <a:ea typeface="Calibri" pitchFamily="34" charset="-122"/>
-                <a:cs typeface="Calibri" pitchFamily="34" charset="-120"/>
+                <a:cs typeface="Amiri" pitchFamily="2" charset="-78"/>
               </a:rPr>
               <a:t>ARABIC DEPARTMENT · MIFTAH ARABIC · IGCSE 0544</a:t>
             </a:r>
@@ -32623,8 +32007,7 @@
                   <a:srgbClr val="FFFFFF"/>
                 </a:solidFill>
                 <a:latin typeface="Calibri" pitchFamily="34" charset="0"/>
-                <a:ea typeface="Calibri" pitchFamily="34" charset="-122"/>
-                <a:cs typeface="Calibri" pitchFamily="34" charset="-120"/>
+                <a:cs typeface="Amiri" pitchFamily="2" charset="-78"/>
               </a:rPr>
               <a:t>P6-L04 · IGCSE Bridge</a:t>
             </a:r>
@@ -32689,8 +32072,7 @@
                   <a:srgbClr val="FFFFFF"/>
                 </a:solidFill>
                 <a:latin typeface="Calibri" pitchFamily="34" charset="0"/>
-                <a:ea typeface="Calibri" pitchFamily="34" charset="-122"/>
-                <a:cs typeface="Calibri" pitchFamily="34" charset="-120"/>
+                <a:cs typeface="Amiri" pitchFamily="2" charset="-78"/>
               </a:rPr>
               <a:t>DO NOW · 2 MIN</a:t>
             </a:r>
@@ -32728,8 +32110,7 @@
                   <a:srgbClr val="0E7C86"/>
                 </a:solidFill>
                 <a:latin typeface="Calibri" pitchFamily="34" charset="0"/>
-                <a:ea typeface="Calibri" pitchFamily="34" charset="-122"/>
-                <a:cs typeface="Calibri" pitchFamily="34" charset="-120"/>
+                <a:cs typeface="Amiri" pitchFamily="2" charset="-78"/>
               </a:rPr>
               <a:t>DO NOW · ANSWERS AND REASONS</a:t>
             </a:r>
@@ -32767,8 +32148,7 @@
                   <a:srgbClr val="1B3B6F"/>
                 </a:solidFill>
                 <a:latin typeface="Cambria" pitchFamily="34" charset="0"/>
-                <a:ea typeface="Cambria" pitchFamily="34" charset="-122"/>
-                <a:cs typeface="Cambria" pitchFamily="34" charset="-120"/>
+                <a:cs typeface="Amiri" pitchFamily="2" charset="-78"/>
               </a:rPr>
               <a:t>Let’s check — and explain why</a:t>
             </a:r>
@@ -32805,9 +32185,8 @@
                 <a:solidFill>
                   <a:srgbClr val="8A6D1E"/>
                 </a:solidFill>
-                <a:latin typeface="Amiri" pitchFamily="34" charset="0"/>
-                <a:ea typeface="Amiri" pitchFamily="34" charset="-122"/>
-                <a:cs typeface="Amiri" pitchFamily="34" charset="-120"/>
+                <a:latin typeface="Amiri" pitchFamily="2" charset="-78"/>
+                <a:cs typeface="Amiri" pitchFamily="2" charset="-78"/>
               </a:rPr>
               <a:t>الإِجَابَاتُ وَالتَّعْلِيلُ</a:t>
             </a:r>
@@ -32845,8 +32224,7 @@
                   <a:srgbClr val="8A93A0"/>
                 </a:solidFill>
                 <a:latin typeface="Calibri" pitchFamily="34" charset="0"/>
-                <a:ea typeface="Calibri" pitchFamily="34" charset="-122"/>
-                <a:cs typeface="Calibri" pitchFamily="34" charset="-120"/>
+                <a:cs typeface="Amiri" pitchFamily="2" charset="-78"/>
               </a:rPr>
               <a:t>Miftah Arabic · Progression P6 · IGCSE Bridge · P6-L04</a:t>
             </a:r>
@@ -32943,8 +32321,7 @@
                   <a:srgbClr val="FFFFFF"/>
                 </a:solidFill>
                 <a:latin typeface="Calibri" pitchFamily="34" charset="0"/>
-                <a:ea typeface="Calibri" pitchFamily="34" charset="-122"/>
-                <a:cs typeface="Calibri" pitchFamily="34" charset="-120"/>
+                <a:cs typeface="Amiri" pitchFamily="2" charset="-78"/>
               </a:rPr>
               <a:t>1</a:t>
             </a:r>
@@ -32982,8 +32359,7 @@
                   <a:srgbClr val="1B3B6F"/>
                 </a:solidFill>
                 <a:latin typeface="Calibri" pitchFamily="34" charset="0"/>
-                <a:ea typeface="Calibri" pitchFamily="34" charset="-122"/>
-                <a:cs typeface="Calibri" pitchFamily="34" charset="-120"/>
+                <a:cs typeface="Amiri" pitchFamily="2" charset="-78"/>
               </a:rPr>
               <a:t>What does </a:t>
             </a:r>
@@ -32995,9 +32371,8 @@
                 <a:solidFill>
                   <a:srgbClr val="1B3B6F"/>
                 </a:solidFill>
-                <a:latin typeface="Amiri" pitchFamily="34" charset="0"/>
-                <a:ea typeface="Amiri" pitchFamily="34" charset="-122"/>
-                <a:cs typeface="Amiri" pitchFamily="34" charset="-120"/>
+                <a:latin typeface="Amiri" pitchFamily="2" charset="-78"/>
+                <a:cs typeface="Amiri" pitchFamily="2" charset="-78"/>
               </a:rPr>
               <a:t>الكِتَابَةُ المُوَجَّهَةُ</a:t>
             </a:r>
@@ -33010,8 +32385,7 @@
                   <a:srgbClr val="1B3B6F"/>
                 </a:solidFill>
                 <a:latin typeface="Calibri" pitchFamily="34" charset="0"/>
-                <a:ea typeface="Calibri" pitchFamily="34" charset="-122"/>
-                <a:cs typeface="Calibri" pitchFamily="34" charset="-120"/>
+                <a:cs typeface="Amiri" pitchFamily="2" charset="-78"/>
               </a:rPr>
               <a:t> mean?</a:t>
             </a:r>
@@ -33074,8 +32448,7 @@
                   <a:srgbClr val="1B3B6F"/>
                 </a:solidFill>
                 <a:latin typeface="Calibri" pitchFamily="34" charset="0"/>
-                <a:ea typeface="Calibri" pitchFamily="34" charset="-122"/>
-                <a:cs typeface="Calibri" pitchFamily="34" charset="-120"/>
+                <a:cs typeface="Amiri" pitchFamily="2" charset="-78"/>
               </a:rPr>
               <a:t>A</a:t>
             </a:r>
@@ -33113,8 +32486,7 @@
                   <a:srgbClr val="9AA1AB"/>
                 </a:solidFill>
                 <a:latin typeface="Calibri" pitchFamily="34" charset="0"/>
-                <a:ea typeface="Calibri" pitchFamily="34" charset="-122"/>
-                <a:cs typeface="Calibri" pitchFamily="34" charset="-120"/>
+                <a:cs typeface="Amiri" pitchFamily="2" charset="-78"/>
               </a:rPr>
               <a:t>free writing</a:t>
             </a:r>
@@ -33204,8 +32576,7 @@
                   <a:srgbClr val="FFFFFF"/>
                 </a:solidFill>
                 <a:latin typeface="Calibri" pitchFamily="34" charset="0"/>
-                <a:ea typeface="Calibri" pitchFamily="34" charset="-122"/>
-                <a:cs typeface="Calibri" pitchFamily="34" charset="-120"/>
+                <a:cs typeface="Amiri" pitchFamily="2" charset="-78"/>
               </a:rPr>
               <a:t>B</a:t>
             </a:r>
@@ -33243,8 +32614,7 @@
                   <a:srgbClr val="1F2A37"/>
                 </a:solidFill>
                 <a:latin typeface="Calibri" pitchFamily="34" charset="0"/>
-                <a:ea typeface="Calibri" pitchFamily="34" charset="-122"/>
-                <a:cs typeface="Calibri" pitchFamily="34" charset="-120"/>
+                <a:cs typeface="Amiri" pitchFamily="2" charset="-78"/>
               </a:rPr>
               <a:t>directed writing</a:t>
             </a:r>
@@ -33307,8 +32677,7 @@
                   <a:srgbClr val="1B3B6F"/>
                 </a:solidFill>
                 <a:latin typeface="Calibri" pitchFamily="34" charset="0"/>
-                <a:ea typeface="Calibri" pitchFamily="34" charset="-122"/>
-                <a:cs typeface="Calibri" pitchFamily="34" charset="-120"/>
+                <a:cs typeface="Amiri" pitchFamily="2" charset="-78"/>
               </a:rPr>
               <a:t>C</a:t>
             </a:r>
@@ -33346,8 +32715,7 @@
                   <a:srgbClr val="9AA1AB"/>
                 </a:solidFill>
                 <a:latin typeface="Calibri" pitchFamily="34" charset="0"/>
-                <a:ea typeface="Calibri" pitchFamily="34" charset="-122"/>
-                <a:cs typeface="Calibri" pitchFamily="34" charset="-120"/>
+                <a:cs typeface="Amiri" pitchFamily="2" charset="-78"/>
               </a:rPr>
               <a:t>handwriting</a:t>
             </a:r>
@@ -33385,8 +32753,7 @@
                   <a:srgbClr val="8A6D1E"/>
                 </a:solidFill>
                 <a:latin typeface="Calibri" pitchFamily="34" charset="0"/>
-                <a:ea typeface="Calibri" pitchFamily="34" charset="-122"/>
-                <a:cs typeface="Calibri" pitchFamily="34" charset="-120"/>
+                <a:cs typeface="Amiri" pitchFamily="2" charset="-78"/>
               </a:rPr>
               <a:t>Prepared at home (P6-L03).</a:t>
             </a:r>
@@ -33483,8 +32850,7 @@
                   <a:srgbClr val="FFFFFF"/>
                 </a:solidFill>
                 <a:latin typeface="Calibri" pitchFamily="34" charset="0"/>
-                <a:ea typeface="Calibri" pitchFamily="34" charset="-122"/>
-                <a:cs typeface="Calibri" pitchFamily="34" charset="-120"/>
+                <a:cs typeface="Amiri" pitchFamily="2" charset="-78"/>
               </a:rPr>
               <a:t>2</a:t>
             </a:r>
@@ -33522,8 +32888,7 @@
                   <a:srgbClr val="1B3B6F"/>
                 </a:solidFill>
                 <a:latin typeface="Calibri" pitchFamily="34" charset="0"/>
-                <a:ea typeface="Calibri" pitchFamily="34" charset="-122"/>
-                <a:cs typeface="Calibri" pitchFamily="34" charset="-120"/>
+                <a:cs typeface="Amiri" pitchFamily="2" charset="-78"/>
               </a:rPr>
               <a:t>What does </a:t>
             </a:r>
@@ -33535,9 +32900,8 @@
                 <a:solidFill>
                   <a:srgbClr val="1B3B6F"/>
                 </a:solidFill>
-                <a:latin typeface="Amiri" pitchFamily="34" charset="0"/>
-                <a:ea typeface="Amiri" pitchFamily="34" charset="-122"/>
-                <a:cs typeface="Amiri" pitchFamily="34" charset="-120"/>
+                <a:latin typeface="Amiri" pitchFamily="2" charset="-78"/>
+                <a:cs typeface="Amiri" pitchFamily="2" charset="-78"/>
               </a:rPr>
               <a:t>صِيغَةٌ رَسْمِيَّةٌ</a:t>
             </a:r>
@@ -33550,8 +32914,7 @@
                   <a:srgbClr val="1B3B6F"/>
                 </a:solidFill>
                 <a:latin typeface="Calibri" pitchFamily="34" charset="0"/>
-                <a:ea typeface="Calibri" pitchFamily="34" charset="-122"/>
-                <a:cs typeface="Calibri" pitchFamily="34" charset="-120"/>
+                <a:cs typeface="Amiri" pitchFamily="2" charset="-78"/>
               </a:rPr>
               <a:t> mean?</a:t>
             </a:r>
@@ -33641,8 +33004,7 @@
                   <a:srgbClr val="FFFFFF"/>
                 </a:solidFill>
                 <a:latin typeface="Calibri" pitchFamily="34" charset="0"/>
-                <a:ea typeface="Calibri" pitchFamily="34" charset="-122"/>
-                <a:cs typeface="Calibri" pitchFamily="34" charset="-120"/>
+                <a:cs typeface="Amiri" pitchFamily="2" charset="-78"/>
               </a:rPr>
               <a:t>A</a:t>
             </a:r>
@@ -33680,8 +33042,7 @@
                   <a:srgbClr val="1F2A37"/>
                 </a:solidFill>
                 <a:latin typeface="Calibri" pitchFamily="34" charset="0"/>
-                <a:ea typeface="Calibri" pitchFamily="34" charset="-122"/>
-                <a:cs typeface="Calibri" pitchFamily="34" charset="-120"/>
+                <a:cs typeface="Amiri" pitchFamily="2" charset="-78"/>
               </a:rPr>
               <a:t>formal register</a:t>
             </a:r>
@@ -33744,8 +33105,7 @@
                   <a:srgbClr val="1B3B6F"/>
                 </a:solidFill>
                 <a:latin typeface="Calibri" pitchFamily="34" charset="0"/>
-                <a:ea typeface="Calibri" pitchFamily="34" charset="-122"/>
-                <a:cs typeface="Calibri" pitchFamily="34" charset="-120"/>
+                <a:cs typeface="Amiri" pitchFamily="2" charset="-78"/>
               </a:rPr>
               <a:t>B</a:t>
             </a:r>
@@ -33783,8 +33143,7 @@
                   <a:srgbClr val="9AA1AB"/>
                 </a:solidFill>
                 <a:latin typeface="Calibri" pitchFamily="34" charset="0"/>
-                <a:ea typeface="Calibri" pitchFamily="34" charset="-122"/>
-                <a:cs typeface="Calibri" pitchFamily="34" charset="-120"/>
+                <a:cs typeface="Amiri" pitchFamily="2" charset="-78"/>
               </a:rPr>
               <a:t>an official form</a:t>
             </a:r>
@@ -33847,8 +33206,7 @@
                   <a:srgbClr val="1B3B6F"/>
                 </a:solidFill>
                 <a:latin typeface="Calibri" pitchFamily="34" charset="0"/>
-                <a:ea typeface="Calibri" pitchFamily="34" charset="-122"/>
-                <a:cs typeface="Calibri" pitchFamily="34" charset="-120"/>
+                <a:cs typeface="Amiri" pitchFamily="2" charset="-78"/>
               </a:rPr>
               <a:t>C</a:t>
             </a:r>
@@ -33886,8 +33244,7 @@
                   <a:srgbClr val="9AA1AB"/>
                 </a:solidFill>
                 <a:latin typeface="Calibri" pitchFamily="34" charset="0"/>
-                <a:ea typeface="Calibri" pitchFamily="34" charset="-122"/>
-                <a:cs typeface="Calibri" pitchFamily="34" charset="-120"/>
+                <a:cs typeface="Amiri" pitchFamily="2" charset="-78"/>
               </a:rPr>
               <a:t>a friendly tone</a:t>
             </a:r>
@@ -33925,8 +33282,7 @@
                   <a:srgbClr val="8A6D1E"/>
                 </a:solidFill>
                 <a:latin typeface="Calibri" pitchFamily="34" charset="0"/>
-                <a:ea typeface="Calibri" pitchFamily="34" charset="-122"/>
-                <a:cs typeface="Calibri" pitchFamily="34" charset="-120"/>
+                <a:cs typeface="Amiri" pitchFamily="2" charset="-78"/>
               </a:rPr>
               <a:t>Prepared at home (P6-L03).</a:t>
             </a:r>
@@ -34023,8 +33379,7 @@
                   <a:srgbClr val="FFFFFF"/>
                 </a:solidFill>
                 <a:latin typeface="Calibri" pitchFamily="34" charset="0"/>
-                <a:ea typeface="Calibri" pitchFamily="34" charset="-122"/>
-                <a:cs typeface="Calibri" pitchFamily="34" charset="-120"/>
+                <a:cs typeface="Amiri" pitchFamily="2" charset="-78"/>
               </a:rPr>
               <a:t>3</a:t>
             </a:r>
@@ -34062,8 +33417,7 @@
                   <a:srgbClr val="1B3B6F"/>
                 </a:solidFill>
                 <a:latin typeface="Calibri" pitchFamily="34" charset="0"/>
-                <a:ea typeface="Calibri" pitchFamily="34" charset="-122"/>
-                <a:cs typeface="Calibri" pitchFamily="34" charset="-120"/>
+                <a:cs typeface="Amiri" pitchFamily="2" charset="-78"/>
               </a:rPr>
               <a:t>Which phrase opens a formal letter?</a:t>
             </a:r>
@@ -34126,8 +33480,7 @@
                   <a:srgbClr val="1B3B6F"/>
                 </a:solidFill>
                 <a:latin typeface="Calibri" pitchFamily="34" charset="0"/>
-                <a:ea typeface="Calibri" pitchFamily="34" charset="-122"/>
-                <a:cs typeface="Calibri" pitchFamily="34" charset="-120"/>
+                <a:cs typeface="Amiri" pitchFamily="2" charset="-78"/>
               </a:rPr>
               <a:t>A</a:t>
             </a:r>
@@ -34164,9 +33517,8 @@
                 <a:solidFill>
                   <a:srgbClr val="9AA1AB"/>
                 </a:solidFill>
-                <a:latin typeface="Amiri" pitchFamily="34" charset="0"/>
-                <a:ea typeface="Amiri" pitchFamily="34" charset="-122"/>
-                <a:cs typeface="Amiri" pitchFamily="34" charset="-120"/>
+                <a:latin typeface="Amiri" pitchFamily="2" charset="-78"/>
+                <a:cs typeface="Amiri" pitchFamily="2" charset="-78"/>
               </a:rPr>
               <a:t>حَيَّاكَ اللَّهُ</a:t>
             </a:r>
@@ -34229,8 +33581,7 @@
                   <a:srgbClr val="1B3B6F"/>
                 </a:solidFill>
                 <a:latin typeface="Calibri" pitchFamily="34" charset="0"/>
-                <a:ea typeface="Calibri" pitchFamily="34" charset="-122"/>
-                <a:cs typeface="Calibri" pitchFamily="34" charset="-120"/>
+                <a:cs typeface="Amiri" pitchFamily="2" charset="-78"/>
               </a:rPr>
               <a:t>B</a:t>
             </a:r>
@@ -34267,9 +33618,8 @@
                 <a:solidFill>
                   <a:srgbClr val="9AA1AB"/>
                 </a:solidFill>
-                <a:latin typeface="Amiri" pitchFamily="34" charset="0"/>
-                <a:ea typeface="Amiri" pitchFamily="34" charset="-122"/>
-                <a:cs typeface="Amiri" pitchFamily="34" charset="-120"/>
+                <a:latin typeface="Amiri" pitchFamily="2" charset="-78"/>
+                <a:cs typeface="Amiri" pitchFamily="2" charset="-78"/>
               </a:rPr>
               <a:t>إِلَى اللِّقَاءِ</a:t>
             </a:r>
@@ -34359,8 +33709,7 @@
                   <a:srgbClr val="FFFFFF"/>
                 </a:solidFill>
                 <a:latin typeface="Calibri" pitchFamily="34" charset="0"/>
-                <a:ea typeface="Calibri" pitchFamily="34" charset="-122"/>
-                <a:cs typeface="Calibri" pitchFamily="34" charset="-120"/>
+                <a:cs typeface="Amiri" pitchFamily="2" charset="-78"/>
               </a:rPr>
               <a:t>C</a:t>
             </a:r>
@@ -34397,9 +33746,8 @@
                 <a:solidFill>
                   <a:srgbClr val="1F2A37"/>
                 </a:solidFill>
-                <a:latin typeface="Amiri" pitchFamily="34" charset="0"/>
-                <a:ea typeface="Amiri" pitchFamily="34" charset="-122"/>
-                <a:cs typeface="Amiri" pitchFamily="34" charset="-120"/>
+                <a:latin typeface="Amiri" pitchFamily="2" charset="-78"/>
+                <a:cs typeface="Amiri" pitchFamily="2" charset="-78"/>
               </a:rPr>
               <a:t>أَتَشَرَّفُ بِمُخَاطَبَتِكُمْ</a:t>
             </a:r>
@@ -34437,8 +33785,7 @@
                   <a:srgbClr val="8A6D1E"/>
                 </a:solidFill>
                 <a:latin typeface="Calibri" pitchFamily="34" charset="0"/>
-                <a:ea typeface="Calibri" pitchFamily="34" charset="-122"/>
-                <a:cs typeface="Calibri" pitchFamily="34" charset="-120"/>
+                <a:cs typeface="Amiri" pitchFamily="2" charset="-78"/>
               </a:rPr>
               <a:t>Prepared at home (P6-L03).</a:t>
             </a:r>
@@ -34535,8 +33882,7 @@
                   <a:srgbClr val="FFFFFF"/>
                 </a:solidFill>
                 <a:latin typeface="Calibri" pitchFamily="34" charset="0"/>
-                <a:ea typeface="Calibri" pitchFamily="34" charset="-122"/>
-                <a:cs typeface="Calibri" pitchFamily="34" charset="-120"/>
+                <a:cs typeface="Amiri" pitchFamily="2" charset="-78"/>
               </a:rPr>
               <a:t>4</a:t>
             </a:r>
@@ -34574,8 +33920,7 @@
                   <a:srgbClr val="1B3B6F"/>
                 </a:solidFill>
                 <a:latin typeface="Calibri" pitchFamily="34" charset="0"/>
-                <a:ea typeface="Calibri" pitchFamily="34" charset="-122"/>
-                <a:cs typeface="Calibri" pitchFamily="34" charset="-120"/>
+                <a:cs typeface="Amiri" pitchFamily="2" charset="-78"/>
               </a:rPr>
               <a:t>Complete: </a:t>
             </a:r>
@@ -34587,9 +33932,8 @@
                 <a:solidFill>
                   <a:srgbClr val="1B3B6F"/>
                 </a:solidFill>
-                <a:latin typeface="Amiri" pitchFamily="34" charset="0"/>
-                <a:ea typeface="Amiri" pitchFamily="34" charset="-122"/>
-                <a:cs typeface="Amiri" pitchFamily="34" charset="-120"/>
+                <a:latin typeface="Amiri" pitchFamily="2" charset="-78"/>
+                <a:cs typeface="Amiri" pitchFamily="2" charset="-78"/>
               </a:rPr>
               <a:t>أَقْتَرِحُ أَنْ</a:t>
             </a:r>
@@ -34602,8 +33946,7 @@
                   <a:srgbClr val="1B3B6F"/>
                 </a:solidFill>
                 <a:latin typeface="Calibri" pitchFamily="34" charset="0"/>
-                <a:ea typeface="Calibri" pitchFamily="34" charset="-122"/>
-                <a:cs typeface="Calibri" pitchFamily="34" charset="-120"/>
+                <a:cs typeface="Amiri" pitchFamily="2" charset="-78"/>
               </a:rPr>
               <a:t> ___ </a:t>
             </a:r>
@@ -34615,9 +33958,8 @@
                 <a:solidFill>
                   <a:srgbClr val="1B3B6F"/>
                 </a:solidFill>
-                <a:latin typeface="Amiri" pitchFamily="34" charset="0"/>
-                <a:ea typeface="Amiri" pitchFamily="34" charset="-122"/>
-                <a:cs typeface="Amiri" pitchFamily="34" charset="-120"/>
+                <a:latin typeface="Amiri" pitchFamily="2" charset="-78"/>
+                <a:cs typeface="Amiri" pitchFamily="2" charset="-78"/>
               </a:rPr>
               <a:t>حَمْلَةٌ لِتَرْشِيدِ الاسْتِهْلَاكِ</a:t>
             </a:r>
@@ -34630,8 +33972,7 @@
                   <a:srgbClr val="1B3B6F"/>
                 </a:solidFill>
                 <a:latin typeface="Calibri" pitchFamily="34" charset="0"/>
-                <a:ea typeface="Calibri" pitchFamily="34" charset="-122"/>
-                <a:cs typeface="Calibri" pitchFamily="34" charset="-120"/>
+                <a:cs typeface="Amiri" pitchFamily="2" charset="-78"/>
               </a:rPr>
               <a:t>.</a:t>
             </a:r>
@@ -34694,8 +34035,7 @@
                   <a:srgbClr val="1B3B6F"/>
                 </a:solidFill>
                 <a:latin typeface="Calibri" pitchFamily="34" charset="0"/>
-                <a:ea typeface="Calibri" pitchFamily="34" charset="-122"/>
-                <a:cs typeface="Calibri" pitchFamily="34" charset="-120"/>
+                <a:cs typeface="Amiri" pitchFamily="2" charset="-78"/>
               </a:rPr>
               <a:t>A</a:t>
             </a:r>
@@ -34732,9 +34072,8 @@
                 <a:solidFill>
                   <a:srgbClr val="9AA1AB"/>
                 </a:solidFill>
-                <a:latin typeface="Amiri" pitchFamily="34" charset="0"/>
-                <a:ea typeface="Amiri" pitchFamily="34" charset="-122"/>
-                <a:cs typeface="Amiri" pitchFamily="34" charset="-120"/>
+                <a:latin typeface="Amiri" pitchFamily="2" charset="-78"/>
+                <a:cs typeface="Amiri" pitchFamily="2" charset="-78"/>
               </a:rPr>
               <a:t>تُطْلَقُ</a:t>
             </a:r>
@@ -34797,8 +34136,7 @@
                   <a:srgbClr val="1B3B6F"/>
                 </a:solidFill>
                 <a:latin typeface="Calibri" pitchFamily="34" charset="0"/>
-                <a:ea typeface="Calibri" pitchFamily="34" charset="-122"/>
-                <a:cs typeface="Calibri" pitchFamily="34" charset="-120"/>
+                <a:cs typeface="Amiri" pitchFamily="2" charset="-78"/>
               </a:rPr>
               <a:t>B</a:t>
             </a:r>
@@ -34835,9 +34173,8 @@
                 <a:solidFill>
                   <a:srgbClr val="9AA1AB"/>
                 </a:solidFill>
-                <a:latin typeface="Amiri" pitchFamily="34" charset="0"/>
-                <a:ea typeface="Amiri" pitchFamily="34" charset="-122"/>
-                <a:cs typeface="Amiri" pitchFamily="34" charset="-120"/>
+                <a:latin typeface="Amiri" pitchFamily="2" charset="-78"/>
+                <a:cs typeface="Amiri" pitchFamily="2" charset="-78"/>
               </a:rPr>
               <a:t>أُطْلِقَتْ</a:t>
             </a:r>
@@ -34927,8 +34264,7 @@
                   <a:srgbClr val="FFFFFF"/>
                 </a:solidFill>
                 <a:latin typeface="Calibri" pitchFamily="34" charset="0"/>
-                <a:ea typeface="Calibri" pitchFamily="34" charset="-122"/>
-                <a:cs typeface="Calibri" pitchFamily="34" charset="-120"/>
+                <a:cs typeface="Amiri" pitchFamily="2" charset="-78"/>
               </a:rPr>
               <a:t>C</a:t>
             </a:r>
@@ -34965,9 +34301,8 @@
                 <a:solidFill>
                   <a:srgbClr val="1F2A37"/>
                 </a:solidFill>
-                <a:latin typeface="Amiri" pitchFamily="34" charset="0"/>
-                <a:ea typeface="Amiri" pitchFamily="34" charset="-122"/>
-                <a:cs typeface="Amiri" pitchFamily="34" charset="-120"/>
+                <a:latin typeface="Amiri" pitchFamily="2" charset="-78"/>
+                <a:cs typeface="Amiri" pitchFamily="2" charset="-78"/>
               </a:rPr>
               <a:t>تُطْلَقَ</a:t>
             </a:r>
@@ -35005,8 +34340,7 @@
                   <a:srgbClr val="8A6D1E"/>
                 </a:solidFill>
                 <a:latin typeface="Calibri" pitchFamily="34" charset="0"/>
-                <a:ea typeface="Calibri" pitchFamily="34" charset="-122"/>
-                <a:cs typeface="Calibri" pitchFamily="34" charset="-120"/>
+                <a:cs typeface="Amiri" pitchFamily="2" charset="-78"/>
               </a:rPr>
               <a:t>P5: an + a passive in -a.</a:t>
             </a:r>
@@ -35103,8 +34437,7 @@
                   <a:srgbClr val="FFFFFF"/>
                 </a:solidFill>
                 <a:latin typeface="Calibri" pitchFamily="34" charset="0"/>
-                <a:ea typeface="Calibri" pitchFamily="34" charset="-122"/>
-                <a:cs typeface="Calibri" pitchFamily="34" charset="-120"/>
+                <a:cs typeface="Amiri" pitchFamily="2" charset="-78"/>
               </a:rPr>
               <a:t>5</a:t>
             </a:r>
@@ -35142,8 +34475,7 @@
                   <a:srgbClr val="1B3B6F"/>
                 </a:solidFill>
                 <a:latin typeface="Calibri" pitchFamily="34" charset="0"/>
-                <a:ea typeface="Calibri" pitchFamily="34" charset="-122"/>
-                <a:cs typeface="Calibri" pitchFamily="34" charset="-120"/>
+                <a:cs typeface="Amiri" pitchFamily="2" charset="-78"/>
               </a:rPr>
               <a:t>Complete: </a:t>
             </a:r>
@@ -35155,9 +34487,8 @@
                 <a:solidFill>
                   <a:srgbClr val="1B3B6F"/>
                 </a:solidFill>
-                <a:latin typeface="Amiri" pitchFamily="34" charset="0"/>
-                <a:ea typeface="Amiri" pitchFamily="34" charset="-122"/>
-                <a:cs typeface="Amiri" pitchFamily="34" charset="-120"/>
+                <a:latin typeface="Amiri" pitchFamily="2" charset="-78"/>
+                <a:cs typeface="Amiri" pitchFamily="2" charset="-78"/>
               </a:rPr>
               <a:t>لَوْ طُبِّقَتْ هٰذِهِ الإِجْرَاءَاتُ،</a:t>
             </a:r>
@@ -35170,8 +34501,7 @@
                   <a:srgbClr val="1B3B6F"/>
                 </a:solidFill>
                 <a:latin typeface="Calibri" pitchFamily="34" charset="0"/>
-                <a:ea typeface="Calibri" pitchFamily="34" charset="-122"/>
-                <a:cs typeface="Calibri" pitchFamily="34" charset="-120"/>
+                <a:cs typeface="Amiri" pitchFamily="2" charset="-78"/>
               </a:rPr>
               <a:t> ___ </a:t>
             </a:r>
@@ -35183,9 +34513,8 @@
                 <a:solidFill>
                   <a:srgbClr val="1B3B6F"/>
                 </a:solidFill>
-                <a:latin typeface="Amiri" pitchFamily="34" charset="0"/>
-                <a:ea typeface="Amiri" pitchFamily="34" charset="-122"/>
-                <a:cs typeface="Amiri" pitchFamily="34" charset="-120"/>
+                <a:latin typeface="Amiri" pitchFamily="2" charset="-78"/>
+                <a:cs typeface="Amiri" pitchFamily="2" charset="-78"/>
               </a:rPr>
               <a:t>الوَضْعُ</a:t>
             </a:r>
@@ -35198,8 +34527,7 @@
                   <a:srgbClr val="1B3B6F"/>
                 </a:solidFill>
                 <a:latin typeface="Calibri" pitchFamily="34" charset="0"/>
-                <a:ea typeface="Calibri" pitchFamily="34" charset="-122"/>
-                <a:cs typeface="Calibri" pitchFamily="34" charset="-120"/>
+                <a:cs typeface="Amiri" pitchFamily="2" charset="-78"/>
               </a:rPr>
               <a:t>.</a:t>
             </a:r>
@@ -35289,8 +34617,7 @@
                   <a:srgbClr val="FFFFFF"/>
                 </a:solidFill>
                 <a:latin typeface="Calibri" pitchFamily="34" charset="0"/>
-                <a:ea typeface="Calibri" pitchFamily="34" charset="-122"/>
-                <a:cs typeface="Calibri" pitchFamily="34" charset="-120"/>
+                <a:cs typeface="Amiri" pitchFamily="2" charset="-78"/>
               </a:rPr>
               <a:t>A</a:t>
             </a:r>
@@ -35327,9 +34654,8 @@
                 <a:solidFill>
                   <a:srgbClr val="1F2A37"/>
                 </a:solidFill>
-                <a:latin typeface="Amiri" pitchFamily="34" charset="0"/>
-                <a:ea typeface="Amiri" pitchFamily="34" charset="-122"/>
-                <a:cs typeface="Amiri" pitchFamily="34" charset="-120"/>
+                <a:latin typeface="Amiri" pitchFamily="2" charset="-78"/>
+                <a:cs typeface="Amiri" pitchFamily="2" charset="-78"/>
               </a:rPr>
               <a:t>لَتَحَسَّنَ</a:t>
             </a:r>
@@ -35392,8 +34718,7 @@
                   <a:srgbClr val="1B3B6F"/>
                 </a:solidFill>
                 <a:latin typeface="Calibri" pitchFamily="34" charset="0"/>
-                <a:ea typeface="Calibri" pitchFamily="34" charset="-122"/>
-                <a:cs typeface="Calibri" pitchFamily="34" charset="-120"/>
+                <a:cs typeface="Amiri" pitchFamily="2" charset="-78"/>
               </a:rPr>
               <a:t>B</a:t>
             </a:r>
@@ -35430,9 +34755,8 @@
                 <a:solidFill>
                   <a:srgbClr val="9AA1AB"/>
                 </a:solidFill>
-                <a:latin typeface="Amiri" pitchFamily="34" charset="0"/>
-                <a:ea typeface="Amiri" pitchFamily="34" charset="-122"/>
-                <a:cs typeface="Amiri" pitchFamily="34" charset="-120"/>
+                <a:latin typeface="Amiri" pitchFamily="2" charset="-78"/>
+                <a:cs typeface="Amiri" pitchFamily="2" charset="-78"/>
               </a:rPr>
               <a:t>سَيَتَحَسَّنُ</a:t>
             </a:r>
@@ -35495,8 +34819,7 @@
                   <a:srgbClr val="1B3B6F"/>
                 </a:solidFill>
                 <a:latin typeface="Calibri" pitchFamily="34" charset="0"/>
-                <a:ea typeface="Calibri" pitchFamily="34" charset="-122"/>
-                <a:cs typeface="Calibri" pitchFamily="34" charset="-120"/>
+                <a:cs typeface="Amiri" pitchFamily="2" charset="-78"/>
               </a:rPr>
               <a:t>C</a:t>
             </a:r>
@@ -35533,9 +34856,8 @@
                 <a:solidFill>
                   <a:srgbClr val="9AA1AB"/>
                 </a:solidFill>
-                <a:latin typeface="Amiri" pitchFamily="34" charset="0"/>
-                <a:ea typeface="Amiri" pitchFamily="34" charset="-122"/>
-                <a:cs typeface="Amiri" pitchFamily="34" charset="-120"/>
+                <a:latin typeface="Amiri" pitchFamily="2" charset="-78"/>
+                <a:cs typeface="Amiri" pitchFamily="2" charset="-78"/>
               </a:rPr>
               <a:t>يَتَحَسَّنُ</a:t>
             </a:r>
@@ -35573,8 +34895,7 @@
                   <a:srgbClr val="8A6D1E"/>
                 </a:solidFill>
                 <a:latin typeface="Calibri" pitchFamily="34" charset="0"/>
-                <a:ea typeface="Calibri" pitchFamily="34" charset="-122"/>
-                <a:cs typeface="Calibri" pitchFamily="34" charset="-120"/>
+                <a:cs typeface="Amiri" pitchFamily="2" charset="-78"/>
               </a:rPr>
               <a:t>P5: law … la-.</a:t>
             </a:r>
@@ -35646,8 +34967,7 @@
                   <a:srgbClr val="8A6D1E"/>
                 </a:solidFill>
                 <a:latin typeface="Calibri" pitchFamily="34" charset="0"/>
-                <a:ea typeface="Calibri" pitchFamily="34" charset="-122"/>
-                <a:cs typeface="Calibri" pitchFamily="34" charset="-120"/>
+                <a:cs typeface="Amiri" pitchFamily="2" charset="-78"/>
               </a:rPr>
               <a:t>THE KEY IDEA FOR TODAY</a:t>
             </a:r>
@@ -35685,8 +35005,7 @@
                   <a:srgbClr val="1F2A37"/>
                 </a:solidFill>
                 <a:latin typeface="Calibri" pitchFamily="34" charset="0"/>
-                <a:ea typeface="Calibri" pitchFamily="34" charset="-122"/>
-                <a:cs typeface="Calibri" pitchFamily="34" charset="-120"/>
+                <a:cs typeface="Amiri" pitchFamily="2" charset="-78"/>
               </a:rPr>
               <a:t>In Q1 the reader decides the language: a minister, a magazine reader and a friend each need a different register — from the very first line.</a:t>
             </a:r>
@@ -35723,9 +35042,8 @@
                 <a:solidFill>
                   <a:srgbClr val="1B3B6F"/>
                 </a:solidFill>
-                <a:latin typeface="Amiri" pitchFamily="34" charset="0"/>
-                <a:ea typeface="Amiri" pitchFamily="34" charset="-122"/>
-                <a:cs typeface="Amiri" pitchFamily="34" charset="-120"/>
+                <a:latin typeface="Amiri" pitchFamily="2" charset="-78"/>
+                <a:cs typeface="Amiri" pitchFamily="2" charset="-78"/>
               </a:rPr>
               <a:t>أَتَشَرَّفُ بِمُخَاطَبَتِكُمْ ≠ حَيَّاكَ اللَّهُ</a:t>
             </a:r>
@@ -35763,8 +35081,7 @@
                   <a:srgbClr val="8A93A0"/>
                 </a:solidFill>
                 <a:latin typeface="Calibri" pitchFamily="34" charset="0"/>
-                <a:ea typeface="Calibri" pitchFamily="34" charset="-122"/>
-                <a:cs typeface="Calibri" pitchFamily="34" charset="-120"/>
+                <a:cs typeface="Amiri" pitchFamily="2" charset="-78"/>
               </a:rPr>
               <a:t>5 / 26</a:t>
             </a:r>
@@ -35858,9 +35175,8 @@
                 <a:solidFill>
                   <a:srgbClr val="D4AF37"/>
                 </a:solidFill>
-                <a:latin typeface="Amiri" pitchFamily="34" charset="0"/>
-                <a:ea typeface="Amiri" pitchFamily="34" charset="-122"/>
-                <a:cs typeface="Amiri" pitchFamily="34" charset="-120"/>
+                <a:latin typeface="Amiri" pitchFamily="2" charset="-78"/>
+                <a:cs typeface="Amiri" pitchFamily="2" charset="-78"/>
               </a:rPr>
               <a:t>م</a:t>
             </a:r>
@@ -35898,8 +35214,7 @@
                   <a:srgbClr val="1B3B6F"/>
                 </a:solidFill>
                 <a:latin typeface="Cambria" pitchFamily="34" charset="0"/>
-                <a:ea typeface="Cambria" pitchFamily="34" charset="-122"/>
-                <a:cs typeface="Cambria" pitchFamily="34" charset="-120"/>
+                <a:cs typeface="Amiri" pitchFamily="2" charset="-78"/>
               </a:rPr>
               <a:t>Al Madina Online School</a:t>
             </a:r>
@@ -35937,8 +35252,7 @@
                   <a:srgbClr val="8A6D1E"/>
                 </a:solidFill>
                 <a:latin typeface="Calibri" pitchFamily="34" charset="0"/>
-                <a:ea typeface="Calibri" pitchFamily="34" charset="-122"/>
-                <a:cs typeface="Calibri" pitchFamily="34" charset="-120"/>
+                <a:cs typeface="Amiri" pitchFamily="2" charset="-78"/>
               </a:rPr>
               <a:t>ARABIC DEPARTMENT · MIFTAH ARABIC · IGCSE 0544</a:t>
             </a:r>
@@ -36003,8 +35317,7 @@
                   <a:srgbClr val="FFFFFF"/>
                 </a:solidFill>
                 <a:latin typeface="Calibri" pitchFamily="34" charset="0"/>
-                <a:ea typeface="Calibri" pitchFamily="34" charset="-122"/>
-                <a:cs typeface="Calibri" pitchFamily="34" charset="-120"/>
+                <a:cs typeface="Amiri" pitchFamily="2" charset="-78"/>
               </a:rPr>
               <a:t>P6-L04 · IGCSE Bridge</a:t>
             </a:r>
@@ -36069,8 +35382,7 @@
                   <a:srgbClr val="FFFFFF"/>
                 </a:solidFill>
                 <a:latin typeface="Calibri" pitchFamily="34" charset="0"/>
-                <a:ea typeface="Calibri" pitchFamily="34" charset="-122"/>
-                <a:cs typeface="Calibri" pitchFamily="34" charset="-120"/>
+                <a:cs typeface="Amiri" pitchFamily="2" charset="-78"/>
               </a:rPr>
               <a:t>WELCOME · 1 MIN</a:t>
             </a:r>
@@ -36108,8 +35420,7 @@
                   <a:srgbClr val="5A6472"/>
                 </a:solidFill>
                 <a:latin typeface="Calibri" pitchFamily="34" charset="0"/>
-                <a:ea typeface="Calibri" pitchFamily="34" charset="-122"/>
-                <a:cs typeface="Calibri" pitchFamily="34" charset="-120"/>
+                <a:cs typeface="Amiri" pitchFamily="2" charset="-78"/>
               </a:rPr>
               <a:t>LESSON OBJECTIVES</a:t>
             </a:r>
@@ -36147,8 +35458,7 @@
                   <a:srgbClr val="1B3B6F"/>
                 </a:solidFill>
                 <a:latin typeface="Cambria" pitchFamily="34" charset="0"/>
-                <a:ea typeface="Cambria" pitchFamily="34" charset="-122"/>
-                <a:cs typeface="Cambria" pitchFamily="34" charset="-120"/>
+                <a:cs typeface="Amiri" pitchFamily="2" charset="-78"/>
               </a:rPr>
               <a:t>Objectives and success criteria</a:t>
             </a:r>
@@ -36185,9 +35495,8 @@
                 <a:solidFill>
                   <a:srgbClr val="8A6D1E"/>
                 </a:solidFill>
-                <a:latin typeface="Amiri" pitchFamily="34" charset="0"/>
-                <a:ea typeface="Amiri" pitchFamily="34" charset="-122"/>
-                <a:cs typeface="Amiri" pitchFamily="34" charset="-120"/>
+                <a:latin typeface="Amiri" pitchFamily="2" charset="-78"/>
+                <a:cs typeface="Amiri" pitchFamily="2" charset="-78"/>
               </a:rPr>
               <a:t>الأَهْدَافُ وَمَعَايِيرُ النَّجَاحِ</a:t>
             </a:r>
@@ -36225,8 +35534,7 @@
                   <a:srgbClr val="8A93A0"/>
                 </a:solidFill>
                 <a:latin typeface="Calibri" pitchFamily="34" charset="0"/>
-                <a:ea typeface="Calibri" pitchFamily="34" charset="-122"/>
-                <a:cs typeface="Calibri" pitchFamily="34" charset="-120"/>
+                <a:cs typeface="Amiri" pitchFamily="2" charset="-78"/>
               </a:rPr>
               <a:t>Miftah Arabic · Progression P6 · IGCSE Bridge · P6-L04</a:t>
             </a:r>
@@ -36298,8 +35606,7 @@
                   <a:srgbClr val="1B3B6F"/>
                 </a:solidFill>
                 <a:latin typeface="Calibri" pitchFamily="34" charset="0"/>
-                <a:ea typeface="Calibri" pitchFamily="34" charset="-122"/>
-                <a:cs typeface="Calibri" pitchFamily="34" charset="-120"/>
+                <a:cs typeface="Amiri" pitchFamily="2" charset="-78"/>
               </a:rPr>
               <a:t>TODAY YOU WILL</a:t>
             </a:r>
@@ -36336,9 +35643,8 @@
                 <a:solidFill>
                   <a:srgbClr val="8A6D1E"/>
                 </a:solidFill>
-                <a:latin typeface="Amiri" pitchFamily="34" charset="0"/>
-                <a:ea typeface="Amiri" pitchFamily="34" charset="-122"/>
-                <a:cs typeface="Amiri" pitchFamily="34" charset="-120"/>
+                <a:latin typeface="Amiri" pitchFamily="2" charset="-78"/>
+                <a:cs typeface="Amiri" pitchFamily="2" charset="-78"/>
               </a:rPr>
               <a:t>سَتَتَعَلَّمُ اليَوْمَ</a:t>
             </a:r>
@@ -36401,8 +35707,7 @@
                   <a:srgbClr val="D4AF37"/>
                 </a:solidFill>
                 <a:latin typeface="Calibri" pitchFamily="34" charset="0"/>
-                <a:ea typeface="Calibri" pitchFamily="34" charset="-122"/>
-                <a:cs typeface="Calibri" pitchFamily="34" charset="-120"/>
+                <a:cs typeface="Amiri" pitchFamily="2" charset="-78"/>
               </a:rPr>
               <a:t>1</a:t>
             </a:r>
@@ -36440,8 +35745,7 @@
                   <a:srgbClr val="1F2A37"/>
                 </a:solidFill>
                 <a:latin typeface="Calibri" pitchFamily="34" charset="0"/>
-                <a:ea typeface="Calibri" pitchFamily="34" charset="-122"/>
-                <a:cs typeface="Calibri" pitchFamily="34" charset="-120"/>
+                <a:cs typeface="Amiri" pitchFamily="2" charset="-78"/>
               </a:rPr>
               <a:t>Write Paper 4 Q1 (130–140 words) in three different text types.</a:t>
             </a:r>
@@ -36504,8 +35808,7 @@
                   <a:srgbClr val="D4AF37"/>
                 </a:solidFill>
                 <a:latin typeface="Calibri" pitchFamily="34" charset="0"/>
-                <a:ea typeface="Calibri" pitchFamily="34" charset="-122"/>
-                <a:cs typeface="Calibri" pitchFamily="34" charset="-120"/>
+                <a:cs typeface="Amiri" pitchFamily="2" charset="-78"/>
               </a:rPr>
               <a:t>2</a:t>
             </a:r>
@@ -36543,8 +35846,7 @@
                   <a:srgbClr val="1F2A37"/>
                 </a:solidFill>
                 <a:latin typeface="Calibri" pitchFamily="34" charset="0"/>
-                <a:ea typeface="Calibri" pitchFamily="34" charset="-122"/>
-                <a:cs typeface="Calibri" pitchFamily="34" charset="-120"/>
+                <a:cs typeface="Amiri" pitchFamily="2" charset="-78"/>
               </a:rPr>
               <a:t>Match register — formal, semi-formal, friendly — to each text type.</a:t>
             </a:r>
@@ -36607,8 +35909,7 @@
                   <a:srgbClr val="D4AF37"/>
                 </a:solidFill>
                 <a:latin typeface="Calibri" pitchFamily="34" charset="0"/>
-                <a:ea typeface="Calibri" pitchFamily="34" charset="-122"/>
-                <a:cs typeface="Calibri" pitchFamily="34" charset="-120"/>
+                <a:cs typeface="Amiri" pitchFamily="2" charset="-78"/>
               </a:rPr>
               <a:t>3</a:t>
             </a:r>
@@ -36646,8 +35947,7 @@
                   <a:srgbClr val="1F2A37"/>
                 </a:solidFill>
                 <a:latin typeface="Calibri" pitchFamily="34" charset="0"/>
-                <a:ea typeface="Calibri" pitchFamily="34" charset="-122"/>
-                <a:cs typeface="Calibri" pitchFamily="34" charset="-120"/>
+                <a:cs typeface="Amiri" pitchFamily="2" charset="-78"/>
               </a:rPr>
               <a:t>Cover every required content point for Task Completion.</a:t>
             </a:r>
@@ -36710,8 +36010,7 @@
                   <a:srgbClr val="D4AF37"/>
                 </a:solidFill>
                 <a:latin typeface="Calibri" pitchFamily="34" charset="0"/>
-                <a:ea typeface="Calibri" pitchFamily="34" charset="-122"/>
-                <a:cs typeface="Calibri" pitchFamily="34" charset="-120"/>
+                <a:cs typeface="Amiri" pitchFamily="2" charset="-78"/>
               </a:rPr>
               <a:t>4</a:t>
             </a:r>
@@ -36749,8 +36048,7 @@
                   <a:srgbClr val="1F2A37"/>
                 </a:solidFill>
                 <a:latin typeface="Calibri" pitchFamily="34" charset="0"/>
-                <a:ea typeface="Calibri" pitchFamily="34" charset="-122"/>
-                <a:cs typeface="Calibri" pitchFamily="34" charset="-120"/>
+                <a:cs typeface="Amiri" pitchFamily="2" charset="-78"/>
               </a:rPr>
               <a:t>Apply the Q1 mark scheme to self-assess each response.</a:t>
             </a:r>
@@ -36842,8 +36140,7 @@
                   <a:srgbClr val="FFFFFF"/>
                 </a:solidFill>
                 <a:latin typeface="Calibri" pitchFamily="34" charset="0"/>
-                <a:ea typeface="Calibri" pitchFamily="34" charset="-122"/>
-                <a:cs typeface="Calibri" pitchFamily="34" charset="-120"/>
+                <a:cs typeface="Amiri" pitchFamily="2" charset="-78"/>
               </a:rPr>
               <a:t>CORE</a:t>
             </a:r>
@@ -36881,8 +36178,7 @@
                   <a:srgbClr val="2E8B57"/>
                 </a:solidFill>
                 <a:latin typeface="Calibri" pitchFamily="34" charset="0"/>
-                <a:ea typeface="Calibri" pitchFamily="34" charset="-122"/>
-                <a:cs typeface="Calibri" pitchFamily="34" charset="-120"/>
+                <a:cs typeface="Amiri" pitchFamily="2" charset="-78"/>
               </a:rPr>
               <a:t>Everyone</a:t>
             </a:r>
@@ -36920,8 +36216,7 @@
                   <a:srgbClr val="2E8B57"/>
                 </a:solidFill>
                 <a:latin typeface="Calibri" pitchFamily="34" charset="0"/>
-                <a:ea typeface="Calibri" pitchFamily="34" charset="-122"/>
-                <a:cs typeface="Calibri" pitchFamily="34" charset="-120"/>
+                <a:cs typeface="Amiri" pitchFamily="2" charset="-78"/>
               </a:rPr>
               <a:t>☐  I can open and close a friendly email correctly.</a:t>
             </a:r>
@@ -36959,8 +36254,7 @@
                   <a:srgbClr val="2E8B57"/>
                 </a:solidFill>
                 <a:latin typeface="Calibri" pitchFamily="34" charset="0"/>
-                <a:ea typeface="Calibri" pitchFamily="34" charset="-122"/>
-                <a:cs typeface="Calibri" pitchFamily="34" charset="-120"/>
+                <a:cs typeface="Amiri" pitchFamily="2" charset="-78"/>
               </a:rPr>
               <a:t>☐  I can cover all four content points.</a:t>
             </a:r>
@@ -37052,8 +36346,7 @@
                   <a:srgbClr val="FFFFFF"/>
                 </a:solidFill>
                 <a:latin typeface="Calibri" pitchFamily="34" charset="0"/>
-                <a:ea typeface="Calibri" pitchFamily="34" charset="-122"/>
-                <a:cs typeface="Calibri" pitchFamily="34" charset="-120"/>
+                <a:cs typeface="Amiri" pitchFamily="2" charset="-78"/>
               </a:rPr>
               <a:t>DEVELOP</a:t>
             </a:r>
@@ -37091,8 +36384,7 @@
                   <a:srgbClr val="C9780A"/>
                 </a:solidFill>
                 <a:latin typeface="Calibri" pitchFamily="34" charset="0"/>
-                <a:ea typeface="Calibri" pitchFamily="34" charset="-122"/>
-                <a:cs typeface="Calibri" pitchFamily="34" charset="-120"/>
+                <a:cs typeface="Amiri" pitchFamily="2" charset="-78"/>
               </a:rPr>
               <a:t>Most of us</a:t>
             </a:r>
@@ -37130,8 +36422,7 @@
                   <a:srgbClr val="C9780A"/>
                 </a:solidFill>
                 <a:latin typeface="Calibri" pitchFamily="34" charset="0"/>
-                <a:ea typeface="Calibri" pitchFamily="34" charset="-122"/>
-                <a:cs typeface="Calibri" pitchFamily="34" charset="-120"/>
+                <a:cs typeface="Amiri" pitchFamily="2" charset="-78"/>
               </a:rPr>
               <a:t>☐  I can keep a semi-formal register in an article.</a:t>
             </a:r>
@@ -37169,8 +36460,7 @@
                   <a:srgbClr val="C9780A"/>
                 </a:solidFill>
                 <a:latin typeface="Calibri" pitchFamily="34" charset="0"/>
-                <a:ea typeface="Calibri" pitchFamily="34" charset="-122"/>
-                <a:cs typeface="Calibri" pitchFamily="34" charset="-120"/>
+                <a:cs typeface="Amiri" pitchFamily="2" charset="-78"/>
               </a:rPr>
               <a:t>☐  I can use a conditional and a trigger.</a:t>
             </a:r>
@@ -37262,8 +36552,7 @@
                   <a:srgbClr val="FFFFFF"/>
                 </a:solidFill>
                 <a:latin typeface="Calibri" pitchFamily="34" charset="0"/>
-                <a:ea typeface="Calibri" pitchFamily="34" charset="-122"/>
-                <a:cs typeface="Calibri" pitchFamily="34" charset="-120"/>
+                <a:cs typeface="Amiri" pitchFamily="2" charset="-78"/>
               </a:rPr>
               <a:t>STRETCH</a:t>
             </a:r>
@@ -37301,8 +36590,7 @@
                   <a:srgbClr val="B83227"/>
                 </a:solidFill>
                 <a:latin typeface="Calibri" pitchFamily="34" charset="0"/>
-                <a:ea typeface="Calibri" pitchFamily="34" charset="-122"/>
-                <a:cs typeface="Calibri" pitchFamily="34" charset="-120"/>
+                <a:cs typeface="Amiri" pitchFamily="2" charset="-78"/>
               </a:rPr>
               <a:t>Aim high</a:t>
             </a:r>
@@ -37340,8 +36628,7 @@
                   <a:srgbClr val="B83227"/>
                 </a:solidFill>
                 <a:latin typeface="Calibri" pitchFamily="34" charset="0"/>
-                <a:ea typeface="Calibri" pitchFamily="34" charset="-122"/>
-                <a:cs typeface="Calibri" pitchFamily="34" charset="-120"/>
+                <a:cs typeface="Amiri" pitchFamily="2" charset="-78"/>
               </a:rPr>
               <a:t>☐  I can write a formal letter with passives and formal connectors.</a:t>
             </a:r>
@@ -37379,8 +36666,7 @@
                   <a:srgbClr val="B83227"/>
                 </a:solidFill>
                 <a:latin typeface="Calibri" pitchFamily="34" charset="0"/>
-                <a:ea typeface="Calibri" pitchFamily="34" charset="-122"/>
-                <a:cs typeface="Calibri" pitchFamily="34" charset="-120"/>
+                <a:cs typeface="Amiri" pitchFamily="2" charset="-78"/>
               </a:rPr>
               <a:t>☐  I can self-mark against TC, Range and Accuracy.</a:t>
             </a:r>
@@ -37418,8 +36704,7 @@
                   <a:srgbClr val="8A93A0"/>
                 </a:solidFill>
                 <a:latin typeface="Calibri" pitchFamily="34" charset="0"/>
-                <a:ea typeface="Calibri" pitchFamily="34" charset="-122"/>
-                <a:cs typeface="Calibri" pitchFamily="34" charset="-120"/>
+                <a:cs typeface="Amiri" pitchFamily="2" charset="-78"/>
               </a:rPr>
               <a:t>6 / 26</a:t>
             </a:r>
@@ -37541,8 +36826,7 @@
                   <a:srgbClr val="0D1F3C"/>
                 </a:solidFill>
                 <a:latin typeface="Calibri" pitchFamily="34" charset="0"/>
-                <a:ea typeface="Calibri" pitchFamily="34" charset="-122"/>
-                <a:cs typeface="Calibri" pitchFamily="34" charset="-120"/>
+                <a:cs typeface="Amiri" pitchFamily="2" charset="-78"/>
               </a:rPr>
               <a:t>TEACHER INSTRUCTION · 7 MIN</a:t>
             </a:r>
@@ -37580,8 +36864,7 @@
                   <a:srgbClr val="FFFFFF"/>
                 </a:solidFill>
                 <a:latin typeface="Cambria" pitchFamily="34" charset="0"/>
-                <a:ea typeface="Cambria" pitchFamily="34" charset="-122"/>
-                <a:cs typeface="Cambria" pitchFamily="34" charset="-120"/>
+                <a:cs typeface="Amiri" pitchFamily="2" charset="-78"/>
               </a:rPr>
               <a:t>Key words for today</a:t>
             </a:r>
@@ -37618,9 +36901,8 @@
                 <a:solidFill>
                   <a:srgbClr val="D4AF37"/>
                 </a:solidFill>
-                <a:latin typeface="Amiri" pitchFamily="34" charset="0"/>
-                <a:ea typeface="Amiri" pitchFamily="34" charset="-122"/>
-                <a:cs typeface="Amiri" pitchFamily="34" charset="-120"/>
+                <a:latin typeface="Amiri" pitchFamily="2" charset="-78"/>
+                <a:cs typeface="Amiri" pitchFamily="2" charset="-78"/>
               </a:rPr>
               <a:t>كَلِمَاتُ الدَّرْسِ</a:t>
             </a:r>
@@ -37658,8 +36940,7 @@
                   <a:srgbClr val="C6D2E6"/>
                 </a:solidFill>
                 <a:latin typeface="Calibri" pitchFamily="34" charset="0"/>
-                <a:ea typeface="Calibri" pitchFamily="34" charset="-122"/>
-                <a:cs typeface="Calibri" pitchFamily="34" charset="-120"/>
+                <a:cs typeface="Amiri" pitchFamily="2" charset="-78"/>
               </a:rPr>
               <a:t>16 exam words from the website in 2 groups. </a:t>
             </a:r>
@@ -37724,8 +37005,7 @@
                   <a:srgbClr val="D4AF37"/>
                 </a:solidFill>
                 <a:latin typeface="Calibri" pitchFamily="34" charset="0"/>
-                <a:ea typeface="Calibri" pitchFamily="34" charset="-122"/>
-                <a:cs typeface="Calibri" pitchFamily="34" charset="-120"/>
+                <a:cs typeface="Amiri" pitchFamily="2" charset="-78"/>
               </a:rPr>
               <a:t>GROUP 1</a:t>
             </a:r>
@@ -37741,8 +37021,7 @@
                   <a:srgbClr val="FFFFFF"/>
                 </a:solidFill>
                 <a:latin typeface="Calibri" pitchFamily="34" charset="0"/>
-                <a:ea typeface="Calibri" pitchFamily="34" charset="-122"/>
-                <a:cs typeface="Calibri" pitchFamily="34" charset="-120"/>
+                <a:cs typeface="Amiri" pitchFamily="2" charset="-78"/>
               </a:rPr>
               <a:t>Text types · 8</a:t>
             </a:r>
@@ -37807,8 +37086,7 @@
                   <a:srgbClr val="D4AF37"/>
                 </a:solidFill>
                 <a:latin typeface="Calibri" pitchFamily="34" charset="0"/>
-                <a:ea typeface="Calibri" pitchFamily="34" charset="-122"/>
-                <a:cs typeface="Calibri" pitchFamily="34" charset="-120"/>
+                <a:cs typeface="Amiri" pitchFamily="2" charset="-78"/>
               </a:rPr>
               <a:t>GROUP 2</a:t>
             </a:r>
@@ -37824,8 +37102,7 @@
                   <a:srgbClr val="FFFFFF"/>
                 </a:solidFill>
                 <a:latin typeface="Calibri" pitchFamily="34" charset="0"/>
-                <a:ea typeface="Calibri" pitchFamily="34" charset="-122"/>
-                <a:cs typeface="Calibri" pitchFamily="34" charset="-120"/>
+                <a:cs typeface="Amiri" pitchFamily="2" charset="-78"/>
               </a:rPr>
               <a:t>Register signals · 8</a:t>
             </a:r>
@@ -37890,8 +37167,7 @@
                   <a:srgbClr val="2E8B57"/>
                 </a:solidFill>
                 <a:latin typeface="Calibri" pitchFamily="34" charset="0"/>
-                <a:ea typeface="Calibri" pitchFamily="34" charset="-122"/>
-                <a:cs typeface="Calibri" pitchFamily="34" charset="-120"/>
+                <a:cs typeface="Amiri" pitchFamily="2" charset="-78"/>
               </a:rPr>
               <a:t>BRIDGE FROM URDU</a:t>
             </a:r>
@@ -37928,9 +37204,8 @@
                 <a:solidFill>
                   <a:srgbClr val="1B3B6F"/>
                 </a:solidFill>
-                <a:latin typeface="Amiri" pitchFamily="34" charset="0"/>
-                <a:ea typeface="Amiri" pitchFamily="34" charset="-122"/>
-                <a:cs typeface="Amiri" pitchFamily="34" charset="-120"/>
+                <a:latin typeface="Amiri" pitchFamily="2" charset="-78"/>
+                <a:cs typeface="Amiri" pitchFamily="2" charset="-78"/>
               </a:rPr>
               <a:t>خِطَابٌ</a:t>
             </a:r>
@@ -37967,9 +37242,8 @@
                 <a:solidFill>
                   <a:srgbClr val="2E8B57"/>
                 </a:solidFill>
-                <a:latin typeface="Amiri" pitchFamily="34" charset="0"/>
-                <a:ea typeface="Amiri" pitchFamily="34" charset="-122"/>
-                <a:cs typeface="Amiri" pitchFamily="34" charset="-120"/>
+                <a:latin typeface="Amiri" pitchFamily="2" charset="-78"/>
+                <a:cs typeface="Amiri" pitchFamily="2" charset="-78"/>
               </a:rPr>
               <a:t>‎خطاب‎ </a:t>
             </a:r>
@@ -37982,8 +37256,7 @@
                   <a:srgbClr val="2E8B57"/>
                 </a:solidFill>
                 <a:latin typeface="Calibri" pitchFamily="34" charset="0"/>
-                <a:ea typeface="Calibri" pitchFamily="34" charset="-122"/>
-                <a:cs typeface="Calibri" pitchFamily="34" charset="-120"/>
+                <a:cs typeface="Amiri" pitchFamily="2" charset="-78"/>
               </a:rPr>
               <a:t> khitāb · Arabic: a letter, an address · Urdu: a speech, a title</a:t>
             </a:r>
@@ -38020,9 +37293,8 @@
                 <a:solidFill>
                   <a:srgbClr val="1B3B6F"/>
                 </a:solidFill>
-                <a:latin typeface="Amiri" pitchFamily="34" charset="0"/>
-                <a:ea typeface="Amiri" pitchFamily="34" charset="-122"/>
-                <a:cs typeface="Amiri" pitchFamily="34" charset="-120"/>
+                <a:latin typeface="Amiri" pitchFamily="2" charset="-78"/>
+                <a:cs typeface="Amiri" pitchFamily="2" charset="-78"/>
               </a:rPr>
               <a:t>رَسْمِيٌّ</a:t>
             </a:r>
@@ -38059,9 +37331,8 @@
                 <a:solidFill>
                   <a:srgbClr val="2E8B57"/>
                 </a:solidFill>
-                <a:latin typeface="Amiri" pitchFamily="34" charset="0"/>
-                <a:ea typeface="Amiri" pitchFamily="34" charset="-122"/>
-                <a:cs typeface="Amiri" pitchFamily="34" charset="-120"/>
+                <a:latin typeface="Amiri" pitchFamily="2" charset="-78"/>
+                <a:cs typeface="Amiri" pitchFamily="2" charset="-78"/>
               </a:rPr>
               <a:t>‎رسمی‎ </a:t>
             </a:r>
@@ -38074,8 +37345,7 @@
                   <a:srgbClr val="2E8B57"/>
                 </a:solidFill>
                 <a:latin typeface="Calibri" pitchFamily="34" charset="0"/>
-                <a:ea typeface="Calibri" pitchFamily="34" charset="-122"/>
-                <a:cs typeface="Calibri" pitchFamily="34" charset="-120"/>
+                <a:cs typeface="Amiri" pitchFamily="2" charset="-78"/>
               </a:rPr>
               <a:t> rasmī · formal, official</a:t>
             </a:r>
@@ -38112,9 +37382,8 @@
                 <a:solidFill>
                   <a:srgbClr val="1B3B6F"/>
                 </a:solidFill>
-                <a:latin typeface="Amiri" pitchFamily="34" charset="0"/>
-                <a:ea typeface="Amiri" pitchFamily="34" charset="-122"/>
-                <a:cs typeface="Amiri" pitchFamily="34" charset="-120"/>
+                <a:latin typeface="Amiri" pitchFamily="2" charset="-78"/>
+                <a:cs typeface="Amiri" pitchFamily="2" charset="-78"/>
               </a:rPr>
               <a:t>تَقْرِيرٌ</a:t>
             </a:r>
@@ -38151,9 +37420,8 @@
                 <a:solidFill>
                   <a:srgbClr val="2E8B57"/>
                 </a:solidFill>
-                <a:latin typeface="Amiri" pitchFamily="34" charset="0"/>
-                <a:ea typeface="Amiri" pitchFamily="34" charset="-122"/>
-                <a:cs typeface="Amiri" pitchFamily="34" charset="-120"/>
+                <a:latin typeface="Amiri" pitchFamily="2" charset="-78"/>
+                <a:cs typeface="Amiri" pitchFamily="2" charset="-78"/>
               </a:rPr>
               <a:t>‎تقریر‎ </a:t>
             </a:r>
@@ -38166,8 +37434,7 @@
                   <a:srgbClr val="2E8B57"/>
                 </a:solidFill>
                 <a:latin typeface="Calibri" pitchFamily="34" charset="0"/>
-                <a:ea typeface="Calibri" pitchFamily="34" charset="-122"/>
-                <a:cs typeface="Calibri" pitchFamily="34" charset="-120"/>
+                <a:cs typeface="Amiri" pitchFamily="2" charset="-78"/>
               </a:rPr>
               <a:t> taqrīr · Arabic: a report · Urdu: a speech</a:t>
             </a:r>
@@ -38204,9 +37471,8 @@
                 <a:solidFill>
                   <a:srgbClr val="1B3B6F"/>
                 </a:solidFill>
-                <a:latin typeface="Amiri" pitchFamily="34" charset="0"/>
-                <a:ea typeface="Amiri" pitchFamily="34" charset="-122"/>
-                <a:cs typeface="Amiri" pitchFamily="34" charset="-120"/>
+                <a:latin typeface="Amiri" pitchFamily="2" charset="-78"/>
+                <a:cs typeface="Amiri" pitchFamily="2" charset="-78"/>
               </a:rPr>
               <a:t>مَقَالَةٌ</a:t>
             </a:r>
@@ -38243,9 +37509,8 @@
                 <a:solidFill>
                   <a:srgbClr val="2E8B57"/>
                 </a:solidFill>
-                <a:latin typeface="Amiri" pitchFamily="34" charset="0"/>
-                <a:ea typeface="Amiri" pitchFamily="34" charset="-122"/>
-                <a:cs typeface="Amiri" pitchFamily="34" charset="-120"/>
+                <a:latin typeface="Amiri" pitchFamily="2" charset="-78"/>
+                <a:cs typeface="Amiri" pitchFamily="2" charset="-78"/>
               </a:rPr>
               <a:t>‎مقالہ‎ </a:t>
             </a:r>
@@ -38258,8 +37523,7 @@
                   <a:srgbClr val="2E8B57"/>
                 </a:solidFill>
                 <a:latin typeface="Calibri" pitchFamily="34" charset="0"/>
-                <a:ea typeface="Calibri" pitchFamily="34" charset="-122"/>
-                <a:cs typeface="Calibri" pitchFamily="34" charset="-120"/>
+                <a:cs typeface="Amiri" pitchFamily="2" charset="-78"/>
               </a:rPr>
               <a:t> maqāla · an article</a:t>
             </a:r>
@@ -38296,9 +37560,8 @@
                 <a:solidFill>
                   <a:srgbClr val="1B3B6F"/>
                 </a:solidFill>
-                <a:latin typeface="Amiri" pitchFamily="34" charset="0"/>
-                <a:ea typeface="Amiri" pitchFamily="34" charset="-122"/>
-                <a:cs typeface="Amiri" pitchFamily="34" charset="-120"/>
+                <a:latin typeface="Amiri" pitchFamily="2" charset="-78"/>
+                <a:cs typeface="Amiri" pitchFamily="2" charset="-78"/>
               </a:rPr>
               <a:t>اِحْتِرَامٌ</a:t>
             </a:r>
@@ -38335,9 +37598,8 @@
                 <a:solidFill>
                   <a:srgbClr val="2E8B57"/>
                 </a:solidFill>
-                <a:latin typeface="Amiri" pitchFamily="34" charset="0"/>
-                <a:ea typeface="Amiri" pitchFamily="34" charset="-122"/>
-                <a:cs typeface="Amiri" pitchFamily="34" charset="-120"/>
+                <a:latin typeface="Amiri" pitchFamily="2" charset="-78"/>
+                <a:cs typeface="Amiri" pitchFamily="2" charset="-78"/>
               </a:rPr>
               <a:t>‎احترام‎ </a:t>
             </a:r>
@@ -38350,8 +37612,7 @@
                   <a:srgbClr val="2E8B57"/>
                 </a:solidFill>
                 <a:latin typeface="Calibri" pitchFamily="34" charset="0"/>
-                <a:ea typeface="Calibri" pitchFamily="34" charset="-122"/>
-                <a:cs typeface="Calibri" pitchFamily="34" charset="-120"/>
+                <a:cs typeface="Amiri" pitchFamily="2" charset="-78"/>
               </a:rPr>
               <a:t> ehtirām · respect</a:t>
             </a:r>
@@ -38389,8 +37650,7 @@
                   <a:srgbClr val="8A93A0"/>
                 </a:solidFill>
                 <a:latin typeface="Calibri" pitchFamily="34" charset="0"/>
-                <a:ea typeface="Calibri" pitchFamily="34" charset="-122"/>
-                <a:cs typeface="Calibri" pitchFamily="34" charset="-120"/>
+                <a:cs typeface="Amiri" pitchFamily="2" charset="-78"/>
               </a:rPr>
               <a:t>7 / 26</a:t>
             </a:r>
@@ -38484,9 +37744,8 @@
                 <a:solidFill>
                   <a:srgbClr val="D4AF37"/>
                 </a:solidFill>
-                <a:latin typeface="Amiri" pitchFamily="34" charset="0"/>
-                <a:ea typeface="Amiri" pitchFamily="34" charset="-122"/>
-                <a:cs typeface="Amiri" pitchFamily="34" charset="-120"/>
+                <a:latin typeface="Amiri" pitchFamily="2" charset="-78"/>
+                <a:cs typeface="Amiri" pitchFamily="2" charset="-78"/>
               </a:rPr>
               <a:t>م</a:t>
             </a:r>
@@ -38524,8 +37783,7 @@
                   <a:srgbClr val="1B3B6F"/>
                 </a:solidFill>
                 <a:latin typeface="Cambria" pitchFamily="34" charset="0"/>
-                <a:ea typeface="Cambria" pitchFamily="34" charset="-122"/>
-                <a:cs typeface="Cambria" pitchFamily="34" charset="-120"/>
+                <a:cs typeface="Amiri" pitchFamily="2" charset="-78"/>
               </a:rPr>
               <a:t>Al Madina Online School</a:t>
             </a:r>
@@ -38563,8 +37821,7 @@
                   <a:srgbClr val="8A6D1E"/>
                 </a:solidFill>
                 <a:latin typeface="Calibri" pitchFamily="34" charset="0"/>
-                <a:ea typeface="Calibri" pitchFamily="34" charset="-122"/>
-                <a:cs typeface="Calibri" pitchFamily="34" charset="-120"/>
+                <a:cs typeface="Amiri" pitchFamily="2" charset="-78"/>
               </a:rPr>
               <a:t>ARABIC DEPARTMENT · MIFTAH ARABIC · IGCSE 0544</a:t>
             </a:r>
@@ -38629,8 +37886,7 @@
                   <a:srgbClr val="FFFFFF"/>
                 </a:solidFill>
                 <a:latin typeface="Calibri" pitchFamily="34" charset="0"/>
-                <a:ea typeface="Calibri" pitchFamily="34" charset="-122"/>
-                <a:cs typeface="Calibri" pitchFamily="34" charset="-120"/>
+                <a:cs typeface="Amiri" pitchFamily="2" charset="-78"/>
               </a:rPr>
               <a:t>P6-L04 · IGCSE Bridge</a:t>
             </a:r>
@@ -38695,8 +37951,7 @@
                   <a:srgbClr val="FFFFFF"/>
                 </a:solidFill>
                 <a:latin typeface="Calibri" pitchFamily="34" charset="0"/>
-                <a:ea typeface="Calibri" pitchFamily="34" charset="-122"/>
-                <a:cs typeface="Calibri" pitchFamily="34" charset="-120"/>
+                <a:cs typeface="Amiri" pitchFamily="2" charset="-78"/>
               </a:rPr>
               <a:t>TEACHER INSTRUCTION · 2 MIN</a:t>
             </a:r>
@@ -38734,8 +37989,7 @@
                   <a:srgbClr val="1B3B6F"/>
                 </a:solidFill>
                 <a:latin typeface="Calibri" pitchFamily="34" charset="0"/>
-                <a:ea typeface="Calibri" pitchFamily="34" charset="-122"/>
-                <a:cs typeface="Calibri" pitchFamily="34" charset="-120"/>
+                <a:cs typeface="Amiri" pitchFamily="2" charset="-78"/>
               </a:rPr>
               <a:t>KEY WORDS · GROUP 1</a:t>
             </a:r>
@@ -38773,8 +38027,7 @@
                   <a:srgbClr val="1B3B6F"/>
                 </a:solidFill>
                 <a:latin typeface="Cambria" pitchFamily="34" charset="0"/>
-                <a:ea typeface="Cambria" pitchFamily="34" charset="-122"/>
-                <a:cs typeface="Cambria" pitchFamily="34" charset="-120"/>
+                <a:cs typeface="Amiri" pitchFamily="2" charset="-78"/>
               </a:rPr>
               <a:t>Text types (1 of 2)</a:t>
             </a:r>
@@ -38811,9 +38064,8 @@
                 <a:solidFill>
                   <a:srgbClr val="8A6D1E"/>
                 </a:solidFill>
-                <a:latin typeface="Amiri" pitchFamily="34" charset="0"/>
-                <a:ea typeface="Amiri" pitchFamily="34" charset="-122"/>
-                <a:cs typeface="Amiri" pitchFamily="34" charset="-120"/>
+                <a:latin typeface="Amiri" pitchFamily="2" charset="-78"/>
+                <a:cs typeface="Amiri" pitchFamily="2" charset="-78"/>
               </a:rPr>
               <a:t>كَلِمَاتُ الدَّرْسِ</a:t>
             </a:r>
@@ -38851,8 +38103,7 @@
                   <a:srgbClr val="8A93A0"/>
                 </a:solidFill>
                 <a:latin typeface="Calibri" pitchFamily="34" charset="0"/>
-                <a:ea typeface="Calibri" pitchFamily="34" charset="-122"/>
-                <a:cs typeface="Calibri" pitchFamily="34" charset="-120"/>
+                <a:cs typeface="Amiri" pitchFamily="2" charset="-78"/>
               </a:rPr>
               <a:t>Miftah Arabic · Progression P6 · IGCSE Bridge · P6-L04</a:t>
             </a:r>
@@ -38949,8 +38200,7 @@
                   <a:srgbClr val="1B3B6F"/>
                 </a:solidFill>
                 <a:latin typeface="Calibri" pitchFamily="34" charset="0"/>
-                <a:ea typeface="Calibri" pitchFamily="34" charset="-122"/>
-                <a:cs typeface="Calibri" pitchFamily="34" charset="-120"/>
+                <a:cs typeface="Amiri" pitchFamily="2" charset="-78"/>
               </a:rPr>
               <a:t>1</a:t>
             </a:r>
@@ -39015,8 +38265,7 @@
                   <a:srgbClr val="FFFFFF"/>
                 </a:solidFill>
                 <a:latin typeface="Calibri" pitchFamily="34" charset="0"/>
-                <a:ea typeface="Calibri" pitchFamily="34" charset="-122"/>
-                <a:cs typeface="Calibri" pitchFamily="34" charset="-120"/>
+                <a:cs typeface="Amiri" pitchFamily="2" charset="-78"/>
               </a:rPr>
               <a:t>CORE</a:t>
             </a:r>
@@ -39053,9 +38302,8 @@
                 <a:solidFill>
                   <a:srgbClr val="1B3B6F"/>
                 </a:solidFill>
-                <a:latin typeface="Amiri" pitchFamily="34" charset="0"/>
-                <a:ea typeface="Amiri" pitchFamily="34" charset="-122"/>
-                <a:cs typeface="Amiri" pitchFamily="34" charset="-120"/>
+                <a:latin typeface="Amiri" pitchFamily="2" charset="-78"/>
+                <a:cs typeface="Amiri" pitchFamily="2" charset="-78"/>
               </a:rPr>
               <a:t>الكِتَابَةُ المُوَجَّهَةُ</a:t>
             </a:r>
@@ -39093,8 +38341,7 @@
                   <a:srgbClr val="1F2A37"/>
                 </a:solidFill>
                 <a:latin typeface="Calibri" pitchFamily="34" charset="0"/>
-                <a:ea typeface="Calibri" pitchFamily="34" charset="-122"/>
-                <a:cs typeface="Calibri" pitchFamily="34" charset="-120"/>
+                <a:cs typeface="Amiri" pitchFamily="2" charset="-78"/>
               </a:rPr>
               <a:t>directed writing</a:t>
             </a:r>
@@ -39110,8 +38357,7 @@
                   <a:srgbClr val="5A6472"/>
                 </a:solidFill>
                 <a:latin typeface="Calibri" pitchFamily="34" charset="0"/>
-                <a:ea typeface="Calibri" pitchFamily="34" charset="-122"/>
-                <a:cs typeface="Calibri" pitchFamily="34" charset="-120"/>
+                <a:cs typeface="Amiri" pitchFamily="2" charset="-78"/>
               </a:rPr>
               <a:t>al-ki-tā-ba-tu al-mu-waj-ja-ha-tu</a:t>
             </a:r>
@@ -39208,8 +38454,7 @@
                   <a:srgbClr val="1B3B6F"/>
                 </a:solidFill>
                 <a:latin typeface="Calibri" pitchFamily="34" charset="0"/>
-                <a:ea typeface="Calibri" pitchFamily="34" charset="-122"/>
-                <a:cs typeface="Calibri" pitchFamily="34" charset="-120"/>
+                <a:cs typeface="Amiri" pitchFamily="2" charset="-78"/>
               </a:rPr>
               <a:t>2</a:t>
             </a:r>
@@ -39274,8 +38519,7 @@
                   <a:srgbClr val="8A6D1E"/>
                 </a:solidFill>
                 <a:latin typeface="Calibri" pitchFamily="34" charset="0"/>
-                <a:ea typeface="Calibri" pitchFamily="34" charset="-122"/>
-                <a:cs typeface="Calibri" pitchFamily="34" charset="-120"/>
+                <a:cs typeface="Amiri" pitchFamily="2" charset="-78"/>
               </a:rPr>
               <a:t>sg · pl</a:t>
             </a:r>
@@ -39340,8 +38584,7 @@
                   <a:srgbClr val="FFFFFF"/>
                 </a:solidFill>
                 <a:latin typeface="Calibri" pitchFamily="34" charset="0"/>
-                <a:ea typeface="Calibri" pitchFamily="34" charset="-122"/>
-                <a:cs typeface="Calibri" pitchFamily="34" charset="-120"/>
+                <a:cs typeface="Amiri" pitchFamily="2" charset="-78"/>
               </a:rPr>
               <a:t>CORE</a:t>
             </a:r>
@@ -39378,9 +38621,8 @@
                 <a:solidFill>
                   <a:srgbClr val="1B3B6F"/>
                 </a:solidFill>
-                <a:latin typeface="Amiri" pitchFamily="34" charset="0"/>
-                <a:ea typeface="Amiri" pitchFamily="34" charset="-122"/>
-                <a:cs typeface="Amiri" pitchFamily="34" charset="-120"/>
+                <a:latin typeface="Amiri" pitchFamily="2" charset="-78"/>
+                <a:cs typeface="Amiri" pitchFamily="2" charset="-78"/>
               </a:rPr>
               <a:t>خِطَابٌ رَسْمِيٌّ</a:t>
             </a:r>
@@ -39418,8 +38660,7 @@
                   <a:srgbClr val="1F2A37"/>
                 </a:solidFill>
                 <a:latin typeface="Calibri" pitchFamily="34" charset="0"/>
-                <a:ea typeface="Calibri" pitchFamily="34" charset="-122"/>
-                <a:cs typeface="Calibri" pitchFamily="34" charset="-120"/>
+                <a:cs typeface="Amiri" pitchFamily="2" charset="-78"/>
               </a:rPr>
               <a:t>a formal letter</a:t>
             </a:r>
@@ -39435,8 +38676,7 @@
                   <a:srgbClr val="5A6472"/>
                 </a:solidFill>
                 <a:latin typeface="Calibri" pitchFamily="34" charset="0"/>
-                <a:ea typeface="Calibri" pitchFamily="34" charset="-122"/>
-                <a:cs typeface="Calibri" pitchFamily="34" charset="-120"/>
+                <a:cs typeface="Amiri" pitchFamily="2" charset="-78"/>
               </a:rPr>
               <a:t>khi-ṭā-bun ras-miy-yun</a:t>
             </a:r>
@@ -39501,8 +38741,7 @@
                   <a:srgbClr val="8A6D1E"/>
                 </a:solidFill>
                 <a:latin typeface="Calibri" pitchFamily="34" charset="0"/>
-                <a:ea typeface="Calibri" pitchFamily="34" charset="-122"/>
-                <a:cs typeface="Calibri" pitchFamily="34" charset="-120"/>
+                <a:cs typeface="Amiri" pitchFamily="2" charset="-78"/>
               </a:rPr>
               <a:t>pl.</a:t>
             </a:r>
@@ -39539,9 +38778,8 @@
                 <a:solidFill>
                   <a:srgbClr val="1B3B6F"/>
                 </a:solidFill>
-                <a:latin typeface="Amiri" pitchFamily="34" charset="0"/>
-                <a:ea typeface="Amiri" pitchFamily="34" charset="-122"/>
-                <a:cs typeface="Amiri" pitchFamily="34" charset="-120"/>
+                <a:latin typeface="Amiri" pitchFamily="2" charset="-78"/>
+                <a:cs typeface="Amiri" pitchFamily="2" charset="-78"/>
               </a:rPr>
               <a:t>خِطَابَاتٌ رَسْمِيَّةٌ</a:t>
             </a:r>
@@ -39638,8 +38876,7 @@
                   <a:srgbClr val="1B3B6F"/>
                 </a:solidFill>
                 <a:latin typeface="Calibri" pitchFamily="34" charset="0"/>
-                <a:ea typeface="Calibri" pitchFamily="34" charset="-122"/>
-                <a:cs typeface="Calibri" pitchFamily="34" charset="-120"/>
+                <a:cs typeface="Amiri" pitchFamily="2" charset="-78"/>
               </a:rPr>
               <a:t>3</a:t>
             </a:r>
@@ -39704,8 +38941,7 @@
                   <a:srgbClr val="FFFFFF"/>
                 </a:solidFill>
                 <a:latin typeface="Calibri" pitchFamily="34" charset="0"/>
-                <a:ea typeface="Calibri" pitchFamily="34" charset="-122"/>
-                <a:cs typeface="Calibri" pitchFamily="34" charset="-120"/>
+                <a:cs typeface="Amiri" pitchFamily="2" charset="-78"/>
               </a:rPr>
               <a:t>CORE</a:t>
             </a:r>
@@ -39742,9 +38978,8 @@
                 <a:solidFill>
                   <a:srgbClr val="1B3B6F"/>
                 </a:solidFill>
-                <a:latin typeface="Amiri" pitchFamily="34" charset="0"/>
-                <a:ea typeface="Amiri" pitchFamily="34" charset="-122"/>
-                <a:cs typeface="Amiri" pitchFamily="34" charset="-120"/>
+                <a:latin typeface="Amiri" pitchFamily="2" charset="-78"/>
+                <a:cs typeface="Amiri" pitchFamily="2" charset="-78"/>
               </a:rPr>
               <a:t>بَرِيدٌ إِلِكْتْرُونِيٌّ</a:t>
             </a:r>
@@ -39782,8 +39017,7 @@
                   <a:srgbClr val="1F2A37"/>
                 </a:solidFill>
                 <a:latin typeface="Calibri" pitchFamily="34" charset="0"/>
-                <a:ea typeface="Calibri" pitchFamily="34" charset="-122"/>
-                <a:cs typeface="Calibri" pitchFamily="34" charset="-120"/>
+                <a:cs typeface="Amiri" pitchFamily="2" charset="-78"/>
               </a:rPr>
               <a:t>an email</a:t>
             </a:r>
@@ -39799,8 +39033,7 @@
                   <a:srgbClr val="5A6472"/>
                 </a:solidFill>
                 <a:latin typeface="Calibri" pitchFamily="34" charset="0"/>
-                <a:ea typeface="Calibri" pitchFamily="34" charset="-122"/>
-                <a:cs typeface="Calibri" pitchFamily="34" charset="-120"/>
+                <a:cs typeface="Amiri" pitchFamily="2" charset="-78"/>
               </a:rPr>
               <a:t>ba-rī-dun i-likt-rū-niy-yun</a:t>
             </a:r>
@@ -39897,8 +39130,7 @@
                   <a:srgbClr val="1B3B6F"/>
                 </a:solidFill>
                 <a:latin typeface="Calibri" pitchFamily="34" charset="0"/>
-                <a:ea typeface="Calibri" pitchFamily="34" charset="-122"/>
-                <a:cs typeface="Calibri" pitchFamily="34" charset="-120"/>
+                <a:cs typeface="Amiri" pitchFamily="2" charset="-78"/>
               </a:rPr>
               <a:t>4</a:t>
             </a:r>
@@ -39963,8 +39195,7 @@
                   <a:srgbClr val="8A6D1E"/>
                 </a:solidFill>
                 <a:latin typeface="Calibri" pitchFamily="34" charset="0"/>
-                <a:ea typeface="Calibri" pitchFamily="34" charset="-122"/>
-                <a:cs typeface="Calibri" pitchFamily="34" charset="-120"/>
+                <a:cs typeface="Amiri" pitchFamily="2" charset="-78"/>
               </a:rPr>
               <a:t>sg · pl</a:t>
             </a:r>
@@ -40029,8 +39260,7 @@
                   <a:srgbClr val="FFFFFF"/>
                 </a:solidFill>
                 <a:latin typeface="Calibri" pitchFamily="34" charset="0"/>
-                <a:ea typeface="Calibri" pitchFamily="34" charset="-122"/>
-                <a:cs typeface="Calibri" pitchFamily="34" charset="-120"/>
+                <a:cs typeface="Amiri" pitchFamily="2" charset="-78"/>
               </a:rPr>
               <a:t>CORE</a:t>
             </a:r>
@@ -40067,9 +39297,8 @@
                 <a:solidFill>
                   <a:srgbClr val="1B3B6F"/>
                 </a:solidFill>
-                <a:latin typeface="Amiri" pitchFamily="34" charset="0"/>
-                <a:ea typeface="Amiri" pitchFamily="34" charset="-122"/>
-                <a:cs typeface="Amiri" pitchFamily="34" charset="-120"/>
+                <a:latin typeface="Amiri" pitchFamily="2" charset="-78"/>
+                <a:cs typeface="Amiri" pitchFamily="2" charset="-78"/>
               </a:rPr>
               <a:t>مَقَالَةٌ</a:t>
             </a:r>
@@ -40107,8 +39336,7 @@
                   <a:srgbClr val="1F2A37"/>
                 </a:solidFill>
                 <a:latin typeface="Calibri" pitchFamily="34" charset="0"/>
-                <a:ea typeface="Calibri" pitchFamily="34" charset="-122"/>
-                <a:cs typeface="Calibri" pitchFamily="34" charset="-120"/>
+                <a:cs typeface="Amiri" pitchFamily="2" charset="-78"/>
               </a:rPr>
               <a:t>an article</a:t>
             </a:r>
@@ -40124,8 +39352,7 @@
                   <a:srgbClr val="5A6472"/>
                 </a:solidFill>
                 <a:latin typeface="Calibri" pitchFamily="34" charset="0"/>
-                <a:ea typeface="Calibri" pitchFamily="34" charset="-122"/>
-                <a:cs typeface="Calibri" pitchFamily="34" charset="-120"/>
+                <a:cs typeface="Amiri" pitchFamily="2" charset="-78"/>
               </a:rPr>
               <a:t>ma-qā-la-tun</a:t>
             </a:r>
@@ -40190,8 +39417,7 @@
                   <a:srgbClr val="8A6D1E"/>
                 </a:solidFill>
                 <a:latin typeface="Calibri" pitchFamily="34" charset="0"/>
-                <a:ea typeface="Calibri" pitchFamily="34" charset="-122"/>
-                <a:cs typeface="Calibri" pitchFamily="34" charset="-120"/>
+                <a:cs typeface="Amiri" pitchFamily="2" charset="-78"/>
               </a:rPr>
               <a:t>pl.</a:t>
             </a:r>
@@ -40228,9 +39454,8 @@
                 <a:solidFill>
                   <a:srgbClr val="1B3B6F"/>
                 </a:solidFill>
-                <a:latin typeface="Amiri" pitchFamily="34" charset="0"/>
-                <a:ea typeface="Amiri" pitchFamily="34" charset="-122"/>
-                <a:cs typeface="Amiri" pitchFamily="34" charset="-120"/>
+                <a:latin typeface="Amiri" pitchFamily="2" charset="-78"/>
+                <a:cs typeface="Amiri" pitchFamily="2" charset="-78"/>
               </a:rPr>
               <a:t>مَقَالَاتٌ</a:t>
             </a:r>
@@ -40268,8 +39493,7 @@
                   <a:srgbClr val="8A93A0"/>
                 </a:solidFill>
                 <a:latin typeface="Calibri" pitchFamily="34" charset="0"/>
-                <a:ea typeface="Calibri" pitchFamily="34" charset="-122"/>
-                <a:cs typeface="Calibri" pitchFamily="34" charset="-120"/>
+                <a:cs typeface="Amiri" pitchFamily="2" charset="-78"/>
               </a:rPr>
               <a:t>8 / 26</a:t>
             </a:r>
@@ -40363,9 +39587,8 @@
                 <a:solidFill>
                   <a:srgbClr val="D4AF37"/>
                 </a:solidFill>
-                <a:latin typeface="Amiri" pitchFamily="34" charset="0"/>
-                <a:ea typeface="Amiri" pitchFamily="34" charset="-122"/>
-                <a:cs typeface="Amiri" pitchFamily="34" charset="-120"/>
+                <a:latin typeface="Amiri" pitchFamily="2" charset="-78"/>
+                <a:cs typeface="Amiri" pitchFamily="2" charset="-78"/>
               </a:rPr>
               <a:t>م</a:t>
             </a:r>
@@ -40403,8 +39626,7 @@
                   <a:srgbClr val="1B3B6F"/>
                 </a:solidFill>
                 <a:latin typeface="Cambria" pitchFamily="34" charset="0"/>
-                <a:ea typeface="Cambria" pitchFamily="34" charset="-122"/>
-                <a:cs typeface="Cambria" pitchFamily="34" charset="-120"/>
+                <a:cs typeface="Amiri" pitchFamily="2" charset="-78"/>
               </a:rPr>
               <a:t>Al Madina Online School</a:t>
             </a:r>
@@ -40442,8 +39664,7 @@
                   <a:srgbClr val="8A6D1E"/>
                 </a:solidFill>
                 <a:latin typeface="Calibri" pitchFamily="34" charset="0"/>
-                <a:ea typeface="Calibri" pitchFamily="34" charset="-122"/>
-                <a:cs typeface="Calibri" pitchFamily="34" charset="-120"/>
+                <a:cs typeface="Amiri" pitchFamily="2" charset="-78"/>
               </a:rPr>
               <a:t>ARABIC DEPARTMENT · MIFTAH ARABIC · IGCSE 0544</a:t>
             </a:r>
@@ -40508,8 +39729,7 @@
                   <a:srgbClr val="FFFFFF"/>
                 </a:solidFill>
                 <a:latin typeface="Calibri" pitchFamily="34" charset="0"/>
-                <a:ea typeface="Calibri" pitchFamily="34" charset="-122"/>
-                <a:cs typeface="Calibri" pitchFamily="34" charset="-120"/>
+                <a:cs typeface="Amiri" pitchFamily="2" charset="-78"/>
               </a:rPr>
               <a:t>P6-L04 · IGCSE Bridge</a:t>
             </a:r>
@@ -40574,8 +39794,7 @@
                   <a:srgbClr val="FFFFFF"/>
                 </a:solidFill>
                 <a:latin typeface="Calibri" pitchFamily="34" charset="0"/>
-                <a:ea typeface="Calibri" pitchFamily="34" charset="-122"/>
-                <a:cs typeface="Calibri" pitchFamily="34" charset="-120"/>
+                <a:cs typeface="Amiri" pitchFamily="2" charset="-78"/>
               </a:rPr>
               <a:t>TEACHER INSTRUCTION · 2 MIN</a:t>
             </a:r>
@@ -40613,8 +39832,7 @@
                   <a:srgbClr val="1B3B6F"/>
                 </a:solidFill>
                 <a:latin typeface="Calibri" pitchFamily="34" charset="0"/>
-                <a:ea typeface="Calibri" pitchFamily="34" charset="-122"/>
-                <a:cs typeface="Calibri" pitchFamily="34" charset="-120"/>
+                <a:cs typeface="Amiri" pitchFamily="2" charset="-78"/>
               </a:rPr>
               <a:t>KEY WORDS · GROUP 1</a:t>
             </a:r>
@@ -40652,8 +39870,7 @@
                   <a:srgbClr val="1B3B6F"/>
                 </a:solidFill>
                 <a:latin typeface="Cambria" pitchFamily="34" charset="0"/>
-                <a:ea typeface="Cambria" pitchFamily="34" charset="-122"/>
-                <a:cs typeface="Cambria" pitchFamily="34" charset="-120"/>
+                <a:cs typeface="Amiri" pitchFamily="2" charset="-78"/>
               </a:rPr>
               <a:t>Text types (2 of 2)</a:t>
             </a:r>
@@ -40690,9 +39907,8 @@
                 <a:solidFill>
                   <a:srgbClr val="8A6D1E"/>
                 </a:solidFill>
-                <a:latin typeface="Amiri" pitchFamily="34" charset="0"/>
-                <a:ea typeface="Amiri" pitchFamily="34" charset="-122"/>
-                <a:cs typeface="Amiri" pitchFamily="34" charset="-120"/>
+                <a:latin typeface="Amiri" pitchFamily="2" charset="-78"/>
+                <a:cs typeface="Amiri" pitchFamily="2" charset="-78"/>
               </a:rPr>
               <a:t>كَلِمَاتُ الدَّرْسِ</a:t>
             </a:r>
@@ -40730,8 +39946,7 @@
                   <a:srgbClr val="8A93A0"/>
                 </a:solidFill>
                 <a:latin typeface="Calibri" pitchFamily="34" charset="0"/>
-                <a:ea typeface="Calibri" pitchFamily="34" charset="-122"/>
-                <a:cs typeface="Calibri" pitchFamily="34" charset="-120"/>
+                <a:cs typeface="Amiri" pitchFamily="2" charset="-78"/>
               </a:rPr>
               <a:t>Miftah Arabic · Progression P6 · IGCSE Bridge · P6-L04</a:t>
             </a:r>
@@ -40828,8 +40043,7 @@
                   <a:srgbClr val="1B3B6F"/>
                 </a:solidFill>
                 <a:latin typeface="Calibri" pitchFamily="34" charset="0"/>
-                <a:ea typeface="Calibri" pitchFamily="34" charset="-122"/>
-                <a:cs typeface="Calibri" pitchFamily="34" charset="-120"/>
+                <a:cs typeface="Amiri" pitchFamily="2" charset="-78"/>
               </a:rPr>
               <a:t>5</a:t>
             </a:r>
@@ -40894,8 +40108,7 @@
                   <a:srgbClr val="8A6D1E"/>
                 </a:solidFill>
                 <a:latin typeface="Calibri" pitchFamily="34" charset="0"/>
-                <a:ea typeface="Calibri" pitchFamily="34" charset="-122"/>
-                <a:cs typeface="Calibri" pitchFamily="34" charset="-120"/>
+                <a:cs typeface="Amiri" pitchFamily="2" charset="-78"/>
               </a:rPr>
               <a:t>sg · pl</a:t>
             </a:r>
@@ -40932,9 +40145,8 @@
                 <a:solidFill>
                   <a:srgbClr val="1B3B6F"/>
                 </a:solidFill>
-                <a:latin typeface="Amiri" pitchFamily="34" charset="0"/>
-                <a:ea typeface="Amiri" pitchFamily="34" charset="-122"/>
-                <a:cs typeface="Amiri" pitchFamily="34" charset="-120"/>
+                <a:latin typeface="Amiri" pitchFamily="2" charset="-78"/>
+                <a:cs typeface="Amiri" pitchFamily="2" charset="-78"/>
               </a:rPr>
               <a:t>تَقْرِيرٌ</a:t>
             </a:r>
@@ -40972,8 +40184,7 @@
                   <a:srgbClr val="1F2A37"/>
                 </a:solidFill>
                 <a:latin typeface="Calibri" pitchFamily="34" charset="0"/>
-                <a:ea typeface="Calibri" pitchFamily="34" charset="-122"/>
-                <a:cs typeface="Calibri" pitchFamily="34" charset="-120"/>
+                <a:cs typeface="Amiri" pitchFamily="2" charset="-78"/>
               </a:rPr>
               <a:t>a report</a:t>
             </a:r>
@@ -40989,8 +40200,7 @@
                   <a:srgbClr val="5A6472"/>
                 </a:solidFill>
                 <a:latin typeface="Calibri" pitchFamily="34" charset="0"/>
-                <a:ea typeface="Calibri" pitchFamily="34" charset="-122"/>
-                <a:cs typeface="Calibri" pitchFamily="34" charset="-120"/>
+                <a:cs typeface="Amiri" pitchFamily="2" charset="-78"/>
               </a:rPr>
               <a:t>taq-rī-run</a:t>
             </a:r>
@@ -41055,8 +40265,7 @@
                   <a:srgbClr val="8A6D1E"/>
                 </a:solidFill>
                 <a:latin typeface="Calibri" pitchFamily="34" charset="0"/>
-                <a:ea typeface="Calibri" pitchFamily="34" charset="-122"/>
-                <a:cs typeface="Calibri" pitchFamily="34" charset="-120"/>
+                <a:cs typeface="Amiri" pitchFamily="2" charset="-78"/>
               </a:rPr>
               <a:t>pl.</a:t>
             </a:r>
@@ -41093,9 +40302,8 @@
                 <a:solidFill>
                   <a:srgbClr val="1B3B6F"/>
                 </a:solidFill>
-                <a:latin typeface="Amiri" pitchFamily="34" charset="0"/>
-                <a:ea typeface="Amiri" pitchFamily="34" charset="-122"/>
-                <a:cs typeface="Amiri" pitchFamily="34" charset="-120"/>
+                <a:latin typeface="Amiri" pitchFamily="2" charset="-78"/>
+                <a:cs typeface="Amiri" pitchFamily="2" charset="-78"/>
               </a:rPr>
               <a:t>تَقَارِيرُ</a:t>
             </a:r>
@@ -41192,8 +40400,7 @@
                   <a:srgbClr val="1B3B6F"/>
                 </a:solidFill>
                 <a:latin typeface="Calibri" pitchFamily="34" charset="0"/>
-                <a:ea typeface="Calibri" pitchFamily="34" charset="-122"/>
-                <a:cs typeface="Calibri" pitchFamily="34" charset="-120"/>
+                <a:cs typeface="Amiri" pitchFamily="2" charset="-78"/>
               </a:rPr>
               <a:t>6</a:t>
             </a:r>
@@ -41230,9 +40437,8 @@
                 <a:solidFill>
                   <a:srgbClr val="1B3B6F"/>
                 </a:solidFill>
-                <a:latin typeface="Amiri" pitchFamily="34" charset="0"/>
-                <a:ea typeface="Amiri" pitchFamily="34" charset="-122"/>
-                <a:cs typeface="Amiri" pitchFamily="34" charset="-120"/>
+                <a:latin typeface="Amiri" pitchFamily="2" charset="-78"/>
+                <a:cs typeface="Amiri" pitchFamily="2" charset="-78"/>
               </a:rPr>
               <a:t>يَوْمِيَّاتٌ</a:t>
             </a:r>
@@ -41270,8 +40476,7 @@
                   <a:srgbClr val="1F2A37"/>
                 </a:solidFill>
                 <a:latin typeface="Calibri" pitchFamily="34" charset="0"/>
-                <a:ea typeface="Calibri" pitchFamily="34" charset="-122"/>
-                <a:cs typeface="Calibri" pitchFamily="34" charset="-120"/>
+                <a:cs typeface="Amiri" pitchFamily="2" charset="-78"/>
               </a:rPr>
               <a:t>a diary entry</a:t>
             </a:r>
@@ -41287,8 +40492,7 @@
                   <a:srgbClr val="5A6472"/>
                 </a:solidFill>
                 <a:latin typeface="Calibri" pitchFamily="34" charset="0"/>
-                <a:ea typeface="Calibri" pitchFamily="34" charset="-122"/>
-                <a:cs typeface="Calibri" pitchFamily="34" charset="-120"/>
+                <a:cs typeface="Amiri" pitchFamily="2" charset="-78"/>
               </a:rPr>
               <a:t>yaw-miy-yā-tun</a:t>
             </a:r>
@@ -41385,8 +40589,7 @@
                   <a:srgbClr val="1B3B6F"/>
                 </a:solidFill>
                 <a:latin typeface="Calibri" pitchFamily="34" charset="0"/>
-                <a:ea typeface="Calibri" pitchFamily="34" charset="-122"/>
-                <a:cs typeface="Calibri" pitchFamily="34" charset="-120"/>
+                <a:cs typeface="Amiri" pitchFamily="2" charset="-78"/>
               </a:rPr>
               <a:t>7</a:t>
             </a:r>
@@ -41451,8 +40654,7 @@
                   <a:srgbClr val="FFFFFF"/>
                 </a:solidFill>
                 <a:latin typeface="Calibri" pitchFamily="34" charset="0"/>
-                <a:ea typeface="Calibri" pitchFamily="34" charset="-122"/>
-                <a:cs typeface="Calibri" pitchFamily="34" charset="-120"/>
+                <a:cs typeface="Amiri" pitchFamily="2" charset="-78"/>
               </a:rPr>
               <a:t>CORE</a:t>
             </a:r>
@@ -41489,9 +40691,8 @@
                 <a:solidFill>
                   <a:srgbClr val="1B3B6F"/>
                 </a:solidFill>
-                <a:latin typeface="Amiri" pitchFamily="34" charset="0"/>
-                <a:ea typeface="Amiri" pitchFamily="34" charset="-122"/>
-                <a:cs typeface="Amiri" pitchFamily="34" charset="-120"/>
+                <a:latin typeface="Amiri" pitchFamily="2" charset="-78"/>
+                <a:cs typeface="Amiri" pitchFamily="2" charset="-78"/>
               </a:rPr>
               <a:t>صِيغَةٌ رَسْمِيَّةٌ</a:t>
             </a:r>
@@ -41529,8 +40730,7 @@
                   <a:srgbClr val="1F2A37"/>
                 </a:solidFill>
                 <a:latin typeface="Calibri" pitchFamily="34" charset="0"/>
-                <a:ea typeface="Calibri" pitchFamily="34" charset="-122"/>
-                <a:cs typeface="Calibri" pitchFamily="34" charset="-120"/>
+                <a:cs typeface="Amiri" pitchFamily="2" charset="-78"/>
               </a:rPr>
               <a:t>formal register</a:t>
             </a:r>
@@ -41546,8 +40746,7 @@
                   <a:srgbClr val="5A6472"/>
                 </a:solidFill>
                 <a:latin typeface="Calibri" pitchFamily="34" charset="0"/>
-                <a:ea typeface="Calibri" pitchFamily="34" charset="-122"/>
-                <a:cs typeface="Calibri" pitchFamily="34" charset="-120"/>
+                <a:cs typeface="Amiri" pitchFamily="2" charset="-78"/>
               </a:rPr>
               <a:t>ṣī-gha-tun ras-miy-ya-tun</a:t>
             </a:r>
@@ -41644,8 +40843,7 @@
                   <a:srgbClr val="1B3B6F"/>
                 </a:solidFill>
                 <a:latin typeface="Calibri" pitchFamily="34" charset="0"/>
-                <a:ea typeface="Calibri" pitchFamily="34" charset="-122"/>
-                <a:cs typeface="Calibri" pitchFamily="34" charset="-120"/>
+                <a:cs typeface="Amiri" pitchFamily="2" charset="-78"/>
               </a:rPr>
               <a:t>8</a:t>
             </a:r>
@@ -41710,8 +40908,7 @@
                   <a:srgbClr val="FFFFFF"/>
                 </a:solidFill>
                 <a:latin typeface="Calibri" pitchFamily="34" charset="0"/>
-                <a:ea typeface="Calibri" pitchFamily="34" charset="-122"/>
-                <a:cs typeface="Calibri" pitchFamily="34" charset="-120"/>
+                <a:cs typeface="Amiri" pitchFamily="2" charset="-78"/>
               </a:rPr>
               <a:t>CORE</a:t>
             </a:r>
@@ -41748,9 +40945,8 @@
                 <a:solidFill>
                   <a:srgbClr val="1B3B6F"/>
                 </a:solidFill>
-                <a:latin typeface="Amiri" pitchFamily="34" charset="0"/>
-                <a:ea typeface="Amiri" pitchFamily="34" charset="-122"/>
-                <a:cs typeface="Amiri" pitchFamily="34" charset="-120"/>
+                <a:latin typeface="Amiri" pitchFamily="2" charset="-78"/>
+                <a:cs typeface="Amiri" pitchFamily="2" charset="-78"/>
               </a:rPr>
               <a:t>صِيغَةٌ غَيْرُ رَسْمِيَّةٍ</a:t>
             </a:r>
@@ -41788,8 +40984,7 @@
                   <a:srgbClr val="1F2A37"/>
                 </a:solidFill>
                 <a:latin typeface="Calibri" pitchFamily="34" charset="0"/>
-                <a:ea typeface="Calibri" pitchFamily="34" charset="-122"/>
-                <a:cs typeface="Calibri" pitchFamily="34" charset="-120"/>
+                <a:cs typeface="Amiri" pitchFamily="2" charset="-78"/>
               </a:rPr>
               <a:t>informal register</a:t>
             </a:r>
@@ -41805,8 +41000,7 @@
                   <a:srgbClr val="5A6472"/>
                 </a:solidFill>
                 <a:latin typeface="Calibri" pitchFamily="34" charset="0"/>
-                <a:ea typeface="Calibri" pitchFamily="34" charset="-122"/>
-                <a:cs typeface="Calibri" pitchFamily="34" charset="-120"/>
+                <a:cs typeface="Amiri" pitchFamily="2" charset="-78"/>
               </a:rPr>
               <a:t>ṣī-gha-tun ghay-ru ras-miy-ya-tin</a:t>
             </a:r>
@@ -41844,8 +41038,7 @@
                   <a:srgbClr val="8A93A0"/>
                 </a:solidFill>
                 <a:latin typeface="Calibri" pitchFamily="34" charset="0"/>
-                <a:ea typeface="Calibri" pitchFamily="34" charset="-122"/>
-                <a:cs typeface="Calibri" pitchFamily="34" charset="-120"/>
+                <a:cs typeface="Amiri" pitchFamily="2" charset="-78"/>
               </a:rPr>
               <a:t>9 / 26</a:t>
             </a:r>

--- a/Progression_P6/P6-L04_Paper_4_Q1_Directed_Writing.pptx
+++ b/Progression_P6/P6-L04_Paper_4_Q1_Directed_Writing.pptx
@@ -524,7 +524,11 @@
           <a:lstStyle/>
           <a:p>
             <a:r>
-              <a:rPr lang="en-US" dirty="0"/>
+              <a:rPr lang="ar-SA" dirty="0">
+                <a:latin typeface="Amiri" pitchFamily="2" charset="-78"/>
+                <a:ea typeface="Amiri" pitchFamily="2" charset="-78"/>
+                <a:cs typeface="Amiri" pitchFamily="2" charset="-78"/>
+              </a:rPr>
               <a:t>LESSON AT A GLANCE — planned for 56 minutes, leaving about 4 minutes for Teams delays.
 0–1 Welcome · 1–2 Map · 2–8 Do Now + answers · 8–9 Objectives · 9–14 Register words · 14–17 Register signals · 17–21 Same content, two registers (I Do) · 21–23 The Q1 mark scheme · 23–25 Choose your task · 25–45 Write (20 min, exam timing) · 45–51 Models + self-mark · 51–54 Difficulty profile · 54–58 Reflection + self-check · 58–60 Preparation.
 FLEX slides are optional. Use them if the class is moving quickly; otherwise the same activities are on the website for homework.
@@ -624,7 +628,11 @@
           <a:lstStyle/>
           <a:p>
             <a:r>
-              <a:rPr lang="en-US" dirty="0"/>
+              <a:rPr lang="ar-SA" dirty="0">
+                <a:latin typeface="Amiri" pitchFamily="2" charset="-78"/>
+                <a:ea typeface="Amiri" pitchFamily="2" charset="-78"/>
+                <a:cs typeface="Amiri" pitchFamily="2" charset="-78"/>
+              </a:rPr>
               <a:t>KEY WORDS — Register signals (website vocabulary (1 of 2)). Hear → Say → See → Use. Transliteration is printed for Core students (cover it for Develop/Stretch).
 Register signals — learn them in PAIRS: formal أَتَشَرَّفُ بِمُخَاطَبَتِكُمْ … وَتَفَضَّلُوا بِقَبُولِ الاحْتِرَامِ · friendly حَيَّاكَ اللَّهُ … إِلَى اللِّقَاءِ. Never mix them in one text.</a:t>
             </a:r>
@@ -713,7 +721,11 @@
           <a:lstStyle/>
           <a:p>
             <a:r>
-              <a:rPr lang="en-US" dirty="0"/>
+              <a:rPr lang="ar-SA" dirty="0">
+                <a:latin typeface="Amiri" pitchFamily="2" charset="-78"/>
+                <a:ea typeface="Amiri" pitchFamily="2" charset="-78"/>
+                <a:cs typeface="Amiri" pitchFamily="2" charset="-78"/>
+              </a:rPr>
               <a:t>KEY WORDS — Register signals (website vocabulary (2 of 2)). Hear → Say → See → Use. Transliteration is printed for Core students (cover it for Develop/Stretch).
 Register signals — learn them in PAIRS: formal أَتَشَرَّفُ بِمُخَاطَبَتِكُمْ … وَتَفَضَّلُوا بِقَبُولِ الاحْتِرَامِ · friendly حَيَّاكَ اللَّهُ … إِلَى اللِّقَاءِ. Never mix them in one text.</a:t>
             </a:r>
@@ -890,7 +902,11 @@
           <a:lstStyle/>
           <a:p>
             <a:r>
-              <a:rPr lang="en-US" dirty="0"/>
+              <a:rPr lang="ar-SA" dirty="0">
+                <a:latin typeface="Amiri" pitchFamily="2" charset="-78"/>
+                <a:ea typeface="Amiri" pitchFamily="2" charset="-78"/>
+                <a:cs typeface="Amiri" pitchFamily="2" charset="-78"/>
+              </a:rPr>
               <a:t>I DO (4 min) — built from the two website models. Read each row across, formal then friendly. Point out: formal = plural “you” (تَتَّخِذُوا), passives (تُطْلَقَ), formal titles; friendly = singular “you” (أَنْصَحُكَ), names, exclamation. The P5 grammar works in BOTH registers.</a:t>
             </a:r>
             <a:endParaRPr lang="en-US" dirty="0"/>
@@ -1155,7 +1171,11 @@
           <a:lstStyle/>
           <a:p>
             <a:r>
-              <a:rPr lang="en-US" dirty="0"/>
+              <a:rPr lang="ar-SA" dirty="0">
+                <a:latin typeface="Amiri" pitchFamily="2" charset="-78"/>
+                <a:ea typeface="Amiri" pitchFamily="2" charset="-78"/>
+                <a:cs typeface="Amiri" pitchFamily="2" charset="-78"/>
+              </a:rPr>
               <a:t>
 Website task: Write a friendly email (130–140 words) to an Arabic exchange student coming to your school for a month. Describe: your school, the local area, one cultural custom to be aware of, and a suggested activity. Register: friendly, semi-formal.
 Website checklist: A warm opening (حَيَّاكَ اللَّهُ / عَزِيزِي …). · The school, the area, a custom and a suggested activity. · Friendly, first/second-person register. · A warm closing (إِلَى اللِّقَاءِ).</a:t>
@@ -1335,7 +1355,11 @@
           <a:lstStyle/>
           <a:p>
             <a:r>
-              <a:rPr lang="en-US" dirty="0"/>
+              <a:rPr lang="ar-SA" dirty="0">
+                <a:latin typeface="Amiri" pitchFamily="2" charset="-78"/>
+                <a:ea typeface="Amiri" pitchFamily="2" charset="-78"/>
+                <a:cs typeface="Amiri" pitchFamily="2" charset="-78"/>
+              </a:rPr>
               <a:t>
 Website task: Write a formal letter (130–140 words) to the Arab League Environment Committee recommending a specific environmental measure. Include: the problem, your proposed solution, the expected benefit, and a request for action. Keep the register رَسْمِيًّا throughout.
 Website checklist: Formal opening (أَتَشَرَّفُ بِمُخَاطَبَتِكُمْ …). · The problem, the solution, the benefit and a request for action. · Formal connectors and impersonal/passive structures. · A formal closing (وَتَفَضَّلُوا بِقَبُولِ الاحْتِرَامِ).</a:t>
@@ -1425,7 +1449,11 @@
           <a:lstStyle/>
           <a:p>
             <a:r>
-              <a:rPr lang="en-US" dirty="0"/>
+              <a:rPr lang="ar-SA" dirty="0">
+                <a:latin typeface="Amiri" pitchFamily="2" charset="-78"/>
+                <a:ea typeface="Amiri" pitchFamily="2" charset="-78"/>
+                <a:cs typeface="Amiri" pitchFamily="2" charset="-78"/>
+              </a:rPr>
               <a:t>MODEL (website) — show AFTER students have written. Students find the four items on the chips, then choose ONE thing to add to their own answer.
 Website model (email), with one fix: يَسْعُدُنِي → يُسْعِدُنِي (Form IV, “it makes me happy”). Register signals: عَزِيزِي · حَيَّاكَ اللَّهُ · أَنْصَحُكَ بِأَنْ تُحْضِرَ · إِلَى اللِّقَاءِ، صَدِيقُكَ.</a:t>
             </a:r>
@@ -1514,7 +1542,11 @@
           <a:lstStyle/>
           <a:p>
             <a:r>
-              <a:rPr lang="en-US" dirty="0"/>
+              <a:rPr lang="ar-SA" dirty="0">
+                <a:latin typeface="Amiri" pitchFamily="2" charset="-78"/>
+                <a:ea typeface="Amiri" pitchFamily="2" charset="-78"/>
+                <a:cs typeface="Amiri" pitchFamily="2" charset="-78"/>
+              </a:rPr>
               <a:t>WELCOME (1 min) — while students join.
 • Greet each student by name as they arrive: السَّلَامُ عَلَيْكُمْ. Take the register (Pastoral Tracker: attendance 0/1).
 • 2-MINUTE CHECK-IN (SEND training): a private chat to any student who seemed unsettled last lesson — “Are you okay today? 👍 / 👎”.
@@ -1607,7 +1639,11 @@
           <a:lstStyle/>
           <a:p>
             <a:r>
-              <a:rPr lang="en-US" dirty="0"/>
+              <a:rPr lang="ar-SA" dirty="0">
+                <a:latin typeface="Amiri" pitchFamily="2" charset="-78"/>
+                <a:ea typeface="Amiri" pitchFamily="2" charset="-78"/>
+                <a:cs typeface="Amiri" pitchFamily="2" charset="-78"/>
+              </a:rPr>
               <a:t>MODEL (website) — show AFTER students have written. Students find the four items on the chips, then choose ONE thing to add to their own answer.
 Website model (article). Register signals: a hook question, first person (أُشِيرُ · أُحَافِظُ), يَنْبَغِي أَنْ, a call to the reader (أَدْعُو … إِلَى أَنْ يَعْتَنِيَ). Note: إِذَا خَصَّصْتُ … شَعَرْتُ — a past-tense result for a habit (“whenever”).</a:t>
             </a:r>
@@ -1696,7 +1732,11 @@
           <a:lstStyle/>
           <a:p>
             <a:r>
-              <a:rPr lang="en-US" dirty="0"/>
+              <a:rPr lang="ar-SA" dirty="0">
+                <a:latin typeface="Amiri" pitchFamily="2" charset="-78"/>
+                <a:ea typeface="Amiri" pitchFamily="2" charset="-78"/>
+                <a:cs typeface="Amiri" pitchFamily="2" charset="-78"/>
+              </a:rPr>
               <a:t>MODEL (website) — show AFTER students have written. Students find the four items on the chips, then choose ONE thing to add to their own answer.
 Website model (formal letter). Register signals: حَضَرَاتِ … المُحْتَرَمِينَ · أَتَشَرَّفُ بِمُخَاطَبَتِكُمْ · passives in -a (أَنْ تُطْلَقَ · أَنْ تُسْتَثْمَرَ) · وَتَفَضَّلُوا بِقَبُولِ فَائِقِ الاحْتِرَامِ.</a:t>
             </a:r>
@@ -2593,7 +2633,11 @@
           <a:lstStyle/>
           <a:p>
             <a:r>
-              <a:rPr lang="en-US" dirty="0"/>
+              <a:rPr lang="ar-SA" dirty="0">
+                <a:latin typeface="Amiri" pitchFamily="2" charset="-78"/>
+                <a:ea typeface="Amiri" pitchFamily="2" charset="-78"/>
+                <a:cs typeface="Amiri" pitchFamily="2" charset="-78"/>
+              </a:rPr>
               <a:t>KEY WORDS — HOW TO TEACH EACH GROUP (EAL pre-teaching routine, 7 min)
 1. HEAR IT: say the word twice, clearly, with a gesture where possible.
 2. SAY IT: choral repetition — “I say, you say” — then two volunteers.
@@ -2688,7 +2732,11 @@
           <a:lstStyle/>
           <a:p>
             <a:r>
-              <a:rPr lang="en-US" dirty="0"/>
+              <a:rPr lang="ar-SA" dirty="0">
+                <a:latin typeface="Amiri" pitchFamily="2" charset="-78"/>
+                <a:ea typeface="Amiri" pitchFamily="2" charset="-78"/>
+                <a:cs typeface="Amiri" pitchFamily="2" charset="-78"/>
+              </a:rPr>
               <a:t>KEY WORDS — Text types (website vocabulary (1 of 2)). Hear → Say → See → Use. Transliteration is printed for Core students (cover it for Develop/Stretch).
 Text types: خِطَابٌ رَسْمِيٌّ (a formal letter) · بَرِيدٌ إِلِكْتْرُونِيٌّ (an email) · مَقَالَةٌ (an article) · تَقْرِيرٌ (a report) · يَوْمِيَّاتٌ (a diary). Each has its own صِيغَةٌ (register): رَسْمِيَّةٌ or غَيْرُ رَسْمِيَّةٍ.</a:t>
             </a:r>
@@ -2777,7 +2825,11 @@
           <a:lstStyle/>
           <a:p>
             <a:r>
-              <a:rPr lang="en-US" dirty="0"/>
+              <a:rPr lang="ar-SA" dirty="0">
+                <a:latin typeface="Amiri" pitchFamily="2" charset="-78"/>
+                <a:ea typeface="Amiri" pitchFamily="2" charset="-78"/>
+                <a:cs typeface="Amiri" pitchFamily="2" charset="-78"/>
+              </a:rPr>
               <a:t>KEY WORDS — Text types (website vocabulary (2 of 2)). Hear → Say → See → Use. Transliteration is printed for Core students (cover it for Develop/Stretch).
 Text types: خِطَابٌ رَسْمِيٌّ (a formal letter) · بَرِيدٌ إِلِكْتْرُونِيٌّ (an email) · مَقَالَةٌ (an article) · تَقْرِيرٌ (a report) · يَوْمِيَّاتٌ (a diary). Each has its own صِيغَةٌ (register): رَسْمِيَّةٌ or غَيْرُ رَسْمِيَّةٍ.</a:t>
             </a:r>
@@ -3262,6 +3314,7 @@
                   <a:srgbClr val="D4AF37"/>
                 </a:solidFill>
                 <a:latin typeface="Amiri" pitchFamily="2" charset="-78"/>
+                <a:ea typeface="Amiri" pitchFamily="2" charset="-78"/>
                 <a:cs typeface="Amiri" pitchFamily="2" charset="-78"/>
               </a:rPr>
               <a:t>م</a:t>
@@ -3468,6 +3521,7 @@
                   <a:srgbClr val="D4AF37"/>
                 </a:solidFill>
                 <a:latin typeface="Amiri" pitchFamily="2" charset="-78"/>
+                <a:ea typeface="Amiri" pitchFamily="2" charset="-78"/>
                 <a:cs typeface="Amiri" pitchFamily="2" charset="-78"/>
               </a:rPr>
               <a:t>الوَرَقَةُ الرَّابِعَةُ — الكِتَابَةُ المُوَجَّهَةُ: الشَّكْلُ وَالصِّيغَةُ</a:t>
@@ -3925,6 +3979,7 @@
                   <a:srgbClr val="D4AF37"/>
                 </a:solidFill>
                 <a:latin typeface="Amiri" pitchFamily="2" charset="-78"/>
+                <a:ea typeface="Amiri" pitchFamily="2" charset="-78"/>
                 <a:cs typeface="Amiri" pitchFamily="2" charset="-78"/>
               </a:rPr>
               <a:t>م</a:t>
@@ -4245,6 +4300,7 @@
                   <a:srgbClr val="8A6D1E"/>
                 </a:solidFill>
                 <a:latin typeface="Amiri" pitchFamily="2" charset="-78"/>
+                <a:ea typeface="Amiri" pitchFamily="2" charset="-78"/>
                 <a:cs typeface="Amiri" pitchFamily="2" charset="-78"/>
               </a:rPr>
               <a:t>كَلِمَاتُ الدَّرْسِ</a:t>
@@ -4418,6 +4474,7 @@
                   <a:srgbClr val="1B3B6F"/>
                 </a:solidFill>
                 <a:latin typeface="Amiri" pitchFamily="2" charset="-78"/>
+                <a:ea typeface="Amiri" pitchFamily="2" charset="-78"/>
                 <a:cs typeface="Amiri" pitchFamily="2" charset="-78"/>
               </a:rPr>
               <a:t>مُقَدِّمَةٌ مُنَاسِبَةٌ</a:t>
@@ -4607,6 +4664,7 @@
                   <a:srgbClr val="1B3B6F"/>
                 </a:solidFill>
                 <a:latin typeface="Amiri" pitchFamily="2" charset="-78"/>
+                <a:ea typeface="Amiri" pitchFamily="2" charset="-78"/>
                 <a:cs typeface="Amiri" pitchFamily="2" charset="-78"/>
               </a:rPr>
               <a:t>خَاتِمَةٌ مُنَاسِبَةٌ</a:t>
@@ -4796,6 +4854,7 @@
                   <a:srgbClr val="1B3B6F"/>
                 </a:solidFill>
                 <a:latin typeface="Amiri" pitchFamily="2" charset="-78"/>
+                <a:ea typeface="Amiri" pitchFamily="2" charset="-78"/>
                 <a:cs typeface="Amiri" pitchFamily="2" charset="-78"/>
               </a:rPr>
               <a:t>اللُّغَةُ الإِقْنَاعِيَّةُ</a:t>
@@ -4985,6 +5044,7 @@
                   <a:srgbClr val="1B3B6F"/>
                 </a:solidFill>
                 <a:latin typeface="Amiri" pitchFamily="2" charset="-78"/>
+                <a:ea typeface="Amiri" pitchFamily="2" charset="-78"/>
                 <a:cs typeface="Amiri" pitchFamily="2" charset="-78"/>
               </a:rPr>
               <a:t>المَعْلُومَاتُ المَطْلُوبَةُ</a:t>
@@ -5172,6 +5232,7 @@
                   <a:srgbClr val="D4AF37"/>
                 </a:solidFill>
                 <a:latin typeface="Amiri" pitchFamily="2" charset="-78"/>
+                <a:ea typeface="Amiri" pitchFamily="2" charset="-78"/>
                 <a:cs typeface="Amiri" pitchFamily="2" charset="-78"/>
               </a:rPr>
               <a:t>م</a:t>
@@ -5492,6 +5553,7 @@
                   <a:srgbClr val="8A6D1E"/>
                 </a:solidFill>
                 <a:latin typeface="Amiri" pitchFamily="2" charset="-78"/>
+                <a:ea typeface="Amiri" pitchFamily="2" charset="-78"/>
                 <a:cs typeface="Amiri" pitchFamily="2" charset="-78"/>
               </a:rPr>
               <a:t>كَلِمَاتُ الدَّرْسِ</a:t>
@@ -5795,6 +5857,7 @@
                   <a:srgbClr val="1B3B6F"/>
                 </a:solidFill>
                 <a:latin typeface="Amiri" pitchFamily="2" charset="-78"/>
+                <a:ea typeface="Amiri" pitchFamily="2" charset="-78"/>
                 <a:cs typeface="Amiri" pitchFamily="2" charset="-78"/>
               </a:rPr>
               <a:t>أَتَشَرَّفُ بِمُخَاطَبَتِكُمْ</a:t>
@@ -6114,6 +6177,7 @@
                   <a:srgbClr val="1B3B6F"/>
                 </a:solidFill>
                 <a:latin typeface="Amiri" pitchFamily="2" charset="-78"/>
+                <a:ea typeface="Amiri" pitchFamily="2" charset="-78"/>
                 <a:cs typeface="Amiri" pitchFamily="2" charset="-78"/>
               </a:rPr>
               <a:t>حَيَّاكَ اللَّهُ</a:t>
@@ -6271,6 +6335,7 @@
                   <a:srgbClr val="1B3B6F"/>
                 </a:solidFill>
                 <a:latin typeface="Amiri" pitchFamily="2" charset="-78"/>
+                <a:ea typeface="Amiri" pitchFamily="2" charset="-78"/>
                 <a:cs typeface="Amiri" pitchFamily="2" charset="-78"/>
               </a:rPr>
               <a:t>حَيَّاكِ اللَّهُ</a:t>
@@ -6536,6 +6601,7 @@
                   <a:srgbClr val="1B3B6F"/>
                 </a:solidFill>
                 <a:latin typeface="Amiri" pitchFamily="2" charset="-78"/>
+                <a:ea typeface="Amiri" pitchFamily="2" charset="-78"/>
                 <a:cs typeface="Amiri" pitchFamily="2" charset="-78"/>
               </a:rPr>
               <a:t>وَتَفَضَّلُوا بِقَبُولِ الاحْتِرَامِ</a:t>
@@ -6855,6 +6921,7 @@
                   <a:srgbClr val="1B3B6F"/>
                 </a:solidFill>
                 <a:latin typeface="Amiri" pitchFamily="2" charset="-78"/>
+                <a:ea typeface="Amiri" pitchFamily="2" charset="-78"/>
                 <a:cs typeface="Amiri" pitchFamily="2" charset="-78"/>
               </a:rPr>
               <a:t>إِلَى اللِّقَاءِ</a:t>
@@ -7042,6 +7109,7 @@
                   <a:srgbClr val="D4AF37"/>
                 </a:solidFill>
                 <a:latin typeface="Amiri" pitchFamily="2" charset="-78"/>
+                <a:ea typeface="Amiri" pitchFamily="2" charset="-78"/>
                 <a:cs typeface="Amiri" pitchFamily="2" charset="-78"/>
               </a:rPr>
               <a:t>م</a:t>
@@ -7362,6 +7430,7 @@
                   <a:srgbClr val="8A6D1E"/>
                 </a:solidFill>
                 <a:latin typeface="Amiri" pitchFamily="2" charset="-78"/>
+                <a:ea typeface="Amiri" pitchFamily="2" charset="-78"/>
                 <a:cs typeface="Amiri" pitchFamily="2" charset="-78"/>
               </a:rPr>
               <a:t>عَلَامَاتُ الصِّيغَةِ</a:t>
@@ -7642,6 +7711,7 @@
                   <a:srgbClr val="1B3B6F"/>
                 </a:solidFill>
                 <a:latin typeface="Amiri" pitchFamily="2" charset="-78"/>
+                <a:ea typeface="Amiri" pitchFamily="2" charset="-78"/>
                 <a:cs typeface="Amiri" pitchFamily="2" charset="-78"/>
               </a:rPr>
               <a:t>أَتَشَرَّفُ بِمُخَاطَبَتِكُمْ</a:t>
@@ -7848,6 +7918,7 @@
                   <a:srgbClr val="1B3B6F"/>
                 </a:solidFill>
                 <a:latin typeface="Amiri" pitchFamily="2" charset="-78"/>
+                <a:ea typeface="Amiri" pitchFamily="2" charset="-78"/>
                 <a:cs typeface="Amiri" pitchFamily="2" charset="-78"/>
               </a:rPr>
               <a:t>حَيَّاكَ اللَّهُ / عَزِيزِي</a:t>
@@ -8195,6 +8266,7 @@
                   <a:srgbClr val="1B3B6F"/>
                 </a:solidFill>
                 <a:latin typeface="Amiri" pitchFamily="2" charset="-78"/>
+                <a:ea typeface="Amiri" pitchFamily="2" charset="-78"/>
                 <a:cs typeface="Amiri" pitchFamily="2" charset="-78"/>
               </a:rPr>
               <a:t>عُنْوَانٌ + أَقْسَامٌ مُرَقَّمَةٌ</a:t>
@@ -8404,6 +8476,7 @@
                   <a:srgbClr val="D4AF37"/>
                 </a:solidFill>
                 <a:latin typeface="Amiri" pitchFamily="2" charset="-78"/>
+                <a:ea typeface="Amiri" pitchFamily="2" charset="-78"/>
                 <a:cs typeface="Amiri" pitchFamily="2" charset="-78"/>
               </a:rPr>
               <a:t>م</a:t>
@@ -8724,6 +8797,7 @@
                   <a:srgbClr val="8A6D1E"/>
                 </a:solidFill>
                 <a:latin typeface="Amiri" pitchFamily="2" charset="-78"/>
+                <a:ea typeface="Amiri" pitchFamily="2" charset="-78"/>
                 <a:cs typeface="Amiri" pitchFamily="2" charset="-78"/>
               </a:rPr>
               <a:t>رَسْمِيٌّ أَمْ وُدِّيٌّ؟</a:t>
@@ -8966,6 +9040,7 @@
                   <a:srgbClr val="1B3B6F"/>
                 </a:solidFill>
                 <a:latin typeface="Amiri" pitchFamily="2" charset="-78"/>
+                <a:ea typeface="Amiri" pitchFamily="2" charset="-78"/>
                 <a:cs typeface="Amiri" pitchFamily="2" charset="-78"/>
               </a:rPr>
               <a:t>عَزِيزِي أَحْمَدُ، حَيَّاكَ اللَّهُ!</a:t>
@@ -9004,6 +9079,7 @@
                   <a:srgbClr val="1B3B6F"/>
                 </a:solidFill>
                 <a:latin typeface="Amiri" pitchFamily="2" charset="-78"/>
+                <a:ea typeface="Amiri" pitchFamily="2" charset="-78"/>
                 <a:cs typeface="Amiri" pitchFamily="2" charset="-78"/>
               </a:rPr>
               <a:t>حَضَرَاتِ أَعْضَاءِ اللَّجْنَةِ المُحْتَرَمِينَ، أَتَشَرَّفُ بِمُخَاطَبَتِكُمْ …</a:t>
@@ -9172,6 +9248,7 @@
                   <a:srgbClr val="1B3B6F"/>
                 </a:solidFill>
                 <a:latin typeface="Amiri" pitchFamily="2" charset="-78"/>
+                <a:ea typeface="Amiri" pitchFamily="2" charset="-78"/>
                 <a:cs typeface="Amiri" pitchFamily="2" charset="-78"/>
               </a:rPr>
               <a:t>صَحِيحٌ أَنَّ الطَّقْسَ بَارِدٌ، غَيْرَ أَنَّ …</a:t>
@@ -9210,6 +9287,7 @@
                   <a:srgbClr val="1B3B6F"/>
                 </a:solidFill>
                 <a:latin typeface="Amiri" pitchFamily="2" charset="-78"/>
+                <a:ea typeface="Amiri" pitchFamily="2" charset="-78"/>
                 <a:cs typeface="Amiri" pitchFamily="2" charset="-78"/>
               </a:rPr>
               <a:t>صَحِيحٌ أَنَّ المَوَارِدَ مَحْدُودَةٌ، غَيْرَ أَنَّ …</a:t>
@@ -9313,6 +9391,7 @@
                   <a:srgbClr val="1B3B6F"/>
                 </a:solidFill>
                 <a:latin typeface="Amiri" pitchFamily="2" charset="-78"/>
+                <a:ea typeface="Amiri" pitchFamily="2" charset="-78"/>
                 <a:cs typeface="Amiri" pitchFamily="2" charset="-78"/>
               </a:rPr>
               <a:t>وَأَنْصَحُكَ بِأَنْ تُحْضِرَ مِعْطَفًا.</a:t>
@@ -9351,6 +9430,7 @@
                   <a:srgbClr val="1B3B6F"/>
                 </a:solidFill>
                 <a:latin typeface="Amiri" pitchFamily="2" charset="-78"/>
+                <a:ea typeface="Amiri" pitchFamily="2" charset="-78"/>
                 <a:cs typeface="Amiri" pitchFamily="2" charset="-78"/>
               </a:rPr>
               <a:t>وَأَقْتَرِحُ أَنْ تُطْلَقَ حَمْلَةٌ …</a:t>
@@ -9454,6 +9534,7 @@
                   <a:srgbClr val="1B3B6F"/>
                 </a:solidFill>
                 <a:latin typeface="Amiri" pitchFamily="2" charset="-78"/>
+                <a:ea typeface="Amiri" pitchFamily="2" charset="-78"/>
                 <a:cs typeface="Amiri" pitchFamily="2" charset="-78"/>
               </a:rPr>
               <a:t>وَإِذَا تَوَفَّرَ الوَقْتُ، سَنَزُورُ المَتْحَفَ.</a:t>
@@ -9492,6 +9573,7 @@
                   <a:srgbClr val="1B3B6F"/>
                 </a:solidFill>
                 <a:latin typeface="Amiri" pitchFamily="2" charset="-78"/>
+                <a:ea typeface="Amiri" pitchFamily="2" charset="-78"/>
                 <a:cs typeface="Amiri" pitchFamily="2" charset="-78"/>
               </a:rPr>
               <a:t>أَرْجُو أَنْ تَتَّخِذُوا القَرَارَ المُنَاسِبَ عَاجِلًا.</a:t>
@@ -9595,6 +9677,7 @@
                   <a:srgbClr val="1B3B6F"/>
                 </a:solidFill>
                 <a:latin typeface="Amiri" pitchFamily="2" charset="-78"/>
+                <a:ea typeface="Amiri" pitchFamily="2" charset="-78"/>
                 <a:cs typeface="Amiri" pitchFamily="2" charset="-78"/>
               </a:rPr>
               <a:t>إِلَى اللِّقَاءِ، صَدِيقُكَ سَامِي.</a:t>
@@ -9633,6 +9716,7 @@
                   <a:srgbClr val="1B3B6F"/>
                 </a:solidFill>
                 <a:latin typeface="Amiri" pitchFamily="2" charset="-78"/>
+                <a:ea typeface="Amiri" pitchFamily="2" charset="-78"/>
                 <a:cs typeface="Amiri" pitchFamily="2" charset="-78"/>
               </a:rPr>
               <a:t>وَتَفَضَّلُوا بِقَبُولِ فَائِقِ الاحْتِرَامِ.</a:t>
@@ -9907,6 +9991,7 @@
                   <a:srgbClr val="D4AF37"/>
                 </a:solidFill>
                 <a:latin typeface="Amiri" pitchFamily="2" charset="-78"/>
+                <a:ea typeface="Amiri" pitchFamily="2" charset="-78"/>
                 <a:cs typeface="Amiri" pitchFamily="2" charset="-78"/>
               </a:rPr>
               <a:t>م</a:t>
@@ -10227,6 +10312,7 @@
                   <a:srgbClr val="8A6D1E"/>
                 </a:solidFill>
                 <a:latin typeface="Amiri" pitchFamily="2" charset="-78"/>
+                <a:ea typeface="Amiri" pitchFamily="2" charset="-78"/>
                 <a:cs typeface="Amiri" pitchFamily="2" charset="-78"/>
               </a:rPr>
               <a:t>مَعَايِيرُ التَّقْيِيمِ</a:t>
@@ -11063,6 +11149,7 @@
                   <a:srgbClr val="D4AF37"/>
                 </a:solidFill>
                 <a:latin typeface="Amiri" pitchFamily="2" charset="-78"/>
+                <a:ea typeface="Amiri" pitchFamily="2" charset="-78"/>
                 <a:cs typeface="Amiri" pitchFamily="2" charset="-78"/>
               </a:rPr>
               <a:t>م</a:t>
@@ -11383,6 +11470,7 @@
                   <a:srgbClr val="8A6D1E"/>
                 </a:solidFill>
                 <a:latin typeface="Amiri" pitchFamily="2" charset="-78"/>
+                <a:ea typeface="Amiri" pitchFamily="2" charset="-78"/>
                 <a:cs typeface="Amiri" pitchFamily="2" charset="-78"/>
               </a:rPr>
               <a:t>اُكْتُبْ</a:t>
@@ -11558,6 +11646,7 @@
                   <a:srgbClr val="2E8B57"/>
                 </a:solidFill>
                 <a:latin typeface="Amiri" pitchFamily="2" charset="-78"/>
+                <a:ea typeface="Amiri" pitchFamily="2" charset="-78"/>
                 <a:cs typeface="Amiri" pitchFamily="2" charset="-78"/>
               </a:rPr>
               <a:t>الأَسَاسُ</a:t>
@@ -11710,11 +11799,12 @@
               <a:buNone/>
             </a:pPr>
             <a:r>
-              <a:rPr lang="en-US" sz="1150" dirty="0">
+              <a:rPr lang="ar-SA" sz="1150" dirty="0">
                 <a:solidFill>
                   <a:srgbClr val="1F2A37"/>
                 </a:solidFill>
                 <a:latin typeface="Calibri" pitchFamily="34" charset="0"/>
+                <a:ea typeface="Amiri" pitchFamily="2" charset="-78"/>
                 <a:cs typeface="Amiri" pitchFamily="2" charset="-78"/>
               </a:rPr>
               <a:t>Open with عَزِيزِي … حَيَّاكَ اللَّهُ! · close with إِلَى اللِّقَاءِ. Tick the four points.</a:t>
@@ -11852,6 +11942,7 @@
                   <a:srgbClr val="C9780A"/>
                 </a:solidFill>
                 <a:latin typeface="Amiri" pitchFamily="2" charset="-78"/>
+                <a:ea typeface="Amiri" pitchFamily="2" charset="-78"/>
                 <a:cs typeface="Amiri" pitchFamily="2" charset="-78"/>
               </a:rPr>
               <a:t>التَّطْوِيرُ</a:t>
@@ -12146,6 +12237,7 @@
                   <a:srgbClr val="B83227"/>
                 </a:solidFill>
                 <a:latin typeface="Amiri" pitchFamily="2" charset="-78"/>
+                <a:ea typeface="Amiri" pitchFamily="2" charset="-78"/>
                 <a:cs typeface="Amiri" pitchFamily="2" charset="-78"/>
               </a:rPr>
               <a:t>التَّحَدِّي</a:t>
@@ -12436,6 +12528,7 @@
                   <a:srgbClr val="D4AF37"/>
                 </a:solidFill>
                 <a:latin typeface="Amiri" pitchFamily="2" charset="-78"/>
+                <a:ea typeface="Amiri" pitchFamily="2" charset="-78"/>
                 <a:cs typeface="Amiri" pitchFamily="2" charset="-78"/>
               </a:rPr>
               <a:t>م</a:t>
@@ -12756,6 +12849,7 @@
                   <a:srgbClr val="8A6D1E"/>
                 </a:solidFill>
                 <a:latin typeface="Amiri" pitchFamily="2" charset="-78"/>
+                <a:ea typeface="Amiri" pitchFamily="2" charset="-78"/>
                 <a:cs typeface="Amiri" pitchFamily="2" charset="-78"/>
               </a:rPr>
               <a:t>بَرِيدٌ إِلِكْتْرُونِيٌّ</a:t>
@@ -12982,6 +13076,7 @@
                   <a:srgbClr val="1F2A37"/>
                 </a:solidFill>
                 <a:latin typeface="Amiri" pitchFamily="2" charset="-78"/>
+                <a:ea typeface="Amiri" pitchFamily="2" charset="-78"/>
                 <a:cs typeface="Amiri" pitchFamily="2" charset="-78"/>
               </a:rPr>
               <a:t>حَيَّاكَ اللَّهُ / عَزِيزِي</a:t>
@@ -13122,6 +13217,7 @@
                   <a:srgbClr val="1F2A37"/>
                 </a:solidFill>
                 <a:latin typeface="Amiri" pitchFamily="2" charset="-78"/>
+                <a:ea typeface="Amiri" pitchFamily="2" charset="-78"/>
                 <a:cs typeface="Amiri" pitchFamily="2" charset="-78"/>
               </a:rPr>
               <a:t>إِلَى اللِّقَاءِ</a:t>
@@ -13245,6 +13341,7 @@
                   <a:srgbClr val="1B3B6F"/>
                 </a:solidFill>
                 <a:latin typeface="Amiri" pitchFamily="2" charset="-78"/>
+                <a:ea typeface="Amiri" pitchFamily="2" charset="-78"/>
                 <a:cs typeface="Amiri" pitchFamily="2" charset="-78"/>
               </a:rPr>
               <a:t>عَزِيزِي … ، حَيَّاكَ اللَّهُ!</a:t>
@@ -13321,6 +13418,7 @@
                   <a:srgbClr val="1B3B6F"/>
                 </a:solidFill>
                 <a:latin typeface="Amiri" pitchFamily="2" charset="-78"/>
+                <a:ea typeface="Amiri" pitchFamily="2" charset="-78"/>
                 <a:cs typeface="Amiri" pitchFamily="2" charset="-78"/>
               </a:rPr>
               <a:t>يُسْعِدُنِي أَنَّكَ سَتَزُورُ</a:t>
@@ -13397,6 +13495,7 @@
                   <a:srgbClr val="1B3B6F"/>
                 </a:solidFill>
                 <a:latin typeface="Amiri" pitchFamily="2" charset="-78"/>
+                <a:ea typeface="Amiri" pitchFamily="2" charset="-78"/>
                 <a:cs typeface="Amiri" pitchFamily="2" charset="-78"/>
               </a:rPr>
               <a:t>وَأَنْصَحُكَ بِأَنْ تُحْضِرَ</a:t>
@@ -13473,6 +13572,7 @@
                   <a:srgbClr val="1B3B6F"/>
                 </a:solidFill>
                 <a:latin typeface="Amiri" pitchFamily="2" charset="-78"/>
+                <a:ea typeface="Amiri" pitchFamily="2" charset="-78"/>
                 <a:cs typeface="Amiri" pitchFamily="2" charset="-78"/>
               </a:rPr>
               <a:t>وَمِنَ العَادَاتِ المُهِمَّةِ أَنْ …</a:t>
@@ -13549,6 +13649,7 @@
                   <a:srgbClr val="1B3B6F"/>
                 </a:solidFill>
                 <a:latin typeface="Amiri" pitchFamily="2" charset="-78"/>
+                <a:ea typeface="Amiri" pitchFamily="2" charset="-78"/>
                 <a:cs typeface="Amiri" pitchFamily="2" charset="-78"/>
               </a:rPr>
               <a:t>أَتَطَلَّعُ إِلَى لِقَائِكَ</a:t>
@@ -13720,6 +13821,7 @@
                   <a:srgbClr val="D4AF37"/>
                 </a:solidFill>
                 <a:latin typeface="Amiri" pitchFamily="2" charset="-78"/>
+                <a:ea typeface="Amiri" pitchFamily="2" charset="-78"/>
                 <a:cs typeface="Amiri" pitchFamily="2" charset="-78"/>
               </a:rPr>
               <a:t>م</a:t>
@@ -14040,6 +14142,7 @@
                   <a:srgbClr val="8A6D1E"/>
                 </a:solidFill>
                 <a:latin typeface="Amiri" pitchFamily="2" charset="-78"/>
+                <a:ea typeface="Amiri" pitchFamily="2" charset="-78"/>
                 <a:cs typeface="Amiri" pitchFamily="2" charset="-78"/>
               </a:rPr>
               <a:t>مَقَالَةٌ</a:t>
@@ -14477,6 +14580,7 @@
                   <a:srgbClr val="1B3B6F"/>
                 </a:solidFill>
                 <a:latin typeface="Amiri" pitchFamily="2" charset="-78"/>
+                <a:ea typeface="Amiri" pitchFamily="2" charset="-78"/>
                 <a:cs typeface="Amiri" pitchFamily="2" charset="-78"/>
               </a:rPr>
               <a:t>سُؤَالٌ يَشْغَلُ كَثِيرًا مِنَ الشَّبَابِ</a:t>
@@ -14553,6 +14657,7 @@
                   <a:srgbClr val="1B3B6F"/>
                 </a:solidFill>
                 <a:latin typeface="Amiri" pitchFamily="2" charset="-78"/>
+                <a:ea typeface="Amiri" pitchFamily="2" charset="-78"/>
                 <a:cs typeface="Amiri" pitchFamily="2" charset="-78"/>
               </a:rPr>
               <a:t>أَسَاسٌ لَا غِنَى عَنْهُ</a:t>
@@ -14629,6 +14734,7 @@
                   <a:srgbClr val="1B3B6F"/>
                 </a:solidFill>
                 <a:latin typeface="Amiri" pitchFamily="2" charset="-78"/>
+                <a:ea typeface="Amiri" pitchFamily="2" charset="-78"/>
                 <a:cs typeface="Amiri" pitchFamily="2" charset="-78"/>
               </a:rPr>
               <a:t>تَنْظِيمُ الوَقْتِ يُخَفِّفُهُ</a:t>
@@ -14705,6 +14811,7 @@
                   <a:srgbClr val="1B3B6F"/>
                 </a:solidFill>
                 <a:latin typeface="Amiri" pitchFamily="2" charset="-78"/>
+                <a:ea typeface="Amiri" pitchFamily="2" charset="-78"/>
                 <a:cs typeface="Amiri" pitchFamily="2" charset="-78"/>
               </a:rPr>
               <a:t>مَعَ مَنْ نَثِقُ بِهِمْ</a:t>
@@ -14781,6 +14888,7 @@
                   <a:srgbClr val="1B3B6F"/>
                 </a:solidFill>
                 <a:latin typeface="Amiri" pitchFamily="2" charset="-78"/>
+                <a:ea typeface="Amiri" pitchFamily="2" charset="-78"/>
                 <a:cs typeface="Amiri" pitchFamily="2" charset="-78"/>
               </a:rPr>
               <a:t>أَدْعُو كُلَّ قَارِئٍ إِلَى أَنْ …</a:t>
@@ -14952,6 +15060,7 @@
                   <a:srgbClr val="D4AF37"/>
                 </a:solidFill>
                 <a:latin typeface="Amiri" pitchFamily="2" charset="-78"/>
+                <a:ea typeface="Amiri" pitchFamily="2" charset="-78"/>
                 <a:cs typeface="Amiri" pitchFamily="2" charset="-78"/>
               </a:rPr>
               <a:t>م</a:t>
@@ -15272,6 +15381,7 @@
                   <a:srgbClr val="8A6D1E"/>
                 </a:solidFill>
                 <a:latin typeface="Amiri" pitchFamily="2" charset="-78"/>
+                <a:ea typeface="Amiri" pitchFamily="2" charset="-78"/>
                 <a:cs typeface="Amiri" pitchFamily="2" charset="-78"/>
               </a:rPr>
               <a:t>خِطَابٌ رَسْمِيٌّ</a:t>
@@ -15460,6 +15570,7 @@
                   <a:srgbClr val="1F2A37"/>
                 </a:solidFill>
                 <a:latin typeface="Amiri" pitchFamily="2" charset="-78"/>
+                <a:ea typeface="Amiri" pitchFamily="2" charset="-78"/>
                 <a:cs typeface="Amiri" pitchFamily="2" charset="-78"/>
               </a:rPr>
               <a:t>رَسْمِيًّا</a:t>
@@ -15524,6 +15635,7 @@
                   <a:srgbClr val="1F2A37"/>
                 </a:solidFill>
                 <a:latin typeface="Amiri" pitchFamily="2" charset="-78"/>
+                <a:ea typeface="Amiri" pitchFamily="2" charset="-78"/>
                 <a:cs typeface="Amiri" pitchFamily="2" charset="-78"/>
               </a:rPr>
               <a:t>أَتَشَرَّفُ بِمُخَاطَبَتِكُمْ</a:t>
@@ -15664,6 +15776,7 @@
                   <a:srgbClr val="1F2A37"/>
                 </a:solidFill>
                 <a:latin typeface="Amiri" pitchFamily="2" charset="-78"/>
+                <a:ea typeface="Amiri" pitchFamily="2" charset="-78"/>
                 <a:cs typeface="Amiri" pitchFamily="2" charset="-78"/>
               </a:rPr>
               <a:t>وَتَفَضَّلُوا بِقَبُولِ الاحْتِرَامِ</a:t>
@@ -15787,6 +15900,7 @@
                   <a:srgbClr val="1B3B6F"/>
                 </a:solidFill>
                 <a:latin typeface="Amiri" pitchFamily="2" charset="-78"/>
+                <a:ea typeface="Amiri" pitchFamily="2" charset="-78"/>
                 <a:cs typeface="Amiri" pitchFamily="2" charset="-78"/>
               </a:rPr>
               <a:t>أَتَشَرَّفُ بِمُخَاطَبَتِكُمْ بِشَأْنِ</a:t>
@@ -15863,6 +15977,7 @@
                   <a:srgbClr val="1B3B6F"/>
                 </a:solidFill>
                 <a:latin typeface="Amiri" pitchFamily="2" charset="-78"/>
+                <a:ea typeface="Amiri" pitchFamily="2" charset="-78"/>
                 <a:cs typeface="Amiri" pitchFamily="2" charset="-78"/>
               </a:rPr>
               <a:t>يُفَاقِمُ الأَزْمَةَ</a:t>
@@ -15939,6 +16054,7 @@
                   <a:srgbClr val="1B3B6F"/>
                 </a:solidFill>
                 <a:latin typeface="Amiri" pitchFamily="2" charset="-78"/>
+                <a:ea typeface="Amiri" pitchFamily="2" charset="-78"/>
                 <a:cs typeface="Amiri" pitchFamily="2" charset="-78"/>
               </a:rPr>
               <a:t>وَأَقْتَرِحُ أَنْ تُطْلَقَ حَمْلَةٌ</a:t>
@@ -16015,6 +16131,7 @@
                   <a:srgbClr val="1B3B6F"/>
                 </a:solidFill>
                 <a:latin typeface="Amiri" pitchFamily="2" charset="-78"/>
+                <a:ea typeface="Amiri" pitchFamily="2" charset="-78"/>
                 <a:cs typeface="Amiri" pitchFamily="2" charset="-78"/>
               </a:rPr>
               <a:t>أَرْجُو أَنْ تَتَّخِذُوا القَرَارَ المُنَاسِبَ</a:t>
@@ -16091,6 +16208,7 @@
                   <a:srgbClr val="1B3B6F"/>
                 </a:solidFill>
                 <a:latin typeface="Amiri" pitchFamily="2" charset="-78"/>
+                <a:ea typeface="Amiri" pitchFamily="2" charset="-78"/>
                 <a:cs typeface="Amiri" pitchFamily="2" charset="-78"/>
               </a:rPr>
               <a:t>وَتَفَضَّلُوا بِقَبُولِ فَائِقِ الاحْتِرَامِ</a:t>
@@ -16262,6 +16380,7 @@
                   <a:srgbClr val="D4AF37"/>
                 </a:solidFill>
                 <a:latin typeface="Amiri" pitchFamily="2" charset="-78"/>
+                <a:ea typeface="Amiri" pitchFamily="2" charset="-78"/>
                 <a:cs typeface="Amiri" pitchFamily="2" charset="-78"/>
               </a:rPr>
               <a:t>م</a:t>
@@ -16582,6 +16701,7 @@
                   <a:srgbClr val="8A6D1E"/>
                 </a:solidFill>
                 <a:latin typeface="Amiri" pitchFamily="2" charset="-78"/>
+                <a:ea typeface="Amiri" pitchFamily="2" charset="-78"/>
                 <a:cs typeface="Amiri" pitchFamily="2" charset="-78"/>
               </a:rPr>
               <a:t>نَمُوذَجُ الإِجَابَةِ</a:t>
@@ -16695,6 +16815,7 @@
                   <a:srgbClr val="1F2A37"/>
                 </a:solidFill>
                 <a:latin typeface="Amiri" pitchFamily="2" charset="-78"/>
+                <a:ea typeface="Amiri" pitchFamily="2" charset="-78"/>
                 <a:cs typeface="Amiri" pitchFamily="2" charset="-78"/>
               </a:rPr>
               <a:t>عَزِيزِي أَحْمَدُ، حَيَّاكَ اللَّهُ! يُسْعِدُنِي أَنَّكَ سَتَزُورُ مَدْرَسَتَنَا الشَّهْرَ القَادِمَ. مَدْرَسَتُنَا كَبِيرَةٌ وَفِيهَا مُخْتَبَرَاتٌ حَدِيثَةٌ، وَتَقَعُ قُرْبَ حَدِيقَةٍ جَمِيلَةٍ. صَحِيحٌ أَنَّ الطَّقْسَ بَارِدٌ أَحْيَانًا، غَيْرَ أَنَّ النَّاسَ وَدُودُونَ. وَأَنْصَحُكَ بِأَنْ تُحْضِرَ مِعْطَفًا. وَمِنَ العَادَاتِ المُهِمَّةِ أَنْ نَخْلَعَ الحِذَاءَ عِنْدَ دُخُولِ البُيُوتِ. وَإِذَا تَوَفَّرَ الوَقْتُ، سَنَزُورُ المَتْحَفَ المَحَلِّيَّ مَعًا. أَتَطَلَّعُ إِلَى لِقَائِكَ. إِلَى اللِّقَاءِ، صَدِيقُكَ سَامِي.</a:t>
@@ -17191,6 +17312,7 @@
                   <a:srgbClr val="D4AF37"/>
                 </a:solidFill>
                 <a:latin typeface="Amiri" pitchFamily="2" charset="-78"/>
+                <a:ea typeface="Amiri" pitchFamily="2" charset="-78"/>
                 <a:cs typeface="Amiri" pitchFamily="2" charset="-78"/>
               </a:rPr>
               <a:t>م</a:t>
@@ -17511,6 +17633,7 @@
                   <a:srgbClr val="8A6D1E"/>
                 </a:solidFill>
                 <a:latin typeface="Amiri" pitchFamily="2" charset="-78"/>
+                <a:ea typeface="Amiri" pitchFamily="2" charset="-78"/>
                 <a:cs typeface="Amiri" pitchFamily="2" charset="-78"/>
               </a:rPr>
               <a:t>آدَابُ الصَّفِّ</a:t>
@@ -19042,6 +19165,7 @@
                   <a:srgbClr val="D4AF37"/>
                 </a:solidFill>
                 <a:latin typeface="Amiri" pitchFamily="2" charset="-78"/>
+                <a:ea typeface="Amiri" pitchFamily="2" charset="-78"/>
                 <a:cs typeface="Amiri" pitchFamily="2" charset="-78"/>
               </a:rPr>
               <a:t>م</a:t>
@@ -19362,6 +19486,7 @@
                   <a:srgbClr val="8A6D1E"/>
                 </a:solidFill>
                 <a:latin typeface="Amiri" pitchFamily="2" charset="-78"/>
+                <a:ea typeface="Amiri" pitchFamily="2" charset="-78"/>
                 <a:cs typeface="Amiri" pitchFamily="2" charset="-78"/>
               </a:rPr>
               <a:t>نَمُوذَجُ الإِجَابَةِ</a:t>
@@ -19475,6 +19600,7 @@
                   <a:srgbClr val="1F2A37"/>
                 </a:solidFill>
                 <a:latin typeface="Amiri" pitchFamily="2" charset="-78"/>
+                <a:ea typeface="Amiri" pitchFamily="2" charset="-78"/>
                 <a:cs typeface="Amiri" pitchFamily="2" charset="-78"/>
               </a:rPr>
               <a:t>كَيْفَ أُحَافِظُ عَلَى تَوَازُنِي النَّفْسِيِّ؟ سُؤَالٌ يَشْغَلُ كَثِيرًا مِنَ الشَّبَابِ. أُشِيرُ أَوَّلًا إِلَى أَنَّ النَّوْمَ الجَيِّدَ وَالرِّيَاضَةَ أَسَاسٌ لَا غِنَى عَنْهُ. صَحِيحٌ أَنَّ الدِّرَاسَةَ تُسَبِّبُ ضَغْطًا، غَيْرَ أَنَّ تَنْظِيمَ الوَقْتِ يُخَفِّفُهُ. وَإِذَا خَصَّصْتُ سَاعَةً لِلرَّاحَةِ يَوْمِيًّا، شَعَرْتُ بِتَحَسُّنٍ وَاضِحٍ. وَيَنْبَغِي أَنْ نَحْرِصَ عَلَى الحَدِيثِ مَعَ مَنْ نَثِقُ بِهِمْ. وَخِتَامًا، أَدْعُو كُلَّ قَارِئٍ إِلَى أَنْ يَعْتَنِيَ بِصِحَّتِهِ النَّفْسِيَّةِ كَمَا يَعْتَنِي بِجَسَدِهِ.</a:t>
@@ -19971,6 +20097,7 @@
                   <a:srgbClr val="D4AF37"/>
                 </a:solidFill>
                 <a:latin typeface="Amiri" pitchFamily="2" charset="-78"/>
+                <a:ea typeface="Amiri" pitchFamily="2" charset="-78"/>
                 <a:cs typeface="Amiri" pitchFamily="2" charset="-78"/>
               </a:rPr>
               <a:t>م</a:t>
@@ -20291,6 +20418,7 @@
                   <a:srgbClr val="8A6D1E"/>
                 </a:solidFill>
                 <a:latin typeface="Amiri" pitchFamily="2" charset="-78"/>
+                <a:ea typeface="Amiri" pitchFamily="2" charset="-78"/>
                 <a:cs typeface="Amiri" pitchFamily="2" charset="-78"/>
               </a:rPr>
               <a:t>نَمُوذَجُ الإِجَابَةِ</a:t>
@@ -20404,6 +20532,7 @@
                   <a:srgbClr val="1F2A37"/>
                 </a:solidFill>
                 <a:latin typeface="Amiri" pitchFamily="2" charset="-78"/>
+                <a:ea typeface="Amiri" pitchFamily="2" charset="-78"/>
                 <a:cs typeface="Amiri" pitchFamily="2" charset="-78"/>
               </a:rPr>
               <a:t>حَضَرَاتِ أَعْضَاءِ لَجْنَةِ البِيئَةِ المُحْتَرَمِينَ، أَتَشَرَّفُ بِمُخَاطَبَتِكُمْ بِشَأْنِ نُدْرَةِ المِيَاهِ فِي مِنْطَقَتِنَا. صَحِيحٌ أَنَّ المَوَارِدَ مَحْدُودَةٌ، غَيْرَ أَنَّ سُوءَ الإِدَارَةِ يُفَاقِمُ الأَزْمَةَ. وَأَقْتَرِحُ أَنْ تُطْلَقَ حَمْلَةٌ لِتَرْشِيدِ الاسْتِهْلَاكِ، وَأَنْ تُسْتَثْمَرَ الطَّاقَةُ الشَّمْسِيَّةُ فِي تَحْلِيَةِ المِيَاهِ. وَلَوْ طُبِّقَتْ هٰذِهِ الإِجْرَاءَاتُ، لَتَحَسَّنَ الوَضْعُ كَثِيرًا. وَبِنَاءً عَلَى مَا سَبَقَ، أَرْجُو أَنْ تَتَّخِذُوا القَرَارَ المُنَاسِبَ عَاجِلًا. وَتَفَضَّلُوا بِقَبُولِ فَائِقِ الاحْتِرَامِ.</a:t>
@@ -20900,6 +21029,7 @@
                   <a:srgbClr val="D4AF37"/>
                 </a:solidFill>
                 <a:latin typeface="Amiri" pitchFamily="2" charset="-78"/>
+                <a:ea typeface="Amiri" pitchFamily="2" charset="-78"/>
                 <a:cs typeface="Amiri" pitchFamily="2" charset="-78"/>
               </a:rPr>
               <a:t>م</a:t>
@@ -21220,6 +21350,7 @@
                   <a:srgbClr val="8A6D1E"/>
                 </a:solidFill>
                 <a:latin typeface="Amiri" pitchFamily="2" charset="-78"/>
+                <a:ea typeface="Amiri" pitchFamily="2" charset="-78"/>
                 <a:cs typeface="Amiri" pitchFamily="2" charset="-78"/>
               </a:rPr>
               <a:t>أَقْوَى نَوْعٍ وَأَضْعَفُهُ</a:t>
@@ -21991,6 +22122,7 @@
                   <a:srgbClr val="D4AF37"/>
                 </a:solidFill>
                 <a:latin typeface="Amiri" pitchFamily="2" charset="-78"/>
+                <a:ea typeface="Amiri" pitchFamily="2" charset="-78"/>
                 <a:cs typeface="Amiri" pitchFamily="2" charset="-78"/>
               </a:rPr>
               <a:t>م</a:t>
@@ -22311,6 +22443,7 @@
                   <a:srgbClr val="8A6D1E"/>
                 </a:solidFill>
                 <a:latin typeface="Amiri" pitchFamily="2" charset="-78"/>
+                <a:ea typeface="Amiri" pitchFamily="2" charset="-78"/>
                 <a:cs typeface="Amiri" pitchFamily="2" charset="-78"/>
               </a:rPr>
               <a:t>التَّأَمُّلُ</a:t>
@@ -22553,6 +22686,7 @@
                   <a:srgbClr val="1B3B6F"/>
                 </a:solidFill>
                 <a:latin typeface="Amiri" pitchFamily="2" charset="-78"/>
+                <a:ea typeface="Amiri" pitchFamily="2" charset="-78"/>
                 <a:cs typeface="Amiri" pitchFamily="2" charset="-78"/>
               </a:rPr>
               <a:t>أَتَشَرَّفُ بِمُخَاطَبَتِكُمْ</a:t>
@@ -22835,6 +22969,7 @@
                   <a:srgbClr val="1B3B6F"/>
                 </a:solidFill>
                 <a:latin typeface="Amiri" pitchFamily="2" charset="-78"/>
+                <a:ea typeface="Amiri" pitchFamily="2" charset="-78"/>
                 <a:cs typeface="Amiri" pitchFamily="2" charset="-78"/>
               </a:rPr>
               <a:t>الخِطَابُ الرَّسْمِيُّ</a:t>
@@ -22911,6 +23046,7 @@
                   <a:srgbClr val="1B3B6F"/>
                 </a:solidFill>
                 <a:latin typeface="Amiri" pitchFamily="2" charset="-78"/>
+                <a:ea typeface="Amiri" pitchFamily="2" charset="-78"/>
                 <a:cs typeface="Amiri" pitchFamily="2" charset="-78"/>
               </a:rPr>
               <a:t>أَصْعَبُ نَوْعٍ عِنْدِي هُوَ ______ .</a:t>
@@ -23082,6 +23218,7 @@
                   <a:srgbClr val="D4AF37"/>
                 </a:solidFill>
                 <a:latin typeface="Amiri" pitchFamily="2" charset="-78"/>
+                <a:ea typeface="Amiri" pitchFamily="2" charset="-78"/>
                 <a:cs typeface="Amiri" pitchFamily="2" charset="-78"/>
               </a:rPr>
               <a:t>م</a:t>
@@ -23402,6 +23539,7 @@
                   <a:srgbClr val="8A6D1E"/>
                 </a:solidFill>
                 <a:latin typeface="Amiri" pitchFamily="2" charset="-78"/>
+                <a:ea typeface="Amiri" pitchFamily="2" charset="-78"/>
                 <a:cs typeface="Amiri" pitchFamily="2" charset="-78"/>
               </a:rPr>
               <a:t>قَيِّمْ عَمَلَكَ</a:t>
@@ -24559,6 +24697,7 @@
                   <a:srgbClr val="D4AF37"/>
                 </a:solidFill>
                 <a:latin typeface="Amiri" pitchFamily="2" charset="-78"/>
+                <a:ea typeface="Amiri" pitchFamily="2" charset="-78"/>
                 <a:cs typeface="Amiri" pitchFamily="2" charset="-78"/>
               </a:rPr>
               <a:t>م</a:t>
@@ -24879,6 +25018,7 @@
                   <a:srgbClr val="8A6D1E"/>
                 </a:solidFill>
                 <a:latin typeface="Amiri" pitchFamily="2" charset="-78"/>
+                <a:ea typeface="Amiri" pitchFamily="2" charset="-78"/>
                 <a:cs typeface="Amiri" pitchFamily="2" charset="-78"/>
               </a:rPr>
               <a:t>التَّحْضِيرُ لِلدَّرْسِ القَادِمِ</a:t>
@@ -25092,6 +25232,7 @@
                   <a:srgbClr val="1B3B6F"/>
                 </a:solidFill>
                 <a:latin typeface="Amiri" pitchFamily="2" charset="-78"/>
+                <a:ea typeface="Amiri" pitchFamily="2" charset="-78"/>
                 <a:cs typeface="Amiri" pitchFamily="2" charset="-78"/>
               </a:rPr>
               <a:t>الكِتَابَةُ المُوَسَّعَةُ</a:t>
@@ -25181,6 +25322,7 @@
                   <a:srgbClr val="1B3B6F"/>
                 </a:solidFill>
                 <a:latin typeface="Amiri" pitchFamily="2" charset="-78"/>
+                <a:ea typeface="Amiri" pitchFamily="2" charset="-78"/>
                 <a:cs typeface="Amiri" pitchFamily="2" charset="-78"/>
               </a:rPr>
               <a:t>هَيْكَلُ المَقَالِ</a:t>
@@ -25227,11 +25369,12 @@
               <a:buNone/>
             </a:pPr>
             <a:r>
-              <a:rPr lang="en-US" sz="1000" i="1" dirty="0">
+              <a:rPr lang="ar-SA" sz="1000" i="1" dirty="0">
                 <a:solidFill>
                   <a:srgbClr val="5A6472"/>
                 </a:solidFill>
                 <a:latin typeface="Calibri" pitchFamily="34" charset="0"/>
+                <a:ea typeface="Amiri" pitchFamily="2" charset="-78"/>
                 <a:cs typeface="Amiri" pitchFamily="2" charset="-78"/>
               </a:rPr>
               <a:t>  pl. هَيَاكِلُ</a:t>
@@ -25270,6 +25413,7 @@
                   <a:srgbClr val="1B3B6F"/>
                 </a:solidFill>
                 <a:latin typeface="Amiri" pitchFamily="2" charset="-78"/>
+                <a:ea typeface="Amiri" pitchFamily="2" charset="-78"/>
                 <a:cs typeface="Amiri" pitchFamily="2" charset="-78"/>
               </a:rPr>
               <a:t>التَّنَوُّعُ المَعْجَمِيُّ</a:t>
@@ -25359,6 +25503,7 @@
                   <a:srgbClr val="1B3B6F"/>
                 </a:solidFill>
                 <a:latin typeface="Amiri" pitchFamily="2" charset="-78"/>
+                <a:ea typeface="Amiri" pitchFamily="2" charset="-78"/>
                 <a:cs typeface="Amiri" pitchFamily="2" charset="-78"/>
               </a:rPr>
               <a:t>الدِّقَّةُ تَحْتَ ضَغْطِ الوَقْتِ</a:t>
@@ -25448,6 +25593,7 @@
                   <a:srgbClr val="1B3B6F"/>
                 </a:solidFill>
                 <a:latin typeface="Amiri" pitchFamily="2" charset="-78"/>
+                <a:ea typeface="Amiri" pitchFamily="2" charset="-78"/>
                 <a:cs typeface="Amiri" pitchFamily="2" charset="-78"/>
               </a:rPr>
               <a:t>الأُطْرُوحَةُ</a:t>
@@ -25494,11 +25640,12 @@
               <a:buNone/>
             </a:pPr>
             <a:r>
-              <a:rPr lang="en-US" sz="1000" i="1" dirty="0">
+              <a:rPr lang="ar-SA" sz="1000" i="1" dirty="0">
                 <a:solidFill>
                   <a:srgbClr val="5A6472"/>
                 </a:solidFill>
                 <a:latin typeface="Calibri" pitchFamily="34" charset="0"/>
+                <a:ea typeface="Amiri" pitchFamily="2" charset="-78"/>
                 <a:cs typeface="Amiri" pitchFamily="2" charset="-78"/>
               </a:rPr>
               <a:t>  pl. الأُطْرُوحَاتُ</a:t>
@@ -25616,6 +25763,7 @@
                   <a:srgbClr val="1B3B6F"/>
                 </a:solidFill>
                 <a:latin typeface="Amiri" pitchFamily="2" charset="-78"/>
+                <a:ea typeface="Amiri" pitchFamily="2" charset="-78"/>
                 <a:cs typeface="Amiri" pitchFamily="2" charset="-78"/>
               </a:rPr>
               <a:t>أُخَطِّطُ لِلْمَقَالِ ______ دَقَائِقَ، لِأَنَّ ______ .</a:t>
@@ -26285,6 +26433,7 @@
                   <a:srgbClr val="FFFFFF"/>
                 </a:solidFill>
                 <a:latin typeface="Amiri" pitchFamily="2" charset="-78"/>
+                <a:ea typeface="Amiri" pitchFamily="2" charset="-78"/>
                 <a:cs typeface="Amiri" pitchFamily="2" charset="-78"/>
               </a:rPr>
               <a:t>أَحْسَنْتُمْ! إِلَى اللِّقَاءِ</a:t>
@@ -26437,6 +26586,7 @@
                   <a:srgbClr val="D4AF37"/>
                 </a:solidFill>
                 <a:latin typeface="Amiri" pitchFamily="2" charset="-78"/>
+                <a:ea typeface="Amiri" pitchFamily="2" charset="-78"/>
                 <a:cs typeface="Amiri" pitchFamily="2" charset="-78"/>
               </a:rPr>
               <a:t>الوَرَقَةُ الرَّابِعَةُ — الكِتَابَةُ المُوَسَّعَةُ</a:t>
@@ -26570,6 +26720,7 @@
                   <a:srgbClr val="D4AF37"/>
                 </a:solidFill>
                 <a:latin typeface="Amiri" pitchFamily="2" charset="-78"/>
+                <a:ea typeface="Amiri" pitchFamily="2" charset="-78"/>
                 <a:cs typeface="Amiri" pitchFamily="2" charset="-78"/>
               </a:rPr>
               <a:t>م</a:t>
@@ -26890,6 +27041,7 @@
                   <a:srgbClr val="8A6D1E"/>
                 </a:solidFill>
                 <a:latin typeface="Amiri" pitchFamily="2" charset="-78"/>
+                <a:ea typeface="Amiri" pitchFamily="2" charset="-78"/>
                 <a:cs typeface="Amiri" pitchFamily="2" charset="-78"/>
               </a:rPr>
               <a:t>خَرِيطَةُ الدَّرْسِ</a:t>
@@ -27204,6 +27356,7 @@
                   <a:srgbClr val="0E7C86"/>
                 </a:solidFill>
                 <a:latin typeface="Amiri" pitchFamily="2" charset="-78"/>
+                <a:ea typeface="Amiri" pitchFamily="2" charset="-78"/>
                 <a:cs typeface="Amiri" pitchFamily="2" charset="-78"/>
               </a:rPr>
               <a:t>اِبْدَأِ الآنَ</a:t>
@@ -27480,6 +27633,7 @@
                   <a:srgbClr val="1B3B6F"/>
                 </a:solidFill>
                 <a:latin typeface="Amiri" pitchFamily="2" charset="-78"/>
+                <a:ea typeface="Amiri" pitchFamily="2" charset="-78"/>
                 <a:cs typeface="Amiri" pitchFamily="2" charset="-78"/>
               </a:rPr>
               <a:t>الصِّيغَةُ</a:t>
@@ -27756,6 +27910,7 @@
                   <a:srgbClr val="6B4C9A"/>
                 </a:solidFill>
                 <a:latin typeface="Amiri" pitchFamily="2" charset="-78"/>
+                <a:ea typeface="Amiri" pitchFamily="2" charset="-78"/>
                 <a:cs typeface="Amiri" pitchFamily="2" charset="-78"/>
               </a:rPr>
               <a:t>شَاهِدْ</a:t>
@@ -28032,6 +28187,7 @@
                   <a:srgbClr val="1E6B52"/>
                 </a:solidFill>
                 <a:latin typeface="Amiri" pitchFamily="2" charset="-78"/>
+                <a:ea typeface="Amiri" pitchFamily="2" charset="-78"/>
                 <a:cs typeface="Amiri" pitchFamily="2" charset="-78"/>
               </a:rPr>
               <a:t>اُكْتُبْ</a:t>
@@ -28308,6 +28464,7 @@
                   <a:srgbClr val="8A6D1E"/>
                 </a:solidFill>
                 <a:latin typeface="Amiri" pitchFamily="2" charset="-78"/>
+                <a:ea typeface="Amiri" pitchFamily="2" charset="-78"/>
                 <a:cs typeface="Amiri" pitchFamily="2" charset="-78"/>
               </a:rPr>
               <a:t>قَيِّمْ</a:t>
@@ -28584,6 +28741,7 @@
                   <a:srgbClr val="C45A3C"/>
                 </a:solidFill>
                 <a:latin typeface="Amiri" pitchFamily="2" charset="-78"/>
+                <a:ea typeface="Amiri" pitchFamily="2" charset="-78"/>
                 <a:cs typeface="Amiri" pitchFamily="2" charset="-78"/>
               </a:rPr>
               <a:t>اِسْتَعِدَّ</a:t>
@@ -28827,6 +28985,7 @@
                   <a:srgbClr val="D4AF37"/>
                 </a:solidFill>
                 <a:latin typeface="Amiri" pitchFamily="2" charset="-78"/>
+                <a:ea typeface="Amiri" pitchFamily="2" charset="-78"/>
                 <a:cs typeface="Amiri" pitchFamily="2" charset="-78"/>
               </a:rPr>
               <a:t>م</a:t>
@@ -29147,6 +29306,7 @@
                   <a:srgbClr val="8A6D1E"/>
                 </a:solidFill>
                 <a:latin typeface="Amiri" pitchFamily="2" charset="-78"/>
+                <a:ea typeface="Amiri" pitchFamily="2" charset="-78"/>
                 <a:cs typeface="Amiri" pitchFamily="2" charset="-78"/>
               </a:rPr>
               <a:t>اِبْدَأِ الآنَ</a:t>
@@ -29333,6 +29493,7 @@
                   <a:srgbClr val="1B3B6F"/>
                 </a:solidFill>
                 <a:latin typeface="Amiri" pitchFamily="2" charset="-78"/>
+                <a:ea typeface="Amiri" pitchFamily="2" charset="-78"/>
                 <a:cs typeface="Amiri" pitchFamily="2" charset="-78"/>
               </a:rPr>
               <a:t>الكِتَابَةُ المُوَجَّهَةُ</a:t>
@@ -29797,6 +29958,7 @@
                   <a:srgbClr val="1B3B6F"/>
                 </a:solidFill>
                 <a:latin typeface="Amiri" pitchFamily="2" charset="-78"/>
+                <a:ea typeface="Amiri" pitchFamily="2" charset="-78"/>
                 <a:cs typeface="Amiri" pitchFamily="2" charset="-78"/>
               </a:rPr>
               <a:t>صِيغَةٌ رَسْمِيَّةٌ</a:t>
@@ -30349,6 +30511,7 @@
                   <a:srgbClr val="1F2A37"/>
                 </a:solidFill>
                 <a:latin typeface="Amiri" pitchFamily="2" charset="-78"/>
+                <a:ea typeface="Amiri" pitchFamily="2" charset="-78"/>
                 <a:cs typeface="Amiri" pitchFamily="2" charset="-78"/>
               </a:rPr>
               <a:t>حَيَّاكَ اللَّهُ</a:t>
@@ -30450,6 +30613,7 @@
                   <a:srgbClr val="1F2A37"/>
                 </a:solidFill>
                 <a:latin typeface="Amiri" pitchFamily="2" charset="-78"/>
+                <a:ea typeface="Amiri" pitchFamily="2" charset="-78"/>
                 <a:cs typeface="Amiri" pitchFamily="2" charset="-78"/>
               </a:rPr>
               <a:t>إِلَى اللِّقَاءِ</a:t>
@@ -30551,6 +30715,7 @@
                   <a:srgbClr val="1F2A37"/>
                 </a:solidFill>
                 <a:latin typeface="Amiri" pitchFamily="2" charset="-78"/>
+                <a:ea typeface="Amiri" pitchFamily="2" charset="-78"/>
                 <a:cs typeface="Amiri" pitchFamily="2" charset="-78"/>
               </a:rPr>
               <a:t>أَتَشَرَّفُ بِمُخَاطَبَتِكُمْ</a:t>
@@ -30699,6 +30864,7 @@
                   <a:srgbClr val="1B3B6F"/>
                 </a:solidFill>
                 <a:latin typeface="Amiri" pitchFamily="2" charset="-78"/>
+                <a:ea typeface="Amiri" pitchFamily="2" charset="-78"/>
                 <a:cs typeface="Amiri" pitchFamily="2" charset="-78"/>
               </a:rPr>
               <a:t>أَقْتَرِحُ أَنْ</a:t>
@@ -30725,6 +30891,7 @@
                   <a:srgbClr val="1B3B6F"/>
                 </a:solidFill>
                 <a:latin typeface="Amiri" pitchFamily="2" charset="-78"/>
+                <a:ea typeface="Amiri" pitchFamily="2" charset="-78"/>
                 <a:cs typeface="Amiri" pitchFamily="2" charset="-78"/>
               </a:rPr>
               <a:t>حَمْلَةٌ لِتَرْشِيدِ الاسْتِهْلَاكِ</a:t>
@@ -30839,6 +31006,7 @@
                   <a:srgbClr val="1F2A37"/>
                 </a:solidFill>
                 <a:latin typeface="Amiri" pitchFamily="2" charset="-78"/>
+                <a:ea typeface="Amiri" pitchFamily="2" charset="-78"/>
                 <a:cs typeface="Amiri" pitchFamily="2" charset="-78"/>
               </a:rPr>
               <a:t>تُطْلَقُ</a:t>
@@ -30940,6 +31108,7 @@
                   <a:srgbClr val="1F2A37"/>
                 </a:solidFill>
                 <a:latin typeface="Amiri" pitchFamily="2" charset="-78"/>
+                <a:ea typeface="Amiri" pitchFamily="2" charset="-78"/>
                 <a:cs typeface="Amiri" pitchFamily="2" charset="-78"/>
               </a:rPr>
               <a:t>أُطْلِقَتْ</a:t>
@@ -31041,6 +31210,7 @@
                   <a:srgbClr val="1F2A37"/>
                 </a:solidFill>
                 <a:latin typeface="Amiri" pitchFamily="2" charset="-78"/>
+                <a:ea typeface="Amiri" pitchFamily="2" charset="-78"/>
                 <a:cs typeface="Amiri" pitchFamily="2" charset="-78"/>
               </a:rPr>
               <a:t>تُطْلَقَ</a:t>
@@ -31189,6 +31359,7 @@
                   <a:srgbClr val="1B3B6F"/>
                 </a:solidFill>
                 <a:latin typeface="Amiri" pitchFamily="2" charset="-78"/>
+                <a:ea typeface="Amiri" pitchFamily="2" charset="-78"/>
                 <a:cs typeface="Amiri" pitchFamily="2" charset="-78"/>
               </a:rPr>
               <a:t>لَوْ طُبِّقَتْ هٰذِهِ الإِجْرَاءَاتُ،</a:t>
@@ -31215,6 +31386,7 @@
                   <a:srgbClr val="1B3B6F"/>
                 </a:solidFill>
                 <a:latin typeface="Amiri" pitchFamily="2" charset="-78"/>
+                <a:ea typeface="Amiri" pitchFamily="2" charset="-78"/>
                 <a:cs typeface="Amiri" pitchFamily="2" charset="-78"/>
               </a:rPr>
               <a:t>الوَضْعُ</a:t>
@@ -31329,6 +31501,7 @@
                   <a:srgbClr val="1F2A37"/>
                 </a:solidFill>
                 <a:latin typeface="Amiri" pitchFamily="2" charset="-78"/>
+                <a:ea typeface="Amiri" pitchFamily="2" charset="-78"/>
                 <a:cs typeface="Amiri" pitchFamily="2" charset="-78"/>
               </a:rPr>
               <a:t>لَتَحَسَّنَ</a:t>
@@ -31430,6 +31603,7 @@
                   <a:srgbClr val="1F2A37"/>
                 </a:solidFill>
                 <a:latin typeface="Amiri" pitchFamily="2" charset="-78"/>
+                <a:ea typeface="Amiri" pitchFamily="2" charset="-78"/>
                 <a:cs typeface="Amiri" pitchFamily="2" charset="-78"/>
               </a:rPr>
               <a:t>سَيَتَحَسَّنُ</a:t>
@@ -31531,6 +31705,7 @@
                   <a:srgbClr val="1F2A37"/>
                 </a:solidFill>
                 <a:latin typeface="Amiri" pitchFamily="2" charset="-78"/>
+                <a:ea typeface="Amiri" pitchFamily="2" charset="-78"/>
                 <a:cs typeface="Amiri" pitchFamily="2" charset="-78"/>
               </a:rPr>
               <a:t>يَتَحَسَّنُ</a:t>
@@ -31866,6 +32041,7 @@
                   <a:srgbClr val="D4AF37"/>
                 </a:solidFill>
                 <a:latin typeface="Amiri" pitchFamily="2" charset="-78"/>
+                <a:ea typeface="Amiri" pitchFamily="2" charset="-78"/>
                 <a:cs typeface="Amiri" pitchFamily="2" charset="-78"/>
               </a:rPr>
               <a:t>م</a:t>
@@ -32186,6 +32362,7 @@
                   <a:srgbClr val="8A6D1E"/>
                 </a:solidFill>
                 <a:latin typeface="Amiri" pitchFamily="2" charset="-78"/>
+                <a:ea typeface="Amiri" pitchFamily="2" charset="-78"/>
                 <a:cs typeface="Amiri" pitchFamily="2" charset="-78"/>
               </a:rPr>
               <a:t>الإِجَابَاتُ وَالتَّعْلِيلُ</a:t>
@@ -32372,6 +32549,7 @@
                   <a:srgbClr val="1B3B6F"/>
                 </a:solidFill>
                 <a:latin typeface="Amiri" pitchFamily="2" charset="-78"/>
+                <a:ea typeface="Amiri" pitchFamily="2" charset="-78"/>
                 <a:cs typeface="Amiri" pitchFamily="2" charset="-78"/>
               </a:rPr>
               <a:t>الكِتَابَةُ المُوَجَّهَةُ</a:t>
@@ -32901,6 +33079,7 @@
                   <a:srgbClr val="1B3B6F"/>
                 </a:solidFill>
                 <a:latin typeface="Amiri" pitchFamily="2" charset="-78"/>
+                <a:ea typeface="Amiri" pitchFamily="2" charset="-78"/>
                 <a:cs typeface="Amiri" pitchFamily="2" charset="-78"/>
               </a:rPr>
               <a:t>صِيغَةٌ رَسْمِيَّةٌ</a:t>
@@ -33518,6 +33697,7 @@
                   <a:srgbClr val="9AA1AB"/>
                 </a:solidFill>
                 <a:latin typeface="Amiri" pitchFamily="2" charset="-78"/>
+                <a:ea typeface="Amiri" pitchFamily="2" charset="-78"/>
                 <a:cs typeface="Amiri" pitchFamily="2" charset="-78"/>
               </a:rPr>
               <a:t>حَيَّاكَ اللَّهُ</a:t>
@@ -33619,6 +33799,7 @@
                   <a:srgbClr val="9AA1AB"/>
                 </a:solidFill>
                 <a:latin typeface="Amiri" pitchFamily="2" charset="-78"/>
+                <a:ea typeface="Amiri" pitchFamily="2" charset="-78"/>
                 <a:cs typeface="Amiri" pitchFamily="2" charset="-78"/>
               </a:rPr>
               <a:t>إِلَى اللِّقَاءِ</a:t>
@@ -33747,6 +33928,7 @@
                   <a:srgbClr val="1F2A37"/>
                 </a:solidFill>
                 <a:latin typeface="Amiri" pitchFamily="2" charset="-78"/>
+                <a:ea typeface="Amiri" pitchFamily="2" charset="-78"/>
                 <a:cs typeface="Amiri" pitchFamily="2" charset="-78"/>
               </a:rPr>
               <a:t>أَتَشَرَّفُ بِمُخَاطَبَتِكُمْ</a:t>
@@ -33933,6 +34115,7 @@
                   <a:srgbClr val="1B3B6F"/>
                 </a:solidFill>
                 <a:latin typeface="Amiri" pitchFamily="2" charset="-78"/>
+                <a:ea typeface="Amiri" pitchFamily="2" charset="-78"/>
                 <a:cs typeface="Amiri" pitchFamily="2" charset="-78"/>
               </a:rPr>
               <a:t>أَقْتَرِحُ أَنْ</a:t>
@@ -33959,6 +34142,7 @@
                   <a:srgbClr val="1B3B6F"/>
                 </a:solidFill>
                 <a:latin typeface="Amiri" pitchFamily="2" charset="-78"/>
+                <a:ea typeface="Amiri" pitchFamily="2" charset="-78"/>
                 <a:cs typeface="Amiri" pitchFamily="2" charset="-78"/>
               </a:rPr>
               <a:t>حَمْلَةٌ لِتَرْشِيدِ الاسْتِهْلَاكِ</a:t>
@@ -34073,6 +34257,7 @@
                   <a:srgbClr val="9AA1AB"/>
                 </a:solidFill>
                 <a:latin typeface="Amiri" pitchFamily="2" charset="-78"/>
+                <a:ea typeface="Amiri" pitchFamily="2" charset="-78"/>
                 <a:cs typeface="Amiri" pitchFamily="2" charset="-78"/>
               </a:rPr>
               <a:t>تُطْلَقُ</a:t>
@@ -34174,6 +34359,7 @@
                   <a:srgbClr val="9AA1AB"/>
                 </a:solidFill>
                 <a:latin typeface="Amiri" pitchFamily="2" charset="-78"/>
+                <a:ea typeface="Amiri" pitchFamily="2" charset="-78"/>
                 <a:cs typeface="Amiri" pitchFamily="2" charset="-78"/>
               </a:rPr>
               <a:t>أُطْلِقَتْ</a:t>
@@ -34302,6 +34488,7 @@
                   <a:srgbClr val="1F2A37"/>
                 </a:solidFill>
                 <a:latin typeface="Amiri" pitchFamily="2" charset="-78"/>
+                <a:ea typeface="Amiri" pitchFamily="2" charset="-78"/>
                 <a:cs typeface="Amiri" pitchFamily="2" charset="-78"/>
               </a:rPr>
               <a:t>تُطْلَقَ</a:t>
@@ -34488,6 +34675,7 @@
                   <a:srgbClr val="1B3B6F"/>
                 </a:solidFill>
                 <a:latin typeface="Amiri" pitchFamily="2" charset="-78"/>
+                <a:ea typeface="Amiri" pitchFamily="2" charset="-78"/>
                 <a:cs typeface="Amiri" pitchFamily="2" charset="-78"/>
               </a:rPr>
               <a:t>لَوْ طُبِّقَتْ هٰذِهِ الإِجْرَاءَاتُ،</a:t>
@@ -34514,6 +34702,7 @@
                   <a:srgbClr val="1B3B6F"/>
                 </a:solidFill>
                 <a:latin typeface="Amiri" pitchFamily="2" charset="-78"/>
+                <a:ea typeface="Amiri" pitchFamily="2" charset="-78"/>
                 <a:cs typeface="Amiri" pitchFamily="2" charset="-78"/>
               </a:rPr>
               <a:t>الوَضْعُ</a:t>
@@ -34655,6 +34844,7 @@
                   <a:srgbClr val="1F2A37"/>
                 </a:solidFill>
                 <a:latin typeface="Amiri" pitchFamily="2" charset="-78"/>
+                <a:ea typeface="Amiri" pitchFamily="2" charset="-78"/>
                 <a:cs typeface="Amiri" pitchFamily="2" charset="-78"/>
               </a:rPr>
               <a:t>لَتَحَسَّنَ</a:t>
@@ -34756,6 +34946,7 @@
                   <a:srgbClr val="9AA1AB"/>
                 </a:solidFill>
                 <a:latin typeface="Amiri" pitchFamily="2" charset="-78"/>
+                <a:ea typeface="Amiri" pitchFamily="2" charset="-78"/>
                 <a:cs typeface="Amiri" pitchFamily="2" charset="-78"/>
               </a:rPr>
               <a:t>سَيَتَحَسَّنُ</a:t>
@@ -34857,6 +35048,7 @@
                   <a:srgbClr val="9AA1AB"/>
                 </a:solidFill>
                 <a:latin typeface="Amiri" pitchFamily="2" charset="-78"/>
+                <a:ea typeface="Amiri" pitchFamily="2" charset="-78"/>
                 <a:cs typeface="Amiri" pitchFamily="2" charset="-78"/>
               </a:rPr>
               <a:t>يَتَحَسَّنُ</a:t>
@@ -35043,6 +35235,7 @@
                   <a:srgbClr val="1B3B6F"/>
                 </a:solidFill>
                 <a:latin typeface="Amiri" pitchFamily="2" charset="-78"/>
+                <a:ea typeface="Amiri" pitchFamily="2" charset="-78"/>
                 <a:cs typeface="Amiri" pitchFamily="2" charset="-78"/>
               </a:rPr>
               <a:t>أَتَشَرَّفُ بِمُخَاطَبَتِكُمْ ≠ حَيَّاكَ اللَّهُ</a:t>
@@ -35176,6 +35369,7 @@
                   <a:srgbClr val="D4AF37"/>
                 </a:solidFill>
                 <a:latin typeface="Amiri" pitchFamily="2" charset="-78"/>
+                <a:ea typeface="Amiri" pitchFamily="2" charset="-78"/>
                 <a:cs typeface="Amiri" pitchFamily="2" charset="-78"/>
               </a:rPr>
               <a:t>م</a:t>
@@ -35496,6 +35690,7 @@
                   <a:srgbClr val="8A6D1E"/>
                 </a:solidFill>
                 <a:latin typeface="Amiri" pitchFamily="2" charset="-78"/>
+                <a:ea typeface="Amiri" pitchFamily="2" charset="-78"/>
                 <a:cs typeface="Amiri" pitchFamily="2" charset="-78"/>
               </a:rPr>
               <a:t>الأَهْدَافُ وَمَعَايِيرُ النَّجَاحِ</a:t>
@@ -35644,6 +35839,7 @@
                   <a:srgbClr val="8A6D1E"/>
                 </a:solidFill>
                 <a:latin typeface="Amiri" pitchFamily="2" charset="-78"/>
+                <a:ea typeface="Amiri" pitchFamily="2" charset="-78"/>
                 <a:cs typeface="Amiri" pitchFamily="2" charset="-78"/>
               </a:rPr>
               <a:t>سَتَتَعَلَّمُ اليَوْمَ</a:t>
@@ -36902,6 +37098,7 @@
                   <a:srgbClr val="D4AF37"/>
                 </a:solidFill>
                 <a:latin typeface="Amiri" pitchFamily="2" charset="-78"/>
+                <a:ea typeface="Amiri" pitchFamily="2" charset="-78"/>
                 <a:cs typeface="Amiri" pitchFamily="2" charset="-78"/>
               </a:rPr>
               <a:t>كَلِمَاتُ الدَّرْسِ</a:t>
@@ -37205,6 +37402,7 @@
                   <a:srgbClr val="1B3B6F"/>
                 </a:solidFill>
                 <a:latin typeface="Amiri" pitchFamily="2" charset="-78"/>
+                <a:ea typeface="Amiri" pitchFamily="2" charset="-78"/>
                 <a:cs typeface="Amiri" pitchFamily="2" charset="-78"/>
               </a:rPr>
               <a:t>خِطَابٌ</a:t>
@@ -37238,11 +37436,12 @@
               <a:buNone/>
             </a:pPr>
             <a:r>
-              <a:rPr lang="ur-PK" altLang="en-US" sz="1400" b="1" dirty="0">
+              <a:rPr lang="ar-SA" altLang="en-US" sz="1400" b="1" dirty="0">
                 <a:solidFill>
                   <a:srgbClr val="2E8B57"/>
                 </a:solidFill>
                 <a:latin typeface="Amiri" pitchFamily="2" charset="-78"/>
+                <a:ea typeface="Amiri" pitchFamily="2" charset="-78"/>
                 <a:cs typeface="Amiri" pitchFamily="2" charset="-78"/>
               </a:rPr>
               <a:t>‎خطاب‎ </a:t>
@@ -37294,6 +37493,7 @@
                   <a:srgbClr val="1B3B6F"/>
                 </a:solidFill>
                 <a:latin typeface="Amiri" pitchFamily="2" charset="-78"/>
+                <a:ea typeface="Amiri" pitchFamily="2" charset="-78"/>
                 <a:cs typeface="Amiri" pitchFamily="2" charset="-78"/>
               </a:rPr>
               <a:t>رَسْمِيٌّ</a:t>
@@ -37327,11 +37527,12 @@
               <a:buNone/>
             </a:pPr>
             <a:r>
-              <a:rPr lang="ur-PK" altLang="en-US" sz="1400" b="1" dirty="0">
+              <a:rPr lang="ar-SA" altLang="en-US" sz="1400" b="1" dirty="0">
                 <a:solidFill>
                   <a:srgbClr val="2E8B57"/>
                 </a:solidFill>
                 <a:latin typeface="Amiri" pitchFamily="2" charset="-78"/>
+                <a:ea typeface="Amiri" pitchFamily="2" charset="-78"/>
                 <a:cs typeface="Amiri" pitchFamily="2" charset="-78"/>
               </a:rPr>
               <a:t>‎رسمی‎ </a:t>
@@ -37383,6 +37584,7 @@
                   <a:srgbClr val="1B3B6F"/>
                 </a:solidFill>
                 <a:latin typeface="Amiri" pitchFamily="2" charset="-78"/>
+                <a:ea typeface="Amiri" pitchFamily="2" charset="-78"/>
                 <a:cs typeface="Amiri" pitchFamily="2" charset="-78"/>
               </a:rPr>
               <a:t>تَقْرِيرٌ</a:t>
@@ -37416,11 +37618,12 @@
               <a:buNone/>
             </a:pPr>
             <a:r>
-              <a:rPr lang="ur-PK" altLang="en-US" sz="1400" b="1" dirty="0">
+              <a:rPr lang="ar-SA" altLang="en-US" sz="1400" b="1" dirty="0">
                 <a:solidFill>
                   <a:srgbClr val="2E8B57"/>
                 </a:solidFill>
                 <a:latin typeface="Amiri" pitchFamily="2" charset="-78"/>
+                <a:ea typeface="Amiri" pitchFamily="2" charset="-78"/>
                 <a:cs typeface="Amiri" pitchFamily="2" charset="-78"/>
               </a:rPr>
               <a:t>‎تقریر‎ </a:t>
@@ -37472,6 +37675,7 @@
                   <a:srgbClr val="1B3B6F"/>
                 </a:solidFill>
                 <a:latin typeface="Amiri" pitchFamily="2" charset="-78"/>
+                <a:ea typeface="Amiri" pitchFamily="2" charset="-78"/>
                 <a:cs typeface="Amiri" pitchFamily="2" charset="-78"/>
               </a:rPr>
               <a:t>مَقَالَةٌ</a:t>
@@ -37505,11 +37709,12 @@
               <a:buNone/>
             </a:pPr>
             <a:r>
-              <a:rPr lang="ur-PK" altLang="en-US" sz="1400" b="1" dirty="0">
+              <a:rPr lang="ar-SA" altLang="en-US" sz="1400" b="1" dirty="0">
                 <a:solidFill>
                   <a:srgbClr val="2E8B57"/>
                 </a:solidFill>
                 <a:latin typeface="Amiri" pitchFamily="2" charset="-78"/>
+                <a:ea typeface="Amiri" pitchFamily="2" charset="-78"/>
                 <a:cs typeface="Amiri" pitchFamily="2" charset="-78"/>
               </a:rPr>
               <a:t>‎مقالہ‎ </a:t>
@@ -37561,6 +37766,7 @@
                   <a:srgbClr val="1B3B6F"/>
                 </a:solidFill>
                 <a:latin typeface="Amiri" pitchFamily="2" charset="-78"/>
+                <a:ea typeface="Amiri" pitchFamily="2" charset="-78"/>
                 <a:cs typeface="Amiri" pitchFamily="2" charset="-78"/>
               </a:rPr>
               <a:t>اِحْتِرَامٌ</a:t>
@@ -37594,11 +37800,12 @@
               <a:buNone/>
             </a:pPr>
             <a:r>
-              <a:rPr lang="ur-PK" altLang="en-US" sz="1400" b="1" dirty="0">
+              <a:rPr lang="ar-SA" altLang="en-US" sz="1400" b="1" dirty="0">
                 <a:solidFill>
                   <a:srgbClr val="2E8B57"/>
                 </a:solidFill>
                 <a:latin typeface="Amiri" pitchFamily="2" charset="-78"/>
+                <a:ea typeface="Amiri" pitchFamily="2" charset="-78"/>
                 <a:cs typeface="Amiri" pitchFamily="2" charset="-78"/>
               </a:rPr>
               <a:t>‎احترام‎ </a:t>
@@ -37745,6 +37952,7 @@
                   <a:srgbClr val="D4AF37"/>
                 </a:solidFill>
                 <a:latin typeface="Amiri" pitchFamily="2" charset="-78"/>
+                <a:ea typeface="Amiri" pitchFamily="2" charset="-78"/>
                 <a:cs typeface="Amiri" pitchFamily="2" charset="-78"/>
               </a:rPr>
               <a:t>م</a:t>
@@ -38065,6 +38273,7 @@
                   <a:srgbClr val="8A6D1E"/>
                 </a:solidFill>
                 <a:latin typeface="Amiri" pitchFamily="2" charset="-78"/>
+                <a:ea typeface="Amiri" pitchFamily="2" charset="-78"/>
                 <a:cs typeface="Amiri" pitchFamily="2" charset="-78"/>
               </a:rPr>
               <a:t>كَلِمَاتُ الدَّرْسِ</a:t>
@@ -38303,6 +38512,7 @@
                   <a:srgbClr val="1B3B6F"/>
                 </a:solidFill>
                 <a:latin typeface="Amiri" pitchFamily="2" charset="-78"/>
+                <a:ea typeface="Amiri" pitchFamily="2" charset="-78"/>
                 <a:cs typeface="Amiri" pitchFamily="2" charset="-78"/>
               </a:rPr>
               <a:t>الكِتَابَةُ المُوَجَّهَةُ</a:t>
@@ -38622,6 +38832,7 @@
                   <a:srgbClr val="1B3B6F"/>
                 </a:solidFill>
                 <a:latin typeface="Amiri" pitchFamily="2" charset="-78"/>
+                <a:ea typeface="Amiri" pitchFamily="2" charset="-78"/>
                 <a:cs typeface="Amiri" pitchFamily="2" charset="-78"/>
               </a:rPr>
               <a:t>خِطَابٌ رَسْمِيٌّ</a:t>
@@ -38779,6 +38990,7 @@
                   <a:srgbClr val="1B3B6F"/>
                 </a:solidFill>
                 <a:latin typeface="Amiri" pitchFamily="2" charset="-78"/>
+                <a:ea typeface="Amiri" pitchFamily="2" charset="-78"/>
                 <a:cs typeface="Amiri" pitchFamily="2" charset="-78"/>
               </a:rPr>
               <a:t>خِطَابَاتٌ رَسْمِيَّةٌ</a:t>
@@ -38979,6 +39191,7 @@
                   <a:srgbClr val="1B3B6F"/>
                 </a:solidFill>
                 <a:latin typeface="Amiri" pitchFamily="2" charset="-78"/>
+                <a:ea typeface="Amiri" pitchFamily="2" charset="-78"/>
                 <a:cs typeface="Amiri" pitchFamily="2" charset="-78"/>
               </a:rPr>
               <a:t>بَرِيدٌ إِلِكْتْرُونِيٌّ</a:t>
@@ -39298,6 +39511,7 @@
                   <a:srgbClr val="1B3B6F"/>
                 </a:solidFill>
                 <a:latin typeface="Amiri" pitchFamily="2" charset="-78"/>
+                <a:ea typeface="Amiri" pitchFamily="2" charset="-78"/>
                 <a:cs typeface="Amiri" pitchFamily="2" charset="-78"/>
               </a:rPr>
               <a:t>مَقَالَةٌ</a:t>
@@ -39455,6 +39669,7 @@
                   <a:srgbClr val="1B3B6F"/>
                 </a:solidFill>
                 <a:latin typeface="Amiri" pitchFamily="2" charset="-78"/>
+                <a:ea typeface="Amiri" pitchFamily="2" charset="-78"/>
                 <a:cs typeface="Amiri" pitchFamily="2" charset="-78"/>
               </a:rPr>
               <a:t>مَقَالَاتٌ</a:t>
@@ -39588,6 +39803,7 @@
                   <a:srgbClr val="D4AF37"/>
                 </a:solidFill>
                 <a:latin typeface="Amiri" pitchFamily="2" charset="-78"/>
+                <a:ea typeface="Amiri" pitchFamily="2" charset="-78"/>
                 <a:cs typeface="Amiri" pitchFamily="2" charset="-78"/>
               </a:rPr>
               <a:t>م</a:t>
@@ -39908,6 +40124,7 @@
                   <a:srgbClr val="8A6D1E"/>
                 </a:solidFill>
                 <a:latin typeface="Amiri" pitchFamily="2" charset="-78"/>
+                <a:ea typeface="Amiri" pitchFamily="2" charset="-78"/>
                 <a:cs typeface="Amiri" pitchFamily="2" charset="-78"/>
               </a:rPr>
               <a:t>كَلِمَاتُ الدَّرْسِ</a:t>
@@ -40146,6 +40363,7 @@
                   <a:srgbClr val="1B3B6F"/>
                 </a:solidFill>
                 <a:latin typeface="Amiri" pitchFamily="2" charset="-78"/>
+                <a:ea typeface="Amiri" pitchFamily="2" charset="-78"/>
                 <a:cs typeface="Amiri" pitchFamily="2" charset="-78"/>
               </a:rPr>
               <a:t>تَقْرِيرٌ</a:t>
@@ -40303,6 +40521,7 @@
                   <a:srgbClr val="1B3B6F"/>
                 </a:solidFill>
                 <a:latin typeface="Amiri" pitchFamily="2" charset="-78"/>
+                <a:ea typeface="Amiri" pitchFamily="2" charset="-78"/>
                 <a:cs typeface="Amiri" pitchFamily="2" charset="-78"/>
               </a:rPr>
               <a:t>تَقَارِيرُ</a:t>
@@ -40438,6 +40657,7 @@
                   <a:srgbClr val="1B3B6F"/>
                 </a:solidFill>
                 <a:latin typeface="Amiri" pitchFamily="2" charset="-78"/>
+                <a:ea typeface="Amiri" pitchFamily="2" charset="-78"/>
                 <a:cs typeface="Amiri" pitchFamily="2" charset="-78"/>
               </a:rPr>
               <a:t>يَوْمِيَّاتٌ</a:t>
@@ -40692,6 +40912,7 @@
                   <a:srgbClr val="1B3B6F"/>
                 </a:solidFill>
                 <a:latin typeface="Amiri" pitchFamily="2" charset="-78"/>
+                <a:ea typeface="Amiri" pitchFamily="2" charset="-78"/>
                 <a:cs typeface="Amiri" pitchFamily="2" charset="-78"/>
               </a:rPr>
               <a:t>صِيغَةٌ رَسْمِيَّةٌ</a:t>
@@ -40946,6 +41167,7 @@
                   <a:srgbClr val="1B3B6F"/>
                 </a:solidFill>
                 <a:latin typeface="Amiri" pitchFamily="2" charset="-78"/>
+                <a:ea typeface="Amiri" pitchFamily="2" charset="-78"/>
                 <a:cs typeface="Amiri" pitchFamily="2" charset="-78"/>
               </a:rPr>
               <a:t>صِيغَةٌ غَيْرُ رَسْمِيَّةٍ</a:t>
@@ -41098,13 +41320,9 @@
     <a:fontScheme name="Office">
       <a:majorFont>
         <a:latin typeface="Calibri Light" panose="020F0302020204030204"/>
-        <a:ea typeface=""/>
-        <a:cs typeface=""/>
-        <a:font script="Jpan" typeface="游ゴシック Light"/>
-        <a:font script="Hang" typeface="맑은 고딕"/>
-        <a:font script="Hans" typeface="等线 Light"/>
-        <a:font script="Hant" typeface="新細明體"/>
-        <a:font script="Arab" typeface="Times New Roman"/>
+        <a:ea typeface="Amiri" pitchFamily="2" charset="-78"/>
+        <a:cs typeface="Amiri" pitchFamily="2" charset="-78"/>
+        <a:font script="Arab" typeface="Amiri"/>
         <a:font script="Hebr" typeface="Times New Roman"/>
         <a:font script="Thai" typeface="Angsana New"/>
         <a:font script="Ethi" typeface="Nyala"/>
@@ -41150,13 +41368,9 @@
       </a:majorFont>
       <a:minorFont>
         <a:latin typeface="Calibri" panose="020F0502020204030204"/>
-        <a:ea typeface=""/>
-        <a:cs typeface=""/>
-        <a:font script="Jpan" typeface="游ゴシック"/>
-        <a:font script="Hang" typeface="맑은 고딕"/>
-        <a:font script="Hans" typeface="等线"/>
-        <a:font script="Hant" typeface="新細明體"/>
-        <a:font script="Arab" typeface="Arial"/>
+        <a:ea typeface="Amiri" pitchFamily="2" charset="-78"/>
+        <a:cs typeface="Amiri" pitchFamily="2" charset="-78"/>
+        <a:font script="Arab" typeface="Amiri"/>
         <a:font script="Hebr" typeface="Arial"/>
         <a:font script="Thai" typeface="Cordia New"/>
         <a:font script="Ethi" typeface="Nyala"/>
